--- a/downloads/design/kyle-hobson-design-deck.pptx
+++ b/downloads/design/kyle-hobson-design-deck.pptx
@@ -2,22 +2,26 @@
 <file path=ppt/presentation.xml><?xml version="1.0" encoding="utf-8"?>
 <p:presentation xmlns:p="http://schemas.openxmlformats.org/presentationml/2006/main">
   <p:sldMasterIdLst>
-    <p:sldMasterId xmlns:r="http://schemas.openxmlformats.org/officeDocument/2006/relationships" id="2147483648" r:id="R79f0d73102aa41b2"/>
+    <p:sldMasterId xmlns:r="http://schemas.openxmlformats.org/officeDocument/2006/relationships" id="2147483648" r:id="R490ed8bc47944cb8"/>
   </p:sldMasterIdLst>
   <p:notesMasterIdLst>
-    <p:notesMasterId xmlns:r="http://schemas.openxmlformats.org/officeDocument/2006/relationships" r:id="R84baf6d247254f23"/>
+    <p:notesMasterId xmlns:r="http://schemas.openxmlformats.org/officeDocument/2006/relationships" r:id="R6fb5bfc6f1b043be"/>
   </p:notesMasterIdLst>
   <p:sldIdLst>
-    <p:sldId xmlns:r="http://schemas.openxmlformats.org/officeDocument/2006/relationships" id="256" r:id="R4efa74b12f474da2"/>
-    <p:sldId xmlns:r="http://schemas.openxmlformats.org/officeDocument/2006/relationships" id="257" r:id="R050da16364954fe2"/>
-    <p:sldId xmlns:r="http://schemas.openxmlformats.org/officeDocument/2006/relationships" id="258" r:id="Re4904e3ed62c4d45"/>
-    <p:sldId xmlns:r="http://schemas.openxmlformats.org/officeDocument/2006/relationships" id="259" r:id="R80908d3b6d654cef"/>
-    <p:sldId xmlns:r="http://schemas.openxmlformats.org/officeDocument/2006/relationships" id="260" r:id="R1657ad01f67b443d"/>
-    <p:sldId xmlns:r="http://schemas.openxmlformats.org/officeDocument/2006/relationships" id="261" r:id="Rb51362207b4943c8"/>
-    <p:sldId xmlns:r="http://schemas.openxmlformats.org/officeDocument/2006/relationships" id="262" r:id="R72ff799b85574134"/>
-    <p:sldId xmlns:r="http://schemas.openxmlformats.org/officeDocument/2006/relationships" id="263" r:id="R87030004ced44d00"/>
-    <p:sldId xmlns:r="http://schemas.openxmlformats.org/officeDocument/2006/relationships" id="264" r:id="Rb47af1f17a7f4b4d"/>
-    <p:sldId xmlns:r="http://schemas.openxmlformats.org/officeDocument/2006/relationships" id="265" r:id="R101852f7d6a24165"/>
+    <p:sldId xmlns:r="http://schemas.openxmlformats.org/officeDocument/2006/relationships" id="256" r:id="Rc291683a3f814417"/>
+    <p:sldId xmlns:r="http://schemas.openxmlformats.org/officeDocument/2006/relationships" id="257" r:id="R9b330df305d74675"/>
+    <p:sldId xmlns:r="http://schemas.openxmlformats.org/officeDocument/2006/relationships" id="258" r:id="Rc51ba350f8fe4f63"/>
+    <p:sldId xmlns:r="http://schemas.openxmlformats.org/officeDocument/2006/relationships" id="259" r:id="Rf882751565b14d9c"/>
+    <p:sldId xmlns:r="http://schemas.openxmlformats.org/officeDocument/2006/relationships" id="260" r:id="Rb4d350ff4f614b37"/>
+    <p:sldId xmlns:r="http://schemas.openxmlformats.org/officeDocument/2006/relationships" id="261" r:id="Rc9305aa0b9354e89"/>
+    <p:sldId xmlns:r="http://schemas.openxmlformats.org/officeDocument/2006/relationships" id="262" r:id="R060513c9a242432c"/>
+    <p:sldId xmlns:r="http://schemas.openxmlformats.org/officeDocument/2006/relationships" id="263" r:id="R10e44b75113f4570"/>
+    <p:sldId xmlns:r="http://schemas.openxmlformats.org/officeDocument/2006/relationships" id="264" r:id="Re8ad3970a0c74a82"/>
+    <p:sldId xmlns:r="http://schemas.openxmlformats.org/officeDocument/2006/relationships" id="265" r:id="R899aff3d873a463a"/>
+    <p:sldId xmlns:r="http://schemas.openxmlformats.org/officeDocument/2006/relationships" id="266" r:id="R991acdbb5f634b7b"/>
+    <p:sldId xmlns:r="http://schemas.openxmlformats.org/officeDocument/2006/relationships" id="267" r:id="R8cb83c1cc8744224"/>
+    <p:sldId xmlns:r="http://schemas.openxmlformats.org/officeDocument/2006/relationships" id="268" r:id="R558f8342a3a94847"/>
+    <p:sldId xmlns:r="http://schemas.openxmlformats.org/officeDocument/2006/relationships" id="269" r:id="R1b43347fed914d26"/>
   </p:sldIdLst>
   <p:sldSz cx="12192000" cy="6858000"/>
   <p:notesSz cx="6858000" cy="9144000"/>
@@ -521,6 +525,286 @@
           <a:lstStyle xmlns:a="http://schemas.openxmlformats.org/drawingml/2006/main"/>
           <a:p xmlns:a="http://schemas.openxmlformats.org/drawingml/2006/main">
             <a:r>
+              <a:t>Camera capture, April 2026. A stakeholder demo exposed conflicting recording and form controls. Kyle proposed a draggable picture-in-picture concept, then separated that future direction from the agreed immediate scope. The April 14 handoff retained split-screen, removed the problematic bottom Submit, and preserved existing preview and Retake/Use Video actions. The pictured original design is a proposed design frame, not a verified released screen. PIP was a hypothesis, not a measured improvement. Implementation and post-fix testing remain unverified.</a:t>
+            </a:r>
+          </a:p>
+        </p:txBody>
+      </p:sp>
+      <p:sp>
+        <p:nvSpPr>
+          <p:cNvPr id="4" name="Slide Number Placeholder 3"/>
+          <p:cNvSpPr>
+            <a:spLocks xmlns:a="http://schemas.openxmlformats.org/drawingml/2006/main" noGrp="1"/>
+          </p:cNvSpPr>
+          <p:nvPr>
+            <p:ph type="sldNum" idx="5"/>
+          </p:nvPr>
+        </p:nvSpPr>
+        <p:spPr/>
+        <p:txBody>
+          <a:bodyPr xmlns:a="http://schemas.openxmlformats.org/drawingml/2006/main"/>
+          <a:lstStyle xmlns:a="http://schemas.openxmlformats.org/drawingml/2006/main"/>
+          <a:p xmlns:a="http://schemas.openxmlformats.org/drawingml/2006/main"/>
+        </p:txBody>
+      </p:sp>
+    </p:spTree>
+  </p:cSld>
+  <p:clrMapOvr>
+    <a:masterClrMapping xmlns:a="http://schemas.openxmlformats.org/drawingml/2006/main"/>
+  </p:clrMapOvr>
+</p:notes>
+</file>
+
+<file path=ppt/notesSlides/notesSlide11.xml><?xml version="1.0" encoding="utf-8"?>
+<p:notes xmlns:p="http://schemas.openxmlformats.org/presentationml/2006/main">
+  <p:cSld>
+    <p:spTree>
+      <p:nvGrpSpPr>
+        <p:cNvPr id="1" name=""/>
+        <p:cNvGrpSpPr/>
+        <p:nvPr/>
+      </p:nvGrpSpPr>
+      <p:grpSpPr>
+        <a:xfrm xmlns:a="http://schemas.openxmlformats.org/drawingml/2006/main"/>
+      </p:grpSpPr>
+      <p:sp>
+        <p:nvSpPr>
+          <p:cNvPr id="2" name="Slide Image Placeholder 1"/>
+          <p:cNvSpPr>
+            <a:spLocks xmlns:a="http://schemas.openxmlformats.org/drawingml/2006/main" noGrp="1"/>
+          </p:cNvSpPr>
+          <p:nvPr>
+            <p:ph type="sldImg" idx="0"/>
+          </p:nvPr>
+        </p:nvSpPr>
+        <p:spPr/>
+      </p:sp>
+      <p:sp>
+        <p:nvSpPr>
+          <p:cNvPr id="3" name="Notes Placeholder 2"/>
+          <p:cNvSpPr>
+            <a:spLocks xmlns:a="http://schemas.openxmlformats.org/drawingml/2006/main" noGrp="1"/>
+          </p:cNvSpPr>
+          <p:nvPr>
+            <p:ph type="body" idx="1"/>
+          </p:nvPr>
+        </p:nvSpPr>
+        <p:spPr/>
+        <p:txBody>
+          <a:bodyPr xmlns:a="http://schemas.openxmlformats.org/drawingml/2006/main"/>
+          <a:lstStyle xmlns:a="http://schemas.openxmlformats.org/drawingml/2006/main"/>
+          <a:p xmlns:a="http://schemas.openxmlformats.org/drawingml/2006/main">
+            <a:r>
+              <a:t>Case: Oak AI. Kyle: Lead UX Researcher, 2023–2025. Source: original Oak navigation evaluation screenshot, with the identity area omitted. Training the assistant, starting Vibecheck and requesting support appear as competing entry points. Kyle documented the labels and visual treatments and used the audit to make these choices explicit for review. Work stage: usability evaluation and design recommendations. This slide does not present a finished navigation redesign or a user-study finding.</a:t>
+            </a:r>
+          </a:p>
+        </p:txBody>
+      </p:sp>
+      <p:sp>
+        <p:nvSpPr>
+          <p:cNvPr id="4" name="Slide Number Placeholder 3"/>
+          <p:cNvSpPr>
+            <a:spLocks xmlns:a="http://schemas.openxmlformats.org/drawingml/2006/main" noGrp="1"/>
+          </p:cNvSpPr>
+          <p:nvPr>
+            <p:ph type="sldNum" idx="5"/>
+          </p:nvPr>
+        </p:nvSpPr>
+        <p:spPr/>
+        <p:txBody>
+          <a:bodyPr xmlns:a="http://schemas.openxmlformats.org/drawingml/2006/main"/>
+          <a:lstStyle xmlns:a="http://schemas.openxmlformats.org/drawingml/2006/main"/>
+          <a:p xmlns:a="http://schemas.openxmlformats.org/drawingml/2006/main"/>
+        </p:txBody>
+      </p:sp>
+    </p:spTree>
+  </p:cSld>
+  <p:clrMapOvr>
+    <a:masterClrMapping xmlns:a="http://schemas.openxmlformats.org/drawingml/2006/main"/>
+  </p:clrMapOvr>
+</p:notes>
+</file>
+
+<file path=ppt/notesSlides/notesSlide12.xml><?xml version="1.0" encoding="utf-8"?>
+<p:notes xmlns:p="http://schemas.openxmlformats.org/presentationml/2006/main">
+  <p:cSld>
+    <p:spTree>
+      <p:nvGrpSpPr>
+        <p:cNvPr id="1" name=""/>
+        <p:cNvGrpSpPr/>
+        <p:nvPr/>
+      </p:nvGrpSpPr>
+      <p:grpSpPr>
+        <a:xfrm xmlns:a="http://schemas.openxmlformats.org/drawingml/2006/main"/>
+      </p:grpSpPr>
+      <p:sp>
+        <p:nvSpPr>
+          <p:cNvPr id="2" name="Slide Image Placeholder 1"/>
+          <p:cNvSpPr>
+            <a:spLocks xmlns:a="http://schemas.openxmlformats.org/drawingml/2006/main" noGrp="1"/>
+          </p:cNvSpPr>
+          <p:nvPr>
+            <p:ph type="sldImg" idx="0"/>
+          </p:nvPr>
+        </p:nvSpPr>
+        <p:spPr/>
+      </p:sp>
+      <p:sp>
+        <p:nvSpPr>
+          <p:cNvPr id="3" name="Notes Placeholder 2"/>
+          <p:cNvSpPr>
+            <a:spLocks xmlns:a="http://schemas.openxmlformats.org/drawingml/2006/main" noGrp="1"/>
+          </p:cNvSpPr>
+          <p:nvPr>
+            <p:ph type="body" idx="1"/>
+          </p:nvPr>
+        </p:nvSpPr>
+        <p:spPr/>
+        <p:txBody>
+          <a:bodyPr xmlns:a="http://schemas.openxmlformats.org/drawingml/2006/main"/>
+          <a:lstStyle xmlns:a="http://schemas.openxmlformats.org/drawingml/2006/main"/>
+          <a:p xmlns:a="http://schemas.openxmlformats.org/drawingml/2006/main">
+            <a:r>
+              <a:t>Sources: original Oak desktop evaluation and error-messaging recommendation artifact. The shown crops retain original interface pixels and exclude the identity-bearing example field. Original and Proposed labels distinguish the existing interface from the recommendation. The evaluation identified error feedback that did not explain recovery, and the recommendation made a specific correction visible near the password field. This is a recommendation, not a measured usability improvement or a claim that the exact variant shipped.</a:t>
+            </a:r>
+          </a:p>
+        </p:txBody>
+      </p:sp>
+      <p:sp>
+        <p:nvSpPr>
+          <p:cNvPr id="4" name="Slide Number Placeholder 3"/>
+          <p:cNvSpPr>
+            <a:spLocks xmlns:a="http://schemas.openxmlformats.org/drawingml/2006/main" noGrp="1"/>
+          </p:cNvSpPr>
+          <p:nvPr>
+            <p:ph type="sldNum" idx="5"/>
+          </p:nvPr>
+        </p:nvSpPr>
+        <p:spPr/>
+        <p:txBody>
+          <a:bodyPr xmlns:a="http://schemas.openxmlformats.org/drawingml/2006/main"/>
+          <a:lstStyle xmlns:a="http://schemas.openxmlformats.org/drawingml/2006/main"/>
+          <a:p xmlns:a="http://schemas.openxmlformats.org/drawingml/2006/main"/>
+        </p:txBody>
+      </p:sp>
+    </p:spTree>
+  </p:cSld>
+  <p:clrMapOvr>
+    <a:masterClrMapping xmlns:a="http://schemas.openxmlformats.org/drawingml/2006/main"/>
+  </p:clrMapOvr>
+</p:notes>
+</file>
+
+<file path=ppt/notesSlides/notesSlide13.xml><?xml version="1.0" encoding="utf-8"?>
+<p:notes xmlns:p="http://schemas.openxmlformats.org/presentationml/2006/main">
+  <p:cSld>
+    <p:spTree>
+      <p:nvGrpSpPr>
+        <p:cNvPr id="1" name=""/>
+        <p:cNvGrpSpPr/>
+        <p:nvPr/>
+      </p:nvGrpSpPr>
+      <p:grpSpPr>
+        <a:xfrm xmlns:a="http://schemas.openxmlformats.org/drawingml/2006/main"/>
+      </p:grpSpPr>
+      <p:sp>
+        <p:nvSpPr>
+          <p:cNvPr id="2" name="Slide Image Placeholder 1"/>
+          <p:cNvSpPr>
+            <a:spLocks xmlns:a="http://schemas.openxmlformats.org/drawingml/2006/main" noGrp="1"/>
+          </p:cNvSpPr>
+          <p:nvPr>
+            <p:ph type="sldImg" idx="0"/>
+          </p:nvPr>
+        </p:nvSpPr>
+        <p:spPr/>
+      </p:sp>
+      <p:sp>
+        <p:nvSpPr>
+          <p:cNvPr id="3" name="Notes Placeholder 2"/>
+          <p:cNvSpPr>
+            <a:spLocks xmlns:a="http://schemas.openxmlformats.org/drawingml/2006/main" noGrp="1"/>
+          </p:cNvSpPr>
+          <p:nvPr>
+            <p:ph type="body" idx="1"/>
+          </p:nvPr>
+        </p:nvSpPr>
+        <p:spPr/>
+        <p:txBody>
+          <a:bodyPr xmlns:a="http://schemas.openxmlformats.org/drawingml/2006/main"/>
+          <a:lstStyle xmlns:a="http://schemas.openxmlformats.org/drawingml/2006/main"/>
+          <a:p xmlns:a="http://schemas.openxmlformats.org/drawingml/2006/main">
+            <a:r>
+              <a:t>Personal story is based on Kyle’s self-described documentary filmmaking, digital storytelling and game facilitation background. It is an editorial connection, not a measured business-outcome claim. The portrait is a user-supplied personal image, used for identity rather than as project evidence.</a:t>
+            </a:r>
+          </a:p>
+        </p:txBody>
+      </p:sp>
+      <p:sp>
+        <p:nvSpPr>
+          <p:cNvPr id="4" name="Slide Number Placeholder 3"/>
+          <p:cNvSpPr>
+            <a:spLocks xmlns:a="http://schemas.openxmlformats.org/drawingml/2006/main" noGrp="1"/>
+          </p:cNvSpPr>
+          <p:nvPr>
+            <p:ph type="sldNum" idx="5"/>
+          </p:nvPr>
+        </p:nvSpPr>
+        <p:spPr/>
+        <p:txBody>
+          <a:bodyPr xmlns:a="http://schemas.openxmlformats.org/drawingml/2006/main"/>
+          <a:lstStyle xmlns:a="http://schemas.openxmlformats.org/drawingml/2006/main"/>
+          <a:p xmlns:a="http://schemas.openxmlformats.org/drawingml/2006/main"/>
+        </p:txBody>
+      </p:sp>
+    </p:spTree>
+  </p:cSld>
+  <p:clrMapOvr>
+    <a:masterClrMapping xmlns:a="http://schemas.openxmlformats.org/drawingml/2006/main"/>
+  </p:clrMapOvr>
+</p:notes>
+</file>
+
+<file path=ppt/notesSlides/notesSlide14.xml><?xml version="1.0" encoding="utf-8"?>
+<p:notes xmlns:p="http://schemas.openxmlformats.org/presentationml/2006/main">
+  <p:cSld>
+    <p:spTree>
+      <p:nvGrpSpPr>
+        <p:cNvPr id="1" name=""/>
+        <p:cNvGrpSpPr/>
+        <p:nvPr/>
+      </p:nvGrpSpPr>
+      <p:grpSpPr>
+        <a:xfrm xmlns:a="http://schemas.openxmlformats.org/drawingml/2006/main"/>
+      </p:grpSpPr>
+      <p:sp>
+        <p:nvSpPr>
+          <p:cNvPr id="2" name="Slide Image Placeholder 1"/>
+          <p:cNvSpPr>
+            <a:spLocks xmlns:a="http://schemas.openxmlformats.org/drawingml/2006/main" noGrp="1"/>
+          </p:cNvSpPr>
+          <p:nvPr>
+            <p:ph type="sldImg" idx="0"/>
+          </p:nvPr>
+        </p:nvSpPr>
+        <p:spPr/>
+      </p:sp>
+      <p:sp>
+        <p:nvSpPr>
+          <p:cNvPr id="3" name="Notes Placeholder 2"/>
+          <p:cNvSpPr>
+            <a:spLocks xmlns:a="http://schemas.openxmlformats.org/drawingml/2006/main" noGrp="1"/>
+          </p:cNvSpPr>
+          <p:nvPr>
+            <p:ph type="body" idx="1"/>
+          </p:nvPr>
+        </p:nvSpPr>
+        <p:spPr/>
+        <p:txBody>
+          <a:bodyPr xmlns:a="http://schemas.openxmlformats.org/drawingml/2006/main"/>
+          <a:lstStyle xmlns:a="http://schemas.openxmlformats.org/drawingml/2006/main"/>
+          <a:p xmlns:a="http://schemas.openxmlformats.org/drawingml/2006/main">
+            <a:r>
               <a:t>For product and UX design roles, contract projects and professional collaborations. The displayed contact links are clickable.</a:t>
             </a:r>
           </a:p>
@@ -801,7 +1085,7 @@
           <a:lstStyle xmlns:a="http://schemas.openxmlformats.org/drawingml/2006/main"/>
           <a:p xmlns:a="http://schemas.openxmlformats.org/drawingml/2006/main">
             <a:r>
-              <a:t>Case: About Me, SmartTagIt at FactorLab. Kyle: UX Designer &amp; Researcher (Contract), 2026. Source: original About Me Figma direction and April–May 2026 walkthroughs. The displayed crop retains original sample content. A September 2, 2026 engineering update confirms the About Me web/server release. These images document design iterations rather than the exact released layout.</a:t>
+              <a:t>Case: About Me, SmartTagIt at FactorLab. Kyle: UX Designer &amp; Researcher (Contract), 2026. Source: original About Me Figma direction and April–May 2026 walkthroughs. The displayed crop retains original sample content. Engineering reported web/server changes live September 2 and both mobile apps live September 3, 2026. These images document design iterations; exact correspondence to released screens has not been verified.</a:t>
             </a:r>
           </a:p>
         </p:txBody>
@@ -871,7 +1155,7 @@
           <a:lstStyle xmlns:a="http://schemas.openxmlformats.org/drawingml/2006/main"/>
           <a:p xmlns:a="http://schemas.openxmlformats.org/drawingml/2006/main">
             <a:r>
-              <a:t>Source: original About Me Topic Comparison widget and stakeholder design discussions. Values are illustrative design content, not research outcomes. Kyle advocated neutral feedback and made cohort definition and interpretation questions explicit. The case output was a family of insight layouts and concrete product questions for alignment.</a:t>
+              <a:t>About Me Accomplishments decision, August 2026. Kyle compared his grid with an engineering table, identified information missing from his own version, recommended retaining the table, and refined the labels. The displayed crop of an original design omits the followed-people link because that idea was deferred. Counts and dates are sample design content, not user outcomes. Exact correspondence to a released screen remains unverified.</a:t>
             </a:r>
           </a:p>
         </p:txBody>
@@ -941,7 +1225,7 @@
           <a:lstStyle xmlns:a="http://schemas.openxmlformats.org/drawingml/2006/main"/>
           <a:p xmlns:a="http://schemas.openxmlformats.org/drawingml/2006/main">
             <a:r>
-              <a:t>Case: Oak AI. Kyle: Lead UX Researcher, 2023–2025. Source: original Oak navigation evaluation screenshot, with the identity area omitted. Training the assistant, starting Vibecheck and requesting support appear as competing entry points. Kyle documented the labels and visual treatments and used the audit to make these choices explicit for review. Work stage: usability evaluation and design recommendations. This slide does not present a finished navigation redesign or a user-study finding.</a:t>
+              <a:t>Source: original About Me Topic Comparison widget and stakeholder design discussions. Values are illustrative design content, not research outcomes. Kyle advocated neutral feedback and made cohort definition and interpretation questions explicit. The case output was a family of insight layouts and concrete product questions for alignment.</a:t>
             </a:r>
           </a:p>
         </p:txBody>
@@ -1011,7 +1295,7 @@
           <a:lstStyle xmlns:a="http://schemas.openxmlformats.org/drawingml/2006/main"/>
           <a:p xmlns:a="http://schemas.openxmlformats.org/drawingml/2006/main">
             <a:r>
-              <a:t>Sources: original Oak desktop evaluation and error-messaging recommendation artifact. The shown crops retain original interface pixels and exclude the identity-bearing example field. Original and Proposed labels distinguish the existing interface from the recommendation. The evaluation identified error feedback that did not explain recovery, and the recommendation made a specific correction visible near the password field. This is a recommendation, not a measured usability improvement or a claim that the exact variant shipped.</a:t>
+              <a:t>September 8 design captures show a contextual Add detail entry and an action sheet within the existing observation flow. Kyle designed issue and approval paths with shared foundations and different requirements. Engineering reported core Workflow live September 23, 2026, with prior Open Issue data migrated. Exact captured screen variants have not been matched against production.</a:t>
             </a:r>
           </a:p>
         </p:txBody>
@@ -1081,7 +1365,7 @@
           <a:lstStyle xmlns:a="http://schemas.openxmlformats.org/drawingml/2006/main"/>
           <a:p xmlns:a="http://schemas.openxmlformats.org/drawingml/2006/main">
             <a:r>
-              <a:t>Personal story is based on Kyle’s self-described documentary filmmaking, digital storytelling and game facilitation background. It is an editorial connection, not a measured business-outcome claim. The portrait is a user-supplied personal image, used for identity rather than as project evidence.</a:t>
+              <a:t>September 8 original design captures show empty demonstration forms with no user identities. Kyle reused assignment and detail patterns while defining task-specific required fields and statuses for issue creation and approval requests. Engineering reported the core Workflow live September 23, 2026. Report and email integrations remained under review. These are design-stage captures; exact production visual match and user impact are unverified.</a:t>
             </a:r>
           </a:p>
         </p:txBody>
@@ -1149,7 +1433,7 @@
   </p:cSld>
   <p:clrMap bg1="lt1" tx1="dk1" bg2="lt2" tx2="dk2" accent1="accent1" accent2="accent2" accent3="accent3" accent4="accent4" accent5="accent5" accent6="accent6" hlink="hlink" folHlink="folHlink"/>
   <p:sldLayoutIdLst>
-    <p:sldLayoutId xmlns:r="http://schemas.openxmlformats.org/officeDocument/2006/relationships" id="2147483649" r:id="R8eca8c93d6bf4055"/>
+    <p:sldLayoutId xmlns:r="http://schemas.openxmlformats.org/officeDocument/2006/relationships" id="2147483649" r:id="R8b6a1bcf531b4900"/>
   </p:sldLayoutIdLst>
   <p:txStyles>
     <p:titleStyle>
@@ -1700,7 +1984,7 @@
           <p:cNvPr id="8" name="slide-number">
             <a:extLst xmlns:a="http://schemas.openxmlformats.org/drawingml/2006/main">
               <a:ext uri="{FF2B5EF4-FFF2-40B4-BE49-F238E27FC236}">
-                <a16:creationId xmlns:a16="http://schemas.microsoft.com/office/drawing/2014/main" id="{1F0BBC27-41BF-4C4E-AAEE-C881D3369ABB}"/>
+                <a16:creationId xmlns:a16="http://schemas.microsoft.com/office/drawing/2014/main" id="{39EC8650-D712-4C41-95F5-02996424BFCB}"/>
               </a:ext>
             </a:extLst>
           </p:cNvPr>
@@ -1761,7 +2045,7 @@
           <p:cNvPr id="2" name="section-label">
             <a:extLst xmlns:a="http://schemas.openxmlformats.org/drawingml/2006/main">
               <a:ext uri="{FF2B5EF4-FFF2-40B4-BE49-F238E27FC236}">
-                <a16:creationId xmlns:a16="http://schemas.microsoft.com/office/drawing/2014/main" id="{7D114A45-0CDF-4244-B28F-F8E0531F458D}"/>
+                <a16:creationId xmlns:a16="http://schemas.microsoft.com/office/drawing/2014/main" id="{F05589A2-24F6-4AF7-BF31-B96D739A4ED4}"/>
               </a:ext>
             </a:extLst>
           </p:cNvPr>
@@ -1822,7 +2106,7 @@
           <p:cNvPr id="3" name="headline">
             <a:extLst xmlns:a="http://schemas.openxmlformats.org/drawingml/2006/main">
               <a:ext uri="{FF2B5EF4-FFF2-40B4-BE49-F238E27FC236}">
-                <a16:creationId xmlns:a16="http://schemas.microsoft.com/office/drawing/2014/main" id="{B3D70E00-07C9-421D-9BC7-5981ACD0B420}"/>
+                <a16:creationId xmlns:a16="http://schemas.microsoft.com/office/drawing/2014/main" id="{6A14F5EF-3D70-4AE2-8AFA-844DFE8B36D8}"/>
               </a:ext>
             </a:extLst>
           </p:cNvPr>
@@ -1910,7 +2194,7 @@
           <p:cNvPr id="4" name="cover-intro">
             <a:extLst xmlns:a="http://schemas.openxmlformats.org/drawingml/2006/main">
               <a:ext uri="{FF2B5EF4-FFF2-40B4-BE49-F238E27FC236}">
-                <a16:creationId xmlns:a16="http://schemas.microsoft.com/office/drawing/2014/main" id="{A1BC3561-98DE-43CA-BADD-997C6BF97F76}"/>
+                <a16:creationId xmlns:a16="http://schemas.microsoft.com/office/drawing/2014/main" id="{877C6975-F93B-474D-8CF1-EE3A476DFC3B}"/>
               </a:ext>
             </a:extLst>
           </p:cNvPr>
@@ -1998,7 +2282,7 @@
           <p:cNvPr id="5" name="cover-accent">
             <a:extLst xmlns:a="http://schemas.openxmlformats.org/drawingml/2006/main">
               <a:ext uri="{FF2B5EF4-FFF2-40B4-BE49-F238E27FC236}">
-                <a16:creationId xmlns:a16="http://schemas.microsoft.com/office/drawing/2014/main" id="{35F3D71A-E65A-467A-9EBD-C80044F5BB3F}"/>
+                <a16:creationId xmlns:a16="http://schemas.microsoft.com/office/drawing/2014/main" id="{1B20D167-ADC5-4B9D-865F-EE4C3D4CD0C3}"/>
               </a:ext>
             </a:extLst>
           </p:cNvPr>
@@ -2028,7 +2312,7 @@
           <p:cNvPr id="6" name="cover-type">
             <a:extLst xmlns:a="http://schemas.openxmlformats.org/drawingml/2006/main">
               <a:ext uri="{FF2B5EF4-FFF2-40B4-BE49-F238E27FC236}">
-                <a16:creationId xmlns:a16="http://schemas.microsoft.com/office/drawing/2014/main" id="{7CC9DA3F-0F38-40AA-985C-7B15108C99A6}"/>
+                <a16:creationId xmlns:a16="http://schemas.microsoft.com/office/drawing/2014/main" id="{CBC70B89-572E-4580-AEF5-61A201C4D3E4}"/>
               </a:ext>
             </a:extLst>
           </p:cNvPr>
@@ -2093,7 +2377,7 @@
           <p:nvPr/>
         </p:nvPicPr>
         <p:blipFill>
-          <a:blip xmlns:r="http://schemas.openxmlformats.org/officeDocument/2006/relationships" xmlns:a="http://schemas.openxmlformats.org/drawingml/2006/main" r:embed="R3c2af871e8834d0f"/>
+          <a:blip xmlns:r="http://schemas.openxmlformats.org/officeDocument/2006/relationships" xmlns:a="http://schemas.openxmlformats.org/drawingml/2006/main" r:embed="Rc71413ac7fb54b20"/>
           <a:stretch xmlns:a="http://schemas.openxmlformats.org/drawingml/2006/main"/>
         </p:blipFill>
         <p:spPr>
@@ -2109,7 +2393,7 @@
     </p:spTree>
     <p:extLst>
       <p:ext uri="{BB962C8B-B14F-4D97-AF65-F5344CB8AC3E}">
-        <p14:creationId xmlns:p14="http://schemas.microsoft.com/office/powerpoint/2010/main" val="1500851431"/>
+        <p14:creationId xmlns:p14="http://schemas.microsoft.com/office/powerpoint/2010/main" val="1747721104"/>
       </p:ext>
     </p:extLst>
   </p:cSld>
@@ -2117,6 +2401,2061 @@
 </file>
 
 <file path=ppt/slides/slide10.xml><?xml version="1.0" encoding="utf-8"?>
+<p:sld xmlns:p="http://schemas.openxmlformats.org/presentationml/2006/main">
+  <p:cSld>
+    <p:bg>
+      <p:bgPr>
+        <a:solidFill xmlns:a="http://schemas.openxmlformats.org/drawingml/2006/main">
+          <a:srgbClr val="F4F2E9"/>
+        </a:solidFill>
+      </p:bgPr>
+    </p:bg>
+    <p:spTree>
+      <p:nvGrpSpPr>
+        <p:cNvPr id="1" name=""/>
+        <p:cNvGrpSpPr/>
+        <p:nvPr/>
+      </p:nvGrpSpPr>
+      <p:grpSpPr>
+        <a:xfrm xmlns:a="http://schemas.openxmlformats.org/drawingml/2006/main"/>
+      </p:grpSpPr>
+      <p:sp>
+        <p:nvSpPr>
+          <p:cNvPr id="10" name="slide-number">
+            <a:extLst xmlns:a="http://schemas.openxmlformats.org/drawingml/2006/main">
+              <a:ext uri="{FF2B5EF4-FFF2-40B4-BE49-F238E27FC236}">
+                <a16:creationId xmlns:a16="http://schemas.microsoft.com/office/drawing/2014/main" id="{A88728FD-D92D-4893-997A-A85E620C0541}"/>
+              </a:ext>
+            </a:extLst>
+          </p:cNvPr>
+          <p:cNvSpPr>
+            <a:spLocks xmlns:a="http://schemas.openxmlformats.org/drawingml/2006/main" noGrp="1"/>
+          </p:cNvSpPr>
+          <p:nvPr/>
+        </p:nvSpPr>
+        <p:spPr>
+          <a:xfrm xmlns:a="http://schemas.openxmlformats.org/drawingml/2006/main">
+            <a:off x="11353800" y="6515100"/>
+            <a:ext cx="323850" cy="209550"/>
+          </a:xfrm>
+          <a:prstGeom xmlns:a="http://schemas.openxmlformats.org/drawingml/2006/main" prst="rect">
+            <a:avLst/>
+          </a:prstGeom>
+          <a:noFill xmlns:a="http://schemas.openxmlformats.org/drawingml/2006/main"/>
+          <a:ln xmlns:a="http://schemas.openxmlformats.org/drawingml/2006/main" w="0">
+            <a:noFill/>
+          </a:ln>
+        </p:spPr>
+        <p:txBody>
+          <a:bodyPr xmlns:a="http://schemas.openxmlformats.org/drawingml/2006/main" wrap="square" lIns="0" tIns="0" rIns="0" bIns="0" anchor="t">
+            <a:noAutofit/>
+          </a:bodyPr>
+          <a:lstStyle xmlns:a="http://schemas.openxmlformats.org/drawingml/2006/main"/>
+          <a:p xmlns:a="http://schemas.openxmlformats.org/drawingml/2006/main">
+            <a:pPr>
+              <a:lnSpc>
+                <a:spcPct val="110000"/>
+              </a:lnSpc>
+              <a:buNone/>
+              <a:defRPr sz="1050" b="0">
+                <a:solidFill>
+                  <a:srgbClr val="58645D"/>
+                </a:solidFill>
+                <a:latin typeface="Helvetica Neue"/>
+                <a:ea typeface="Helvetica Neue"/>
+                <a:cs typeface="Helvetica Neue"/>
+              </a:defRPr>
+            </a:pPr>
+            <a:r>
+              <a:rPr sz="1050" b="0">
+                <a:solidFill>
+                  <a:srgbClr val="58645D"/>
+                </a:solidFill>
+                <a:latin typeface="Helvetica Neue"/>
+                <a:ea typeface="Helvetica Neue"/>
+                <a:cs typeface="Helvetica Neue"/>
+              </a:rPr>
+              <a:t>10</a:t>
+            </a:r>
+          </a:p>
+        </p:txBody>
+      </p:sp>
+      <p:sp>
+        <p:nvSpPr>
+          <p:cNvPr id="2" name="section-label">
+            <a:extLst xmlns:a="http://schemas.openxmlformats.org/drawingml/2006/main">
+              <a:ext uri="{FF2B5EF4-FFF2-40B4-BE49-F238E27FC236}">
+                <a16:creationId xmlns:a16="http://schemas.microsoft.com/office/drawing/2014/main" id="{961F3938-616B-4896-B5DC-33EA3EBD8BEA}"/>
+              </a:ext>
+            </a:extLst>
+          </p:cNvPr>
+          <p:cNvSpPr>
+            <a:spLocks xmlns:a="http://schemas.openxmlformats.org/drawingml/2006/main" noGrp="1"/>
+          </p:cNvSpPr>
+          <p:nvPr/>
+        </p:nvSpPr>
+        <p:spPr>
+          <a:xfrm xmlns:a="http://schemas.openxmlformats.org/drawingml/2006/main">
+            <a:off x="609600" y="495300"/>
+            <a:ext cx="10668000" cy="266700"/>
+          </a:xfrm>
+          <a:prstGeom xmlns:a="http://schemas.openxmlformats.org/drawingml/2006/main" prst="rect">
+            <a:avLst/>
+          </a:prstGeom>
+          <a:noFill xmlns:a="http://schemas.openxmlformats.org/drawingml/2006/main"/>
+          <a:ln xmlns:a="http://schemas.openxmlformats.org/drawingml/2006/main" w="0">
+            <a:noFill/>
+          </a:ln>
+        </p:spPr>
+        <p:txBody>
+          <a:bodyPr xmlns:a="http://schemas.openxmlformats.org/drawingml/2006/main" wrap="square" lIns="0" tIns="0" rIns="0" bIns="0" anchor="t">
+            <a:noAutofit/>
+          </a:bodyPr>
+          <a:lstStyle xmlns:a="http://schemas.openxmlformats.org/drawingml/2006/main"/>
+          <a:p xmlns:a="http://schemas.openxmlformats.org/drawingml/2006/main">
+            <a:pPr>
+              <a:lnSpc>
+                <a:spcPct val="110000"/>
+              </a:lnSpc>
+              <a:buNone/>
+              <a:defRPr sz="1200" b="1">
+                <a:solidFill>
+                  <a:srgbClr val="244D3C"/>
+                </a:solidFill>
+                <a:latin typeface="Helvetica Neue"/>
+                <a:ea typeface="Helvetica Neue"/>
+                <a:cs typeface="Helvetica Neue"/>
+              </a:defRPr>
+            </a:pPr>
+            <a:r>
+              <a:rPr sz="1200" b="1">
+                <a:solidFill>
+                  <a:srgbClr val="244D3C"/>
+                </a:solidFill>
+                <a:latin typeface="Helvetica Neue"/>
+                <a:ea typeface="Helvetica Neue"/>
+                <a:cs typeface="Helvetica Neue"/>
+              </a:rPr>
+              <a:t>CAMERA CAPTURE   /   SCOPE DECISION</a:t>
+            </a:r>
+          </a:p>
+        </p:txBody>
+      </p:sp>
+      <p:sp>
+        <p:nvSpPr>
+          <p:cNvPr id="3" name="headline">
+            <a:extLst xmlns:a="http://schemas.openxmlformats.org/drawingml/2006/main">
+              <a:ext uri="{FF2B5EF4-FFF2-40B4-BE49-F238E27FC236}">
+                <a16:creationId xmlns:a16="http://schemas.microsoft.com/office/drawing/2014/main" id="{D47BD2F4-F332-4BAA-ADCC-0DFC9E066CF5}"/>
+              </a:ext>
+            </a:extLst>
+          </p:cNvPr>
+          <p:cNvSpPr>
+            <a:spLocks xmlns:a="http://schemas.openxmlformats.org/drawingml/2006/main" noGrp="1"/>
+          </p:cNvSpPr>
+          <p:nvPr/>
+        </p:nvSpPr>
+        <p:spPr>
+          <a:xfrm xmlns:a="http://schemas.openxmlformats.org/drawingml/2006/main">
+            <a:off x="609600" y="1057275"/>
+            <a:ext cx="5610225" cy="1457325"/>
+          </a:xfrm>
+          <a:prstGeom xmlns:a="http://schemas.openxmlformats.org/drawingml/2006/main" prst="rect">
+            <a:avLst/>
+          </a:prstGeom>
+          <a:noFill xmlns:a="http://schemas.openxmlformats.org/drawingml/2006/main"/>
+          <a:ln xmlns:a="http://schemas.openxmlformats.org/drawingml/2006/main" w="0">
+            <a:noFill/>
+          </a:ln>
+        </p:spPr>
+        <p:txBody>
+          <a:bodyPr xmlns:a="http://schemas.openxmlformats.org/drawingml/2006/main" wrap="square" lIns="0" tIns="0" rIns="0" bIns="0" anchor="t">
+            <a:noAutofit/>
+          </a:bodyPr>
+          <a:lstStyle xmlns:a="http://schemas.openxmlformats.org/drawingml/2006/main"/>
+          <a:p xmlns:a="http://schemas.openxmlformats.org/drawingml/2006/main">
+            <a:pPr>
+              <a:lnSpc>
+                <a:spcPct val="110000"/>
+              </a:lnSpc>
+              <a:buNone/>
+              <a:defRPr sz="3600" b="1">
+                <a:solidFill>
+                  <a:srgbClr val="192B25"/>
+                </a:solidFill>
+                <a:latin typeface="Helvetica Neue"/>
+                <a:ea typeface="Helvetica Neue"/>
+                <a:cs typeface="Helvetica Neue"/>
+              </a:defRPr>
+            </a:pPr>
+            <a:r>
+              <a:rPr sz="3600" b="1">
+                <a:solidFill>
+                  <a:srgbClr val="192B25"/>
+                </a:solidFill>
+                <a:latin typeface="Helvetica Neue"/>
+                <a:ea typeface="Helvetica Neue"/>
+                <a:cs typeface="Helvetica Neue"/>
+              </a:rPr>
+              <a:t>A smaller camera fix,</a:t>
+            </a:r>
+          </a:p>
+          <a:p xmlns:a="http://schemas.openxmlformats.org/drawingml/2006/main">
+            <a:pPr>
+              <a:lnSpc>
+                <a:spcPct val="110000"/>
+              </a:lnSpc>
+              <a:buNone/>
+              <a:defRPr sz="3600" b="1">
+                <a:solidFill>
+                  <a:srgbClr val="192B25"/>
+                </a:solidFill>
+                <a:latin typeface="Helvetica Neue"/>
+                <a:ea typeface="Helvetica Neue"/>
+                <a:cs typeface="Helvetica Neue"/>
+              </a:defRPr>
+            </a:pPr>
+            <a:r>
+              <a:rPr sz="3600" b="1">
+                <a:solidFill>
+                  <a:srgbClr val="192B25"/>
+                </a:solidFill>
+                <a:latin typeface="Helvetica Neue"/>
+                <a:ea typeface="Helvetica Neue"/>
+                <a:cs typeface="Helvetica Neue"/>
+              </a:rPr>
+              <a:t>with room to grow</a:t>
+            </a:r>
+          </a:p>
+        </p:txBody>
+      </p:sp>
+      <p:sp>
+        <p:nvSpPr>
+          <p:cNvPr id="4" name="camera-problem">
+            <a:extLst xmlns:a="http://schemas.openxmlformats.org/drawingml/2006/main">
+              <a:ext uri="{FF2B5EF4-FFF2-40B4-BE49-F238E27FC236}">
+                <a16:creationId xmlns:a16="http://schemas.microsoft.com/office/drawing/2014/main" id="{873FE628-0D7F-4066-B561-FF012692E5B8}"/>
+              </a:ext>
+            </a:extLst>
+          </p:cNvPr>
+          <p:cNvSpPr>
+            <a:spLocks xmlns:a="http://schemas.openxmlformats.org/drawingml/2006/main" noGrp="1"/>
+          </p:cNvSpPr>
+          <p:nvPr/>
+        </p:nvSpPr>
+        <p:spPr>
+          <a:xfrm xmlns:a="http://schemas.openxmlformats.org/drawingml/2006/main">
+            <a:off x="609600" y="2790825"/>
+            <a:ext cx="4552950" cy="914400"/>
+          </a:xfrm>
+          <a:prstGeom xmlns:a="http://schemas.openxmlformats.org/drawingml/2006/main" prst="rect">
+            <a:avLst/>
+          </a:prstGeom>
+          <a:noFill xmlns:a="http://schemas.openxmlformats.org/drawingml/2006/main"/>
+          <a:ln xmlns:a="http://schemas.openxmlformats.org/drawingml/2006/main" w="0">
+            <a:noFill/>
+          </a:ln>
+        </p:spPr>
+        <p:txBody>
+          <a:bodyPr xmlns:a="http://schemas.openxmlformats.org/drawingml/2006/main" wrap="square" lIns="0" tIns="0" rIns="0" bIns="0" anchor="t">
+            <a:noAutofit/>
+          </a:bodyPr>
+          <a:lstStyle xmlns:a="http://schemas.openxmlformats.org/drawingml/2006/main"/>
+          <a:p xmlns:a="http://schemas.openxmlformats.org/drawingml/2006/main">
+            <a:pPr>
+              <a:lnSpc>
+                <a:spcPct val="110000"/>
+              </a:lnSpc>
+              <a:buNone/>
+              <a:defRPr sz="1875" b="0">
+                <a:solidFill>
+                  <a:srgbClr val="192B25"/>
+                </a:solidFill>
+                <a:latin typeface="Helvetica Neue"/>
+                <a:ea typeface="Helvetica Neue"/>
+                <a:cs typeface="Helvetica Neue"/>
+              </a:defRPr>
+            </a:pPr>
+            <a:r>
+              <a:rPr sz="1875" b="0">
+                <a:solidFill>
+                  <a:srgbClr val="192B25"/>
+                </a:solidFill>
+                <a:latin typeface="Helvetica Neue"/>
+                <a:ea typeface="Helvetica Neue"/>
+                <a:cs typeface="Helvetica Neue"/>
+              </a:rPr>
+              <a:t>A demo exposed competing controls while someone recorded and reviewed a form.</a:t>
+            </a:r>
+          </a:p>
+        </p:txBody>
+      </p:sp>
+      <p:sp>
+        <p:nvSpPr>
+          <p:cNvPr id="5" name="camera-current">
+            <a:extLst xmlns:a="http://schemas.openxmlformats.org/drawingml/2006/main">
+              <a:ext uri="{FF2B5EF4-FFF2-40B4-BE49-F238E27FC236}">
+                <a16:creationId xmlns:a16="http://schemas.microsoft.com/office/drawing/2014/main" id="{A0F78043-B6EC-4F98-AB8E-81ED72FF7BFB}"/>
+              </a:ext>
+            </a:extLst>
+          </p:cNvPr>
+          <p:cNvSpPr>
+            <a:spLocks xmlns:a="http://schemas.openxmlformats.org/drawingml/2006/main" noGrp="1"/>
+          </p:cNvSpPr>
+          <p:nvPr/>
+        </p:nvSpPr>
+        <p:spPr>
+          <a:xfrm xmlns:a="http://schemas.openxmlformats.org/drawingml/2006/main">
+            <a:off x="609600" y="3905250"/>
+            <a:ext cx="4552950" cy="1323975"/>
+          </a:xfrm>
+          <a:prstGeom xmlns:a="http://schemas.openxmlformats.org/drawingml/2006/main" prst="rect">
+            <a:avLst/>
+          </a:prstGeom>
+          <a:noFill xmlns:a="http://schemas.openxmlformats.org/drawingml/2006/main"/>
+          <a:ln xmlns:a="http://schemas.openxmlformats.org/drawingml/2006/main" w="0">
+            <a:noFill/>
+          </a:ln>
+        </p:spPr>
+        <p:txBody>
+          <a:bodyPr xmlns:a="http://schemas.openxmlformats.org/drawingml/2006/main" wrap="square" lIns="0" tIns="0" rIns="0" bIns="0" anchor="t">
+            <a:noAutofit/>
+          </a:bodyPr>
+          <a:lstStyle xmlns:a="http://schemas.openxmlformats.org/drawingml/2006/main"/>
+          <a:p xmlns:a="http://schemas.openxmlformats.org/drawingml/2006/main">
+            <a:pPr>
+              <a:lnSpc>
+                <a:spcPct val="110000"/>
+              </a:lnSpc>
+              <a:buNone/>
+              <a:defRPr sz="1650" b="0">
+                <a:solidFill>
+                  <a:srgbClr val="192B25"/>
+                </a:solidFill>
+                <a:latin typeface="Helvetica Neue"/>
+                <a:ea typeface="Helvetica Neue"/>
+                <a:cs typeface="Helvetica Neue"/>
+              </a:defRPr>
+            </a:pPr>
+            <a:r>
+              <a:rPr sz="1650" b="0">
+                <a:solidFill>
+                  <a:srgbClr val="192B25"/>
+                </a:solidFill>
+                <a:latin typeface="Helvetica Neue"/>
+                <a:ea typeface="Helvetica Neue"/>
+                <a:cs typeface="Helvetica Neue"/>
+              </a:rPr>
+              <a:t>Current handoff: keep the split screen, remove the problematic bottom Submit, and retain existing preview and Retake/Use Video actions.</a:t>
+            </a:r>
+          </a:p>
+        </p:txBody>
+      </p:sp>
+      <p:sp>
+        <p:nvSpPr>
+          <p:cNvPr id="6" name="camera-future">
+            <a:extLst xmlns:a="http://schemas.openxmlformats.org/drawingml/2006/main">
+              <a:ext uri="{FF2B5EF4-FFF2-40B4-BE49-F238E27FC236}">
+                <a16:creationId xmlns:a16="http://schemas.microsoft.com/office/drawing/2014/main" id="{AD1E3539-E9F4-4A94-A528-DDC008A8E433}"/>
+              </a:ext>
+            </a:extLst>
+          </p:cNvPr>
+          <p:cNvSpPr>
+            <a:spLocks xmlns:a="http://schemas.openxmlformats.org/drawingml/2006/main" noGrp="1"/>
+          </p:cNvSpPr>
+          <p:nvPr/>
+        </p:nvSpPr>
+        <p:spPr>
+          <a:xfrm xmlns:a="http://schemas.openxmlformats.org/drawingml/2006/main">
+            <a:off x="609600" y="5486400"/>
+            <a:ext cx="4705350" cy="771525"/>
+          </a:xfrm>
+          <a:prstGeom xmlns:a="http://schemas.openxmlformats.org/drawingml/2006/main" prst="rect">
+            <a:avLst/>
+          </a:prstGeom>
+          <a:noFill xmlns:a="http://schemas.openxmlformats.org/drawingml/2006/main"/>
+          <a:ln xmlns:a="http://schemas.openxmlformats.org/drawingml/2006/main" w="0">
+            <a:noFill/>
+          </a:ln>
+        </p:spPr>
+        <p:txBody>
+          <a:bodyPr xmlns:a="http://schemas.openxmlformats.org/drawingml/2006/main" wrap="square" lIns="0" tIns="0" rIns="0" bIns="0" anchor="t">
+            <a:noAutofit/>
+          </a:bodyPr>
+          <a:lstStyle xmlns:a="http://schemas.openxmlformats.org/drawingml/2006/main"/>
+          <a:p xmlns:a="http://schemas.openxmlformats.org/drawingml/2006/main">
+            <a:pPr>
+              <a:lnSpc>
+                <a:spcPct val="110000"/>
+              </a:lnSpc>
+              <a:buNone/>
+              <a:defRPr sz="1350" b="0">
+                <a:solidFill>
+                  <a:srgbClr val="58645D"/>
+                </a:solidFill>
+                <a:latin typeface="Helvetica Neue"/>
+                <a:ea typeface="Helvetica Neue"/>
+                <a:cs typeface="Helvetica Neue"/>
+              </a:defRPr>
+            </a:pPr>
+            <a:r>
+              <a:rPr sz="1350" b="0">
+                <a:solidFill>
+                  <a:srgbClr val="58645D"/>
+                </a:solidFill>
+                <a:latin typeface="Helvetica Neue"/>
+                <a:ea typeface="Helvetica Neue"/>
+                <a:cs typeface="Helvetica Neue"/>
+              </a:rPr>
+              <a:t>Future direction: a draggable picture-in-picture view could give the form more room. That benefit remains a design hypothesis.</a:t>
+            </a:r>
+          </a:p>
+        </p:txBody>
+      </p:sp>
+      <p:pic>
+        <p:nvPicPr>
+          <p:cNvPr id="16" name=""/>
+          <p:cNvPicPr>
+            <a:picLocks xmlns:a="http://schemas.openxmlformats.org/drawingml/2006/main" noChangeAspect="1"/>
+          </p:cNvPicPr>
+          <p:nvPr/>
+        </p:nvPicPr>
+        <p:blipFill>
+          <a:blip xmlns:r="http://schemas.openxmlformats.org/officeDocument/2006/relationships" xmlns:a="http://schemas.openxmlformats.org/drawingml/2006/main" r:embed="R3f3cbeb53bcb418c"/>
+          <a:stretch xmlns:a="http://schemas.openxmlformats.org/drawingml/2006/main"/>
+        </p:blipFill>
+        <p:spPr>
+          <a:xfrm xmlns:a="http://schemas.openxmlformats.org/drawingml/2006/main">
+            <a:off x="8578301" y="1209675"/>
+            <a:ext cx="1883872" cy="4762500"/>
+          </a:xfrm>
+          <a:prstGeom xmlns:a="http://schemas.openxmlformats.org/drawingml/2006/main" prst="rect">
+            <a:avLst/>
+          </a:prstGeom>
+        </p:spPr>
+      </p:pic>
+      <p:pic>
+        <p:nvPicPr>
+          <p:cNvPr id="17" name=""/>
+          <p:cNvPicPr>
+            <a:picLocks xmlns:a="http://schemas.openxmlformats.org/drawingml/2006/main" noChangeAspect="1"/>
+          </p:cNvPicPr>
+          <p:nvPr/>
+        </p:nvPicPr>
+        <p:blipFill>
+          <a:blip xmlns:r="http://schemas.openxmlformats.org/officeDocument/2006/relationships" xmlns:a="http://schemas.openxmlformats.org/drawingml/2006/main" r:embed="R87e7b983cc19403e"/>
+          <a:stretch xmlns:a="http://schemas.openxmlformats.org/drawingml/2006/main"/>
+        </p:blipFill>
+        <p:spPr>
+          <a:xfrm xmlns:a="http://schemas.openxmlformats.org/drawingml/2006/main">
+            <a:off x="6048375" y="4534039"/>
+            <a:ext cx="1866900" cy="1218923"/>
+          </a:xfrm>
+          <a:prstGeom xmlns:a="http://schemas.openxmlformats.org/drawingml/2006/main" prst="rect">
+            <a:avLst/>
+          </a:prstGeom>
+        </p:spPr>
+      </p:pic>
+      <p:sp>
+        <p:nvSpPr>
+          <p:cNvPr id="9" name="camera-stage">
+            <a:extLst xmlns:a="http://schemas.openxmlformats.org/drawingml/2006/main">
+              <a:ext uri="{FF2B5EF4-FFF2-40B4-BE49-F238E27FC236}">
+                <a16:creationId xmlns:a16="http://schemas.microsoft.com/office/drawing/2014/main" id="{CFF1A6B1-B042-4EF0-9D26-5DA9128B9BDD}"/>
+              </a:ext>
+            </a:extLst>
+          </p:cNvPr>
+          <p:cNvSpPr>
+            <a:spLocks xmlns:a="http://schemas.openxmlformats.org/drawingml/2006/main" noGrp="1"/>
+          </p:cNvSpPr>
+          <p:nvPr/>
+        </p:nvSpPr>
+        <p:spPr>
+          <a:xfrm xmlns:a="http://schemas.openxmlformats.org/drawingml/2006/main">
+            <a:off x="6048375" y="6019800"/>
+            <a:ext cx="4943475" cy="342900"/>
+          </a:xfrm>
+          <a:prstGeom xmlns:a="http://schemas.openxmlformats.org/drawingml/2006/main" prst="rect">
+            <a:avLst/>
+          </a:prstGeom>
+          <a:noFill xmlns:a="http://schemas.openxmlformats.org/drawingml/2006/main"/>
+          <a:ln xmlns:a="http://schemas.openxmlformats.org/drawingml/2006/main" w="0">
+            <a:noFill/>
+          </a:ln>
+        </p:spPr>
+        <p:txBody>
+          <a:bodyPr xmlns:a="http://schemas.openxmlformats.org/drawingml/2006/main" wrap="square" lIns="0" tIns="0" rIns="0" bIns="0" anchor="t">
+            <a:noAutofit/>
+          </a:bodyPr>
+          <a:lstStyle xmlns:a="http://schemas.openxmlformats.org/drawingml/2006/main"/>
+          <a:p xmlns:a="http://schemas.openxmlformats.org/drawingml/2006/main">
+            <a:pPr>
+              <a:lnSpc>
+                <a:spcPct val="110000"/>
+              </a:lnSpc>
+              <a:buNone/>
+              <a:defRPr sz="1200" b="0">
+                <a:solidFill>
+                  <a:srgbClr val="58645D"/>
+                </a:solidFill>
+                <a:latin typeface="Helvetica Neue"/>
+                <a:ea typeface="Helvetica Neue"/>
+                <a:cs typeface="Helvetica Neue"/>
+              </a:defRPr>
+            </a:pPr>
+            <a:r>
+              <a:rPr sz="1200" b="0">
+                <a:solidFill>
+                  <a:srgbClr val="58645D"/>
+                </a:solidFill>
+                <a:latin typeface="Helvetica Neue"/>
+                <a:ea typeface="Helvetica Neue"/>
+                <a:cs typeface="Helvetica Neue"/>
+              </a:rPr>
+              <a:t>Original design and April handoff · implementation and retest unverified</a:t>
+            </a:r>
+          </a:p>
+        </p:txBody>
+      </p:sp>
+    </p:spTree>
+    <p:extLst>
+      <p:ext uri="{BB962C8B-B14F-4D97-AF65-F5344CB8AC3E}">
+        <p14:creationId xmlns:p14="http://schemas.microsoft.com/office/powerpoint/2010/main" val="565416675"/>
+      </p:ext>
+    </p:extLst>
+  </p:cSld>
+</p:sld>
+</file>
+
+<file path=ppt/slides/slide11.xml><?xml version="1.0" encoding="utf-8"?>
+<p:sld xmlns:p="http://schemas.openxmlformats.org/presentationml/2006/main">
+  <p:cSld>
+    <p:bg>
+      <p:bgPr>
+        <a:solidFill xmlns:a="http://schemas.openxmlformats.org/drawingml/2006/main">
+          <a:srgbClr val="F4F2E9"/>
+        </a:solidFill>
+      </p:bgPr>
+    </p:bg>
+    <p:spTree>
+      <p:nvGrpSpPr>
+        <p:cNvPr id="1" name=""/>
+        <p:cNvGrpSpPr/>
+        <p:nvPr/>
+      </p:nvGrpSpPr>
+      <p:grpSpPr>
+        <a:xfrm xmlns:a="http://schemas.openxmlformats.org/drawingml/2006/main"/>
+      </p:grpSpPr>
+      <p:sp>
+        <p:nvSpPr>
+          <p:cNvPr id="8" name="slide-number">
+            <a:extLst xmlns:a="http://schemas.openxmlformats.org/drawingml/2006/main">
+              <a:ext uri="{FF2B5EF4-FFF2-40B4-BE49-F238E27FC236}">
+                <a16:creationId xmlns:a16="http://schemas.microsoft.com/office/drawing/2014/main" id="{CEC947D4-762E-4A06-AA25-FE74A567C06C}"/>
+              </a:ext>
+            </a:extLst>
+          </p:cNvPr>
+          <p:cNvSpPr>
+            <a:spLocks xmlns:a="http://schemas.openxmlformats.org/drawingml/2006/main" noGrp="1"/>
+          </p:cNvSpPr>
+          <p:nvPr/>
+        </p:nvSpPr>
+        <p:spPr>
+          <a:xfrm xmlns:a="http://schemas.openxmlformats.org/drawingml/2006/main">
+            <a:off x="11353800" y="6515100"/>
+            <a:ext cx="323850" cy="209550"/>
+          </a:xfrm>
+          <a:prstGeom xmlns:a="http://schemas.openxmlformats.org/drawingml/2006/main" prst="rect">
+            <a:avLst/>
+          </a:prstGeom>
+          <a:noFill xmlns:a="http://schemas.openxmlformats.org/drawingml/2006/main"/>
+          <a:ln xmlns:a="http://schemas.openxmlformats.org/drawingml/2006/main" w="0">
+            <a:noFill/>
+          </a:ln>
+        </p:spPr>
+        <p:txBody>
+          <a:bodyPr xmlns:a="http://schemas.openxmlformats.org/drawingml/2006/main" wrap="square" lIns="0" tIns="0" rIns="0" bIns="0" anchor="t">
+            <a:noAutofit/>
+          </a:bodyPr>
+          <a:lstStyle xmlns:a="http://schemas.openxmlformats.org/drawingml/2006/main"/>
+          <a:p xmlns:a="http://schemas.openxmlformats.org/drawingml/2006/main">
+            <a:pPr>
+              <a:lnSpc>
+                <a:spcPct val="110000"/>
+              </a:lnSpc>
+              <a:buNone/>
+              <a:defRPr sz="1050" b="0">
+                <a:solidFill>
+                  <a:srgbClr val="58645D"/>
+                </a:solidFill>
+                <a:latin typeface="Helvetica Neue"/>
+                <a:ea typeface="Helvetica Neue"/>
+                <a:cs typeface="Helvetica Neue"/>
+              </a:defRPr>
+            </a:pPr>
+            <a:r>
+              <a:rPr sz="1050" b="0">
+                <a:solidFill>
+                  <a:srgbClr val="58645D"/>
+                </a:solidFill>
+                <a:latin typeface="Helvetica Neue"/>
+                <a:ea typeface="Helvetica Neue"/>
+                <a:cs typeface="Helvetica Neue"/>
+              </a:rPr>
+              <a:t>11</a:t>
+            </a:r>
+          </a:p>
+        </p:txBody>
+      </p:sp>
+      <p:sp>
+        <p:nvSpPr>
+          <p:cNvPr id="2" name="section-label">
+            <a:extLst xmlns:a="http://schemas.openxmlformats.org/drawingml/2006/main">
+              <a:ext uri="{FF2B5EF4-FFF2-40B4-BE49-F238E27FC236}">
+                <a16:creationId xmlns:a16="http://schemas.microsoft.com/office/drawing/2014/main" id="{2BC964AC-DFFD-474C-9FAF-90D308C2F451}"/>
+              </a:ext>
+            </a:extLst>
+          </p:cNvPr>
+          <p:cNvSpPr>
+            <a:spLocks xmlns:a="http://schemas.openxmlformats.org/drawingml/2006/main" noGrp="1"/>
+          </p:cNvSpPr>
+          <p:nvPr/>
+        </p:nvSpPr>
+        <p:spPr>
+          <a:xfrm xmlns:a="http://schemas.openxmlformats.org/drawingml/2006/main">
+            <a:off x="609600" y="495300"/>
+            <a:ext cx="10668000" cy="266700"/>
+          </a:xfrm>
+          <a:prstGeom xmlns:a="http://schemas.openxmlformats.org/drawingml/2006/main" prst="rect">
+            <a:avLst/>
+          </a:prstGeom>
+          <a:noFill xmlns:a="http://schemas.openxmlformats.org/drawingml/2006/main"/>
+          <a:ln xmlns:a="http://schemas.openxmlformats.org/drawingml/2006/main" w="0">
+            <a:noFill/>
+          </a:ln>
+        </p:spPr>
+        <p:txBody>
+          <a:bodyPr xmlns:a="http://schemas.openxmlformats.org/drawingml/2006/main" wrap="square" lIns="0" tIns="0" rIns="0" bIns="0" anchor="t">
+            <a:noAutofit/>
+          </a:bodyPr>
+          <a:lstStyle xmlns:a="http://schemas.openxmlformats.org/drawingml/2006/main"/>
+          <a:p xmlns:a="http://schemas.openxmlformats.org/drawingml/2006/main">
+            <a:pPr>
+              <a:lnSpc>
+                <a:spcPct val="110000"/>
+              </a:lnSpc>
+              <a:buNone/>
+              <a:defRPr sz="1200" b="1">
+                <a:solidFill>
+                  <a:srgbClr val="244D3C"/>
+                </a:solidFill>
+                <a:latin typeface="Helvetica Neue"/>
+                <a:ea typeface="Helvetica Neue"/>
+                <a:cs typeface="Helvetica Neue"/>
+              </a:defRPr>
+            </a:pPr>
+            <a:r>
+              <a:rPr sz="1200" b="1">
+                <a:solidFill>
+                  <a:srgbClr val="244D3C"/>
+                </a:solidFill>
+                <a:latin typeface="Helvetica Neue"/>
+                <a:ea typeface="Helvetica Neue"/>
+                <a:cs typeface="Helvetica Neue"/>
+              </a:rPr>
+              <a:t>OAK AI   /   LEAD UX RESEARCHER, 2023–2025</a:t>
+            </a:r>
+          </a:p>
+        </p:txBody>
+      </p:sp>
+      <p:sp>
+        <p:nvSpPr>
+          <p:cNvPr id="3" name="headline">
+            <a:extLst xmlns:a="http://schemas.openxmlformats.org/drawingml/2006/main">
+              <a:ext uri="{FF2B5EF4-FFF2-40B4-BE49-F238E27FC236}">
+                <a16:creationId xmlns:a16="http://schemas.microsoft.com/office/drawing/2014/main" id="{D715EAFF-6235-4BCA-BB28-F15C475BCB0F}"/>
+              </a:ext>
+            </a:extLst>
+          </p:cNvPr>
+          <p:cNvSpPr>
+            <a:spLocks xmlns:a="http://schemas.openxmlformats.org/drawingml/2006/main" noGrp="1"/>
+          </p:cNvSpPr>
+          <p:nvPr/>
+        </p:nvSpPr>
+        <p:spPr>
+          <a:xfrm xmlns:a="http://schemas.openxmlformats.org/drawingml/2006/main">
+            <a:off x="609600" y="1104900"/>
+            <a:ext cx="4248150" cy="1438275"/>
+          </a:xfrm>
+          <a:prstGeom xmlns:a="http://schemas.openxmlformats.org/drawingml/2006/main" prst="rect">
+            <a:avLst/>
+          </a:prstGeom>
+          <a:noFill xmlns:a="http://schemas.openxmlformats.org/drawingml/2006/main"/>
+          <a:ln xmlns:a="http://schemas.openxmlformats.org/drawingml/2006/main" w="0">
+            <a:noFill/>
+          </a:ln>
+        </p:spPr>
+        <p:txBody>
+          <a:bodyPr xmlns:a="http://schemas.openxmlformats.org/drawingml/2006/main" wrap="square" lIns="0" tIns="0" rIns="0" bIns="0" anchor="t">
+            <a:noAutofit/>
+          </a:bodyPr>
+          <a:lstStyle xmlns:a="http://schemas.openxmlformats.org/drawingml/2006/main"/>
+          <a:p xmlns:a="http://schemas.openxmlformats.org/drawingml/2006/main">
+            <a:pPr>
+              <a:lnSpc>
+                <a:spcPct val="110000"/>
+              </a:lnSpc>
+              <a:buNone/>
+              <a:defRPr sz="3750" b="1">
+                <a:solidFill>
+                  <a:srgbClr val="192B25"/>
+                </a:solidFill>
+                <a:latin typeface="Helvetica Neue"/>
+                <a:ea typeface="Helvetica Neue"/>
+                <a:cs typeface="Helvetica Neue"/>
+              </a:defRPr>
+            </a:pPr>
+            <a:r>
+              <a:rPr sz="3750" b="1">
+                <a:solidFill>
+                  <a:srgbClr val="192B25"/>
+                </a:solidFill>
+                <a:latin typeface="Helvetica Neue"/>
+                <a:ea typeface="Helvetica Neue"/>
+                <a:cs typeface="Helvetica Neue"/>
+              </a:rPr>
+              <a:t>Competing</a:t>
+            </a:r>
+          </a:p>
+          <a:p xmlns:a="http://schemas.openxmlformats.org/drawingml/2006/main">
+            <a:pPr>
+              <a:lnSpc>
+                <a:spcPct val="110000"/>
+              </a:lnSpc>
+              <a:buNone/>
+              <a:defRPr sz="3750" b="1">
+                <a:solidFill>
+                  <a:srgbClr val="192B25"/>
+                </a:solidFill>
+                <a:latin typeface="Helvetica Neue"/>
+                <a:ea typeface="Helvetica Neue"/>
+                <a:cs typeface="Helvetica Neue"/>
+              </a:defRPr>
+            </a:pPr>
+            <a:r>
+              <a:rPr sz="3750" b="1">
+                <a:solidFill>
+                  <a:srgbClr val="192B25"/>
+                </a:solidFill>
+                <a:latin typeface="Helvetica Neue"/>
+                <a:ea typeface="Helvetica Neue"/>
+                <a:cs typeface="Helvetica Neue"/>
+              </a:rPr>
+              <a:t>entry points</a:t>
+            </a:r>
+          </a:p>
+        </p:txBody>
+      </p:sp>
+      <p:sp>
+        <p:nvSpPr>
+          <p:cNvPr id="4" name="oak-observation">
+            <a:extLst xmlns:a="http://schemas.openxmlformats.org/drawingml/2006/main">
+              <a:ext uri="{FF2B5EF4-FFF2-40B4-BE49-F238E27FC236}">
+                <a16:creationId xmlns:a16="http://schemas.microsoft.com/office/drawing/2014/main" id="{B6040F3D-C2CC-4A92-BDA0-26720D6E1100}"/>
+              </a:ext>
+            </a:extLst>
+          </p:cNvPr>
+          <p:cNvSpPr>
+            <a:spLocks xmlns:a="http://schemas.openxmlformats.org/drawingml/2006/main" noGrp="1"/>
+          </p:cNvSpPr>
+          <p:nvPr/>
+        </p:nvSpPr>
+        <p:spPr>
+          <a:xfrm xmlns:a="http://schemas.openxmlformats.org/drawingml/2006/main">
+            <a:off x="609600" y="2981325"/>
+            <a:ext cx="4057650" cy="1743075"/>
+          </a:xfrm>
+          <a:prstGeom xmlns:a="http://schemas.openxmlformats.org/drawingml/2006/main" prst="rect">
+            <a:avLst/>
+          </a:prstGeom>
+          <a:noFill xmlns:a="http://schemas.openxmlformats.org/drawingml/2006/main"/>
+          <a:ln xmlns:a="http://schemas.openxmlformats.org/drawingml/2006/main" w="0">
+            <a:noFill/>
+          </a:ln>
+        </p:spPr>
+        <p:txBody>
+          <a:bodyPr xmlns:a="http://schemas.openxmlformats.org/drawingml/2006/main" wrap="square" lIns="0" tIns="0" rIns="0" bIns="0" anchor="t">
+            <a:noAutofit/>
+          </a:bodyPr>
+          <a:lstStyle xmlns:a="http://schemas.openxmlformats.org/drawingml/2006/main"/>
+          <a:p xmlns:a="http://schemas.openxmlformats.org/drawingml/2006/main">
+            <a:pPr>
+              <a:lnSpc>
+                <a:spcPct val="110000"/>
+              </a:lnSpc>
+              <a:buNone/>
+              <a:defRPr sz="1950" b="0">
+                <a:solidFill>
+                  <a:srgbClr val="192B25"/>
+                </a:solidFill>
+                <a:latin typeface="Helvetica Neue"/>
+                <a:ea typeface="Helvetica Neue"/>
+                <a:cs typeface="Helvetica Neue"/>
+              </a:defRPr>
+            </a:pPr>
+            <a:r>
+              <a:rPr sz="1950" b="0">
+                <a:solidFill>
+                  <a:srgbClr val="192B25"/>
+                </a:solidFill>
+                <a:latin typeface="Helvetica Neue"/>
+                <a:ea typeface="Helvetica Neue"/>
+                <a:cs typeface="Helvetica Neue"/>
+              </a:rPr>
+              <a:t>Training an assistant, starting a Vibecheck and requesting support competed at the same entry point.</a:t>
+            </a:r>
+          </a:p>
+        </p:txBody>
+      </p:sp>
+      <p:sp>
+        <p:nvSpPr>
+          <p:cNvPr id="5" name="oak-rationale">
+            <a:extLst xmlns:a="http://schemas.openxmlformats.org/drawingml/2006/main">
+              <a:ext uri="{FF2B5EF4-FFF2-40B4-BE49-F238E27FC236}">
+                <a16:creationId xmlns:a16="http://schemas.microsoft.com/office/drawing/2014/main" id="{DB617A73-058A-430C-ABE7-8D9F12FDE410}"/>
+              </a:ext>
+            </a:extLst>
+          </p:cNvPr>
+          <p:cNvSpPr>
+            <a:spLocks xmlns:a="http://schemas.openxmlformats.org/drawingml/2006/main" noGrp="1"/>
+          </p:cNvSpPr>
+          <p:nvPr/>
+        </p:nvSpPr>
+        <p:spPr>
+          <a:xfrm xmlns:a="http://schemas.openxmlformats.org/drawingml/2006/main">
+            <a:off x="609600" y="5038725"/>
+            <a:ext cx="4057650" cy="981075"/>
+          </a:xfrm>
+          <a:prstGeom xmlns:a="http://schemas.openxmlformats.org/drawingml/2006/main" prst="rect">
+            <a:avLst/>
+          </a:prstGeom>
+          <a:noFill xmlns:a="http://schemas.openxmlformats.org/drawingml/2006/main"/>
+          <a:ln xmlns:a="http://schemas.openxmlformats.org/drawingml/2006/main" w="0">
+            <a:noFill/>
+          </a:ln>
+        </p:spPr>
+        <p:txBody>
+          <a:bodyPr xmlns:a="http://schemas.openxmlformats.org/drawingml/2006/main" wrap="square" lIns="0" tIns="0" rIns="0" bIns="0" anchor="t">
+            <a:noAutofit/>
+          </a:bodyPr>
+          <a:lstStyle xmlns:a="http://schemas.openxmlformats.org/drawingml/2006/main"/>
+          <a:p xmlns:a="http://schemas.openxmlformats.org/drawingml/2006/main">
+            <a:pPr>
+              <a:lnSpc>
+                <a:spcPct val="110000"/>
+              </a:lnSpc>
+              <a:buNone/>
+              <a:defRPr sz="1725" b="0">
+                <a:solidFill>
+                  <a:srgbClr val="58645D"/>
+                </a:solidFill>
+                <a:latin typeface="Helvetica Neue"/>
+                <a:ea typeface="Helvetica Neue"/>
+                <a:cs typeface="Helvetica Neue"/>
+              </a:defRPr>
+            </a:pPr>
+            <a:r>
+              <a:rPr sz="1725" b="0">
+                <a:solidFill>
+                  <a:srgbClr val="58645D"/>
+                </a:solidFill>
+                <a:latin typeface="Helvetica Neue"/>
+                <a:ea typeface="Helvetica Neue"/>
+                <a:cs typeface="Helvetica Neue"/>
+              </a:rPr>
+              <a:t>I used the audit to make these choices explicit for the team’s review.</a:t>
+            </a:r>
+          </a:p>
+        </p:txBody>
+      </p:sp>
+      <p:sp>
+        <p:nvSpPr>
+          <p:cNvPr id="6" name="oak-stage">
+            <a:extLst xmlns:a="http://schemas.openxmlformats.org/drawingml/2006/main">
+              <a:ext uri="{FF2B5EF4-FFF2-40B4-BE49-F238E27FC236}">
+                <a16:creationId xmlns:a16="http://schemas.microsoft.com/office/drawing/2014/main" id="{490BA70F-B7DA-4248-AF89-488297250B05}"/>
+              </a:ext>
+            </a:extLst>
+          </p:cNvPr>
+          <p:cNvSpPr>
+            <a:spLocks xmlns:a="http://schemas.openxmlformats.org/drawingml/2006/main" noGrp="1"/>
+          </p:cNvSpPr>
+          <p:nvPr/>
+        </p:nvSpPr>
+        <p:spPr>
+          <a:xfrm xmlns:a="http://schemas.openxmlformats.org/drawingml/2006/main">
+            <a:off x="609600" y="6096000"/>
+            <a:ext cx="4248150" cy="400050"/>
+          </a:xfrm>
+          <a:prstGeom xmlns:a="http://schemas.openxmlformats.org/drawingml/2006/main" prst="rect">
+            <a:avLst/>
+          </a:prstGeom>
+          <a:noFill xmlns:a="http://schemas.openxmlformats.org/drawingml/2006/main"/>
+          <a:ln xmlns:a="http://schemas.openxmlformats.org/drawingml/2006/main" w="0">
+            <a:noFill/>
+          </a:ln>
+        </p:spPr>
+        <p:txBody>
+          <a:bodyPr xmlns:a="http://schemas.openxmlformats.org/drawingml/2006/main" wrap="square" lIns="0" tIns="0" rIns="0" bIns="0" anchor="t">
+            <a:noAutofit/>
+          </a:bodyPr>
+          <a:lstStyle xmlns:a="http://schemas.openxmlformats.org/drawingml/2006/main"/>
+          <a:p xmlns:a="http://schemas.openxmlformats.org/drawingml/2006/main">
+            <a:pPr>
+              <a:lnSpc>
+                <a:spcPct val="110000"/>
+              </a:lnSpc>
+              <a:buNone/>
+              <a:defRPr sz="1200" b="0">
+                <a:solidFill>
+                  <a:srgbClr val="58645D"/>
+                </a:solidFill>
+                <a:latin typeface="Helvetica Neue"/>
+                <a:ea typeface="Helvetica Neue"/>
+                <a:cs typeface="Helvetica Neue"/>
+              </a:defRPr>
+            </a:pPr>
+            <a:r>
+              <a:rPr sz="1200" b="0">
+                <a:solidFill>
+                  <a:srgbClr val="58645D"/>
+                </a:solidFill>
+                <a:latin typeface="Helvetica Neue"/>
+                <a:ea typeface="Helvetica Neue"/>
+                <a:cs typeface="Helvetica Neue"/>
+              </a:rPr>
+              <a:t>Usability evaluation and design recommendations</a:t>
+            </a:r>
+          </a:p>
+        </p:txBody>
+      </p:sp>
+      <p:pic>
+        <p:nvPicPr>
+          <p:cNvPr id="14" name=""/>
+          <p:cNvPicPr>
+            <a:picLocks xmlns:a="http://schemas.openxmlformats.org/drawingml/2006/main" noChangeAspect="1"/>
+          </p:cNvPicPr>
+          <p:nvPr/>
+        </p:nvPicPr>
+        <p:blipFill>
+          <a:blip xmlns:r="http://schemas.openxmlformats.org/officeDocument/2006/relationships" xmlns:a="http://schemas.openxmlformats.org/drawingml/2006/main" r:embed="R9ad64653b3484edd"/>
+          <a:stretch xmlns:a="http://schemas.openxmlformats.org/drawingml/2006/main"/>
+        </p:blipFill>
+        <p:spPr>
+          <a:xfrm xmlns:a="http://schemas.openxmlformats.org/drawingml/2006/main">
+            <a:off x="5147971" y="1438275"/>
+            <a:ext cx="6429958" cy="5048250"/>
+          </a:xfrm>
+          <a:prstGeom xmlns:a="http://schemas.openxmlformats.org/drawingml/2006/main" prst="rect">
+            <a:avLst/>
+          </a:prstGeom>
+        </p:spPr>
+      </p:pic>
+    </p:spTree>
+    <p:extLst>
+      <p:ext uri="{BB962C8B-B14F-4D97-AF65-F5344CB8AC3E}">
+        <p14:creationId xmlns:p14="http://schemas.microsoft.com/office/powerpoint/2010/main" val="268901315"/>
+      </p:ext>
+    </p:extLst>
+  </p:cSld>
+</p:sld>
+</file>
+
+<file path=ppt/slides/slide12.xml><?xml version="1.0" encoding="utf-8"?>
+<p:sld xmlns:p="http://schemas.openxmlformats.org/presentationml/2006/main">
+  <p:cSld>
+    <p:bg>
+      <p:bgPr>
+        <a:solidFill xmlns:a="http://schemas.openxmlformats.org/drawingml/2006/main">
+          <a:srgbClr val="F4F2E9"/>
+        </a:solidFill>
+      </p:bgPr>
+    </p:bg>
+    <p:spTree>
+      <p:nvGrpSpPr>
+        <p:cNvPr id="1" name=""/>
+        <p:cNvGrpSpPr/>
+        <p:nvPr/>
+      </p:nvGrpSpPr>
+      <p:grpSpPr>
+        <a:xfrm xmlns:a="http://schemas.openxmlformats.org/drawingml/2006/main"/>
+      </p:grpSpPr>
+      <p:sp>
+        <p:nvSpPr>
+          <p:cNvPr id="13" name="slide-number">
+            <a:extLst xmlns:a="http://schemas.openxmlformats.org/drawingml/2006/main">
+              <a:ext uri="{FF2B5EF4-FFF2-40B4-BE49-F238E27FC236}">
+                <a16:creationId xmlns:a16="http://schemas.microsoft.com/office/drawing/2014/main" id="{D9BF6269-7BEE-4B51-A319-119E526BF029}"/>
+              </a:ext>
+            </a:extLst>
+          </p:cNvPr>
+          <p:cNvSpPr>
+            <a:spLocks xmlns:a="http://schemas.openxmlformats.org/drawingml/2006/main" noGrp="1"/>
+          </p:cNvSpPr>
+          <p:nvPr/>
+        </p:nvSpPr>
+        <p:spPr>
+          <a:xfrm xmlns:a="http://schemas.openxmlformats.org/drawingml/2006/main">
+            <a:off x="11353800" y="6515100"/>
+            <a:ext cx="323850" cy="209550"/>
+          </a:xfrm>
+          <a:prstGeom xmlns:a="http://schemas.openxmlformats.org/drawingml/2006/main" prst="rect">
+            <a:avLst/>
+          </a:prstGeom>
+          <a:noFill xmlns:a="http://schemas.openxmlformats.org/drawingml/2006/main"/>
+          <a:ln xmlns:a="http://schemas.openxmlformats.org/drawingml/2006/main" w="0">
+            <a:noFill/>
+          </a:ln>
+        </p:spPr>
+        <p:txBody>
+          <a:bodyPr xmlns:a="http://schemas.openxmlformats.org/drawingml/2006/main" wrap="square" lIns="0" tIns="0" rIns="0" bIns="0" anchor="t">
+            <a:noAutofit/>
+          </a:bodyPr>
+          <a:lstStyle xmlns:a="http://schemas.openxmlformats.org/drawingml/2006/main"/>
+          <a:p xmlns:a="http://schemas.openxmlformats.org/drawingml/2006/main">
+            <a:pPr>
+              <a:lnSpc>
+                <a:spcPct val="110000"/>
+              </a:lnSpc>
+              <a:buNone/>
+              <a:defRPr sz="1050" b="0">
+                <a:solidFill>
+                  <a:srgbClr val="58645D"/>
+                </a:solidFill>
+                <a:latin typeface="Helvetica Neue"/>
+                <a:ea typeface="Helvetica Neue"/>
+                <a:cs typeface="Helvetica Neue"/>
+              </a:defRPr>
+            </a:pPr>
+            <a:r>
+              <a:rPr sz="1050" b="0">
+                <a:solidFill>
+                  <a:srgbClr val="58645D"/>
+                </a:solidFill>
+                <a:latin typeface="Helvetica Neue"/>
+                <a:ea typeface="Helvetica Neue"/>
+                <a:cs typeface="Helvetica Neue"/>
+              </a:rPr>
+              <a:t>12</a:t>
+            </a:r>
+          </a:p>
+        </p:txBody>
+      </p:sp>
+      <p:sp>
+        <p:nvSpPr>
+          <p:cNvPr id="2" name="section-label">
+            <a:extLst xmlns:a="http://schemas.openxmlformats.org/drawingml/2006/main">
+              <a:ext uri="{FF2B5EF4-FFF2-40B4-BE49-F238E27FC236}">
+                <a16:creationId xmlns:a16="http://schemas.microsoft.com/office/drawing/2014/main" id="{569112A1-3F11-49C0-93D3-D72F799616B6}"/>
+              </a:ext>
+            </a:extLst>
+          </p:cNvPr>
+          <p:cNvSpPr>
+            <a:spLocks xmlns:a="http://schemas.openxmlformats.org/drawingml/2006/main" noGrp="1"/>
+          </p:cNvSpPr>
+          <p:nvPr/>
+        </p:nvSpPr>
+        <p:spPr>
+          <a:xfrm xmlns:a="http://schemas.openxmlformats.org/drawingml/2006/main">
+            <a:off x="609600" y="495300"/>
+            <a:ext cx="10668000" cy="266700"/>
+          </a:xfrm>
+          <a:prstGeom xmlns:a="http://schemas.openxmlformats.org/drawingml/2006/main" prst="rect">
+            <a:avLst/>
+          </a:prstGeom>
+          <a:noFill xmlns:a="http://schemas.openxmlformats.org/drawingml/2006/main"/>
+          <a:ln xmlns:a="http://schemas.openxmlformats.org/drawingml/2006/main" w="0">
+            <a:noFill/>
+          </a:ln>
+        </p:spPr>
+        <p:txBody>
+          <a:bodyPr xmlns:a="http://schemas.openxmlformats.org/drawingml/2006/main" wrap="square" lIns="0" tIns="0" rIns="0" bIns="0" anchor="t">
+            <a:noAutofit/>
+          </a:bodyPr>
+          <a:lstStyle xmlns:a="http://schemas.openxmlformats.org/drawingml/2006/main"/>
+          <a:p xmlns:a="http://schemas.openxmlformats.org/drawingml/2006/main">
+            <a:pPr>
+              <a:lnSpc>
+                <a:spcPct val="110000"/>
+              </a:lnSpc>
+              <a:buNone/>
+              <a:defRPr sz="1200" b="1">
+                <a:solidFill>
+                  <a:srgbClr val="244D3C"/>
+                </a:solidFill>
+                <a:latin typeface="Helvetica Neue"/>
+                <a:ea typeface="Helvetica Neue"/>
+                <a:cs typeface="Helvetica Neue"/>
+              </a:defRPr>
+            </a:pPr>
+            <a:r>
+              <a:rPr sz="1200" b="1">
+                <a:solidFill>
+                  <a:srgbClr val="244D3C"/>
+                </a:solidFill>
+                <a:latin typeface="Helvetica Neue"/>
+                <a:ea typeface="Helvetica Neue"/>
+                <a:cs typeface="Helvetica Neue"/>
+              </a:rPr>
+              <a:t>OAK AI   /   ERROR RECOVERY RECOMMENDATION</a:t>
+            </a:r>
+          </a:p>
+        </p:txBody>
+      </p:sp>
+      <p:sp>
+        <p:nvSpPr>
+          <p:cNvPr id="3" name="headline">
+            <a:extLst xmlns:a="http://schemas.openxmlformats.org/drawingml/2006/main">
+              <a:ext uri="{FF2B5EF4-FFF2-40B4-BE49-F238E27FC236}">
+                <a16:creationId xmlns:a16="http://schemas.microsoft.com/office/drawing/2014/main" id="{6ADA3570-BED1-4002-9217-8FF5997AB5F0}"/>
+              </a:ext>
+            </a:extLst>
+          </p:cNvPr>
+          <p:cNvSpPr>
+            <a:spLocks xmlns:a="http://schemas.openxmlformats.org/drawingml/2006/main" noGrp="1"/>
+          </p:cNvSpPr>
+          <p:nvPr/>
+        </p:nvSpPr>
+        <p:spPr>
+          <a:xfrm xmlns:a="http://schemas.openxmlformats.org/drawingml/2006/main">
+            <a:off x="609600" y="1104900"/>
+            <a:ext cx="10953750" cy="800100"/>
+          </a:xfrm>
+          <a:prstGeom xmlns:a="http://schemas.openxmlformats.org/drawingml/2006/main" prst="rect">
+            <a:avLst/>
+          </a:prstGeom>
+          <a:noFill xmlns:a="http://schemas.openxmlformats.org/drawingml/2006/main"/>
+          <a:ln xmlns:a="http://schemas.openxmlformats.org/drawingml/2006/main" w="0">
+            <a:noFill/>
+          </a:ln>
+        </p:spPr>
+        <p:txBody>
+          <a:bodyPr xmlns:a="http://schemas.openxmlformats.org/drawingml/2006/main" wrap="square" lIns="0" tIns="0" rIns="0" bIns="0" anchor="t">
+            <a:noAutofit/>
+          </a:bodyPr>
+          <a:lstStyle xmlns:a="http://schemas.openxmlformats.org/drawingml/2006/main"/>
+          <a:p xmlns:a="http://schemas.openxmlformats.org/drawingml/2006/main">
+            <a:pPr>
+              <a:lnSpc>
+                <a:spcPct val="110000"/>
+              </a:lnSpc>
+              <a:buNone/>
+              <a:defRPr sz="3525" b="1">
+                <a:solidFill>
+                  <a:srgbClr val="192B25"/>
+                </a:solidFill>
+                <a:latin typeface="Helvetica Neue"/>
+                <a:ea typeface="Helvetica Neue"/>
+                <a:cs typeface="Helvetica Neue"/>
+              </a:defRPr>
+            </a:pPr>
+            <a:r>
+              <a:rPr sz="3525" b="1">
+                <a:solidFill>
+                  <a:srgbClr val="192B25"/>
+                </a:solidFill>
+                <a:latin typeface="Helvetica Neue"/>
+                <a:ea typeface="Helvetica Neue"/>
+                <a:cs typeface="Helvetica Neue"/>
+              </a:rPr>
+              <a:t>Error feedback beside the field</a:t>
+            </a:r>
+          </a:p>
+        </p:txBody>
+      </p:sp>
+      <p:sp>
+        <p:nvSpPr>
+          <p:cNvPr id="4" name="original-label">
+            <a:extLst xmlns:a="http://schemas.openxmlformats.org/drawingml/2006/main">
+              <a:ext uri="{FF2B5EF4-FFF2-40B4-BE49-F238E27FC236}">
+                <a16:creationId xmlns:a16="http://schemas.microsoft.com/office/drawing/2014/main" id="{FD608254-B5F4-4E92-9D88-AFCAFCB4F9D2}"/>
+              </a:ext>
+            </a:extLst>
+          </p:cNvPr>
+          <p:cNvSpPr>
+            <a:spLocks xmlns:a="http://schemas.openxmlformats.org/drawingml/2006/main" noGrp="1"/>
+          </p:cNvSpPr>
+          <p:nvPr/>
+        </p:nvSpPr>
+        <p:spPr>
+          <a:xfrm xmlns:a="http://schemas.openxmlformats.org/drawingml/2006/main">
+            <a:off x="609600" y="2162175"/>
+            <a:ext cx="5048250" cy="266700"/>
+          </a:xfrm>
+          <a:prstGeom xmlns:a="http://schemas.openxmlformats.org/drawingml/2006/main" prst="rect">
+            <a:avLst/>
+          </a:prstGeom>
+          <a:noFill xmlns:a="http://schemas.openxmlformats.org/drawingml/2006/main"/>
+          <a:ln xmlns:a="http://schemas.openxmlformats.org/drawingml/2006/main" w="0">
+            <a:noFill/>
+          </a:ln>
+        </p:spPr>
+        <p:txBody>
+          <a:bodyPr xmlns:a="http://schemas.openxmlformats.org/drawingml/2006/main" wrap="square" lIns="0" tIns="0" rIns="0" bIns="0" anchor="t">
+            <a:noAutofit/>
+          </a:bodyPr>
+          <a:lstStyle xmlns:a="http://schemas.openxmlformats.org/drawingml/2006/main"/>
+          <a:p xmlns:a="http://schemas.openxmlformats.org/drawingml/2006/main">
+            <a:pPr>
+              <a:lnSpc>
+                <a:spcPct val="110000"/>
+              </a:lnSpc>
+              <a:buNone/>
+              <a:defRPr sz="1350" b="1">
+                <a:solidFill>
+                  <a:srgbClr val="244D3C"/>
+                </a:solidFill>
+                <a:latin typeface="Helvetica Neue"/>
+                <a:ea typeface="Helvetica Neue"/>
+                <a:cs typeface="Helvetica Neue"/>
+              </a:defRPr>
+            </a:pPr>
+            <a:r>
+              <a:rPr sz="1350" b="1">
+                <a:solidFill>
+                  <a:srgbClr val="244D3C"/>
+                </a:solidFill>
+                <a:latin typeface="Helvetica Neue"/>
+                <a:ea typeface="Helvetica Neue"/>
+                <a:cs typeface="Helvetica Neue"/>
+              </a:rPr>
+              <a:t>ORIGINAL</a:t>
+            </a:r>
+          </a:p>
+        </p:txBody>
+      </p:sp>
+      <p:sp>
+        <p:nvSpPr>
+          <p:cNvPr id="5" name="proposed-label">
+            <a:extLst xmlns:a="http://schemas.openxmlformats.org/drawingml/2006/main">
+              <a:ext uri="{FF2B5EF4-FFF2-40B4-BE49-F238E27FC236}">
+                <a16:creationId xmlns:a16="http://schemas.microsoft.com/office/drawing/2014/main" id="{4851BE1A-3DE0-4F6A-9F56-FB80A72D080C}"/>
+              </a:ext>
+            </a:extLst>
+          </p:cNvPr>
+          <p:cNvSpPr>
+            <a:spLocks xmlns:a="http://schemas.openxmlformats.org/drawingml/2006/main" noGrp="1"/>
+          </p:cNvSpPr>
+          <p:nvPr/>
+        </p:nvSpPr>
+        <p:spPr>
+          <a:xfrm xmlns:a="http://schemas.openxmlformats.org/drawingml/2006/main">
+            <a:off x="6515100" y="2162175"/>
+            <a:ext cx="5048250" cy="266700"/>
+          </a:xfrm>
+          <a:prstGeom xmlns:a="http://schemas.openxmlformats.org/drawingml/2006/main" prst="rect">
+            <a:avLst/>
+          </a:prstGeom>
+          <a:noFill xmlns:a="http://schemas.openxmlformats.org/drawingml/2006/main"/>
+          <a:ln xmlns:a="http://schemas.openxmlformats.org/drawingml/2006/main" w="0">
+            <a:noFill/>
+          </a:ln>
+        </p:spPr>
+        <p:txBody>
+          <a:bodyPr xmlns:a="http://schemas.openxmlformats.org/drawingml/2006/main" wrap="square" lIns="0" tIns="0" rIns="0" bIns="0" anchor="t">
+            <a:noAutofit/>
+          </a:bodyPr>
+          <a:lstStyle xmlns:a="http://schemas.openxmlformats.org/drawingml/2006/main"/>
+          <a:p xmlns:a="http://schemas.openxmlformats.org/drawingml/2006/main">
+            <a:pPr>
+              <a:lnSpc>
+                <a:spcPct val="110000"/>
+              </a:lnSpc>
+              <a:buNone/>
+              <a:defRPr sz="1350" b="1">
+                <a:solidFill>
+                  <a:srgbClr val="244D3C"/>
+                </a:solidFill>
+                <a:latin typeface="Helvetica Neue"/>
+                <a:ea typeface="Helvetica Neue"/>
+                <a:cs typeface="Helvetica Neue"/>
+              </a:defRPr>
+            </a:pPr>
+            <a:r>
+              <a:rPr sz="1350" b="1">
+                <a:solidFill>
+                  <a:srgbClr val="244D3C"/>
+                </a:solidFill>
+                <a:latin typeface="Helvetica Neue"/>
+                <a:ea typeface="Helvetica Neue"/>
+                <a:cs typeface="Helvetica Neue"/>
+              </a:rPr>
+              <a:t>MY RECOMMENDATION</a:t>
+            </a:r>
+          </a:p>
+        </p:txBody>
+      </p:sp>
+      <p:sp>
+        <p:nvSpPr>
+          <p:cNvPr id="6" name="error-observation">
+            <a:extLst xmlns:a="http://schemas.openxmlformats.org/drawingml/2006/main">
+              <a:ext uri="{FF2B5EF4-FFF2-40B4-BE49-F238E27FC236}">
+                <a16:creationId xmlns:a16="http://schemas.microsoft.com/office/drawing/2014/main" id="{EF4AA750-1191-464A-9C59-ACAB755B9228}"/>
+              </a:ext>
+            </a:extLst>
+          </p:cNvPr>
+          <p:cNvSpPr>
+            <a:spLocks xmlns:a="http://schemas.openxmlformats.org/drawingml/2006/main" noGrp="1"/>
+          </p:cNvSpPr>
+          <p:nvPr/>
+        </p:nvSpPr>
+        <p:spPr>
+          <a:xfrm xmlns:a="http://schemas.openxmlformats.org/drawingml/2006/main">
+            <a:off x="609600" y="2562225"/>
+            <a:ext cx="5048250" cy="400050"/>
+          </a:xfrm>
+          <a:prstGeom xmlns:a="http://schemas.openxmlformats.org/drawingml/2006/main" prst="rect">
+            <a:avLst/>
+          </a:prstGeom>
+          <a:noFill xmlns:a="http://schemas.openxmlformats.org/drawingml/2006/main"/>
+          <a:ln xmlns:a="http://schemas.openxmlformats.org/drawingml/2006/main" w="0">
+            <a:noFill/>
+          </a:ln>
+        </p:spPr>
+        <p:txBody>
+          <a:bodyPr xmlns:a="http://schemas.openxmlformats.org/drawingml/2006/main" wrap="square" lIns="0" tIns="0" rIns="0" bIns="0" anchor="t">
+            <a:noAutofit/>
+          </a:bodyPr>
+          <a:lstStyle xmlns:a="http://schemas.openxmlformats.org/drawingml/2006/main"/>
+          <a:p xmlns:a="http://schemas.openxmlformats.org/drawingml/2006/main">
+            <a:pPr>
+              <a:lnSpc>
+                <a:spcPct val="110000"/>
+              </a:lnSpc>
+              <a:buNone/>
+              <a:defRPr sz="1725" b="0">
+                <a:solidFill>
+                  <a:srgbClr val="192B25"/>
+                </a:solidFill>
+                <a:latin typeface="Helvetica Neue"/>
+                <a:ea typeface="Helvetica Neue"/>
+                <a:cs typeface="Helvetica Neue"/>
+              </a:defRPr>
+            </a:pPr>
+            <a:r>
+              <a:rPr sz="1725" b="0">
+                <a:solidFill>
+                  <a:srgbClr val="192B25"/>
+                </a:solidFill>
+                <a:latin typeface="Helvetica Neue"/>
+                <a:ea typeface="Helvetica Neue"/>
+                <a:cs typeface="Helvetica Neue"/>
+              </a:rPr>
+              <a:t>The error sat away from the login fields.</a:t>
+            </a:r>
+          </a:p>
+        </p:txBody>
+      </p:sp>
+      <p:sp>
+        <p:nvSpPr>
+          <p:cNvPr id="7" name="error-recommendation">
+            <a:extLst xmlns:a="http://schemas.openxmlformats.org/drawingml/2006/main">
+              <a:ext uri="{FF2B5EF4-FFF2-40B4-BE49-F238E27FC236}">
+                <a16:creationId xmlns:a16="http://schemas.microsoft.com/office/drawing/2014/main" id="{E0B97B1C-BFC7-46ED-8998-8615E3FDFB83}"/>
+              </a:ext>
+            </a:extLst>
+          </p:cNvPr>
+          <p:cNvSpPr>
+            <a:spLocks xmlns:a="http://schemas.openxmlformats.org/drawingml/2006/main" noGrp="1"/>
+          </p:cNvSpPr>
+          <p:nvPr/>
+        </p:nvSpPr>
+        <p:spPr>
+          <a:xfrm xmlns:a="http://schemas.openxmlformats.org/drawingml/2006/main">
+            <a:off x="6515100" y="2562225"/>
+            <a:ext cx="5048250" cy="400050"/>
+          </a:xfrm>
+          <a:prstGeom xmlns:a="http://schemas.openxmlformats.org/drawingml/2006/main" prst="rect">
+            <a:avLst/>
+          </a:prstGeom>
+          <a:noFill xmlns:a="http://schemas.openxmlformats.org/drawingml/2006/main"/>
+          <a:ln xmlns:a="http://schemas.openxmlformats.org/drawingml/2006/main" w="0">
+            <a:noFill/>
+          </a:ln>
+        </p:spPr>
+        <p:txBody>
+          <a:bodyPr xmlns:a="http://schemas.openxmlformats.org/drawingml/2006/main" wrap="square" lIns="0" tIns="0" rIns="0" bIns="0" anchor="t">
+            <a:noAutofit/>
+          </a:bodyPr>
+          <a:lstStyle xmlns:a="http://schemas.openxmlformats.org/drawingml/2006/main"/>
+          <a:p xmlns:a="http://schemas.openxmlformats.org/drawingml/2006/main">
+            <a:pPr>
+              <a:lnSpc>
+                <a:spcPct val="110000"/>
+              </a:lnSpc>
+              <a:buNone/>
+              <a:defRPr sz="1725" b="0">
+                <a:solidFill>
+                  <a:srgbClr val="192B25"/>
+                </a:solidFill>
+                <a:latin typeface="Helvetica Neue"/>
+                <a:ea typeface="Helvetica Neue"/>
+                <a:cs typeface="Helvetica Neue"/>
+              </a:defRPr>
+            </a:pPr>
+            <a:r>
+              <a:rPr sz="1725" b="0">
+                <a:solidFill>
+                  <a:srgbClr val="192B25"/>
+                </a:solidFill>
+                <a:latin typeface="Helvetica Neue"/>
+                <a:ea typeface="Helvetica Neue"/>
+                <a:cs typeface="Helvetica Neue"/>
+              </a:rPr>
+              <a:t>Place the correction beside the field.</a:t>
+            </a:r>
+          </a:p>
+        </p:txBody>
+      </p:sp>
+      <p:pic>
+        <p:nvPicPr>
+          <p:cNvPr id="20" name=""/>
+          <p:cNvPicPr>
+            <a:picLocks xmlns:a="http://schemas.openxmlformats.org/drawingml/2006/main" noChangeAspect="1"/>
+          </p:cNvPicPr>
+          <p:nvPr/>
+        </p:nvPicPr>
+        <p:blipFill>
+          <a:blip xmlns:r="http://schemas.openxmlformats.org/officeDocument/2006/relationships" xmlns:a="http://schemas.openxmlformats.org/drawingml/2006/main" r:embed="Rcd1fb2529913438d"/>
+          <a:stretch xmlns:a="http://schemas.openxmlformats.org/drawingml/2006/main"/>
+        </p:blipFill>
+        <p:spPr>
+          <a:xfrm xmlns:a="http://schemas.openxmlformats.org/drawingml/2006/main">
+            <a:off x="1366838" y="3067050"/>
+            <a:ext cx="3533775" cy="2867025"/>
+          </a:xfrm>
+          <a:prstGeom xmlns:a="http://schemas.openxmlformats.org/drawingml/2006/main" prst="rect">
+            <a:avLst/>
+          </a:prstGeom>
+        </p:spPr>
+      </p:pic>
+      <p:pic>
+        <p:nvPicPr>
+          <p:cNvPr id="21" name=""/>
+          <p:cNvPicPr>
+            <a:picLocks xmlns:a="http://schemas.openxmlformats.org/drawingml/2006/main" noChangeAspect="1"/>
+          </p:cNvPicPr>
+          <p:nvPr/>
+        </p:nvPicPr>
+        <p:blipFill>
+          <a:blip xmlns:r="http://schemas.openxmlformats.org/officeDocument/2006/relationships" xmlns:a="http://schemas.openxmlformats.org/drawingml/2006/main" r:embed="Rf965f634f5514672"/>
+          <a:stretch xmlns:a="http://schemas.openxmlformats.org/drawingml/2006/main"/>
+        </p:blipFill>
+        <p:spPr>
+          <a:xfrm xmlns:a="http://schemas.openxmlformats.org/drawingml/2006/main">
+            <a:off x="7038975" y="3067050"/>
+            <a:ext cx="4000500" cy="2867025"/>
+          </a:xfrm>
+          <a:prstGeom xmlns:a="http://schemas.openxmlformats.org/drawingml/2006/main" prst="rect">
+            <a:avLst/>
+          </a:prstGeom>
+        </p:spPr>
+      </p:pic>
+      <p:sp>
+        <p:nvSpPr>
+          <p:cNvPr id="10" name="footer-label">
+            <a:extLst xmlns:a="http://schemas.openxmlformats.org/drawingml/2006/main">
+              <a:ext uri="{FF2B5EF4-FFF2-40B4-BE49-F238E27FC236}">
+                <a16:creationId xmlns:a16="http://schemas.microsoft.com/office/drawing/2014/main" id="{07ED3E85-4FF8-4ABD-A29D-AF87EC9E3F96}"/>
+              </a:ext>
+            </a:extLst>
+          </p:cNvPr>
+          <p:cNvSpPr>
+            <a:spLocks xmlns:a="http://schemas.openxmlformats.org/drawingml/2006/main" noGrp="1"/>
+          </p:cNvSpPr>
+          <p:nvPr/>
+        </p:nvSpPr>
+        <p:spPr>
+          <a:xfrm xmlns:a="http://schemas.openxmlformats.org/drawingml/2006/main">
+            <a:off x="609600" y="6076950"/>
+            <a:ext cx="5048250" cy="228600"/>
+          </a:xfrm>
+          <a:prstGeom xmlns:a="http://schemas.openxmlformats.org/drawingml/2006/main" prst="rect">
+            <a:avLst/>
+          </a:prstGeom>
+          <a:noFill xmlns:a="http://schemas.openxmlformats.org/drawingml/2006/main"/>
+          <a:ln xmlns:a="http://schemas.openxmlformats.org/drawingml/2006/main" w="0">
+            <a:noFill/>
+          </a:ln>
+        </p:spPr>
+        <p:txBody>
+          <a:bodyPr xmlns:a="http://schemas.openxmlformats.org/drawingml/2006/main" wrap="square" lIns="0" tIns="0" rIns="0" bIns="0" anchor="t">
+            <a:noAutofit/>
+          </a:bodyPr>
+          <a:lstStyle xmlns:a="http://schemas.openxmlformats.org/drawingml/2006/main"/>
+          <a:p xmlns:a="http://schemas.openxmlformats.org/drawingml/2006/main">
+            <a:pPr>
+              <a:lnSpc>
+                <a:spcPct val="110000"/>
+              </a:lnSpc>
+              <a:buNone/>
+              <a:defRPr sz="1200" b="0">
+                <a:solidFill>
+                  <a:srgbClr val="58645D"/>
+                </a:solidFill>
+                <a:latin typeface="Helvetica Neue"/>
+                <a:ea typeface="Helvetica Neue"/>
+                <a:cs typeface="Helvetica Neue"/>
+              </a:defRPr>
+            </a:pPr>
+            <a:r>
+              <a:rPr sz="1200" b="0">
+                <a:solidFill>
+                  <a:srgbClr val="58645D"/>
+                </a:solidFill>
+                <a:latin typeface="Helvetica Neue"/>
+                <a:ea typeface="Helvetica Neue"/>
+                <a:cs typeface="Helvetica Neue"/>
+              </a:rPr>
+              <a:t>Separate page-footer message:</a:t>
+            </a:r>
+          </a:p>
+        </p:txBody>
+      </p:sp>
+      <p:pic>
+        <p:nvPicPr>
+          <p:cNvPr id="23" name=""/>
+          <p:cNvPicPr>
+            <a:picLocks xmlns:a="http://schemas.openxmlformats.org/drawingml/2006/main" noChangeAspect="1"/>
+          </p:cNvPicPr>
+          <p:nvPr/>
+        </p:nvPicPr>
+        <p:blipFill>
+          <a:blip xmlns:r="http://schemas.openxmlformats.org/officeDocument/2006/relationships" xmlns:a="http://schemas.openxmlformats.org/drawingml/2006/main" r:embed="Rd1d2cf2c09d34978"/>
+          <a:stretch xmlns:a="http://schemas.openxmlformats.org/drawingml/2006/main"/>
+        </p:blipFill>
+        <p:spPr>
+          <a:xfrm xmlns:a="http://schemas.openxmlformats.org/drawingml/2006/main">
+            <a:off x="609600" y="6372225"/>
+            <a:ext cx="3476625" cy="333375"/>
+          </a:xfrm>
+          <a:prstGeom xmlns:a="http://schemas.openxmlformats.org/drawingml/2006/main" prst="rect">
+            <a:avLst/>
+          </a:prstGeom>
+        </p:spPr>
+      </p:pic>
+      <p:sp>
+        <p:nvSpPr>
+          <p:cNvPr id="12" name="recommendation-status">
+            <a:extLst xmlns:a="http://schemas.openxmlformats.org/drawingml/2006/main">
+              <a:ext uri="{FF2B5EF4-FFF2-40B4-BE49-F238E27FC236}">
+                <a16:creationId xmlns:a16="http://schemas.microsoft.com/office/drawing/2014/main" id="{BBA12451-CCEA-4DAE-BA5F-67E22C4FC05B}"/>
+              </a:ext>
+            </a:extLst>
+          </p:cNvPr>
+          <p:cNvSpPr>
+            <a:spLocks xmlns:a="http://schemas.openxmlformats.org/drawingml/2006/main" noGrp="1"/>
+          </p:cNvSpPr>
+          <p:nvPr/>
+        </p:nvSpPr>
+        <p:spPr>
+          <a:xfrm xmlns:a="http://schemas.openxmlformats.org/drawingml/2006/main">
+            <a:off x="6515100" y="6115050"/>
+            <a:ext cx="4686300" cy="542925"/>
+          </a:xfrm>
+          <a:prstGeom xmlns:a="http://schemas.openxmlformats.org/drawingml/2006/main" prst="rect">
+            <a:avLst/>
+          </a:prstGeom>
+          <a:noFill xmlns:a="http://schemas.openxmlformats.org/drawingml/2006/main"/>
+          <a:ln xmlns:a="http://schemas.openxmlformats.org/drawingml/2006/main" w="0">
+            <a:noFill/>
+          </a:ln>
+        </p:spPr>
+        <p:txBody>
+          <a:bodyPr xmlns:a="http://schemas.openxmlformats.org/drawingml/2006/main" wrap="square" lIns="0" tIns="0" rIns="0" bIns="0" anchor="t">
+            <a:noAutofit/>
+          </a:bodyPr>
+          <a:lstStyle xmlns:a="http://schemas.openxmlformats.org/drawingml/2006/main"/>
+          <a:p xmlns:a="http://schemas.openxmlformats.org/drawingml/2006/main">
+            <a:pPr>
+              <a:lnSpc>
+                <a:spcPct val="110000"/>
+              </a:lnSpc>
+              <a:buNone/>
+              <a:defRPr sz="1275" b="0">
+                <a:solidFill>
+                  <a:srgbClr val="58645D"/>
+                </a:solidFill>
+                <a:latin typeface="Helvetica Neue"/>
+                <a:ea typeface="Helvetica Neue"/>
+                <a:cs typeface="Helvetica Neue"/>
+              </a:defRPr>
+            </a:pPr>
+            <a:r>
+              <a:rPr sz="1275" b="0">
+                <a:solidFill>
+                  <a:srgbClr val="58645D"/>
+                </a:solidFill>
+                <a:latin typeface="Helvetica Neue"/>
+                <a:ea typeface="Helvetica Neue"/>
+                <a:cs typeface="Helvetica Neue"/>
+              </a:rPr>
+              <a:t>Original recommendation artifact.</a:t>
+            </a:r>
+          </a:p>
+          <a:p xmlns:a="http://schemas.openxmlformats.org/drawingml/2006/main">
+            <a:pPr>
+              <a:lnSpc>
+                <a:spcPct val="110000"/>
+              </a:lnSpc>
+              <a:buNone/>
+              <a:defRPr sz="1275" b="0">
+                <a:solidFill>
+                  <a:srgbClr val="58645D"/>
+                </a:solidFill>
+                <a:latin typeface="Helvetica Neue"/>
+                <a:ea typeface="Helvetica Neue"/>
+                <a:cs typeface="Helvetica Neue"/>
+              </a:defRPr>
+            </a:pPr>
+            <a:r>
+              <a:rPr sz="1275" b="0">
+                <a:solidFill>
+                  <a:srgbClr val="58645D"/>
+                </a:solidFill>
+                <a:latin typeface="Helvetica Neue"/>
+                <a:ea typeface="Helvetica Neue"/>
+                <a:cs typeface="Helvetica Neue"/>
+              </a:rPr>
+              <a:t>Exact shipped variant and usability impact unverified.</a:t>
+            </a:r>
+          </a:p>
+        </p:txBody>
+      </p:sp>
+    </p:spTree>
+    <p:extLst>
+      <p:ext uri="{BB962C8B-B14F-4D97-AF65-F5344CB8AC3E}">
+        <p14:creationId xmlns:p14="http://schemas.microsoft.com/office/powerpoint/2010/main" val="626328617"/>
+      </p:ext>
+    </p:extLst>
+  </p:cSld>
+</p:sld>
+</file>
+
+<file path=ppt/slides/slide13.xml><?xml version="1.0" encoding="utf-8"?>
+<p:sld xmlns:p="http://schemas.openxmlformats.org/presentationml/2006/main">
+  <p:cSld>
+    <p:bg>
+      <p:bgPr>
+        <a:solidFill xmlns:a="http://schemas.openxmlformats.org/drawingml/2006/main">
+          <a:srgbClr val="F4F2E9"/>
+        </a:solidFill>
+      </p:bgPr>
+    </p:bg>
+    <p:spTree>
+      <p:nvGrpSpPr>
+        <p:cNvPr id="1" name=""/>
+        <p:cNvGrpSpPr/>
+        <p:nvPr/>
+      </p:nvGrpSpPr>
+      <p:grpSpPr>
+        <a:xfrm xmlns:a="http://schemas.openxmlformats.org/drawingml/2006/main"/>
+      </p:grpSpPr>
+      <p:sp>
+        <p:nvSpPr>
+          <p:cNvPr id="8" name="slide-number">
+            <a:extLst xmlns:a="http://schemas.openxmlformats.org/drawingml/2006/main">
+              <a:ext uri="{FF2B5EF4-FFF2-40B4-BE49-F238E27FC236}">
+                <a16:creationId xmlns:a16="http://schemas.microsoft.com/office/drawing/2014/main" id="{DC13B6A5-6342-42E8-8915-A9982DE38E68}"/>
+              </a:ext>
+            </a:extLst>
+          </p:cNvPr>
+          <p:cNvSpPr>
+            <a:spLocks xmlns:a="http://schemas.openxmlformats.org/drawingml/2006/main" noGrp="1"/>
+          </p:cNvSpPr>
+          <p:nvPr/>
+        </p:nvSpPr>
+        <p:spPr>
+          <a:xfrm xmlns:a="http://schemas.openxmlformats.org/drawingml/2006/main">
+            <a:off x="11353800" y="6515100"/>
+            <a:ext cx="323850" cy="209550"/>
+          </a:xfrm>
+          <a:prstGeom xmlns:a="http://schemas.openxmlformats.org/drawingml/2006/main" prst="rect">
+            <a:avLst/>
+          </a:prstGeom>
+          <a:noFill xmlns:a="http://schemas.openxmlformats.org/drawingml/2006/main"/>
+          <a:ln xmlns:a="http://schemas.openxmlformats.org/drawingml/2006/main" w="0">
+            <a:noFill/>
+          </a:ln>
+        </p:spPr>
+        <p:txBody>
+          <a:bodyPr xmlns:a="http://schemas.openxmlformats.org/drawingml/2006/main" wrap="square" lIns="0" tIns="0" rIns="0" bIns="0" anchor="t">
+            <a:noAutofit/>
+          </a:bodyPr>
+          <a:lstStyle xmlns:a="http://schemas.openxmlformats.org/drawingml/2006/main"/>
+          <a:p xmlns:a="http://schemas.openxmlformats.org/drawingml/2006/main">
+            <a:pPr>
+              <a:lnSpc>
+                <a:spcPct val="110000"/>
+              </a:lnSpc>
+              <a:buNone/>
+              <a:defRPr sz="1050" b="0">
+                <a:solidFill>
+                  <a:srgbClr val="58645D"/>
+                </a:solidFill>
+                <a:latin typeface="Helvetica Neue"/>
+                <a:ea typeface="Helvetica Neue"/>
+                <a:cs typeface="Helvetica Neue"/>
+              </a:defRPr>
+            </a:pPr>
+            <a:r>
+              <a:rPr sz="1050" b="0">
+                <a:solidFill>
+                  <a:srgbClr val="58645D"/>
+                </a:solidFill>
+                <a:latin typeface="Helvetica Neue"/>
+                <a:ea typeface="Helvetica Neue"/>
+                <a:cs typeface="Helvetica Neue"/>
+              </a:rPr>
+              <a:t>13</a:t>
+            </a:r>
+          </a:p>
+        </p:txBody>
+      </p:sp>
+      <p:sp>
+        <p:nvSpPr>
+          <p:cNvPr id="2" name="story-image-surface">
+            <a:extLst xmlns:a="http://schemas.openxmlformats.org/drawingml/2006/main">
+              <a:ext uri="{FF2B5EF4-FFF2-40B4-BE49-F238E27FC236}">
+                <a16:creationId xmlns:a16="http://schemas.microsoft.com/office/drawing/2014/main" id="{AA68E05C-A41E-4DF2-8978-E5B7FB684CEE}"/>
+              </a:ext>
+            </a:extLst>
+          </p:cNvPr>
+          <p:cNvSpPr>
+            <a:spLocks xmlns:a="http://schemas.openxmlformats.org/drawingml/2006/main" noGrp="1"/>
+          </p:cNvSpPr>
+          <p:nvPr/>
+        </p:nvSpPr>
+        <p:spPr>
+          <a:xfrm xmlns:a="http://schemas.openxmlformats.org/drawingml/2006/main">
+            <a:off x="6705600" y="0"/>
+            <a:ext cx="5486400" cy="6858000"/>
+          </a:xfrm>
+          <a:prstGeom xmlns:a="http://schemas.openxmlformats.org/drawingml/2006/main" prst="rect">
+            <a:avLst/>
+          </a:prstGeom>
+          <a:solidFill xmlns:a="http://schemas.openxmlformats.org/drawingml/2006/main">
+            <a:srgbClr val="E1E8DB"/>
+          </a:solidFill>
+          <a:ln xmlns:a="http://schemas.openxmlformats.org/drawingml/2006/main" w="0">
+            <a:noFill/>
+          </a:ln>
+        </p:spPr>
+      </p:sp>
+      <p:pic>
+        <p:nvPicPr>
+          <p:cNvPr id="10" name=""/>
+          <p:cNvPicPr>
+            <a:picLocks xmlns:a="http://schemas.openxmlformats.org/drawingml/2006/main" noChangeAspect="1"/>
+          </p:cNvPicPr>
+          <p:nvPr/>
+        </p:nvPicPr>
+        <p:blipFill>
+          <a:blip xmlns:r="http://schemas.openxmlformats.org/officeDocument/2006/relationships" xmlns:a="http://schemas.openxmlformats.org/drawingml/2006/main" r:embed="Rd707036a7ac44ffb"/>
+          <a:stretch xmlns:a="http://schemas.openxmlformats.org/drawingml/2006/main"/>
+        </p:blipFill>
+        <p:spPr>
+          <a:xfrm xmlns:a="http://schemas.openxmlformats.org/drawingml/2006/main">
+            <a:off x="7010400" y="1466850"/>
+            <a:ext cx="4876800" cy="4876800"/>
+          </a:xfrm>
+          <a:prstGeom xmlns:a="http://schemas.openxmlformats.org/drawingml/2006/main" prst="rect">
+            <a:avLst/>
+          </a:prstGeom>
+        </p:spPr>
+      </p:pic>
+      <p:sp>
+        <p:nvSpPr>
+          <p:cNvPr id="4" name="section-label">
+            <a:extLst xmlns:a="http://schemas.openxmlformats.org/drawingml/2006/main">
+              <a:ext uri="{FF2B5EF4-FFF2-40B4-BE49-F238E27FC236}">
+                <a16:creationId xmlns:a16="http://schemas.microsoft.com/office/drawing/2014/main" id="{31E9FE38-70B1-4703-A97B-D67B4D3D24FC}"/>
+              </a:ext>
+            </a:extLst>
+          </p:cNvPr>
+          <p:cNvSpPr>
+            <a:spLocks xmlns:a="http://schemas.openxmlformats.org/drawingml/2006/main" noGrp="1"/>
+          </p:cNvSpPr>
+          <p:nvPr/>
+        </p:nvSpPr>
+        <p:spPr>
+          <a:xfrm xmlns:a="http://schemas.openxmlformats.org/drawingml/2006/main">
+            <a:off x="609600" y="514350"/>
+            <a:ext cx="5753100" cy="266700"/>
+          </a:xfrm>
+          <a:prstGeom xmlns:a="http://schemas.openxmlformats.org/drawingml/2006/main" prst="rect">
+            <a:avLst/>
+          </a:prstGeom>
+          <a:noFill xmlns:a="http://schemas.openxmlformats.org/drawingml/2006/main"/>
+          <a:ln xmlns:a="http://schemas.openxmlformats.org/drawingml/2006/main" w="0">
+            <a:noFill/>
+          </a:ln>
+        </p:spPr>
+        <p:txBody>
+          <a:bodyPr xmlns:a="http://schemas.openxmlformats.org/drawingml/2006/main" wrap="square" lIns="0" tIns="0" rIns="0" bIns="0" anchor="t">
+            <a:noAutofit/>
+          </a:bodyPr>
+          <a:lstStyle xmlns:a="http://schemas.openxmlformats.org/drawingml/2006/main"/>
+          <a:p xmlns:a="http://schemas.openxmlformats.org/drawingml/2006/main">
+            <a:pPr>
+              <a:lnSpc>
+                <a:spcPct val="110000"/>
+              </a:lnSpc>
+              <a:buNone/>
+              <a:defRPr sz="1200" b="1">
+                <a:solidFill>
+                  <a:srgbClr val="244D3C"/>
+                </a:solidFill>
+                <a:latin typeface="Helvetica Neue"/>
+                <a:ea typeface="Helvetica Neue"/>
+                <a:cs typeface="Helvetica Neue"/>
+              </a:defRPr>
+            </a:pPr>
+            <a:r>
+              <a:rPr sz="1200" b="1">
+                <a:solidFill>
+                  <a:srgbClr val="244D3C"/>
+                </a:solidFill>
+                <a:latin typeface="Helvetica Neue"/>
+                <a:ea typeface="Helvetica Neue"/>
+                <a:cs typeface="Helvetica Neue"/>
+              </a:rPr>
+              <a:t>THE THREAD THROUGH MY WORK</a:t>
+            </a:r>
+          </a:p>
+        </p:txBody>
+      </p:sp>
+      <p:sp>
+        <p:nvSpPr>
+          <p:cNvPr id="5" name="headline">
+            <a:extLst xmlns:a="http://schemas.openxmlformats.org/drawingml/2006/main">
+              <a:ext uri="{FF2B5EF4-FFF2-40B4-BE49-F238E27FC236}">
+                <a16:creationId xmlns:a16="http://schemas.microsoft.com/office/drawing/2014/main" id="{FE917AA3-1CF8-4818-A7FB-296DACF14AB8}"/>
+              </a:ext>
+            </a:extLst>
+          </p:cNvPr>
+          <p:cNvSpPr>
+            <a:spLocks xmlns:a="http://schemas.openxmlformats.org/drawingml/2006/main" noGrp="1"/>
+          </p:cNvSpPr>
+          <p:nvPr/>
+        </p:nvSpPr>
+        <p:spPr>
+          <a:xfrm xmlns:a="http://schemas.openxmlformats.org/drawingml/2006/main">
+            <a:off x="609600" y="1438275"/>
+            <a:ext cx="5734050" cy="1657350"/>
+          </a:xfrm>
+          <a:prstGeom xmlns:a="http://schemas.openxmlformats.org/drawingml/2006/main" prst="rect">
+            <a:avLst/>
+          </a:prstGeom>
+          <a:noFill xmlns:a="http://schemas.openxmlformats.org/drawingml/2006/main"/>
+          <a:ln xmlns:a="http://schemas.openxmlformats.org/drawingml/2006/main" w="0">
+            <a:noFill/>
+          </a:ln>
+        </p:spPr>
+        <p:txBody>
+          <a:bodyPr xmlns:a="http://schemas.openxmlformats.org/drawingml/2006/main" wrap="square" lIns="0" tIns="0" rIns="0" bIns="0" anchor="t">
+            <a:noAutofit/>
+          </a:bodyPr>
+          <a:lstStyle xmlns:a="http://schemas.openxmlformats.org/drawingml/2006/main"/>
+          <a:p xmlns:a="http://schemas.openxmlformats.org/drawingml/2006/main">
+            <a:pPr>
+              <a:lnSpc>
+                <a:spcPct val="110000"/>
+              </a:lnSpc>
+              <a:buNone/>
+              <a:defRPr sz="3675" b="1">
+                <a:solidFill>
+                  <a:srgbClr val="192B25"/>
+                </a:solidFill>
+                <a:latin typeface="Helvetica Neue"/>
+                <a:ea typeface="Helvetica Neue"/>
+                <a:cs typeface="Helvetica Neue"/>
+              </a:defRPr>
+            </a:pPr>
+            <a:r>
+              <a:rPr sz="3675" b="1">
+                <a:solidFill>
+                  <a:srgbClr val="192B25"/>
+                </a:solidFill>
+                <a:latin typeface="Helvetica Neue"/>
+                <a:ea typeface="Helvetica Neue"/>
+                <a:cs typeface="Helvetica Neue"/>
+              </a:rPr>
+              <a:t>I started by listening</a:t>
+            </a:r>
+          </a:p>
+          <a:p xmlns:a="http://schemas.openxmlformats.org/drawingml/2006/main">
+            <a:pPr>
+              <a:lnSpc>
+                <a:spcPct val="110000"/>
+              </a:lnSpc>
+              <a:buNone/>
+              <a:defRPr sz="3675" b="1">
+                <a:solidFill>
+                  <a:srgbClr val="192B25"/>
+                </a:solidFill>
+                <a:latin typeface="Helvetica Neue"/>
+                <a:ea typeface="Helvetica Neue"/>
+                <a:cs typeface="Helvetica Neue"/>
+              </a:defRPr>
+            </a:pPr>
+            <a:r>
+              <a:rPr sz="3675" b="1">
+                <a:solidFill>
+                  <a:srgbClr val="192B25"/>
+                </a:solidFill>
+                <a:latin typeface="Helvetica Neue"/>
+                <a:ea typeface="Helvetica Neue"/>
+                <a:cs typeface="Helvetica Neue"/>
+              </a:rPr>
+              <a:t>to people’s stories</a:t>
+            </a:r>
+          </a:p>
+        </p:txBody>
+      </p:sp>
+      <p:sp>
+        <p:nvSpPr>
+          <p:cNvPr id="6" name="story-documentary">
+            <a:extLst xmlns:a="http://schemas.openxmlformats.org/drawingml/2006/main">
+              <a:ext uri="{FF2B5EF4-FFF2-40B4-BE49-F238E27FC236}">
+                <a16:creationId xmlns:a16="http://schemas.microsoft.com/office/drawing/2014/main" id="{93987741-6DC9-4DC3-BF28-4F1D12CA4E7B}"/>
+              </a:ext>
+            </a:extLst>
+          </p:cNvPr>
+          <p:cNvSpPr>
+            <a:spLocks xmlns:a="http://schemas.openxmlformats.org/drawingml/2006/main" noGrp="1"/>
+          </p:cNvSpPr>
+          <p:nvPr/>
+        </p:nvSpPr>
+        <p:spPr>
+          <a:xfrm xmlns:a="http://schemas.openxmlformats.org/drawingml/2006/main">
+            <a:off x="609600" y="3609975"/>
+            <a:ext cx="5610225" cy="1095375"/>
+          </a:xfrm>
+          <a:prstGeom xmlns:a="http://schemas.openxmlformats.org/drawingml/2006/main" prst="rect">
+            <a:avLst/>
+          </a:prstGeom>
+          <a:noFill xmlns:a="http://schemas.openxmlformats.org/drawingml/2006/main"/>
+          <a:ln xmlns:a="http://schemas.openxmlformats.org/drawingml/2006/main" w="0">
+            <a:noFill/>
+          </a:ln>
+        </p:spPr>
+        <p:txBody>
+          <a:bodyPr xmlns:a="http://schemas.openxmlformats.org/drawingml/2006/main" wrap="square" lIns="0" tIns="0" rIns="0" bIns="0" anchor="t">
+            <a:noAutofit/>
+          </a:bodyPr>
+          <a:lstStyle xmlns:a="http://schemas.openxmlformats.org/drawingml/2006/main"/>
+          <a:p xmlns:a="http://schemas.openxmlformats.org/drawingml/2006/main">
+            <a:pPr>
+              <a:lnSpc>
+                <a:spcPct val="110000"/>
+              </a:lnSpc>
+              <a:buNone/>
+              <a:defRPr sz="1950" b="0">
+                <a:solidFill>
+                  <a:srgbClr val="192B25"/>
+                </a:solidFill>
+                <a:latin typeface="Helvetica Neue"/>
+                <a:ea typeface="Helvetica Neue"/>
+                <a:cs typeface="Helvetica Neue"/>
+              </a:defRPr>
+            </a:pPr>
+            <a:r>
+              <a:rPr sz="1950" b="0">
+                <a:solidFill>
+                  <a:srgbClr val="192B25"/>
+                </a:solidFill>
+                <a:latin typeface="Helvetica Neue"/>
+                <a:ea typeface="Helvetica Neue"/>
+                <a:cs typeface="Helvetica Neue"/>
+              </a:rPr>
+              <a:t>Documentary filmmaking taught me to listen closely and find the thread in a complicated story.</a:t>
+            </a:r>
+          </a:p>
+        </p:txBody>
+      </p:sp>
+      <p:sp>
+        <p:nvSpPr>
+          <p:cNvPr id="7" name="story-now">
+            <a:extLst xmlns:a="http://schemas.openxmlformats.org/drawingml/2006/main">
+              <a:ext uri="{FF2B5EF4-FFF2-40B4-BE49-F238E27FC236}">
+                <a16:creationId xmlns:a16="http://schemas.microsoft.com/office/drawing/2014/main" id="{0E437A12-EBE7-4DBB-8977-EE70B0501DC6}"/>
+              </a:ext>
+            </a:extLst>
+          </p:cNvPr>
+          <p:cNvSpPr>
+            <a:spLocks xmlns:a="http://schemas.openxmlformats.org/drawingml/2006/main" noGrp="1"/>
+          </p:cNvSpPr>
+          <p:nvPr/>
+        </p:nvSpPr>
+        <p:spPr>
+          <a:xfrm xmlns:a="http://schemas.openxmlformats.org/drawingml/2006/main">
+            <a:off x="609600" y="5057775"/>
+            <a:ext cx="5610225" cy="1362075"/>
+          </a:xfrm>
+          <a:prstGeom xmlns:a="http://schemas.openxmlformats.org/drawingml/2006/main" prst="rect">
+            <a:avLst/>
+          </a:prstGeom>
+          <a:noFill xmlns:a="http://schemas.openxmlformats.org/drawingml/2006/main"/>
+          <a:ln xmlns:a="http://schemas.openxmlformats.org/drawingml/2006/main" w="0">
+            <a:noFill/>
+          </a:ln>
+        </p:spPr>
+        <p:txBody>
+          <a:bodyPr xmlns:a="http://schemas.openxmlformats.org/drawingml/2006/main" wrap="square" lIns="0" tIns="0" rIns="0" bIns="0" anchor="t">
+            <a:noAutofit/>
+          </a:bodyPr>
+          <a:lstStyle xmlns:a="http://schemas.openxmlformats.org/drawingml/2006/main"/>
+          <a:p xmlns:a="http://schemas.openxmlformats.org/drawingml/2006/main">
+            <a:pPr>
+              <a:lnSpc>
+                <a:spcPct val="110000"/>
+              </a:lnSpc>
+              <a:buNone/>
+              <a:defRPr sz="1800" b="0">
+                <a:solidFill>
+                  <a:srgbClr val="58645D"/>
+                </a:solidFill>
+                <a:latin typeface="Helvetica Neue"/>
+                <a:ea typeface="Helvetica Neue"/>
+                <a:cs typeface="Helvetica Neue"/>
+              </a:defRPr>
+            </a:pPr>
+            <a:r>
+              <a:rPr sz="1800" b="0">
+                <a:solidFill>
+                  <a:srgbClr val="58645D"/>
+                </a:solidFill>
+                <a:latin typeface="Helvetica Neue"/>
+                <a:ea typeface="Helvetica Neue"/>
+                <a:cs typeface="Helvetica Neue"/>
+              </a:rPr>
+              <a:t>Those habits stayed with me in research and design. Outside work, I run tabletop games, where listening and helping a group find its way matter too.</a:t>
+            </a:r>
+          </a:p>
+        </p:txBody>
+      </p:sp>
+    </p:spTree>
+    <p:extLst>
+      <p:ext uri="{BB962C8B-B14F-4D97-AF65-F5344CB8AC3E}">
+        <p14:creationId xmlns:p14="http://schemas.microsoft.com/office/powerpoint/2010/main" val="158750328"/>
+      </p:ext>
+    </p:extLst>
+  </p:cSld>
+</p:sld>
+</file>
+
+<file path=ppt/slides/slide14.xml><?xml version="1.0" encoding="utf-8"?>
 <p:sld xmlns:p="http://schemas.openxmlformats.org/presentationml/2006/main">
   <p:cSld>
     <p:bg>
@@ -2140,7 +4479,7 @@
           <p:cNvPr id="7" name="slide-number">
             <a:extLst xmlns:a="http://schemas.openxmlformats.org/drawingml/2006/main">
               <a:ext uri="{FF2B5EF4-FFF2-40B4-BE49-F238E27FC236}">
-                <a16:creationId xmlns:a16="http://schemas.microsoft.com/office/drawing/2014/main" id="{0B488CB0-26C2-431E-9D76-0E12B4842218}"/>
+                <a16:creationId xmlns:a16="http://schemas.microsoft.com/office/drawing/2014/main" id="{E11995A4-C549-4DD1-B0FD-B929A48476C1}"/>
               </a:ext>
             </a:extLst>
           </p:cNvPr>
@@ -2191,7 +4530,7 @@
                 <a:ea typeface="Helvetica Neue"/>
                 <a:cs typeface="Helvetica Neue"/>
               </a:rPr>
-              <a:t>10</a:t>
+              <a:t>14</a:t>
             </a:r>
           </a:p>
         </p:txBody>
@@ -2201,7 +4540,7 @@
           <p:cNvPr id="2" name="section-label">
             <a:extLst xmlns:a="http://schemas.openxmlformats.org/drawingml/2006/main">
               <a:ext uri="{FF2B5EF4-FFF2-40B4-BE49-F238E27FC236}">
-                <a16:creationId xmlns:a16="http://schemas.microsoft.com/office/drawing/2014/main" id="{DE9EBAB4-3AD9-4382-8472-5AF9B51A6B3F}"/>
+                <a16:creationId xmlns:a16="http://schemas.microsoft.com/office/drawing/2014/main" id="{F531D45F-DCC8-4A91-837B-3E3159139573}"/>
               </a:ext>
             </a:extLst>
           </p:cNvPr>
@@ -2262,7 +4601,7 @@
           <p:cNvPr id="3" name="headline">
             <a:extLst xmlns:a="http://schemas.openxmlformats.org/drawingml/2006/main">
               <a:ext uri="{FF2B5EF4-FFF2-40B4-BE49-F238E27FC236}">
-                <a16:creationId xmlns:a16="http://schemas.microsoft.com/office/drawing/2014/main" id="{E1BD84CC-5A32-47FF-94E4-F024CEEC91EA}"/>
+                <a16:creationId xmlns:a16="http://schemas.microsoft.com/office/drawing/2014/main" id="{41C646C0-1616-48BF-B0BF-7406C5DF1404}"/>
               </a:ext>
             </a:extLst>
           </p:cNvPr>
@@ -2350,7 +4689,7 @@
           <p:cNvPr id="4" name="contact-intent">
             <a:extLst xmlns:a="http://schemas.openxmlformats.org/drawingml/2006/main">
               <a:ext uri="{FF2B5EF4-FFF2-40B4-BE49-F238E27FC236}">
-                <a16:creationId xmlns:a16="http://schemas.microsoft.com/office/drawing/2014/main" id="{08CD384F-63E9-4D3B-9397-9195A1141734}"/>
+                <a16:creationId xmlns:a16="http://schemas.microsoft.com/office/drawing/2014/main" id="{C7F1019E-3AF9-475B-BEC3-664DFF0F0FAA}"/>
               </a:ext>
             </a:extLst>
           </p:cNvPr>
@@ -2411,7 +4750,7 @@
           <p:cNvPr id="5" name="email">
             <a:extLst xmlns:a="http://schemas.openxmlformats.org/drawingml/2006/main">
               <a:ext uri="{FF2B5EF4-FFF2-40B4-BE49-F238E27FC236}">
-                <a16:creationId xmlns:a16="http://schemas.microsoft.com/office/drawing/2014/main" id="{21EF4A04-5298-4D2E-8DAF-DD2F33B14540}"/>
+                <a16:creationId xmlns:a16="http://schemas.microsoft.com/office/drawing/2014/main" id="{E9E9F345-250C-4BAD-89C2-7ABCDE999C81}"/>
               </a:ext>
             </a:extLst>
           </p:cNvPr>
@@ -2461,7 +4800,7 @@
                 <a:latin typeface="Helvetica Neue"/>
                 <a:ea typeface="Helvetica Neue"/>
                 <a:cs typeface="Helvetica Neue"/>
-                <a:hlinkClick xmlns:r="http://schemas.openxmlformats.org/officeDocument/2006/relationships" r:id="R745909748ce1472f"/>
+                <a:hlinkClick xmlns:r="http://schemas.openxmlformats.org/officeDocument/2006/relationships" r:id="R3d7d7f60e50c42fe"/>
               </a:rPr>
               <a:t>JonathanKyleHobson@gmail.com</a:t>
             </a:r>
@@ -2473,7 +4812,7 @@
           <p:cNvPr id="6" name="public-profile">
             <a:extLst xmlns:a="http://schemas.openxmlformats.org/drawingml/2006/main">
               <a:ext uri="{FF2B5EF4-FFF2-40B4-BE49-F238E27FC236}">
-                <a16:creationId xmlns:a16="http://schemas.microsoft.com/office/drawing/2014/main" id="{C85944A0-37F6-499F-854C-63944ADEB32A}"/>
+                <a16:creationId xmlns:a16="http://schemas.microsoft.com/office/drawing/2014/main" id="{9CF0FAE8-8A89-4201-8B91-63D45166B0AB}"/>
               </a:ext>
             </a:extLst>
           </p:cNvPr>
@@ -2523,7 +4862,7 @@
                 <a:latin typeface="Helvetica Neue"/>
                 <a:ea typeface="Helvetica Neue"/>
                 <a:cs typeface="Helvetica Neue"/>
-                <a:hlinkClick xmlns:r="http://schemas.openxmlformats.org/officeDocument/2006/relationships" r:id="R3ed980b11bfd471b"/>
+                <a:hlinkClick xmlns:r="http://schemas.openxmlformats.org/officeDocument/2006/relationships" r:id="R419465b5694b4dcf"/>
               </a:rPr>
               <a:t>jonathankhobson.github.io/portfolio/design</a:t>
             </a:r>
@@ -2533,7 +4872,7 @@
     </p:spTree>
     <p:extLst>
       <p:ext uri="{BB962C8B-B14F-4D97-AF65-F5344CB8AC3E}">
-        <p14:creationId xmlns:p14="http://schemas.microsoft.com/office/powerpoint/2010/main" val="2067870962"/>
+        <p14:creationId xmlns:p14="http://schemas.microsoft.com/office/powerpoint/2010/main" val="1451956468"/>
       </p:ext>
     </p:extLst>
   </p:cSld>
@@ -2564,7 +4903,7 @@
           <p:cNvPr id="11" name="slide-number">
             <a:extLst xmlns:a="http://schemas.openxmlformats.org/drawingml/2006/main">
               <a:ext uri="{FF2B5EF4-FFF2-40B4-BE49-F238E27FC236}">
-                <a16:creationId xmlns:a16="http://schemas.microsoft.com/office/drawing/2014/main" id="{372D3DE5-3B7F-45B1-B487-43C4D9904355}"/>
+                <a16:creationId xmlns:a16="http://schemas.microsoft.com/office/drawing/2014/main" id="{10D63E99-046F-4498-9323-619269809B47}"/>
               </a:ext>
             </a:extLst>
           </p:cNvPr>
@@ -2625,7 +4964,7 @@
           <p:cNvPr id="2" name="section-label">
             <a:extLst xmlns:a="http://schemas.openxmlformats.org/drawingml/2006/main">
               <a:ext uri="{FF2B5EF4-FFF2-40B4-BE49-F238E27FC236}">
-                <a16:creationId xmlns:a16="http://schemas.microsoft.com/office/drawing/2014/main" id="{4D7A2245-B771-4BAB-A930-62C70133B3EE}"/>
+                <a16:creationId xmlns:a16="http://schemas.microsoft.com/office/drawing/2014/main" id="{DFD264F8-87CB-4E0E-A1AD-F868B1AF4BF4}"/>
               </a:ext>
             </a:extLst>
           </p:cNvPr>
@@ -2686,7 +5025,7 @@
           <p:cNvPr id="3" name="headline">
             <a:extLst xmlns:a="http://schemas.openxmlformats.org/drawingml/2006/main">
               <a:ext uri="{FF2B5EF4-FFF2-40B4-BE49-F238E27FC236}">
-                <a16:creationId xmlns:a16="http://schemas.microsoft.com/office/drawing/2014/main" id="{14AC98CF-4703-4D8B-8360-EBC126999CE0}"/>
+                <a16:creationId xmlns:a16="http://schemas.microsoft.com/office/drawing/2014/main" id="{1C10C34B-A613-4CC5-83DC-149D75FCD65D}"/>
               </a:ext>
             </a:extLst>
           </p:cNvPr>
@@ -2747,7 +5086,7 @@
           <p:cNvPr id="4" name="before-label">
             <a:extLst xmlns:a="http://schemas.openxmlformats.org/drawingml/2006/main">
               <a:ext uri="{FF2B5EF4-FFF2-40B4-BE49-F238E27FC236}">
-                <a16:creationId xmlns:a16="http://schemas.microsoft.com/office/drawing/2014/main" id="{BCAAE70F-D06C-4ED5-8D2D-A8915107B43C}"/>
+                <a16:creationId xmlns:a16="http://schemas.microsoft.com/office/drawing/2014/main" id="{49E2363E-3B10-45B4-A11D-F7D345637F6B}"/>
               </a:ext>
             </a:extLst>
           </p:cNvPr>
@@ -2808,7 +5147,7 @@
           <p:cNvPr id="5" name="after-label">
             <a:extLst xmlns:a="http://schemas.openxmlformats.org/drawingml/2006/main">
               <a:ext uri="{FF2B5EF4-FFF2-40B4-BE49-F238E27FC236}">
-                <a16:creationId xmlns:a16="http://schemas.microsoft.com/office/drawing/2014/main" id="{25223654-D297-4BE2-A96F-3782581124C6}"/>
+                <a16:creationId xmlns:a16="http://schemas.microsoft.com/office/drawing/2014/main" id="{5F9AA821-B33B-4D5E-876F-3578F70B575C}"/>
               </a:ext>
             </a:extLst>
           </p:cNvPr>
@@ -2869,7 +5208,7 @@
           <p:cNvPr id="6" name="before-caption">
             <a:extLst xmlns:a="http://schemas.openxmlformats.org/drawingml/2006/main">
               <a:ext uri="{FF2B5EF4-FFF2-40B4-BE49-F238E27FC236}">
-                <a16:creationId xmlns:a16="http://schemas.microsoft.com/office/drawing/2014/main" id="{FD2A2869-B470-4F93-8484-83615D53F166}"/>
+                <a16:creationId xmlns:a16="http://schemas.microsoft.com/office/drawing/2014/main" id="{63E965DD-4759-49E9-AB89-3FFD631A7AC2}"/>
               </a:ext>
             </a:extLst>
           </p:cNvPr>
@@ -2930,7 +5269,7 @@
           <p:cNvPr id="7" name="after-caption">
             <a:extLst xmlns:a="http://schemas.openxmlformats.org/drawingml/2006/main">
               <a:ext uri="{FF2B5EF4-FFF2-40B4-BE49-F238E27FC236}">
-                <a16:creationId xmlns:a16="http://schemas.microsoft.com/office/drawing/2014/main" id="{B85A68A8-2AA6-4DEA-944E-47FBACD98F93}"/>
+                <a16:creationId xmlns:a16="http://schemas.microsoft.com/office/drawing/2014/main" id="{F1F1729E-8F3B-4F53-A155-443EB2189225}"/>
               </a:ext>
             </a:extLst>
           </p:cNvPr>
@@ -2995,7 +5334,7 @@
           <p:nvPr/>
         </p:nvPicPr>
         <p:blipFill>
-          <a:blip xmlns:r="http://schemas.openxmlformats.org/officeDocument/2006/relationships" xmlns:a="http://schemas.openxmlformats.org/drawingml/2006/main" r:embed="Rb866d6fd68944576"/>
+          <a:blip xmlns:r="http://schemas.openxmlformats.org/officeDocument/2006/relationships" xmlns:a="http://schemas.openxmlformats.org/drawingml/2006/main" r:embed="R01dee18b99454961"/>
           <a:stretch xmlns:a="http://schemas.openxmlformats.org/drawingml/2006/main"/>
         </p:blipFill>
         <p:spPr>
@@ -3017,7 +5356,7 @@
           <p:nvPr/>
         </p:nvPicPr>
         <p:blipFill>
-          <a:blip xmlns:r="http://schemas.openxmlformats.org/officeDocument/2006/relationships" xmlns:a="http://schemas.openxmlformats.org/drawingml/2006/main" r:embed="R993bfc2651d44369"/>
+          <a:blip xmlns:r="http://schemas.openxmlformats.org/officeDocument/2006/relationships" xmlns:a="http://schemas.openxmlformats.org/drawingml/2006/main" r:embed="Rd9c6e0f8f8fe420f"/>
           <a:stretch xmlns:a="http://schemas.openxmlformats.org/drawingml/2006/main"/>
         </p:blipFill>
         <p:spPr>
@@ -3035,7 +5374,7 @@
           <p:cNvPr id="10" name="stage">
             <a:extLst xmlns:a="http://schemas.openxmlformats.org/drawingml/2006/main">
               <a:ext uri="{FF2B5EF4-FFF2-40B4-BE49-F238E27FC236}">
-                <a16:creationId xmlns:a16="http://schemas.microsoft.com/office/drawing/2014/main" id="{548B68BD-5529-4C3B-8245-5C5FB0E5905A}"/>
+                <a16:creationId xmlns:a16="http://schemas.microsoft.com/office/drawing/2014/main" id="{A714C98F-D01C-4662-9BAD-5E8C85EA3D2B}"/>
               </a:ext>
             </a:extLst>
           </p:cNvPr>
@@ -3094,7 +5433,7 @@
     </p:spTree>
     <p:extLst>
       <p:ext uri="{BB962C8B-B14F-4D97-AF65-F5344CB8AC3E}">
-        <p14:creationId xmlns:p14="http://schemas.microsoft.com/office/powerpoint/2010/main" val="1634921769"/>
+        <p14:creationId xmlns:p14="http://schemas.microsoft.com/office/powerpoint/2010/main" val="1310918179"/>
       </p:ext>
     </p:extLst>
   </p:cSld>
@@ -3125,7 +5464,7 @@
           <p:cNvPr id="9" name="slide-number">
             <a:extLst xmlns:a="http://schemas.openxmlformats.org/drawingml/2006/main">
               <a:ext uri="{FF2B5EF4-FFF2-40B4-BE49-F238E27FC236}">
-                <a16:creationId xmlns:a16="http://schemas.microsoft.com/office/drawing/2014/main" id="{63E5901C-45C7-4489-9BA9-311B936CB323}"/>
+                <a16:creationId xmlns:a16="http://schemas.microsoft.com/office/drawing/2014/main" id="{49D98C7C-33BA-4156-ADA0-7FED9A47F13F}"/>
               </a:ext>
             </a:extLst>
           </p:cNvPr>
@@ -3186,7 +5525,7 @@
           <p:cNvPr id="2" name="section-label">
             <a:extLst xmlns:a="http://schemas.openxmlformats.org/drawingml/2006/main">
               <a:ext uri="{FF2B5EF4-FFF2-40B4-BE49-F238E27FC236}">
-                <a16:creationId xmlns:a16="http://schemas.microsoft.com/office/drawing/2014/main" id="{295D178F-DAAC-4396-B030-6D0F8060B984}"/>
+                <a16:creationId xmlns:a16="http://schemas.microsoft.com/office/drawing/2014/main" id="{4B9BBF2B-999C-4BCE-9E70-7824CFF2616B}"/>
               </a:ext>
             </a:extLst>
           </p:cNvPr>
@@ -3247,7 +5586,7 @@
           <p:cNvPr id="3" name="headline">
             <a:extLst xmlns:a="http://schemas.openxmlformats.org/drawingml/2006/main">
               <a:ext uri="{FF2B5EF4-FFF2-40B4-BE49-F238E27FC236}">
-                <a16:creationId xmlns:a16="http://schemas.microsoft.com/office/drawing/2014/main" id="{170025BE-CCAE-4B3B-A614-4FA7EC1441A3}"/>
+                <a16:creationId xmlns:a16="http://schemas.microsoft.com/office/drawing/2014/main" id="{2944FBF4-7806-4DEC-BA17-DB1C451FD8D4}"/>
               </a:ext>
             </a:extLst>
           </p:cNvPr>
@@ -3335,7 +5674,7 @@
           <p:cNvPr id="4" name="waiting-decision">
             <a:extLst xmlns:a="http://schemas.openxmlformats.org/drawingml/2006/main">
               <a:ext uri="{FF2B5EF4-FFF2-40B4-BE49-F238E27FC236}">
-                <a16:creationId xmlns:a16="http://schemas.microsoft.com/office/drawing/2014/main" id="{5C412603-137B-4291-9E11-EEE691A742A6}"/>
+                <a16:creationId xmlns:a16="http://schemas.microsoft.com/office/drawing/2014/main" id="{89311DF1-07F3-40DB-A001-67170A7A1072}"/>
               </a:ext>
             </a:extLst>
           </p:cNvPr>
@@ -3396,7 +5735,7 @@
           <p:cNvPr id="5" name="waiting-constraint">
             <a:extLst xmlns:a="http://schemas.openxmlformats.org/drawingml/2006/main">
               <a:ext uri="{FF2B5EF4-FFF2-40B4-BE49-F238E27FC236}">
-                <a16:creationId xmlns:a16="http://schemas.microsoft.com/office/drawing/2014/main" id="{57F5B170-8E8E-4132-95D2-A2C24E59B413}"/>
+                <a16:creationId xmlns:a16="http://schemas.microsoft.com/office/drawing/2014/main" id="{82E95FDD-57D6-48B0-BD55-4AD7D86AC432}"/>
               </a:ext>
             </a:extLst>
           </p:cNvPr>
@@ -3461,7 +5800,7 @@
           <p:nvPr/>
         </p:nvPicPr>
         <p:blipFill>
-          <a:blip xmlns:r="http://schemas.openxmlformats.org/officeDocument/2006/relationships" xmlns:a="http://schemas.openxmlformats.org/drawingml/2006/main" r:embed="R1d3d1ff870a04e19"/>
+          <a:blip xmlns:r="http://schemas.openxmlformats.org/officeDocument/2006/relationships" xmlns:a="http://schemas.openxmlformats.org/drawingml/2006/main" r:embed="R08df1bd76c34483f"/>
           <a:stretch xmlns:a="http://schemas.openxmlformats.org/drawingml/2006/main"/>
         </p:blipFill>
         <p:spPr>
@@ -3479,7 +5818,7 @@
           <p:cNvPr id="7" name="detail-caption">
             <a:extLst xmlns:a="http://schemas.openxmlformats.org/drawingml/2006/main">
               <a:ext uri="{FF2B5EF4-FFF2-40B4-BE49-F238E27FC236}">
-                <a16:creationId xmlns:a16="http://schemas.microsoft.com/office/drawing/2014/main" id="{102ED4AF-0892-43AE-8A86-ED699CA32202}"/>
+                <a16:creationId xmlns:a16="http://schemas.microsoft.com/office/drawing/2014/main" id="{932C6AEF-7C6E-4581-9422-2B0BE668A19B}"/>
               </a:ext>
             </a:extLst>
           </p:cNvPr>
@@ -3544,7 +5883,7 @@
           <p:nvPr/>
         </p:nvPicPr>
         <p:blipFill>
-          <a:blip xmlns:r="http://schemas.openxmlformats.org/officeDocument/2006/relationships" xmlns:a="http://schemas.openxmlformats.org/drawingml/2006/main" r:embed="R2dbcead31a7b4e65"/>
+          <a:blip xmlns:r="http://schemas.openxmlformats.org/officeDocument/2006/relationships" xmlns:a="http://schemas.openxmlformats.org/drawingml/2006/main" r:embed="R447264a24f914efc"/>
           <a:stretch xmlns:a="http://schemas.openxmlformats.org/drawingml/2006/main"/>
         </p:blipFill>
         <p:spPr>
@@ -3560,7 +5899,7 @@
     </p:spTree>
     <p:extLst>
       <p:ext uri="{BB962C8B-B14F-4D97-AF65-F5344CB8AC3E}">
-        <p14:creationId xmlns:p14="http://schemas.microsoft.com/office/powerpoint/2010/main" val="640413756"/>
+        <p14:creationId xmlns:p14="http://schemas.microsoft.com/office/powerpoint/2010/main" val="98995015"/>
       </p:ext>
     </p:extLst>
   </p:cSld>
@@ -3591,7 +5930,7 @@
           <p:cNvPr id="10" name="slide-number">
             <a:extLst xmlns:a="http://schemas.openxmlformats.org/drawingml/2006/main">
               <a:ext uri="{FF2B5EF4-FFF2-40B4-BE49-F238E27FC236}">
-                <a16:creationId xmlns:a16="http://schemas.microsoft.com/office/drawing/2014/main" id="{E2503DA0-E362-4A51-8AA2-F95C58E62938}"/>
+                <a16:creationId xmlns:a16="http://schemas.microsoft.com/office/drawing/2014/main" id="{41D63752-A03A-4219-8392-B9F7837861D5}"/>
               </a:ext>
             </a:extLst>
           </p:cNvPr>
@@ -3652,7 +5991,7 @@
           <p:cNvPr id="2" name="section-label">
             <a:extLst xmlns:a="http://schemas.openxmlformats.org/drawingml/2006/main">
               <a:ext uri="{FF2B5EF4-FFF2-40B4-BE49-F238E27FC236}">
-                <a16:creationId xmlns:a16="http://schemas.microsoft.com/office/drawing/2014/main" id="{2AC76F82-D862-4F06-8349-8F3901FEE1E9}"/>
+                <a16:creationId xmlns:a16="http://schemas.microsoft.com/office/drawing/2014/main" id="{30DDD93F-991F-4784-BB54-10533688562B}"/>
               </a:ext>
             </a:extLst>
           </p:cNvPr>
@@ -3713,7 +6052,7 @@
           <p:cNvPr id="3" name="headline">
             <a:extLst xmlns:a="http://schemas.openxmlformats.org/drawingml/2006/main">
               <a:ext uri="{FF2B5EF4-FFF2-40B4-BE49-F238E27FC236}">
-                <a16:creationId xmlns:a16="http://schemas.microsoft.com/office/drawing/2014/main" id="{3DE4F008-4E04-4A9E-A03E-96816EA70ACC}"/>
+                <a16:creationId xmlns:a16="http://schemas.microsoft.com/office/drawing/2014/main" id="{46C3A5CF-172A-4795-A52C-C527CA2E710B}"/>
               </a:ext>
             </a:extLst>
           </p:cNvPr>
@@ -3801,7 +6140,7 @@
           <p:cNvPr id="4" name="recovery-decision">
             <a:extLst xmlns:a="http://schemas.openxmlformats.org/drawingml/2006/main">
               <a:ext uri="{FF2B5EF4-FFF2-40B4-BE49-F238E27FC236}">
-                <a16:creationId xmlns:a16="http://schemas.microsoft.com/office/drawing/2014/main" id="{714EE02C-48E6-40AE-AD27-980E80AFE1A7}"/>
+                <a16:creationId xmlns:a16="http://schemas.microsoft.com/office/drawing/2014/main" id="{B5FC3C24-5E77-4255-8773-63F0D36E4DC0}"/>
               </a:ext>
             </a:extLst>
           </p:cNvPr>
@@ -3862,7 +6201,7 @@
           <p:cNvPr id="5" name="recovery-outcome">
             <a:extLst xmlns:a="http://schemas.openxmlformats.org/drawingml/2006/main">
               <a:ext uri="{FF2B5EF4-FFF2-40B4-BE49-F238E27FC236}">
-                <a16:creationId xmlns:a16="http://schemas.microsoft.com/office/drawing/2014/main" id="{0236DB1D-F541-4DFF-A236-538E2119D8A6}"/>
+                <a16:creationId xmlns:a16="http://schemas.microsoft.com/office/drawing/2014/main" id="{85BB512A-BB3D-4851-A4D9-0BE42B14A9C7}"/>
               </a:ext>
             </a:extLst>
           </p:cNvPr>
@@ -3923,7 +6262,7 @@
           <p:cNvPr id="6" name="incomplete-label">
             <a:extLst xmlns:a="http://schemas.openxmlformats.org/drawingml/2006/main">
               <a:ext uri="{FF2B5EF4-FFF2-40B4-BE49-F238E27FC236}">
-                <a16:creationId xmlns:a16="http://schemas.microsoft.com/office/drawing/2014/main" id="{D7AB9881-EDCA-4FC8-BBB9-CA290744C345}"/>
+                <a16:creationId xmlns:a16="http://schemas.microsoft.com/office/drawing/2014/main" id="{CAE0FCD7-4E3E-4C3E-A1E7-E774799FFA90}"/>
               </a:ext>
             </a:extLst>
           </p:cNvPr>
@@ -3984,7 +6323,7 @@
           <p:cNvPr id="7" name="offline-label">
             <a:extLst xmlns:a="http://schemas.openxmlformats.org/drawingml/2006/main">
               <a:ext uri="{FF2B5EF4-FFF2-40B4-BE49-F238E27FC236}">
-                <a16:creationId xmlns:a16="http://schemas.microsoft.com/office/drawing/2014/main" id="{8A425C49-C4DC-4A93-86DD-7DEC894EBE1B}"/>
+                <a16:creationId xmlns:a16="http://schemas.microsoft.com/office/drawing/2014/main" id="{640A1389-C2CA-4541-BE7A-281FBDD344FA}"/>
               </a:ext>
             </a:extLst>
           </p:cNvPr>
@@ -4049,7 +6388,7 @@
           <p:nvPr/>
         </p:nvPicPr>
         <p:blipFill>
-          <a:blip xmlns:r="http://schemas.openxmlformats.org/officeDocument/2006/relationships" xmlns:a="http://schemas.openxmlformats.org/drawingml/2006/main" r:embed="R4ff1bdb718c24156"/>
+          <a:blip xmlns:r="http://schemas.openxmlformats.org/officeDocument/2006/relationships" xmlns:a="http://schemas.openxmlformats.org/drawingml/2006/main" r:embed="R57e2863456174dec"/>
           <a:stretch xmlns:a="http://schemas.openxmlformats.org/drawingml/2006/main"/>
         </p:blipFill>
         <p:spPr>
@@ -4071,7 +6410,7 @@
           <p:nvPr/>
         </p:nvPicPr>
         <p:blipFill>
-          <a:blip xmlns:r="http://schemas.openxmlformats.org/officeDocument/2006/relationships" xmlns:a="http://schemas.openxmlformats.org/drawingml/2006/main" r:embed="R0bf5710226524da7"/>
+          <a:blip xmlns:r="http://schemas.openxmlformats.org/officeDocument/2006/relationships" xmlns:a="http://schemas.openxmlformats.org/drawingml/2006/main" r:embed="R94ce2b1097ec4a9a"/>
           <a:stretch xmlns:a="http://schemas.openxmlformats.org/drawingml/2006/main"/>
         </p:blipFill>
         <p:spPr>
@@ -4087,7 +6426,7 @@
     </p:spTree>
     <p:extLst>
       <p:ext uri="{BB962C8B-B14F-4D97-AF65-F5344CB8AC3E}">
-        <p14:creationId xmlns:p14="http://schemas.microsoft.com/office/powerpoint/2010/main" val="1154989318"/>
+        <p14:creationId xmlns:p14="http://schemas.microsoft.com/office/powerpoint/2010/main" val="432895907"/>
       </p:ext>
     </p:extLst>
   </p:cSld>
@@ -4118,7 +6457,7 @@
           <p:cNvPr id="8" name="slide-number">
             <a:extLst xmlns:a="http://schemas.openxmlformats.org/drawingml/2006/main">
               <a:ext uri="{FF2B5EF4-FFF2-40B4-BE49-F238E27FC236}">
-                <a16:creationId xmlns:a16="http://schemas.microsoft.com/office/drawing/2014/main" id="{62DC7942-6DD4-417E-996E-0EEE493E80F1}"/>
+                <a16:creationId xmlns:a16="http://schemas.microsoft.com/office/drawing/2014/main" id="{5944B73E-B2E5-4FF9-9CE7-E5CA5D16BE8F}"/>
               </a:ext>
             </a:extLst>
           </p:cNvPr>
@@ -4179,7 +6518,7 @@
           <p:cNvPr id="2" name="section-label">
             <a:extLst xmlns:a="http://schemas.openxmlformats.org/drawingml/2006/main">
               <a:ext uri="{FF2B5EF4-FFF2-40B4-BE49-F238E27FC236}">
-                <a16:creationId xmlns:a16="http://schemas.microsoft.com/office/drawing/2014/main" id="{CC5C4CCD-7412-4524-A4E8-B122F1EB9847}"/>
+                <a16:creationId xmlns:a16="http://schemas.microsoft.com/office/drawing/2014/main" id="{14E7061F-4680-430A-9615-A3890AF88DF6}"/>
               </a:ext>
             </a:extLst>
           </p:cNvPr>
@@ -4240,7 +6579,7 @@
           <p:cNvPr id="3" name="headline">
             <a:extLst xmlns:a="http://schemas.openxmlformats.org/drawingml/2006/main">
               <a:ext uri="{FF2B5EF4-FFF2-40B4-BE49-F238E27FC236}">
-                <a16:creationId xmlns:a16="http://schemas.microsoft.com/office/drawing/2014/main" id="{75B0691E-46E1-41B8-A59E-2A70543E5F98}"/>
+                <a16:creationId xmlns:a16="http://schemas.microsoft.com/office/drawing/2014/main" id="{039D7B94-C9A0-42F9-AC53-9F70C27E6B44}"/>
               </a:ext>
             </a:extLst>
           </p:cNvPr>
@@ -4328,7 +6667,7 @@
           <p:cNvPr id="4" name="role">
             <a:extLst xmlns:a="http://schemas.openxmlformats.org/drawingml/2006/main">
               <a:ext uri="{FF2B5EF4-FFF2-40B4-BE49-F238E27FC236}">
-                <a16:creationId xmlns:a16="http://schemas.microsoft.com/office/drawing/2014/main" id="{DBA44BB4-5B97-4220-8D92-17E68734A9D6}"/>
+                <a16:creationId xmlns:a16="http://schemas.microsoft.com/office/drawing/2014/main" id="{A6C1370E-90A1-4B3A-BE8D-2C0B1DB9C1D4}"/>
               </a:ext>
             </a:extLst>
           </p:cNvPr>
@@ -4389,7 +6728,7 @@
           <p:cNvPr id="5" name="about-decision">
             <a:extLst xmlns:a="http://schemas.openxmlformats.org/drawingml/2006/main">
               <a:ext uri="{FF2B5EF4-FFF2-40B4-BE49-F238E27FC236}">
-                <a16:creationId xmlns:a16="http://schemas.microsoft.com/office/drawing/2014/main" id="{AA2FB6C3-65D6-4C7D-8D33-C9254AC0C5C4}"/>
+                <a16:creationId xmlns:a16="http://schemas.microsoft.com/office/drawing/2014/main" id="{B8E17B32-E775-44D0-B670-2E566F97475B}"/>
               </a:ext>
             </a:extLst>
           </p:cNvPr>
@@ -4450,19 +6789,19 @@
           <p:cNvPr id="6" name="about-stage">
             <a:extLst xmlns:a="http://schemas.openxmlformats.org/drawingml/2006/main">
               <a:ext uri="{FF2B5EF4-FFF2-40B4-BE49-F238E27FC236}">
-                <a16:creationId xmlns:a16="http://schemas.microsoft.com/office/drawing/2014/main" id="{5226FFE5-9076-48B3-9148-FB97CF106F79}"/>
-              </a:ext>
-            </a:extLst>
-          </p:cNvPr>
-          <p:cNvSpPr>
-            <a:spLocks xmlns:a="http://schemas.openxmlformats.org/drawingml/2006/main" noGrp="1"/>
-          </p:cNvSpPr>
-          <p:nvPr/>
-        </p:nvSpPr>
-        <p:spPr>
-          <a:xfrm xmlns:a="http://schemas.openxmlformats.org/drawingml/2006/main">
-            <a:off x="609600" y="5314950"/>
-            <a:ext cx="5210175" cy="781050"/>
+                <a16:creationId xmlns:a16="http://schemas.microsoft.com/office/drawing/2014/main" id="{D69B2EDB-8D68-4AE2-9D6A-4527BE1B2F86}"/>
+              </a:ext>
+            </a:extLst>
+          </p:cNvPr>
+          <p:cNvSpPr>
+            <a:spLocks xmlns:a="http://schemas.openxmlformats.org/drawingml/2006/main" noGrp="1"/>
+          </p:cNvSpPr>
+          <p:nvPr/>
+        </p:nvSpPr>
+        <p:spPr>
+          <a:xfrm xmlns:a="http://schemas.openxmlformats.org/drawingml/2006/main">
+            <a:off x="609600" y="5257800"/>
+            <a:ext cx="5210175" cy="1009650"/>
           </a:xfrm>
           <a:prstGeom xmlns:a="http://schemas.openxmlformats.org/drawingml/2006/main" prst="rect">
             <a:avLst/>
@@ -4501,34 +6840,7 @@
                 <a:ea typeface="Helvetica Neue"/>
                 <a:cs typeface="Helvetica Neue"/>
               </a:rPr>
-              <a:t>Design iterations shown with sample content.</a:t>
-            </a:r>
-          </a:p>
-          <a:p xmlns:a="http://schemas.openxmlformats.org/drawingml/2006/main">
-            <a:pPr>
-              <a:lnSpc>
-                <a:spcPct val="110000"/>
-              </a:lnSpc>
-              <a:buNone/>
-              <a:defRPr sz="1350" b="0">
-                <a:solidFill>
-                  <a:srgbClr val="58645D"/>
-                </a:solidFill>
-                <a:latin typeface="Helvetica Neue"/>
-                <a:ea typeface="Helvetica Neue"/>
-                <a:cs typeface="Helvetica Neue"/>
-              </a:defRPr>
-            </a:pPr>
-            <a:r>
-              <a:rPr sz="1350" b="0">
-                <a:solidFill>
-                  <a:srgbClr val="58645D"/>
-                </a:solidFill>
-                <a:latin typeface="Helvetica Neue"/>
-                <a:ea typeface="Helvetica Neue"/>
-                <a:cs typeface="Helvetica Neue"/>
-              </a:rPr>
-              <a:t>Web/server release confirmed September 2, 2026.</a:t>
+              <a:t>Design iterations with sample content. Engineering reported web/server live September 2 and mobile live September 3, 2026.</a:t>
             </a:r>
           </a:p>
         </p:txBody>
@@ -4542,7 +6854,7 @@
           <p:nvPr/>
         </p:nvPicPr>
         <p:blipFill>
-          <a:blip xmlns:r="http://schemas.openxmlformats.org/officeDocument/2006/relationships" xmlns:a="http://schemas.openxmlformats.org/drawingml/2006/main" r:embed="R865bec4aa85444ba"/>
+          <a:blip xmlns:r="http://schemas.openxmlformats.org/officeDocument/2006/relationships" xmlns:a="http://schemas.openxmlformats.org/drawingml/2006/main" r:embed="R4bf4926ba3f249df"/>
           <a:stretch xmlns:a="http://schemas.openxmlformats.org/drawingml/2006/main"/>
         </p:blipFill>
         <p:spPr>
@@ -4558,7 +6870,7 @@
     </p:spTree>
     <p:extLst>
       <p:ext uri="{BB962C8B-B14F-4D97-AF65-F5344CB8AC3E}">
-        <p14:creationId xmlns:p14="http://schemas.microsoft.com/office/powerpoint/2010/main" val="966602934"/>
+        <p14:creationId xmlns:p14="http://schemas.microsoft.com/office/powerpoint/2010/main" val="1986214611"/>
       </p:ext>
     </p:extLst>
   </p:cSld>
@@ -4586,10 +6898,10 @@
       </p:grpSpPr>
       <p:sp>
         <p:nvSpPr>
-          <p:cNvPr id="8" name="slide-number">
-            <a:extLst xmlns:a="http://schemas.openxmlformats.org/drawingml/2006/main">
-              <a:ext uri="{FF2B5EF4-FFF2-40B4-BE49-F238E27FC236}">
-                <a16:creationId xmlns:a16="http://schemas.microsoft.com/office/drawing/2014/main" id="{2CEBCD03-69BA-4D22-A753-DDEC1E38558F}"/>
+          <p:cNvPr id="9" name="slide-number">
+            <a:extLst xmlns:a="http://schemas.openxmlformats.org/drawingml/2006/main">
+              <a:ext uri="{FF2B5EF4-FFF2-40B4-BE49-F238E27FC236}">
+                <a16:creationId xmlns:a16="http://schemas.microsoft.com/office/drawing/2014/main" id="{2E36D1EB-64A0-493D-AD19-6D2638E4C130}"/>
               </a:ext>
             </a:extLst>
           </p:cNvPr>
@@ -4650,7 +6962,7 @@
           <p:cNvPr id="2" name="section-label">
             <a:extLst xmlns:a="http://schemas.openxmlformats.org/drawingml/2006/main">
               <a:ext uri="{FF2B5EF4-FFF2-40B4-BE49-F238E27FC236}">
-                <a16:creationId xmlns:a16="http://schemas.microsoft.com/office/drawing/2014/main" id="{5E567625-42AA-4906-9A09-B3D44DF04CBD}"/>
+                <a16:creationId xmlns:a16="http://schemas.microsoft.com/office/drawing/2014/main" id="{D6F177E1-1518-4380-80B6-F78DA9E23F69}"/>
               </a:ext>
             </a:extLst>
           </p:cNvPr>
@@ -4701,7 +7013,7 @@
                 <a:ea typeface="Helvetica Neue"/>
                 <a:cs typeface="Helvetica Neue"/>
               </a:rPr>
-              <a:t>ABOUT ME   /   NEUTRAL COMPARISON</a:t>
+              <a:t>ABOUT ME   /   ACCOMPLISHMENTS DECISION</a:t>
             </a:r>
           </a:p>
         </p:txBody>
@@ -4711,7 +7023,7 @@
           <p:cNvPr id="3" name="headline">
             <a:extLst xmlns:a="http://schemas.openxmlformats.org/drawingml/2006/main">
               <a:ext uri="{FF2B5EF4-FFF2-40B4-BE49-F238E27FC236}">
-                <a16:creationId xmlns:a16="http://schemas.microsoft.com/office/drawing/2014/main" id="{05E336DD-1DD4-46DC-BD21-0856BF4A1F79}"/>
+                <a16:creationId xmlns:a16="http://schemas.microsoft.com/office/drawing/2014/main" id="{4D7558C6-7620-4E8E-B5B4-79C1E54A2AAF}"/>
               </a:ext>
             </a:extLst>
           </p:cNvPr>
@@ -4723,7 +7035,7 @@
         <p:spPr>
           <a:xfrm xmlns:a="http://schemas.openxmlformats.org/drawingml/2006/main">
             <a:off x="609600" y="1114425"/>
-            <a:ext cx="5572125" cy="1447800"/>
+            <a:ext cx="5629275" cy="1447800"/>
           </a:xfrm>
           <a:prstGeom xmlns:a="http://schemas.openxmlformats.org/drawingml/2006/main" prst="rect">
             <a:avLst/>
@@ -4762,7 +7074,7 @@
                 <a:ea typeface="Helvetica Neue"/>
                 <a:cs typeface="Helvetica Neue"/>
               </a:rPr>
-              <a:t>A comparison needs</a:t>
+              <a:t>When the table held</a:t>
             </a:r>
           </a:p>
           <a:p xmlns:a="http://schemas.openxmlformats.org/drawingml/2006/main">
@@ -4789,29 +7101,29 @@
                 <a:ea typeface="Helvetica Neue"/>
                 <a:cs typeface="Helvetica Neue"/>
               </a:rPr>
-              <a:t>an interpretation</a:t>
-            </a:r>
-          </a:p>
-        </p:txBody>
-      </p:sp>
-      <p:sp>
-        <p:nvSpPr>
-          <p:cNvPr id="4" name="comparison-decision">
-            <a:extLst xmlns:a="http://schemas.openxmlformats.org/drawingml/2006/main">
-              <a:ext uri="{FF2B5EF4-FFF2-40B4-BE49-F238E27FC236}">
-                <a16:creationId xmlns:a16="http://schemas.microsoft.com/office/drawing/2014/main" id="{7782A241-0436-4DF9-B8D0-88AB2DDDCBF7}"/>
-              </a:ext>
-            </a:extLst>
-          </p:cNvPr>
-          <p:cNvSpPr>
-            <a:spLocks xmlns:a="http://schemas.openxmlformats.org/drawingml/2006/main" noGrp="1"/>
-          </p:cNvSpPr>
-          <p:nvPr/>
-        </p:nvSpPr>
-        <p:spPr>
-          <a:xfrm xmlns:a="http://schemas.openxmlformats.org/drawingml/2006/main">
-            <a:off x="609600" y="3181350"/>
-            <a:ext cx="4400550" cy="1409700"/>
+              <a:t>more information</a:t>
+            </a:r>
+          </a:p>
+        </p:txBody>
+      </p:sp>
+      <p:sp>
+        <p:nvSpPr>
+          <p:cNvPr id="4" name="collaboration-lead">
+            <a:extLst xmlns:a="http://schemas.openxmlformats.org/drawingml/2006/main">
+              <a:ext uri="{FF2B5EF4-FFF2-40B4-BE49-F238E27FC236}">
+                <a16:creationId xmlns:a16="http://schemas.microsoft.com/office/drawing/2014/main" id="{3039C6C8-964B-4FB7-8DCB-2FDC9052DF05}"/>
+              </a:ext>
+            </a:extLst>
+          </p:cNvPr>
+          <p:cNvSpPr>
+            <a:spLocks xmlns:a="http://schemas.openxmlformats.org/drawingml/2006/main" noGrp="1"/>
+          </p:cNvSpPr>
+          <p:nvPr/>
+        </p:nvSpPr>
+        <p:spPr>
+          <a:xfrm xmlns:a="http://schemas.openxmlformats.org/drawingml/2006/main">
+            <a:off x="609600" y="2905125"/>
+            <a:ext cx="4657725" cy="866775"/>
           </a:xfrm>
           <a:prstGeom xmlns:a="http://schemas.openxmlformats.org/drawingml/2006/main" prst="rect">
             <a:avLst/>
@@ -4850,29 +7162,29 @@
                 <a:ea typeface="Helvetica Neue"/>
                 <a:cs typeface="Helvetica Neue"/>
               </a:rPr>
-              <a:t>Mentioning fatigue less often is a comparison. Whether that is good depends on the context.</a:t>
-            </a:r>
-          </a:p>
-        </p:txBody>
-      </p:sp>
-      <p:sp>
-        <p:nvSpPr>
-          <p:cNvPr id="5" name="comparison-outcome">
-            <a:extLst xmlns:a="http://schemas.openxmlformats.org/drawingml/2006/main">
-              <a:ext uri="{FF2B5EF4-FFF2-40B4-BE49-F238E27FC236}">
-                <a16:creationId xmlns:a16="http://schemas.microsoft.com/office/drawing/2014/main" id="{303FC3DF-992B-4DDD-AA28-D29B4705B1F8}"/>
-              </a:ext>
-            </a:extLst>
-          </p:cNvPr>
-          <p:cNvSpPr>
-            <a:spLocks xmlns:a="http://schemas.openxmlformats.org/drawingml/2006/main" noGrp="1"/>
-          </p:cNvSpPr>
-          <p:nvPr/>
-        </p:nvSpPr>
-        <p:spPr>
-          <a:xfrm xmlns:a="http://schemas.openxmlformats.org/drawingml/2006/main">
-            <a:off x="609600" y="5010150"/>
-            <a:ext cx="4400550" cy="1104900"/>
+              <a:t>My grid omitted details already present in engineering’s table.</a:t>
+            </a:r>
+          </a:p>
+        </p:txBody>
+      </p:sp>
+      <p:sp>
+        <p:nvSpPr>
+          <p:cNvPr id="5" name="collaboration-decision">
+            <a:extLst xmlns:a="http://schemas.openxmlformats.org/drawingml/2006/main">
+              <a:ext uri="{FF2B5EF4-FFF2-40B4-BE49-F238E27FC236}">
+                <a16:creationId xmlns:a16="http://schemas.microsoft.com/office/drawing/2014/main" id="{F9CBB0FC-3750-4256-85F7-7A3EFBB55F6D}"/>
+              </a:ext>
+            </a:extLst>
+          </p:cNvPr>
+          <p:cNvSpPr>
+            <a:spLocks xmlns:a="http://schemas.openxmlformats.org/drawingml/2006/main" noGrp="1"/>
+          </p:cNvSpPr>
+          <p:nvPr/>
+        </p:nvSpPr>
+        <p:spPr>
+          <a:xfrm xmlns:a="http://schemas.openxmlformats.org/drawingml/2006/main">
+            <a:off x="609600" y="4000500"/>
+            <a:ext cx="4657725" cy="1123950"/>
           </a:xfrm>
           <a:prstGeom xmlns:a="http://schemas.openxmlformats.org/drawingml/2006/main" prst="rect">
             <a:avLst/>
@@ -4893,7 +7205,68 @@
                 <a:spcPct val="110000"/>
               </a:lnSpc>
               <a:buNone/>
-              <a:defRPr sz="1725" b="0">
+              <a:defRPr sz="1800" b="0">
+                <a:solidFill>
+                  <a:srgbClr val="192B25"/>
+                </a:solidFill>
+                <a:latin typeface="Helvetica Neue"/>
+                <a:ea typeface="Helvetica Neue"/>
+                <a:cs typeface="Helvetica Neue"/>
+              </a:defRPr>
+            </a:pPr>
+            <a:r>
+              <a:rPr sz="1800" b="0">
+                <a:solidFill>
+                  <a:srgbClr val="192B25"/>
+                </a:solidFill>
+                <a:latin typeface="Helvetica Neue"/>
+                <a:ea typeface="Helvetica Neue"/>
+                <a:cs typeface="Helvetica Neue"/>
+              </a:rPr>
+              <a:t>I recommended keeping the table and revised the labels to make given and received activity clearer.</a:t>
+            </a:r>
+          </a:p>
+        </p:txBody>
+      </p:sp>
+      <p:sp>
+        <p:nvSpPr>
+          <p:cNvPr id="6" name="collaboration-stage">
+            <a:extLst xmlns:a="http://schemas.openxmlformats.org/drawingml/2006/main">
+              <a:ext uri="{FF2B5EF4-FFF2-40B4-BE49-F238E27FC236}">
+                <a16:creationId xmlns:a16="http://schemas.microsoft.com/office/drawing/2014/main" id="{088EF960-BD4D-498D-9A08-9E412ACBA69F}"/>
+              </a:ext>
+            </a:extLst>
+          </p:cNvPr>
+          <p:cNvSpPr>
+            <a:spLocks xmlns:a="http://schemas.openxmlformats.org/drawingml/2006/main" noGrp="1"/>
+          </p:cNvSpPr>
+          <p:nvPr/>
+        </p:nvSpPr>
+        <p:spPr>
+          <a:xfrm xmlns:a="http://schemas.openxmlformats.org/drawingml/2006/main">
+            <a:off x="609600" y="5791200"/>
+            <a:ext cx="5286375" cy="628650"/>
+          </a:xfrm>
+          <a:prstGeom xmlns:a="http://schemas.openxmlformats.org/drawingml/2006/main" prst="rect">
+            <a:avLst/>
+          </a:prstGeom>
+          <a:noFill xmlns:a="http://schemas.openxmlformats.org/drawingml/2006/main"/>
+          <a:ln xmlns:a="http://schemas.openxmlformats.org/drawingml/2006/main" w="0">
+            <a:noFill/>
+          </a:ln>
+        </p:spPr>
+        <p:txBody>
+          <a:bodyPr xmlns:a="http://schemas.openxmlformats.org/drawingml/2006/main" wrap="square" lIns="0" tIns="0" rIns="0" bIns="0" anchor="t">
+            <a:noAutofit/>
+          </a:bodyPr>
+          <a:lstStyle xmlns:a="http://schemas.openxmlformats.org/drawingml/2006/main"/>
+          <a:p xmlns:a="http://schemas.openxmlformats.org/drawingml/2006/main">
+            <a:pPr>
+              <a:lnSpc>
+                <a:spcPct val="110000"/>
+              </a:lnSpc>
+              <a:buNone/>
+              <a:defRPr sz="1275" b="0">
                 <a:solidFill>
                   <a:srgbClr val="58645D"/>
                 </a:solidFill>
@@ -4903,7 +7276,7 @@
               </a:defRPr>
             </a:pPr>
             <a:r>
-              <a:rPr sz="1725" b="0">
+              <a:rPr sz="1275" b="0">
                 <a:solidFill>
                   <a:srgbClr val="58645D"/>
                 </a:solidFill>
@@ -4911,27 +7284,27 @@
                 <a:ea typeface="Helvetica Neue"/>
                 <a:cs typeface="Helvetica Neue"/>
               </a:rPr>
-              <a:t>I raised the cohort, percentile and wording questions before they became interface rules.</a:t>
+              <a:t>Original design detail, August 2026 · values are sample content · followed-people link deferred</a:t>
             </a:r>
           </a:p>
         </p:txBody>
       </p:sp>
       <p:pic>
         <p:nvPicPr>
-          <p:cNvPr id="13" name=""/>
+          <p:cNvPr id="15" name=""/>
           <p:cNvPicPr>
             <a:picLocks xmlns:a="http://schemas.openxmlformats.org/drawingml/2006/main" noChangeAspect="1"/>
           </p:cNvPicPr>
           <p:nvPr/>
         </p:nvPicPr>
         <p:blipFill>
-          <a:blip xmlns:r="http://schemas.openxmlformats.org/officeDocument/2006/relationships" xmlns:a="http://schemas.openxmlformats.org/drawingml/2006/main" r:embed="R51ce47b009584793"/>
+          <a:blip xmlns:r="http://schemas.openxmlformats.org/officeDocument/2006/relationships" xmlns:a="http://schemas.openxmlformats.org/drawingml/2006/main" r:embed="R6679bdccf75e4cbc"/>
           <a:stretch xmlns:a="http://schemas.openxmlformats.org/drawingml/2006/main"/>
         </p:blipFill>
         <p:spPr>
           <a:xfrm xmlns:a="http://schemas.openxmlformats.org/drawingml/2006/main">
-            <a:off x="5876925" y="2249327"/>
-            <a:ext cx="5572125" cy="3692847"/>
+            <a:off x="6460893" y="1476375"/>
+            <a:ext cx="4499438" cy="4305300"/>
           </a:xfrm>
           <a:prstGeom xmlns:a="http://schemas.openxmlformats.org/drawingml/2006/main" prst="rect">
             <a:avLst/>
@@ -4940,22 +7313,22 @@
       </p:pic>
       <p:sp>
         <p:nvSpPr>
-          <p:cNvPr id="7" name="sample-label">
-            <a:extLst xmlns:a="http://schemas.openxmlformats.org/drawingml/2006/main">
-              <a:ext uri="{FF2B5EF4-FFF2-40B4-BE49-F238E27FC236}">
-                <a16:creationId xmlns:a16="http://schemas.microsoft.com/office/drawing/2014/main" id="{AD30F844-831B-4276-8062-62372EBC6A32}"/>
-              </a:ext>
-            </a:extLst>
-          </p:cNvPr>
-          <p:cNvSpPr>
-            <a:spLocks xmlns:a="http://schemas.openxmlformats.org/drawingml/2006/main" noGrp="1"/>
-          </p:cNvSpPr>
-          <p:nvPr/>
-        </p:nvSpPr>
-        <p:spPr>
-          <a:xfrm xmlns:a="http://schemas.openxmlformats.org/drawingml/2006/main">
-            <a:off x="5915025" y="6153150"/>
-            <a:ext cx="5505450" cy="247650"/>
+          <p:cNvPr id="8" name="accomplishments-caption">
+            <a:extLst xmlns:a="http://schemas.openxmlformats.org/drawingml/2006/main">
+              <a:ext uri="{FF2B5EF4-FFF2-40B4-BE49-F238E27FC236}">
+                <a16:creationId xmlns:a16="http://schemas.microsoft.com/office/drawing/2014/main" id="{FD985A97-7433-4403-870A-37BF28FD4823}"/>
+              </a:ext>
+            </a:extLst>
+          </p:cNvPr>
+          <p:cNvSpPr>
+            <a:spLocks xmlns:a="http://schemas.openxmlformats.org/drawingml/2006/main" noGrp="1"/>
+          </p:cNvSpPr>
+          <p:nvPr/>
+        </p:nvSpPr>
+        <p:spPr>
+          <a:xfrm xmlns:a="http://schemas.openxmlformats.org/drawingml/2006/main">
+            <a:off x="6477000" y="5934075"/>
+            <a:ext cx="4724400" cy="304800"/>
           </a:xfrm>
           <a:prstGeom xmlns:a="http://schemas.openxmlformats.org/drawingml/2006/main" prst="rect">
             <a:avLst/>
@@ -4994,7 +7367,7 @@
                 <a:ea typeface="Helvetica Neue"/>
                 <a:cs typeface="Helvetica Neue"/>
               </a:rPr>
-              <a:t>Original widget, illustrative values</a:t>
+              <a:t>Table direction with clearer activity labels</a:t>
             </a:r>
           </a:p>
         </p:txBody>
@@ -5002,7 +7375,7 @@
     </p:spTree>
     <p:extLst>
       <p:ext uri="{BB962C8B-B14F-4D97-AF65-F5344CB8AC3E}">
-        <p14:creationId xmlns:p14="http://schemas.microsoft.com/office/powerpoint/2010/main" val="207338722"/>
+        <p14:creationId xmlns:p14="http://schemas.microsoft.com/office/powerpoint/2010/main" val="1527817320"/>
       </p:ext>
     </p:extLst>
   </p:cSld>
@@ -5033,7 +7406,7 @@
           <p:cNvPr id="8" name="slide-number">
             <a:extLst xmlns:a="http://schemas.openxmlformats.org/drawingml/2006/main">
               <a:ext uri="{FF2B5EF4-FFF2-40B4-BE49-F238E27FC236}">
-                <a16:creationId xmlns:a16="http://schemas.microsoft.com/office/drawing/2014/main" id="{775E6D91-9F71-4186-BEB2-68308CF45FA1}"/>
+                <a16:creationId xmlns:a16="http://schemas.microsoft.com/office/drawing/2014/main" id="{C69B6234-F9EB-4A3B-B8F7-37B96327AEFF}"/>
               </a:ext>
             </a:extLst>
           </p:cNvPr>
@@ -5094,7 +7467,7 @@
           <p:cNvPr id="2" name="section-label">
             <a:extLst xmlns:a="http://schemas.openxmlformats.org/drawingml/2006/main">
               <a:ext uri="{FF2B5EF4-FFF2-40B4-BE49-F238E27FC236}">
-                <a16:creationId xmlns:a16="http://schemas.microsoft.com/office/drawing/2014/main" id="{F0F39D1A-88DF-4BBC-A700-801C1D4BA9DB}"/>
+                <a16:creationId xmlns:a16="http://schemas.microsoft.com/office/drawing/2014/main" id="{A8274FD1-5EB7-464E-A9AE-9AA80B0159A1}"/>
               </a:ext>
             </a:extLst>
           </p:cNvPr>
@@ -5145,7 +7518,7 @@
                 <a:ea typeface="Helvetica Neue"/>
                 <a:cs typeface="Helvetica Neue"/>
               </a:rPr>
-              <a:t>OAK AI   /   LEAD UX RESEARCHER, 2023–2025</a:t>
+              <a:t>ABOUT ME   /   NEUTRAL COMPARISON</a:t>
             </a:r>
           </a:p>
         </p:txBody>
@@ -5155,19 +7528,19 @@
           <p:cNvPr id="3" name="headline">
             <a:extLst xmlns:a="http://schemas.openxmlformats.org/drawingml/2006/main">
               <a:ext uri="{FF2B5EF4-FFF2-40B4-BE49-F238E27FC236}">
-                <a16:creationId xmlns:a16="http://schemas.microsoft.com/office/drawing/2014/main" id="{3B56CEA9-5419-4A47-97AD-9E041FB2A4E2}"/>
-              </a:ext>
-            </a:extLst>
-          </p:cNvPr>
-          <p:cNvSpPr>
-            <a:spLocks xmlns:a="http://schemas.openxmlformats.org/drawingml/2006/main" noGrp="1"/>
-          </p:cNvSpPr>
-          <p:nvPr/>
-        </p:nvSpPr>
-        <p:spPr>
-          <a:xfrm xmlns:a="http://schemas.openxmlformats.org/drawingml/2006/main">
-            <a:off x="609600" y="1104900"/>
-            <a:ext cx="4248150" cy="1438275"/>
+                <a16:creationId xmlns:a16="http://schemas.microsoft.com/office/drawing/2014/main" id="{4A666F3D-6735-4ABC-A7D7-4E3244A0D19C}"/>
+              </a:ext>
+            </a:extLst>
+          </p:cNvPr>
+          <p:cNvSpPr>
+            <a:spLocks xmlns:a="http://schemas.openxmlformats.org/drawingml/2006/main" noGrp="1"/>
+          </p:cNvSpPr>
+          <p:nvPr/>
+        </p:nvSpPr>
+        <p:spPr>
+          <a:xfrm xmlns:a="http://schemas.openxmlformats.org/drawingml/2006/main">
+            <a:off x="609600" y="1114425"/>
+            <a:ext cx="5572125" cy="1447800"/>
           </a:xfrm>
           <a:prstGeom xmlns:a="http://schemas.openxmlformats.org/drawingml/2006/main" prst="rect">
             <a:avLst/>
@@ -5188,7 +7561,7 @@
                 <a:spcPct val="110000"/>
               </a:lnSpc>
               <a:buNone/>
-              <a:defRPr sz="3750" b="1">
+              <a:defRPr sz="3675" b="1">
                 <a:solidFill>
                   <a:srgbClr val="192B25"/>
                 </a:solidFill>
@@ -5198,7 +7571,7 @@
               </a:defRPr>
             </a:pPr>
             <a:r>
-              <a:rPr sz="3750" b="1">
+              <a:rPr sz="3675" b="1">
                 <a:solidFill>
                   <a:srgbClr val="192B25"/>
                 </a:solidFill>
@@ -5206,16 +7579,16 @@
                 <a:ea typeface="Helvetica Neue"/>
                 <a:cs typeface="Helvetica Neue"/>
               </a:rPr>
-              <a:t>Competing</a:t>
-            </a:r>
-          </a:p>
-          <a:p xmlns:a="http://schemas.openxmlformats.org/drawingml/2006/main">
-            <a:pPr>
-              <a:lnSpc>
-                <a:spcPct val="110000"/>
-              </a:lnSpc>
-              <a:buNone/>
-              <a:defRPr sz="3750" b="1">
+              <a:t>A comparison needs</a:t>
+            </a:r>
+          </a:p>
+          <a:p xmlns:a="http://schemas.openxmlformats.org/drawingml/2006/main">
+            <a:pPr>
+              <a:lnSpc>
+                <a:spcPct val="110000"/>
+              </a:lnSpc>
+              <a:buNone/>
+              <a:defRPr sz="3675" b="1">
                 <a:solidFill>
                   <a:srgbClr val="192B25"/>
                 </a:solidFill>
@@ -5225,7 +7598,7 @@
               </a:defRPr>
             </a:pPr>
             <a:r>
-              <a:rPr sz="3750" b="1">
+              <a:rPr sz="3675" b="1">
                 <a:solidFill>
                   <a:srgbClr val="192B25"/>
                 </a:solidFill>
@@ -5233,29 +7606,29 @@
                 <a:ea typeface="Helvetica Neue"/>
                 <a:cs typeface="Helvetica Neue"/>
               </a:rPr>
-              <a:t>entry points</a:t>
-            </a:r>
-          </a:p>
-        </p:txBody>
-      </p:sp>
-      <p:sp>
-        <p:nvSpPr>
-          <p:cNvPr id="4" name="oak-observation">
-            <a:extLst xmlns:a="http://schemas.openxmlformats.org/drawingml/2006/main">
-              <a:ext uri="{FF2B5EF4-FFF2-40B4-BE49-F238E27FC236}">
-                <a16:creationId xmlns:a16="http://schemas.microsoft.com/office/drawing/2014/main" id="{ED931B58-FA09-4E8B-B0C6-4DD6EF8E059B}"/>
-              </a:ext>
-            </a:extLst>
-          </p:cNvPr>
-          <p:cNvSpPr>
-            <a:spLocks xmlns:a="http://schemas.openxmlformats.org/drawingml/2006/main" noGrp="1"/>
-          </p:cNvSpPr>
-          <p:nvPr/>
-        </p:nvSpPr>
-        <p:spPr>
-          <a:xfrm xmlns:a="http://schemas.openxmlformats.org/drawingml/2006/main">
-            <a:off x="609600" y="2981325"/>
-            <a:ext cx="4057650" cy="1743075"/>
+              <a:t>an interpretation</a:t>
+            </a:r>
+          </a:p>
+        </p:txBody>
+      </p:sp>
+      <p:sp>
+        <p:nvSpPr>
+          <p:cNvPr id="4" name="comparison-decision">
+            <a:extLst xmlns:a="http://schemas.openxmlformats.org/drawingml/2006/main">
+              <a:ext uri="{FF2B5EF4-FFF2-40B4-BE49-F238E27FC236}">
+                <a16:creationId xmlns:a16="http://schemas.microsoft.com/office/drawing/2014/main" id="{4464D903-E773-466F-90B5-336A2C24FD2A}"/>
+              </a:ext>
+            </a:extLst>
+          </p:cNvPr>
+          <p:cNvSpPr>
+            <a:spLocks xmlns:a="http://schemas.openxmlformats.org/drawingml/2006/main" noGrp="1"/>
+          </p:cNvSpPr>
+          <p:nvPr/>
+        </p:nvSpPr>
+        <p:spPr>
+          <a:xfrm xmlns:a="http://schemas.openxmlformats.org/drawingml/2006/main">
+            <a:off x="609600" y="3181350"/>
+            <a:ext cx="4400550" cy="1409700"/>
           </a:xfrm>
           <a:prstGeom xmlns:a="http://schemas.openxmlformats.org/drawingml/2006/main" prst="rect">
             <a:avLst/>
@@ -5276,7 +7649,7 @@
                 <a:spcPct val="110000"/>
               </a:lnSpc>
               <a:buNone/>
-              <a:defRPr sz="1950" b="0">
+              <a:defRPr sz="2025" b="0">
                 <a:solidFill>
                   <a:srgbClr val="192B25"/>
                 </a:solidFill>
@@ -5286,7 +7659,7 @@
               </a:defRPr>
             </a:pPr>
             <a:r>
-              <a:rPr sz="1950" b="0">
+              <a:rPr sz="2025" b="0">
                 <a:solidFill>
                   <a:srgbClr val="192B25"/>
                 </a:solidFill>
@@ -5294,29 +7667,29 @@
                 <a:ea typeface="Helvetica Neue"/>
                 <a:cs typeface="Helvetica Neue"/>
               </a:rPr>
-              <a:t>Training an assistant, starting a Vibecheck and requesting support competed at the same entry point.</a:t>
-            </a:r>
-          </a:p>
-        </p:txBody>
-      </p:sp>
-      <p:sp>
-        <p:nvSpPr>
-          <p:cNvPr id="5" name="oak-rationale">
-            <a:extLst xmlns:a="http://schemas.openxmlformats.org/drawingml/2006/main">
-              <a:ext uri="{FF2B5EF4-FFF2-40B4-BE49-F238E27FC236}">
-                <a16:creationId xmlns:a16="http://schemas.microsoft.com/office/drawing/2014/main" id="{C72E56B1-FC2F-4999-BAF9-F5A353950FB0}"/>
-              </a:ext>
-            </a:extLst>
-          </p:cNvPr>
-          <p:cNvSpPr>
-            <a:spLocks xmlns:a="http://schemas.openxmlformats.org/drawingml/2006/main" noGrp="1"/>
-          </p:cNvSpPr>
-          <p:nvPr/>
-        </p:nvSpPr>
-        <p:spPr>
-          <a:xfrm xmlns:a="http://schemas.openxmlformats.org/drawingml/2006/main">
-            <a:off x="609600" y="5038725"/>
-            <a:ext cx="4057650" cy="981075"/>
+              <a:t>Mentioning fatigue less often is a comparison. Whether that is good depends on the context.</a:t>
+            </a:r>
+          </a:p>
+        </p:txBody>
+      </p:sp>
+      <p:sp>
+        <p:nvSpPr>
+          <p:cNvPr id="5" name="comparison-outcome">
+            <a:extLst xmlns:a="http://schemas.openxmlformats.org/drawingml/2006/main">
+              <a:ext uri="{FF2B5EF4-FFF2-40B4-BE49-F238E27FC236}">
+                <a16:creationId xmlns:a16="http://schemas.microsoft.com/office/drawing/2014/main" id="{D3343847-6F2A-4BC8-A558-8DF0A616B020}"/>
+              </a:ext>
+            </a:extLst>
+          </p:cNvPr>
+          <p:cNvSpPr>
+            <a:spLocks xmlns:a="http://schemas.openxmlformats.org/drawingml/2006/main" noGrp="1"/>
+          </p:cNvSpPr>
+          <p:nvPr/>
+        </p:nvSpPr>
+        <p:spPr>
+          <a:xfrm xmlns:a="http://schemas.openxmlformats.org/drawingml/2006/main">
+            <a:off x="609600" y="5010150"/>
+            <a:ext cx="4400550" cy="1104900"/>
           </a:xfrm>
           <a:prstGeom xmlns:a="http://schemas.openxmlformats.org/drawingml/2006/main" prst="rect">
             <a:avLst/>
@@ -5355,29 +7728,51 @@
                 <a:ea typeface="Helvetica Neue"/>
                 <a:cs typeface="Helvetica Neue"/>
               </a:rPr>
-              <a:t>I used the audit to make these choices explicit for the team’s review.</a:t>
-            </a:r>
-          </a:p>
-        </p:txBody>
-      </p:sp>
-      <p:sp>
-        <p:nvSpPr>
-          <p:cNvPr id="6" name="oak-stage">
-            <a:extLst xmlns:a="http://schemas.openxmlformats.org/drawingml/2006/main">
-              <a:ext uri="{FF2B5EF4-FFF2-40B4-BE49-F238E27FC236}">
-                <a16:creationId xmlns:a16="http://schemas.microsoft.com/office/drawing/2014/main" id="{A04B6531-C174-475A-8F4A-002EF231E117}"/>
-              </a:ext>
-            </a:extLst>
-          </p:cNvPr>
-          <p:cNvSpPr>
-            <a:spLocks xmlns:a="http://schemas.openxmlformats.org/drawingml/2006/main" noGrp="1"/>
-          </p:cNvSpPr>
-          <p:nvPr/>
-        </p:nvSpPr>
-        <p:spPr>
-          <a:xfrm xmlns:a="http://schemas.openxmlformats.org/drawingml/2006/main">
-            <a:off x="609600" y="6096000"/>
-            <a:ext cx="4248150" cy="400050"/>
+              <a:t>I raised the cohort, percentile and wording questions before they became interface rules.</a:t>
+            </a:r>
+          </a:p>
+        </p:txBody>
+      </p:sp>
+      <p:pic>
+        <p:nvPicPr>
+          <p:cNvPr id="13" name=""/>
+          <p:cNvPicPr>
+            <a:picLocks xmlns:a="http://schemas.openxmlformats.org/drawingml/2006/main" noChangeAspect="1"/>
+          </p:cNvPicPr>
+          <p:nvPr/>
+        </p:nvPicPr>
+        <p:blipFill>
+          <a:blip xmlns:r="http://schemas.openxmlformats.org/officeDocument/2006/relationships" xmlns:a="http://schemas.openxmlformats.org/drawingml/2006/main" r:embed="R4968b09a0e31449a"/>
+          <a:stretch xmlns:a="http://schemas.openxmlformats.org/drawingml/2006/main"/>
+        </p:blipFill>
+        <p:spPr>
+          <a:xfrm xmlns:a="http://schemas.openxmlformats.org/drawingml/2006/main">
+            <a:off x="5876925" y="2249327"/>
+            <a:ext cx="5572125" cy="3692847"/>
+          </a:xfrm>
+          <a:prstGeom xmlns:a="http://schemas.openxmlformats.org/drawingml/2006/main" prst="rect">
+            <a:avLst/>
+          </a:prstGeom>
+        </p:spPr>
+      </p:pic>
+      <p:sp>
+        <p:nvSpPr>
+          <p:cNvPr id="7" name="sample-label">
+            <a:extLst xmlns:a="http://schemas.openxmlformats.org/drawingml/2006/main">
+              <a:ext uri="{FF2B5EF4-FFF2-40B4-BE49-F238E27FC236}">
+                <a16:creationId xmlns:a16="http://schemas.microsoft.com/office/drawing/2014/main" id="{CCC8A31C-A2BA-4F30-A579-D9698B8EA808}"/>
+              </a:ext>
+            </a:extLst>
+          </p:cNvPr>
+          <p:cNvSpPr>
+            <a:spLocks xmlns:a="http://schemas.openxmlformats.org/drawingml/2006/main" noGrp="1"/>
+          </p:cNvSpPr>
+          <p:nvPr/>
+        </p:nvSpPr>
+        <p:spPr>
+          <a:xfrm xmlns:a="http://schemas.openxmlformats.org/drawingml/2006/main">
+            <a:off x="5915025" y="6153150"/>
+            <a:ext cx="5505450" cy="247650"/>
           </a:xfrm>
           <a:prstGeom xmlns:a="http://schemas.openxmlformats.org/drawingml/2006/main" prst="rect">
             <a:avLst/>
@@ -5416,37 +7811,15 @@
                 <a:ea typeface="Helvetica Neue"/>
                 <a:cs typeface="Helvetica Neue"/>
               </a:rPr>
-              <a:t>Usability evaluation and design recommendations</a:t>
-            </a:r>
-          </a:p>
-        </p:txBody>
-      </p:sp>
-      <p:pic>
-        <p:nvPicPr>
-          <p:cNvPr id="14" name=""/>
-          <p:cNvPicPr>
-            <a:picLocks xmlns:a="http://schemas.openxmlformats.org/drawingml/2006/main" noChangeAspect="1"/>
-          </p:cNvPicPr>
-          <p:nvPr/>
-        </p:nvPicPr>
-        <p:blipFill>
-          <a:blip xmlns:r="http://schemas.openxmlformats.org/officeDocument/2006/relationships" xmlns:a="http://schemas.openxmlformats.org/drawingml/2006/main" r:embed="R4779103d0a2a4be1"/>
-          <a:stretch xmlns:a="http://schemas.openxmlformats.org/drawingml/2006/main"/>
-        </p:blipFill>
-        <p:spPr>
-          <a:xfrm xmlns:a="http://schemas.openxmlformats.org/drawingml/2006/main">
-            <a:off x="5147971" y="1438275"/>
-            <a:ext cx="6429958" cy="5048250"/>
-          </a:xfrm>
-          <a:prstGeom xmlns:a="http://schemas.openxmlformats.org/drawingml/2006/main" prst="rect">
-            <a:avLst/>
-          </a:prstGeom>
-        </p:spPr>
-      </p:pic>
+              <a:t>Original widget, illustrative values</a:t>
+            </a:r>
+          </a:p>
+        </p:txBody>
+      </p:sp>
     </p:spTree>
     <p:extLst>
       <p:ext uri="{BB962C8B-B14F-4D97-AF65-F5344CB8AC3E}">
-        <p14:creationId xmlns:p14="http://schemas.microsoft.com/office/powerpoint/2010/main" val="993783581"/>
+        <p14:creationId xmlns:p14="http://schemas.microsoft.com/office/powerpoint/2010/main" val="1154707154"/>
       </p:ext>
     </p:extLst>
   </p:cSld>
@@ -5474,10 +7847,10 @@
       </p:grpSpPr>
       <p:sp>
         <p:nvSpPr>
-          <p:cNvPr id="13" name="slide-number">
-            <a:extLst xmlns:a="http://schemas.openxmlformats.org/drawingml/2006/main">
-              <a:ext uri="{FF2B5EF4-FFF2-40B4-BE49-F238E27FC236}">
-                <a16:creationId xmlns:a16="http://schemas.microsoft.com/office/drawing/2014/main" id="{46F8FFB7-4167-4492-A44A-8F81B191D013}"/>
+          <p:cNvPr id="9" name="slide-number">
+            <a:extLst xmlns:a="http://schemas.openxmlformats.org/drawingml/2006/main">
+              <a:ext uri="{FF2B5EF4-FFF2-40B4-BE49-F238E27FC236}">
+                <a16:creationId xmlns:a16="http://schemas.microsoft.com/office/drawing/2014/main" id="{F9AA0A8C-1C13-4DFA-A7EC-348FABEB5474}"/>
               </a:ext>
             </a:extLst>
           </p:cNvPr>
@@ -5538,7 +7911,7 @@
           <p:cNvPr id="2" name="section-label">
             <a:extLst xmlns:a="http://schemas.openxmlformats.org/drawingml/2006/main">
               <a:ext uri="{FF2B5EF4-FFF2-40B4-BE49-F238E27FC236}">
-                <a16:creationId xmlns:a16="http://schemas.microsoft.com/office/drawing/2014/main" id="{CCE1B6A1-A170-4512-8330-C27B6BEFAAE7}"/>
+                <a16:creationId xmlns:a16="http://schemas.microsoft.com/office/drawing/2014/main" id="{737C0F3A-5A3D-460F-80AF-70A3E5B3A9F0}"/>
               </a:ext>
             </a:extLst>
           </p:cNvPr>
@@ -5589,7 +7962,7 @@
                 <a:ea typeface="Helvetica Neue"/>
                 <a:cs typeface="Helvetica Neue"/>
               </a:rPr>
-              <a:t>OAK AI   /   ERROR RECOVERY RECOMMENDATION</a:t>
+              <a:t>APPROVAL + OPEN ISSUE   /   SMARTTAGIT, FACTORLAB</a:t>
             </a:r>
           </a:p>
         </p:txBody>
@@ -5599,19 +7972,19 @@
           <p:cNvPr id="3" name="headline">
             <a:extLst xmlns:a="http://schemas.openxmlformats.org/drawingml/2006/main">
               <a:ext uri="{FF2B5EF4-FFF2-40B4-BE49-F238E27FC236}">
-                <a16:creationId xmlns:a16="http://schemas.microsoft.com/office/drawing/2014/main" id="{734ED87D-FB2A-4722-A717-502554CA31B4}"/>
-              </a:ext>
-            </a:extLst>
-          </p:cNvPr>
-          <p:cNvSpPr>
-            <a:spLocks xmlns:a="http://schemas.openxmlformats.org/drawingml/2006/main" noGrp="1"/>
-          </p:cNvSpPr>
-          <p:nvPr/>
-        </p:nvSpPr>
-        <p:spPr>
-          <a:xfrm xmlns:a="http://schemas.openxmlformats.org/drawingml/2006/main">
-            <a:off x="609600" y="1104900"/>
-            <a:ext cx="10953750" cy="800100"/>
+                <a16:creationId xmlns:a16="http://schemas.microsoft.com/office/drawing/2014/main" id="{FF227F9E-1DC7-4B55-B436-159458BAF671}"/>
+              </a:ext>
+            </a:extLst>
+          </p:cNvPr>
+          <p:cNvSpPr>
+            <a:spLocks xmlns:a="http://schemas.openxmlformats.org/drawingml/2006/main" noGrp="1"/>
+          </p:cNvSpPr>
+          <p:nvPr/>
+        </p:nvSpPr>
+        <p:spPr>
+          <a:xfrm xmlns:a="http://schemas.openxmlformats.org/drawingml/2006/main">
+            <a:off x="609600" y="1057275"/>
+            <a:ext cx="5505450" cy="1504950"/>
           </a:xfrm>
           <a:prstGeom xmlns:a="http://schemas.openxmlformats.org/drawingml/2006/main" prst="rect">
             <a:avLst/>
@@ -5632,7 +8005,7 @@
                 <a:spcPct val="110000"/>
               </a:lnSpc>
               <a:buNone/>
-              <a:defRPr sz="3525" b="1">
+              <a:defRPr sz="3750" b="1">
                 <a:solidFill>
                   <a:srgbClr val="192B25"/>
                 </a:solidFill>
@@ -5642,7 +8015,7 @@
               </a:defRPr>
             </a:pPr>
             <a:r>
-              <a:rPr sz="3525" b="1">
+              <a:rPr sz="3750" b="1">
                 <a:solidFill>
                   <a:srgbClr val="192B25"/>
                 </a:solidFill>
@@ -5650,29 +8023,56 @@
                 <a:ea typeface="Helvetica Neue"/>
                 <a:cs typeface="Helvetica Neue"/>
               </a:rPr>
-              <a:t>Error feedback beside the field</a:t>
-            </a:r>
-          </a:p>
-        </p:txBody>
-      </p:sp>
-      <p:sp>
-        <p:nvSpPr>
-          <p:cNvPr id="4" name="original-label">
-            <a:extLst xmlns:a="http://schemas.openxmlformats.org/drawingml/2006/main">
-              <a:ext uri="{FF2B5EF4-FFF2-40B4-BE49-F238E27FC236}">
-                <a16:creationId xmlns:a16="http://schemas.microsoft.com/office/drawing/2014/main" id="{5A0E59DD-BB65-4278-B20E-CDC20A230857}"/>
-              </a:ext>
-            </a:extLst>
-          </p:cNvPr>
-          <p:cNvSpPr>
-            <a:spLocks xmlns:a="http://schemas.openxmlformats.org/drawingml/2006/main" noGrp="1"/>
-          </p:cNvSpPr>
-          <p:nvPr/>
-        </p:nvSpPr>
-        <p:spPr>
-          <a:xfrm xmlns:a="http://schemas.openxmlformats.org/drawingml/2006/main">
-            <a:off x="609600" y="2162175"/>
-            <a:ext cx="5048250" cy="266700"/>
+              <a:t>From an observation</a:t>
+            </a:r>
+          </a:p>
+          <a:p xmlns:a="http://schemas.openxmlformats.org/drawingml/2006/main">
+            <a:pPr>
+              <a:lnSpc>
+                <a:spcPct val="110000"/>
+              </a:lnSpc>
+              <a:buNone/>
+              <a:defRPr sz="3750" b="1">
+                <a:solidFill>
+                  <a:srgbClr val="192B25"/>
+                </a:solidFill>
+                <a:latin typeface="Helvetica Neue"/>
+                <a:ea typeface="Helvetica Neue"/>
+                <a:cs typeface="Helvetica Neue"/>
+              </a:defRPr>
+            </a:pPr>
+            <a:r>
+              <a:rPr sz="3750" b="1">
+                <a:solidFill>
+                  <a:srgbClr val="192B25"/>
+                </a:solidFill>
+                <a:latin typeface="Helvetica Neue"/>
+                <a:ea typeface="Helvetica Neue"/>
+                <a:cs typeface="Helvetica Neue"/>
+              </a:rPr>
+              <a:t>to action</a:t>
+            </a:r>
+          </a:p>
+        </p:txBody>
+      </p:sp>
+      <p:sp>
+        <p:nvSpPr>
+          <p:cNvPr id="4" name="workflow-context">
+            <a:extLst xmlns:a="http://schemas.openxmlformats.org/drawingml/2006/main">
+              <a:ext uri="{FF2B5EF4-FFF2-40B4-BE49-F238E27FC236}">
+                <a16:creationId xmlns:a16="http://schemas.microsoft.com/office/drawing/2014/main" id="{63786DB6-B715-4254-91A5-70E18C588BF3}"/>
+              </a:ext>
+            </a:extLst>
+          </p:cNvPr>
+          <p:cNvSpPr>
+            <a:spLocks xmlns:a="http://schemas.openxmlformats.org/drawingml/2006/main" noGrp="1"/>
+          </p:cNvSpPr>
+          <p:nvPr/>
+        </p:nvSpPr>
+        <p:spPr>
+          <a:xfrm xmlns:a="http://schemas.openxmlformats.org/drawingml/2006/main">
+            <a:off x="609600" y="3076575"/>
+            <a:ext cx="4552950" cy="1181100"/>
           </a:xfrm>
           <a:prstGeom xmlns:a="http://schemas.openxmlformats.org/drawingml/2006/main" prst="rect">
             <a:avLst/>
@@ -5693,47 +8093,47 @@
                 <a:spcPct val="110000"/>
               </a:lnSpc>
               <a:buNone/>
-              <a:defRPr sz="1350" b="1">
-                <a:solidFill>
-                  <a:srgbClr val="244D3C"/>
-                </a:solidFill>
-                <a:latin typeface="Helvetica Neue"/>
-                <a:ea typeface="Helvetica Neue"/>
-                <a:cs typeface="Helvetica Neue"/>
-              </a:defRPr>
-            </a:pPr>
-            <a:r>
-              <a:rPr sz="1350" b="1">
-                <a:solidFill>
-                  <a:srgbClr val="244D3C"/>
-                </a:solidFill>
-                <a:latin typeface="Helvetica Neue"/>
-                <a:ea typeface="Helvetica Neue"/>
-                <a:cs typeface="Helvetica Neue"/>
-              </a:rPr>
-              <a:t>ORIGINAL</a:t>
-            </a:r>
-          </a:p>
-        </p:txBody>
-      </p:sp>
-      <p:sp>
-        <p:nvSpPr>
-          <p:cNvPr id="5" name="proposed-label">
-            <a:extLst xmlns:a="http://schemas.openxmlformats.org/drawingml/2006/main">
-              <a:ext uri="{FF2B5EF4-FFF2-40B4-BE49-F238E27FC236}">
-                <a16:creationId xmlns:a16="http://schemas.microsoft.com/office/drawing/2014/main" id="{A8425475-36CA-4E66-AF4C-C01F13A623A2}"/>
-              </a:ext>
-            </a:extLst>
-          </p:cNvPr>
-          <p:cNvSpPr>
-            <a:spLocks xmlns:a="http://schemas.openxmlformats.org/drawingml/2006/main" noGrp="1"/>
-          </p:cNvSpPr>
-          <p:nvPr/>
-        </p:nvSpPr>
-        <p:spPr>
-          <a:xfrm xmlns:a="http://schemas.openxmlformats.org/drawingml/2006/main">
-            <a:off x="6515100" y="2162175"/>
-            <a:ext cx="5048250" cy="266700"/>
+              <a:defRPr sz="1950" b="0">
+                <a:solidFill>
+                  <a:srgbClr val="192B25"/>
+                </a:solidFill>
+                <a:latin typeface="Helvetica Neue"/>
+                <a:ea typeface="Helvetica Neue"/>
+                <a:cs typeface="Helvetica Neue"/>
+              </a:defRPr>
+            </a:pPr>
+            <a:r>
+              <a:rPr sz="1950" b="0">
+                <a:solidFill>
+                  <a:srgbClr val="192B25"/>
+                </a:solidFill>
+                <a:latin typeface="Helvetica Neue"/>
+                <a:ea typeface="Helvetica Neue"/>
+                <a:cs typeface="Helvetica Neue"/>
+              </a:rPr>
+              <a:t>A flagged answer can lead to a specific next action inside the existing observation flow.</a:t>
+            </a:r>
+          </a:p>
+        </p:txBody>
+      </p:sp>
+      <p:sp>
+        <p:nvSpPr>
+          <p:cNvPr id="5" name="workflow-scope">
+            <a:extLst xmlns:a="http://schemas.openxmlformats.org/drawingml/2006/main">
+              <a:ext uri="{FF2B5EF4-FFF2-40B4-BE49-F238E27FC236}">
+                <a16:creationId xmlns:a16="http://schemas.microsoft.com/office/drawing/2014/main" id="{8681354D-6223-4F57-AE89-AE124CA3F06F}"/>
+              </a:ext>
+            </a:extLst>
+          </p:cNvPr>
+          <p:cNvSpPr>
+            <a:spLocks xmlns:a="http://schemas.openxmlformats.org/drawingml/2006/main" noGrp="1"/>
+          </p:cNvSpPr>
+          <p:nvPr/>
+        </p:nvSpPr>
+        <p:spPr>
+          <a:xfrm xmlns:a="http://schemas.openxmlformats.org/drawingml/2006/main">
+            <a:off x="609600" y="4495800"/>
+            <a:ext cx="4552950" cy="942975"/>
           </a:xfrm>
           <a:prstGeom xmlns:a="http://schemas.openxmlformats.org/drawingml/2006/main" prst="rect">
             <a:avLst/>
@@ -5754,47 +8154,91 @@
                 <a:spcPct val="110000"/>
               </a:lnSpc>
               <a:buNone/>
-              <a:defRPr sz="1350" b="1">
-                <a:solidFill>
-                  <a:srgbClr val="244D3C"/>
-                </a:solidFill>
-                <a:latin typeface="Helvetica Neue"/>
-                <a:ea typeface="Helvetica Neue"/>
-                <a:cs typeface="Helvetica Neue"/>
-              </a:defRPr>
-            </a:pPr>
-            <a:r>
-              <a:rPr sz="1350" b="1">
-                <a:solidFill>
-                  <a:srgbClr val="244D3C"/>
-                </a:solidFill>
-                <a:latin typeface="Helvetica Neue"/>
-                <a:ea typeface="Helvetica Neue"/>
-                <a:cs typeface="Helvetica Neue"/>
-              </a:rPr>
-              <a:t>MY RECOMMENDATION</a:t>
-            </a:r>
-          </a:p>
-        </p:txBody>
-      </p:sp>
-      <p:sp>
-        <p:nvSpPr>
-          <p:cNvPr id="6" name="error-observation">
-            <a:extLst xmlns:a="http://schemas.openxmlformats.org/drawingml/2006/main">
-              <a:ext uri="{FF2B5EF4-FFF2-40B4-BE49-F238E27FC236}">
-                <a16:creationId xmlns:a16="http://schemas.microsoft.com/office/drawing/2014/main" id="{9B4831F5-7BFE-494E-A696-DF1FD20091D3}"/>
-              </a:ext>
-            </a:extLst>
-          </p:cNvPr>
-          <p:cNvSpPr>
-            <a:spLocks xmlns:a="http://schemas.openxmlformats.org/drawingml/2006/main" noGrp="1"/>
-          </p:cNvSpPr>
-          <p:nvPr/>
-        </p:nvSpPr>
-        <p:spPr>
-          <a:xfrm xmlns:a="http://schemas.openxmlformats.org/drawingml/2006/main">
-            <a:off x="609600" y="2562225"/>
-            <a:ext cx="5048250" cy="400050"/>
+              <a:defRPr sz="1725" b="0">
+                <a:solidFill>
+                  <a:srgbClr val="58645D"/>
+                </a:solidFill>
+                <a:latin typeface="Helvetica Neue"/>
+                <a:ea typeface="Helvetica Neue"/>
+                <a:cs typeface="Helvetica Neue"/>
+              </a:defRPr>
+            </a:pPr>
+            <a:r>
+              <a:rPr sz="1725" b="0">
+                <a:solidFill>
+                  <a:srgbClr val="58645D"/>
+                </a:solidFill>
+                <a:latin typeface="Helvetica Neue"/>
+                <a:ea typeface="Helvetica Neue"/>
+                <a:cs typeface="Helvetica Neue"/>
+              </a:rPr>
+              <a:t>I kept the entry contextual and separated issue creation from approval requests.</a:t>
+            </a:r>
+          </a:p>
+        </p:txBody>
+      </p:sp>
+      <p:pic>
+        <p:nvPicPr>
+          <p:cNvPr id="14" name=""/>
+          <p:cNvPicPr>
+            <a:picLocks xmlns:a="http://schemas.openxmlformats.org/drawingml/2006/main" noChangeAspect="1"/>
+          </p:cNvPicPr>
+          <p:nvPr/>
+        </p:nvPicPr>
+        <p:blipFill>
+          <a:blip xmlns:r="http://schemas.openxmlformats.org/officeDocument/2006/relationships" xmlns:a="http://schemas.openxmlformats.org/drawingml/2006/main" r:embed="R90dac52e7cf9458b"/>
+          <a:stretch xmlns:a="http://schemas.openxmlformats.org/drawingml/2006/main"/>
+        </p:blipFill>
+        <p:spPr>
+          <a:xfrm xmlns:a="http://schemas.openxmlformats.org/drawingml/2006/main">
+            <a:off x="6477000" y="1485900"/>
+            <a:ext cx="3714750" cy="1876425"/>
+          </a:xfrm>
+          <a:prstGeom xmlns:a="http://schemas.openxmlformats.org/drawingml/2006/main" prst="rect">
+            <a:avLst/>
+          </a:prstGeom>
+        </p:spPr>
+      </p:pic>
+      <p:pic>
+        <p:nvPicPr>
+          <p:cNvPr id="15" name=""/>
+          <p:cNvPicPr>
+            <a:picLocks xmlns:a="http://schemas.openxmlformats.org/drawingml/2006/main" noChangeAspect="1"/>
+          </p:cNvPicPr>
+          <p:nvPr/>
+        </p:nvPicPr>
+        <p:blipFill>
+          <a:blip xmlns:r="http://schemas.openxmlformats.org/officeDocument/2006/relationships" xmlns:a="http://schemas.openxmlformats.org/drawingml/2006/main" r:embed="R01d84cee808a4f5d"/>
+          <a:stretch xmlns:a="http://schemas.openxmlformats.org/drawingml/2006/main"/>
+        </p:blipFill>
+        <p:spPr>
+          <a:xfrm xmlns:a="http://schemas.openxmlformats.org/drawingml/2006/main">
+            <a:off x="6477000" y="3524250"/>
+            <a:ext cx="3714750" cy="2933700"/>
+          </a:xfrm>
+          <a:prstGeom xmlns:a="http://schemas.openxmlformats.org/drawingml/2006/main" prst="rect">
+            <a:avLst/>
+          </a:prstGeom>
+        </p:spPr>
+      </p:pic>
+      <p:sp>
+        <p:nvSpPr>
+          <p:cNvPr id="8" name="workflow-stage">
+            <a:extLst xmlns:a="http://schemas.openxmlformats.org/drawingml/2006/main">
+              <a:ext uri="{FF2B5EF4-FFF2-40B4-BE49-F238E27FC236}">
+                <a16:creationId xmlns:a16="http://schemas.microsoft.com/office/drawing/2014/main" id="{D0AB0BBA-20E4-4783-97A6-00036E70F045}"/>
+              </a:ext>
+            </a:extLst>
+          </p:cNvPr>
+          <p:cNvSpPr>
+            <a:spLocks xmlns:a="http://schemas.openxmlformats.org/drawingml/2006/main" noGrp="1"/>
+          </p:cNvSpPr>
+          <p:nvPr/>
+        </p:nvSpPr>
+        <p:spPr>
+          <a:xfrm xmlns:a="http://schemas.openxmlformats.org/drawingml/2006/main">
+            <a:off x="609600" y="5924550"/>
+            <a:ext cx="5219700" cy="571500"/>
           </a:xfrm>
           <a:prstGeom xmlns:a="http://schemas.openxmlformats.org/drawingml/2006/main" prst="rect">
             <a:avLst/>
@@ -5815,173 +8259,7 @@
                 <a:spcPct val="110000"/>
               </a:lnSpc>
               <a:buNone/>
-              <a:defRPr sz="1725" b="0">
-                <a:solidFill>
-                  <a:srgbClr val="192B25"/>
-                </a:solidFill>
-                <a:latin typeface="Helvetica Neue"/>
-                <a:ea typeface="Helvetica Neue"/>
-                <a:cs typeface="Helvetica Neue"/>
-              </a:defRPr>
-            </a:pPr>
-            <a:r>
-              <a:rPr sz="1725" b="0">
-                <a:solidFill>
-                  <a:srgbClr val="192B25"/>
-                </a:solidFill>
-                <a:latin typeface="Helvetica Neue"/>
-                <a:ea typeface="Helvetica Neue"/>
-                <a:cs typeface="Helvetica Neue"/>
-              </a:rPr>
-              <a:t>The error sat away from the login fields.</a:t>
-            </a:r>
-          </a:p>
-        </p:txBody>
-      </p:sp>
-      <p:sp>
-        <p:nvSpPr>
-          <p:cNvPr id="7" name="error-recommendation">
-            <a:extLst xmlns:a="http://schemas.openxmlformats.org/drawingml/2006/main">
-              <a:ext uri="{FF2B5EF4-FFF2-40B4-BE49-F238E27FC236}">
-                <a16:creationId xmlns:a16="http://schemas.microsoft.com/office/drawing/2014/main" id="{3659ACDA-D2EC-4F28-BF57-AEDF874367CE}"/>
-              </a:ext>
-            </a:extLst>
-          </p:cNvPr>
-          <p:cNvSpPr>
-            <a:spLocks xmlns:a="http://schemas.openxmlformats.org/drawingml/2006/main" noGrp="1"/>
-          </p:cNvSpPr>
-          <p:nvPr/>
-        </p:nvSpPr>
-        <p:spPr>
-          <a:xfrm xmlns:a="http://schemas.openxmlformats.org/drawingml/2006/main">
-            <a:off x="6515100" y="2562225"/>
-            <a:ext cx="5048250" cy="400050"/>
-          </a:xfrm>
-          <a:prstGeom xmlns:a="http://schemas.openxmlformats.org/drawingml/2006/main" prst="rect">
-            <a:avLst/>
-          </a:prstGeom>
-          <a:noFill xmlns:a="http://schemas.openxmlformats.org/drawingml/2006/main"/>
-          <a:ln xmlns:a="http://schemas.openxmlformats.org/drawingml/2006/main" w="0">
-            <a:noFill/>
-          </a:ln>
-        </p:spPr>
-        <p:txBody>
-          <a:bodyPr xmlns:a="http://schemas.openxmlformats.org/drawingml/2006/main" wrap="square" lIns="0" tIns="0" rIns="0" bIns="0" anchor="t">
-            <a:noAutofit/>
-          </a:bodyPr>
-          <a:lstStyle xmlns:a="http://schemas.openxmlformats.org/drawingml/2006/main"/>
-          <a:p xmlns:a="http://schemas.openxmlformats.org/drawingml/2006/main">
-            <a:pPr>
-              <a:lnSpc>
-                <a:spcPct val="110000"/>
-              </a:lnSpc>
-              <a:buNone/>
-              <a:defRPr sz="1725" b="0">
-                <a:solidFill>
-                  <a:srgbClr val="192B25"/>
-                </a:solidFill>
-                <a:latin typeface="Helvetica Neue"/>
-                <a:ea typeface="Helvetica Neue"/>
-                <a:cs typeface="Helvetica Neue"/>
-              </a:defRPr>
-            </a:pPr>
-            <a:r>
-              <a:rPr sz="1725" b="0">
-                <a:solidFill>
-                  <a:srgbClr val="192B25"/>
-                </a:solidFill>
-                <a:latin typeface="Helvetica Neue"/>
-                <a:ea typeface="Helvetica Neue"/>
-                <a:cs typeface="Helvetica Neue"/>
-              </a:rPr>
-              <a:t>Place the correction beside the field.</a:t>
-            </a:r>
-          </a:p>
-        </p:txBody>
-      </p:sp>
-      <p:pic>
-        <p:nvPicPr>
-          <p:cNvPr id="20" name=""/>
-          <p:cNvPicPr>
-            <a:picLocks xmlns:a="http://schemas.openxmlformats.org/drawingml/2006/main" noChangeAspect="1"/>
-          </p:cNvPicPr>
-          <p:nvPr/>
-        </p:nvPicPr>
-        <p:blipFill>
-          <a:blip xmlns:r="http://schemas.openxmlformats.org/officeDocument/2006/relationships" xmlns:a="http://schemas.openxmlformats.org/drawingml/2006/main" r:embed="R8bf3b30dd7f34c65"/>
-          <a:stretch xmlns:a="http://schemas.openxmlformats.org/drawingml/2006/main"/>
-        </p:blipFill>
-        <p:spPr>
-          <a:xfrm xmlns:a="http://schemas.openxmlformats.org/drawingml/2006/main">
-            <a:off x="1366838" y="3067050"/>
-            <a:ext cx="3533775" cy="2867025"/>
-          </a:xfrm>
-          <a:prstGeom xmlns:a="http://schemas.openxmlformats.org/drawingml/2006/main" prst="rect">
-            <a:avLst/>
-          </a:prstGeom>
-        </p:spPr>
-      </p:pic>
-      <p:pic>
-        <p:nvPicPr>
-          <p:cNvPr id="21" name=""/>
-          <p:cNvPicPr>
-            <a:picLocks xmlns:a="http://schemas.openxmlformats.org/drawingml/2006/main" noChangeAspect="1"/>
-          </p:cNvPicPr>
-          <p:nvPr/>
-        </p:nvPicPr>
-        <p:blipFill>
-          <a:blip xmlns:r="http://schemas.openxmlformats.org/officeDocument/2006/relationships" xmlns:a="http://schemas.openxmlformats.org/drawingml/2006/main" r:embed="Rc33d956caf3f40bb"/>
-          <a:stretch xmlns:a="http://schemas.openxmlformats.org/drawingml/2006/main"/>
-        </p:blipFill>
-        <p:spPr>
-          <a:xfrm xmlns:a="http://schemas.openxmlformats.org/drawingml/2006/main">
-            <a:off x="7038975" y="3067050"/>
-            <a:ext cx="4000500" cy="2867025"/>
-          </a:xfrm>
-          <a:prstGeom xmlns:a="http://schemas.openxmlformats.org/drawingml/2006/main" prst="rect">
-            <a:avLst/>
-          </a:prstGeom>
-        </p:spPr>
-      </p:pic>
-      <p:sp>
-        <p:nvSpPr>
-          <p:cNvPr id="10" name="footer-label">
-            <a:extLst xmlns:a="http://schemas.openxmlformats.org/drawingml/2006/main">
-              <a:ext uri="{FF2B5EF4-FFF2-40B4-BE49-F238E27FC236}">
-                <a16:creationId xmlns:a16="http://schemas.microsoft.com/office/drawing/2014/main" id="{F8635E8F-B4E7-4D24-BF00-4DA19A14C4B2}"/>
-              </a:ext>
-            </a:extLst>
-          </p:cNvPr>
-          <p:cNvSpPr>
-            <a:spLocks xmlns:a="http://schemas.openxmlformats.org/drawingml/2006/main" noGrp="1"/>
-          </p:cNvSpPr>
-          <p:nvPr/>
-        </p:nvSpPr>
-        <p:spPr>
-          <a:xfrm xmlns:a="http://schemas.openxmlformats.org/drawingml/2006/main">
-            <a:off x="609600" y="6076950"/>
-            <a:ext cx="5048250" cy="228600"/>
-          </a:xfrm>
-          <a:prstGeom xmlns:a="http://schemas.openxmlformats.org/drawingml/2006/main" prst="rect">
-            <a:avLst/>
-          </a:prstGeom>
-          <a:noFill xmlns:a="http://schemas.openxmlformats.org/drawingml/2006/main"/>
-          <a:ln xmlns:a="http://schemas.openxmlformats.org/drawingml/2006/main" w="0">
-            <a:noFill/>
-          </a:ln>
-        </p:spPr>
-        <p:txBody>
-          <a:bodyPr xmlns:a="http://schemas.openxmlformats.org/drawingml/2006/main" wrap="square" lIns="0" tIns="0" rIns="0" bIns="0" anchor="t">
-            <a:noAutofit/>
-          </a:bodyPr>
-          <a:lstStyle xmlns:a="http://schemas.openxmlformats.org/drawingml/2006/main"/>
-          <a:p xmlns:a="http://schemas.openxmlformats.org/drawingml/2006/main">
-            <a:pPr>
-              <a:lnSpc>
-                <a:spcPct val="110000"/>
-              </a:lnSpc>
-              <a:buNone/>
-              <a:defRPr sz="1200" b="0">
+              <a:defRPr sz="1275" b="0">
                 <a:solidFill>
                   <a:srgbClr val="58645D"/>
                 </a:solidFill>
@@ -5991,7 +8269,7 @@
               </a:defRPr>
             </a:pPr>
             <a:r>
-              <a:rPr sz="1200" b="0">
+              <a:rPr sz="1275" b="0">
                 <a:solidFill>
                   <a:srgbClr val="58645D"/>
                 </a:solidFill>
@@ -5999,117 +8277,7 @@
                 <a:ea typeface="Helvetica Neue"/>
                 <a:cs typeface="Helvetica Neue"/>
               </a:rPr>
-              <a:t>Separate page-footer message:</a:t>
-            </a:r>
-          </a:p>
-        </p:txBody>
-      </p:sp>
-      <p:pic>
-        <p:nvPicPr>
-          <p:cNvPr id="23" name=""/>
-          <p:cNvPicPr>
-            <a:picLocks xmlns:a="http://schemas.openxmlformats.org/drawingml/2006/main" noChangeAspect="1"/>
-          </p:cNvPicPr>
-          <p:nvPr/>
-        </p:nvPicPr>
-        <p:blipFill>
-          <a:blip xmlns:r="http://schemas.openxmlformats.org/officeDocument/2006/relationships" xmlns:a="http://schemas.openxmlformats.org/drawingml/2006/main" r:embed="Rffef72d5159443a2"/>
-          <a:stretch xmlns:a="http://schemas.openxmlformats.org/drawingml/2006/main"/>
-        </p:blipFill>
-        <p:spPr>
-          <a:xfrm xmlns:a="http://schemas.openxmlformats.org/drawingml/2006/main">
-            <a:off x="609600" y="6372225"/>
-            <a:ext cx="3476625" cy="333375"/>
-          </a:xfrm>
-          <a:prstGeom xmlns:a="http://schemas.openxmlformats.org/drawingml/2006/main" prst="rect">
-            <a:avLst/>
-          </a:prstGeom>
-        </p:spPr>
-      </p:pic>
-      <p:sp>
-        <p:nvSpPr>
-          <p:cNvPr id="12" name="recommendation-status">
-            <a:extLst xmlns:a="http://schemas.openxmlformats.org/drawingml/2006/main">
-              <a:ext uri="{FF2B5EF4-FFF2-40B4-BE49-F238E27FC236}">
-                <a16:creationId xmlns:a16="http://schemas.microsoft.com/office/drawing/2014/main" id="{4AC632A4-8197-4D73-8C92-D9260CDC9ABB}"/>
-              </a:ext>
-            </a:extLst>
-          </p:cNvPr>
-          <p:cNvSpPr>
-            <a:spLocks xmlns:a="http://schemas.openxmlformats.org/drawingml/2006/main" noGrp="1"/>
-          </p:cNvSpPr>
-          <p:nvPr/>
-        </p:nvSpPr>
-        <p:spPr>
-          <a:xfrm xmlns:a="http://schemas.openxmlformats.org/drawingml/2006/main">
-            <a:off x="6515100" y="6115050"/>
-            <a:ext cx="4686300" cy="542925"/>
-          </a:xfrm>
-          <a:prstGeom xmlns:a="http://schemas.openxmlformats.org/drawingml/2006/main" prst="rect">
-            <a:avLst/>
-          </a:prstGeom>
-          <a:noFill xmlns:a="http://schemas.openxmlformats.org/drawingml/2006/main"/>
-          <a:ln xmlns:a="http://schemas.openxmlformats.org/drawingml/2006/main" w="0">
-            <a:noFill/>
-          </a:ln>
-        </p:spPr>
-        <p:txBody>
-          <a:bodyPr xmlns:a="http://schemas.openxmlformats.org/drawingml/2006/main" wrap="square" lIns="0" tIns="0" rIns="0" bIns="0" anchor="t">
-            <a:noAutofit/>
-          </a:bodyPr>
-          <a:lstStyle xmlns:a="http://schemas.openxmlformats.org/drawingml/2006/main"/>
-          <a:p xmlns:a="http://schemas.openxmlformats.org/drawingml/2006/main">
-            <a:pPr>
-              <a:lnSpc>
-                <a:spcPct val="110000"/>
-              </a:lnSpc>
-              <a:buNone/>
-              <a:defRPr sz="1275" b="0">
-                <a:solidFill>
-                  <a:srgbClr val="58645D"/>
-                </a:solidFill>
-                <a:latin typeface="Helvetica Neue"/>
-                <a:ea typeface="Helvetica Neue"/>
-                <a:cs typeface="Helvetica Neue"/>
-              </a:defRPr>
-            </a:pPr>
-            <a:r>
-              <a:rPr sz="1275" b="0">
-                <a:solidFill>
-                  <a:srgbClr val="58645D"/>
-                </a:solidFill>
-                <a:latin typeface="Helvetica Neue"/>
-                <a:ea typeface="Helvetica Neue"/>
-                <a:cs typeface="Helvetica Neue"/>
-              </a:rPr>
-              <a:t>Original recommendation artifact.</a:t>
-            </a:r>
-          </a:p>
-          <a:p xmlns:a="http://schemas.openxmlformats.org/drawingml/2006/main">
-            <a:pPr>
-              <a:lnSpc>
-                <a:spcPct val="110000"/>
-              </a:lnSpc>
-              <a:buNone/>
-              <a:defRPr sz="1275" b="0">
-                <a:solidFill>
-                  <a:srgbClr val="58645D"/>
-                </a:solidFill>
-                <a:latin typeface="Helvetica Neue"/>
-                <a:ea typeface="Helvetica Neue"/>
-                <a:cs typeface="Helvetica Neue"/>
-              </a:defRPr>
-            </a:pPr>
-            <a:r>
-              <a:rPr sz="1275" b="0">
-                <a:solidFill>
-                  <a:srgbClr val="58645D"/>
-                </a:solidFill>
-                <a:latin typeface="Helvetica Neue"/>
-                <a:ea typeface="Helvetica Neue"/>
-                <a:cs typeface="Helvetica Neue"/>
-              </a:rPr>
-              <a:t>Exact shipped variant and usability impact unverified.</a:t>
+              <a:t>September 8 design captures. Engineering reported core Workflow live September 23, 2026.</a:t>
             </a:r>
           </a:p>
         </p:txBody>
@@ -6117,7 +8285,7 @@
     </p:spTree>
     <p:extLst>
       <p:ext uri="{BB962C8B-B14F-4D97-AF65-F5344CB8AC3E}">
-        <p14:creationId xmlns:p14="http://schemas.microsoft.com/office/powerpoint/2010/main" val="1755468734"/>
+        <p14:creationId xmlns:p14="http://schemas.microsoft.com/office/powerpoint/2010/main" val="62513720"/>
       </p:ext>
     </p:extLst>
   </p:cSld>
@@ -6145,10 +8313,10 @@
       </p:grpSpPr>
       <p:sp>
         <p:nvSpPr>
-          <p:cNvPr id="9" name="slide-number">
-            <a:extLst xmlns:a="http://schemas.openxmlformats.org/drawingml/2006/main">
-              <a:ext uri="{FF2B5EF4-FFF2-40B4-BE49-F238E27FC236}">
-                <a16:creationId xmlns:a16="http://schemas.microsoft.com/office/drawing/2014/main" id="{CEE50694-93EC-42D3-89AC-CB4E21C72E50}"/>
+          <p:cNvPr id="11" name="slide-number">
+            <a:extLst xmlns:a="http://schemas.openxmlformats.org/drawingml/2006/main">
+              <a:ext uri="{FF2B5EF4-FFF2-40B4-BE49-F238E27FC236}">
+                <a16:creationId xmlns:a16="http://schemas.microsoft.com/office/drawing/2014/main" id="{8698EC3A-8EBA-4602-890D-1DDFA49C279D}"/>
               </a:ext>
             </a:extLst>
           </p:cNvPr>
@@ -6206,74 +8374,486 @@
       </p:sp>
       <p:sp>
         <p:nvSpPr>
-          <p:cNvPr id="2" name="story-image-surface">
-            <a:extLst xmlns:a="http://schemas.openxmlformats.org/drawingml/2006/main">
-              <a:ext uri="{FF2B5EF4-FFF2-40B4-BE49-F238E27FC236}">
-                <a16:creationId xmlns:a16="http://schemas.microsoft.com/office/drawing/2014/main" id="{24FCD8FB-3E96-494C-B896-89A057291B2C}"/>
-              </a:ext>
-            </a:extLst>
-          </p:cNvPr>
-          <p:cNvSpPr>
-            <a:spLocks xmlns:a="http://schemas.openxmlformats.org/drawingml/2006/main" noGrp="1"/>
-          </p:cNvSpPr>
-          <p:nvPr/>
-        </p:nvSpPr>
-        <p:spPr>
-          <a:xfrm xmlns:a="http://schemas.openxmlformats.org/drawingml/2006/main">
-            <a:off x="6705600" y="0"/>
-            <a:ext cx="5486400" cy="6858000"/>
-          </a:xfrm>
-          <a:prstGeom xmlns:a="http://schemas.openxmlformats.org/drawingml/2006/main" prst="rect">
-            <a:avLst/>
-          </a:prstGeom>
-          <a:solidFill xmlns:a="http://schemas.openxmlformats.org/drawingml/2006/main">
-            <a:srgbClr val="E1E8DB"/>
-          </a:solidFill>
-          <a:ln xmlns:a="http://schemas.openxmlformats.org/drawingml/2006/main" w="0">
-            <a:noFill/>
-          </a:ln>
-        </p:spPr>
+          <p:cNvPr id="2" name="section-label">
+            <a:extLst xmlns:a="http://schemas.openxmlformats.org/drawingml/2006/main">
+              <a:ext uri="{FF2B5EF4-FFF2-40B4-BE49-F238E27FC236}">
+                <a16:creationId xmlns:a16="http://schemas.microsoft.com/office/drawing/2014/main" id="{BAA0E2DE-CB9A-49E5-A901-A334F679EA35}"/>
+              </a:ext>
+            </a:extLst>
+          </p:cNvPr>
+          <p:cNvSpPr>
+            <a:spLocks xmlns:a="http://schemas.openxmlformats.org/drawingml/2006/main" noGrp="1"/>
+          </p:cNvSpPr>
+          <p:nvPr/>
+        </p:nvSpPr>
+        <p:spPr>
+          <a:xfrm xmlns:a="http://schemas.openxmlformats.org/drawingml/2006/main">
+            <a:off x="609600" y="495300"/>
+            <a:ext cx="10668000" cy="266700"/>
+          </a:xfrm>
+          <a:prstGeom xmlns:a="http://schemas.openxmlformats.org/drawingml/2006/main" prst="rect">
+            <a:avLst/>
+          </a:prstGeom>
+          <a:noFill xmlns:a="http://schemas.openxmlformats.org/drawingml/2006/main"/>
+          <a:ln xmlns:a="http://schemas.openxmlformats.org/drawingml/2006/main" w="0">
+            <a:noFill/>
+          </a:ln>
+        </p:spPr>
+        <p:txBody>
+          <a:bodyPr xmlns:a="http://schemas.openxmlformats.org/drawingml/2006/main" wrap="square" lIns="0" tIns="0" rIns="0" bIns="0" anchor="t">
+            <a:noAutofit/>
+          </a:bodyPr>
+          <a:lstStyle xmlns:a="http://schemas.openxmlformats.org/drawingml/2006/main"/>
+          <a:p xmlns:a="http://schemas.openxmlformats.org/drawingml/2006/main">
+            <a:pPr>
+              <a:lnSpc>
+                <a:spcPct val="110000"/>
+              </a:lnSpc>
+              <a:buNone/>
+              <a:defRPr sz="1200" b="1">
+                <a:solidFill>
+                  <a:srgbClr val="244D3C"/>
+                </a:solidFill>
+                <a:latin typeface="Helvetica Neue"/>
+                <a:ea typeface="Helvetica Neue"/>
+                <a:cs typeface="Helvetica Neue"/>
+              </a:defRPr>
+            </a:pPr>
+            <a:r>
+              <a:rPr sz="1200" b="1">
+                <a:solidFill>
+                  <a:srgbClr val="244D3C"/>
+                </a:solidFill>
+                <a:latin typeface="Helvetica Neue"/>
+                <a:ea typeface="Helvetica Neue"/>
+                <a:cs typeface="Helvetica Neue"/>
+              </a:rPr>
+              <a:t>APPROVAL + OPEN ISSUE   /   TASK-SPECIFIC FORMS</a:t>
+            </a:r>
+          </a:p>
+        </p:txBody>
+      </p:sp>
+      <p:sp>
+        <p:nvSpPr>
+          <p:cNvPr id="3" name="headline">
+            <a:extLst xmlns:a="http://schemas.openxmlformats.org/drawingml/2006/main">
+              <a:ext uri="{FF2B5EF4-FFF2-40B4-BE49-F238E27FC236}">
+                <a16:creationId xmlns:a16="http://schemas.microsoft.com/office/drawing/2014/main" id="{4847F674-6B44-4E09-BD73-99F1A5C11BFE}"/>
+              </a:ext>
+            </a:extLst>
+          </p:cNvPr>
+          <p:cNvSpPr>
+            <a:spLocks xmlns:a="http://schemas.openxmlformats.org/drawingml/2006/main" noGrp="1"/>
+          </p:cNvSpPr>
+          <p:nvPr/>
+        </p:nvSpPr>
+        <p:spPr>
+          <a:xfrm xmlns:a="http://schemas.openxmlformats.org/drawingml/2006/main">
+            <a:off x="609600" y="1095375"/>
+            <a:ext cx="10953750" cy="790575"/>
+          </a:xfrm>
+          <a:prstGeom xmlns:a="http://schemas.openxmlformats.org/drawingml/2006/main" prst="rect">
+            <a:avLst/>
+          </a:prstGeom>
+          <a:noFill xmlns:a="http://schemas.openxmlformats.org/drawingml/2006/main"/>
+          <a:ln xmlns:a="http://schemas.openxmlformats.org/drawingml/2006/main" w="0">
+            <a:noFill/>
+          </a:ln>
+        </p:spPr>
+        <p:txBody>
+          <a:bodyPr xmlns:a="http://schemas.openxmlformats.org/drawingml/2006/main" wrap="square" lIns="0" tIns="0" rIns="0" bIns="0" anchor="t">
+            <a:noAutofit/>
+          </a:bodyPr>
+          <a:lstStyle xmlns:a="http://schemas.openxmlformats.org/drawingml/2006/main"/>
+          <a:p xmlns:a="http://schemas.openxmlformats.org/drawingml/2006/main">
+            <a:pPr>
+              <a:lnSpc>
+                <a:spcPct val="110000"/>
+              </a:lnSpc>
+              <a:buNone/>
+              <a:defRPr sz="3450" b="1">
+                <a:solidFill>
+                  <a:srgbClr val="192B25"/>
+                </a:solidFill>
+                <a:latin typeface="Helvetica Neue"/>
+                <a:ea typeface="Helvetica Neue"/>
+                <a:cs typeface="Helvetica Neue"/>
+              </a:defRPr>
+            </a:pPr>
+            <a:r>
+              <a:rPr sz="3450" b="1">
+                <a:solidFill>
+                  <a:srgbClr val="192B25"/>
+                </a:solidFill>
+                <a:latin typeface="Helvetica Neue"/>
+                <a:ea typeface="Helvetica Neue"/>
+                <a:cs typeface="Helvetica Neue"/>
+              </a:rPr>
+              <a:t>Shared fields, different decisions</a:t>
+            </a:r>
+          </a:p>
+        </p:txBody>
+      </p:sp>
+      <p:sp>
+        <p:nvSpPr>
+          <p:cNvPr id="4" name="issue-label">
+            <a:extLst xmlns:a="http://schemas.openxmlformats.org/drawingml/2006/main">
+              <a:ext uri="{FF2B5EF4-FFF2-40B4-BE49-F238E27FC236}">
+                <a16:creationId xmlns:a16="http://schemas.microsoft.com/office/drawing/2014/main" id="{67D7BD40-1DE3-4A3E-A549-522AD12FE03E}"/>
+              </a:ext>
+            </a:extLst>
+          </p:cNvPr>
+          <p:cNvSpPr>
+            <a:spLocks xmlns:a="http://schemas.openxmlformats.org/drawingml/2006/main" noGrp="1"/>
+          </p:cNvSpPr>
+          <p:nvPr/>
+        </p:nvSpPr>
+        <p:spPr>
+          <a:xfrm xmlns:a="http://schemas.openxmlformats.org/drawingml/2006/main">
+            <a:off x="1524000" y="1847850"/>
+            <a:ext cx="4333875" cy="276225"/>
+          </a:xfrm>
+          <a:prstGeom xmlns:a="http://schemas.openxmlformats.org/drawingml/2006/main" prst="rect">
+            <a:avLst/>
+          </a:prstGeom>
+          <a:noFill xmlns:a="http://schemas.openxmlformats.org/drawingml/2006/main"/>
+          <a:ln xmlns:a="http://schemas.openxmlformats.org/drawingml/2006/main" w="0">
+            <a:noFill/>
+          </a:ln>
+        </p:spPr>
+        <p:txBody>
+          <a:bodyPr xmlns:a="http://schemas.openxmlformats.org/drawingml/2006/main" wrap="square" lIns="0" tIns="0" rIns="0" bIns="0" anchor="t">
+            <a:noAutofit/>
+          </a:bodyPr>
+          <a:lstStyle xmlns:a="http://schemas.openxmlformats.org/drawingml/2006/main"/>
+          <a:p xmlns:a="http://schemas.openxmlformats.org/drawingml/2006/main">
+            <a:pPr>
+              <a:lnSpc>
+                <a:spcPct val="110000"/>
+              </a:lnSpc>
+              <a:buNone/>
+              <a:defRPr sz="1350" b="1">
+                <a:solidFill>
+                  <a:srgbClr val="244D3C"/>
+                </a:solidFill>
+                <a:latin typeface="Helvetica Neue"/>
+                <a:ea typeface="Helvetica Neue"/>
+                <a:cs typeface="Helvetica Neue"/>
+              </a:defRPr>
+            </a:pPr>
+            <a:r>
+              <a:rPr sz="1350" b="1">
+                <a:solidFill>
+                  <a:srgbClr val="244D3C"/>
+                </a:solidFill>
+                <a:latin typeface="Helvetica Neue"/>
+                <a:ea typeface="Helvetica Neue"/>
+                <a:cs typeface="Helvetica Neue"/>
+              </a:rPr>
+              <a:t>OPEN ISSUE</a:t>
+            </a:r>
+          </a:p>
+        </p:txBody>
+      </p:sp>
+      <p:sp>
+        <p:nvSpPr>
+          <p:cNvPr id="5" name="approval-label">
+            <a:extLst xmlns:a="http://schemas.openxmlformats.org/drawingml/2006/main">
+              <a:ext uri="{FF2B5EF4-FFF2-40B4-BE49-F238E27FC236}">
+                <a16:creationId xmlns:a16="http://schemas.microsoft.com/office/drawing/2014/main" id="{A1658FC5-E26D-48BA-93D6-47CAD47CCF98}"/>
+              </a:ext>
+            </a:extLst>
+          </p:cNvPr>
+          <p:cNvSpPr>
+            <a:spLocks xmlns:a="http://schemas.openxmlformats.org/drawingml/2006/main" noGrp="1"/>
+          </p:cNvSpPr>
+          <p:nvPr/>
+        </p:nvSpPr>
+        <p:spPr>
+          <a:xfrm xmlns:a="http://schemas.openxmlformats.org/drawingml/2006/main">
+            <a:off x="7277100" y="1847850"/>
+            <a:ext cx="4333875" cy="276225"/>
+          </a:xfrm>
+          <a:prstGeom xmlns:a="http://schemas.openxmlformats.org/drawingml/2006/main" prst="rect">
+            <a:avLst/>
+          </a:prstGeom>
+          <a:noFill xmlns:a="http://schemas.openxmlformats.org/drawingml/2006/main"/>
+          <a:ln xmlns:a="http://schemas.openxmlformats.org/drawingml/2006/main" w="0">
+            <a:noFill/>
+          </a:ln>
+        </p:spPr>
+        <p:txBody>
+          <a:bodyPr xmlns:a="http://schemas.openxmlformats.org/drawingml/2006/main" wrap="square" lIns="0" tIns="0" rIns="0" bIns="0" anchor="t">
+            <a:noAutofit/>
+          </a:bodyPr>
+          <a:lstStyle xmlns:a="http://schemas.openxmlformats.org/drawingml/2006/main"/>
+          <a:p xmlns:a="http://schemas.openxmlformats.org/drawingml/2006/main">
+            <a:pPr>
+              <a:lnSpc>
+                <a:spcPct val="110000"/>
+              </a:lnSpc>
+              <a:buNone/>
+              <a:defRPr sz="1350" b="1">
+                <a:solidFill>
+                  <a:srgbClr val="244D3C"/>
+                </a:solidFill>
+                <a:latin typeface="Helvetica Neue"/>
+                <a:ea typeface="Helvetica Neue"/>
+                <a:cs typeface="Helvetica Neue"/>
+              </a:defRPr>
+            </a:pPr>
+            <a:r>
+              <a:rPr sz="1350" b="1">
+                <a:solidFill>
+                  <a:srgbClr val="244D3C"/>
+                </a:solidFill>
+                <a:latin typeface="Helvetica Neue"/>
+                <a:ea typeface="Helvetica Neue"/>
+                <a:cs typeface="Helvetica Neue"/>
+              </a:rPr>
+              <a:t>REQUEST APPROVAL</a:t>
+            </a:r>
+          </a:p>
+        </p:txBody>
+      </p:sp>
+      <p:sp>
+        <p:nvSpPr>
+          <p:cNvPr id="6" name="issue-difference">
+            <a:extLst xmlns:a="http://schemas.openxmlformats.org/drawingml/2006/main">
+              <a:ext uri="{FF2B5EF4-FFF2-40B4-BE49-F238E27FC236}">
+                <a16:creationId xmlns:a16="http://schemas.microsoft.com/office/drawing/2014/main" id="{89A48477-27B3-4907-A16F-1CEE79E26C7D}"/>
+              </a:ext>
+            </a:extLst>
+          </p:cNvPr>
+          <p:cNvSpPr>
+            <a:spLocks xmlns:a="http://schemas.openxmlformats.org/drawingml/2006/main" noGrp="1"/>
+          </p:cNvSpPr>
+          <p:nvPr/>
+        </p:nvSpPr>
+        <p:spPr>
+          <a:xfrm xmlns:a="http://schemas.openxmlformats.org/drawingml/2006/main">
+            <a:off x="1524000" y="2152650"/>
+            <a:ext cx="4333875" cy="514350"/>
+          </a:xfrm>
+          <a:prstGeom xmlns:a="http://schemas.openxmlformats.org/drawingml/2006/main" prst="rect">
+            <a:avLst/>
+          </a:prstGeom>
+          <a:noFill xmlns:a="http://schemas.openxmlformats.org/drawingml/2006/main"/>
+          <a:ln xmlns:a="http://schemas.openxmlformats.org/drawingml/2006/main" w="0">
+            <a:noFill/>
+          </a:ln>
+        </p:spPr>
+        <p:txBody>
+          <a:bodyPr xmlns:a="http://schemas.openxmlformats.org/drawingml/2006/main" wrap="square" lIns="0" tIns="0" rIns="0" bIns="0" anchor="t">
+            <a:noAutofit/>
+          </a:bodyPr>
+          <a:lstStyle xmlns:a="http://schemas.openxmlformats.org/drawingml/2006/main"/>
+          <a:p xmlns:a="http://schemas.openxmlformats.org/drawingml/2006/main">
+            <a:pPr>
+              <a:lnSpc>
+                <a:spcPct val="110000"/>
+              </a:lnSpc>
+              <a:buNone/>
+              <a:defRPr sz="1575" b="0">
+                <a:solidFill>
+                  <a:srgbClr val="192B25"/>
+                </a:solidFill>
+                <a:latin typeface="Helvetica Neue"/>
+                <a:ea typeface="Helvetica Neue"/>
+                <a:cs typeface="Helvetica Neue"/>
+              </a:defRPr>
+            </a:pPr>
+            <a:r>
+              <a:rPr sz="1575" b="0">
+                <a:solidFill>
+                  <a:srgbClr val="192B25"/>
+                </a:solidFill>
+                <a:latin typeface="Helvetica Neue"/>
+                <a:ea typeface="Helvetica Neue"/>
+                <a:cs typeface="Helvetica Neue"/>
+              </a:rPr>
+              <a:t>Open status</a:t>
+            </a:r>
+          </a:p>
+          <a:p xmlns:a="http://schemas.openxmlformats.org/drawingml/2006/main">
+            <a:pPr>
+              <a:lnSpc>
+                <a:spcPct val="110000"/>
+              </a:lnSpc>
+              <a:buNone/>
+              <a:defRPr sz="1575" b="0">
+                <a:solidFill>
+                  <a:srgbClr val="192B25"/>
+                </a:solidFill>
+                <a:latin typeface="Helvetica Neue"/>
+                <a:ea typeface="Helvetica Neue"/>
+                <a:cs typeface="Helvetica Neue"/>
+              </a:defRPr>
+            </a:pPr>
+            <a:r>
+              <a:rPr sz="1575" b="0">
+                <a:solidFill>
+                  <a:srgbClr val="192B25"/>
+                </a:solidFill>
+                <a:latin typeface="Helvetica Neue"/>
+                <a:ea typeface="Helvetica Neue"/>
+                <a:cs typeface="Helvetica Neue"/>
+              </a:rPr>
+              <a:t>No required assignee marker</a:t>
+            </a:r>
+          </a:p>
+        </p:txBody>
+      </p:sp>
+      <p:sp>
+        <p:nvSpPr>
+          <p:cNvPr id="7" name="approval-difference">
+            <a:extLst xmlns:a="http://schemas.openxmlformats.org/drawingml/2006/main">
+              <a:ext uri="{FF2B5EF4-FFF2-40B4-BE49-F238E27FC236}">
+                <a16:creationId xmlns:a16="http://schemas.microsoft.com/office/drawing/2014/main" id="{4506BF08-A7C9-4778-8D5F-4F82E2E494CE}"/>
+              </a:ext>
+            </a:extLst>
+          </p:cNvPr>
+          <p:cNvSpPr>
+            <a:spLocks xmlns:a="http://schemas.openxmlformats.org/drawingml/2006/main" noGrp="1"/>
+          </p:cNvSpPr>
+          <p:nvPr/>
+        </p:nvSpPr>
+        <p:spPr>
+          <a:xfrm xmlns:a="http://schemas.openxmlformats.org/drawingml/2006/main">
+            <a:off x="7277100" y="2152650"/>
+            <a:ext cx="4333875" cy="514350"/>
+          </a:xfrm>
+          <a:prstGeom xmlns:a="http://schemas.openxmlformats.org/drawingml/2006/main" prst="rect">
+            <a:avLst/>
+          </a:prstGeom>
+          <a:noFill xmlns:a="http://schemas.openxmlformats.org/drawingml/2006/main"/>
+          <a:ln xmlns:a="http://schemas.openxmlformats.org/drawingml/2006/main" w="0">
+            <a:noFill/>
+          </a:ln>
+        </p:spPr>
+        <p:txBody>
+          <a:bodyPr xmlns:a="http://schemas.openxmlformats.org/drawingml/2006/main" wrap="square" lIns="0" tIns="0" rIns="0" bIns="0" anchor="t">
+            <a:noAutofit/>
+          </a:bodyPr>
+          <a:lstStyle xmlns:a="http://schemas.openxmlformats.org/drawingml/2006/main"/>
+          <a:p xmlns:a="http://schemas.openxmlformats.org/drawingml/2006/main">
+            <a:pPr>
+              <a:lnSpc>
+                <a:spcPct val="110000"/>
+              </a:lnSpc>
+              <a:buNone/>
+              <a:defRPr sz="1575" b="0">
+                <a:solidFill>
+                  <a:srgbClr val="192B25"/>
+                </a:solidFill>
+                <a:latin typeface="Helvetica Neue"/>
+                <a:ea typeface="Helvetica Neue"/>
+                <a:cs typeface="Helvetica Neue"/>
+              </a:defRPr>
+            </a:pPr>
+            <a:r>
+              <a:rPr sz="1575" b="0">
+                <a:solidFill>
+                  <a:srgbClr val="192B25"/>
+                </a:solidFill>
+                <a:latin typeface="Helvetica Neue"/>
+                <a:ea typeface="Helvetica Neue"/>
+                <a:cs typeface="Helvetica Neue"/>
+              </a:rPr>
+              <a:t>Awaiting approval</a:t>
+            </a:r>
+          </a:p>
+          <a:p xmlns:a="http://schemas.openxmlformats.org/drawingml/2006/main">
+            <a:pPr>
+              <a:lnSpc>
+                <a:spcPct val="110000"/>
+              </a:lnSpc>
+              <a:buNone/>
+              <a:defRPr sz="1575" b="0">
+                <a:solidFill>
+                  <a:srgbClr val="192B25"/>
+                </a:solidFill>
+                <a:latin typeface="Helvetica Neue"/>
+                <a:ea typeface="Helvetica Neue"/>
+                <a:cs typeface="Helvetica Neue"/>
+              </a:defRPr>
+            </a:pPr>
+            <a:r>
+              <a:rPr sz="1575" b="0">
+                <a:solidFill>
+                  <a:srgbClr val="192B25"/>
+                </a:solidFill>
+                <a:latin typeface="Helvetica Neue"/>
+                <a:ea typeface="Helvetica Neue"/>
+                <a:cs typeface="Helvetica Neue"/>
+              </a:rPr>
+              <a:t>Required assignee marker</a:t>
+            </a:r>
+          </a:p>
+        </p:txBody>
       </p:sp>
       <p:pic>
         <p:nvPicPr>
-          <p:cNvPr id="11" name=""/>
+          <p:cNvPr id="18" name=""/>
           <p:cNvPicPr>
             <a:picLocks xmlns:a="http://schemas.openxmlformats.org/drawingml/2006/main" noChangeAspect="1"/>
           </p:cNvPicPr>
           <p:nvPr/>
         </p:nvPicPr>
         <p:blipFill>
-          <a:blip xmlns:r="http://schemas.openxmlformats.org/officeDocument/2006/relationships" xmlns:a="http://schemas.openxmlformats.org/drawingml/2006/main" r:embed="R6eb0e09ddffa4fa6"/>
+          <a:blip xmlns:r="http://schemas.openxmlformats.org/officeDocument/2006/relationships" xmlns:a="http://schemas.openxmlformats.org/drawingml/2006/main" r:embed="R7efeda7dadd2440c"/>
           <a:stretch xmlns:a="http://schemas.openxmlformats.org/drawingml/2006/main"/>
         </p:blipFill>
         <p:spPr>
           <a:xfrm xmlns:a="http://schemas.openxmlformats.org/drawingml/2006/main">
-            <a:off x="7010400" y="1466850"/>
-            <a:ext cx="4876800" cy="4876800"/>
+            <a:off x="1820820" y="2647950"/>
+            <a:ext cx="3006811" cy="3810000"/>
           </a:xfrm>
           <a:prstGeom xmlns:a="http://schemas.openxmlformats.org/drawingml/2006/main" prst="rect">
             <a:avLst/>
           </a:prstGeom>
         </p:spPr>
       </p:pic>
-      <p:sp>
-        <p:nvSpPr>
-          <p:cNvPr id="4" name="section-label">
-            <a:extLst xmlns:a="http://schemas.openxmlformats.org/drawingml/2006/main">
-              <a:ext uri="{FF2B5EF4-FFF2-40B4-BE49-F238E27FC236}">
-                <a16:creationId xmlns:a16="http://schemas.microsoft.com/office/drawing/2014/main" id="{7A81CFA2-5C78-4667-A737-30FD9EBEFFB0}"/>
-              </a:ext>
-            </a:extLst>
-          </p:cNvPr>
-          <p:cNvSpPr>
-            <a:spLocks xmlns:a="http://schemas.openxmlformats.org/drawingml/2006/main" noGrp="1"/>
-          </p:cNvSpPr>
-          <p:nvPr/>
-        </p:nvSpPr>
-        <p:spPr>
-          <a:xfrm xmlns:a="http://schemas.openxmlformats.org/drawingml/2006/main">
-            <a:off x="609600" y="514350"/>
-            <a:ext cx="5753100" cy="266700"/>
+      <p:pic>
+        <p:nvPicPr>
+          <p:cNvPr id="19" name=""/>
+          <p:cNvPicPr>
+            <a:picLocks xmlns:a="http://schemas.openxmlformats.org/drawingml/2006/main" noChangeAspect="1"/>
+          </p:cNvPicPr>
+          <p:nvPr/>
+        </p:nvPicPr>
+        <p:blipFill>
+          <a:blip xmlns:r="http://schemas.openxmlformats.org/officeDocument/2006/relationships" xmlns:a="http://schemas.openxmlformats.org/drawingml/2006/main" r:embed="R9b9f6b33b40f4524"/>
+          <a:stretch xmlns:a="http://schemas.openxmlformats.org/drawingml/2006/main"/>
+        </p:blipFill>
+        <p:spPr>
+          <a:xfrm xmlns:a="http://schemas.openxmlformats.org/drawingml/2006/main">
+            <a:off x="7573920" y="2647950"/>
+            <a:ext cx="3006811" cy="3810000"/>
+          </a:xfrm>
+          <a:prstGeom xmlns:a="http://schemas.openxmlformats.org/drawingml/2006/main" prst="rect">
+            <a:avLst/>
+          </a:prstGeom>
+        </p:spPr>
+      </p:pic>
+      <p:sp>
+        <p:nvSpPr>
+          <p:cNvPr id="10" name="forms-stage">
+            <a:extLst xmlns:a="http://schemas.openxmlformats.org/drawingml/2006/main">
+              <a:ext uri="{FF2B5EF4-FFF2-40B4-BE49-F238E27FC236}">
+                <a16:creationId xmlns:a16="http://schemas.microsoft.com/office/drawing/2014/main" id="{FFA420A6-39CE-4F1B-968D-DBED416250AB}"/>
+              </a:ext>
+            </a:extLst>
+          </p:cNvPr>
+          <p:cNvSpPr>
+            <a:spLocks xmlns:a="http://schemas.openxmlformats.org/drawingml/2006/main" noGrp="1"/>
+          </p:cNvSpPr>
+          <p:nvPr/>
+        </p:nvSpPr>
+        <p:spPr>
+          <a:xfrm xmlns:a="http://schemas.openxmlformats.org/drawingml/2006/main">
+            <a:off x="609600" y="6477000"/>
+            <a:ext cx="10668000" cy="266700"/>
           </a:xfrm>
           <a:prstGeom xmlns:a="http://schemas.openxmlformats.org/drawingml/2006/main" prst="rect">
             <a:avLst/>
@@ -6294,217 +8874,7 @@
                 <a:spcPct val="110000"/>
               </a:lnSpc>
               <a:buNone/>
-              <a:defRPr sz="1200" b="1">
-                <a:solidFill>
-                  <a:srgbClr val="244D3C"/>
-                </a:solidFill>
-                <a:latin typeface="Helvetica Neue"/>
-                <a:ea typeface="Helvetica Neue"/>
-                <a:cs typeface="Helvetica Neue"/>
-              </a:defRPr>
-            </a:pPr>
-            <a:r>
-              <a:rPr sz="1200" b="1">
-                <a:solidFill>
-                  <a:srgbClr val="244D3C"/>
-                </a:solidFill>
-                <a:latin typeface="Helvetica Neue"/>
-                <a:ea typeface="Helvetica Neue"/>
-                <a:cs typeface="Helvetica Neue"/>
-              </a:rPr>
-              <a:t>THE THREAD THROUGH MY WORK</a:t>
-            </a:r>
-          </a:p>
-        </p:txBody>
-      </p:sp>
-      <p:sp>
-        <p:nvSpPr>
-          <p:cNvPr id="5" name="headline">
-            <a:extLst xmlns:a="http://schemas.openxmlformats.org/drawingml/2006/main">
-              <a:ext uri="{FF2B5EF4-FFF2-40B4-BE49-F238E27FC236}">
-                <a16:creationId xmlns:a16="http://schemas.microsoft.com/office/drawing/2014/main" id="{B09ADDBC-2D33-45D9-A160-B713EF2C84DC}"/>
-              </a:ext>
-            </a:extLst>
-          </p:cNvPr>
-          <p:cNvSpPr>
-            <a:spLocks xmlns:a="http://schemas.openxmlformats.org/drawingml/2006/main" noGrp="1"/>
-          </p:cNvSpPr>
-          <p:nvPr/>
-        </p:nvSpPr>
-        <p:spPr>
-          <a:xfrm xmlns:a="http://schemas.openxmlformats.org/drawingml/2006/main">
-            <a:off x="609600" y="1438275"/>
-            <a:ext cx="5734050" cy="1657350"/>
-          </a:xfrm>
-          <a:prstGeom xmlns:a="http://schemas.openxmlformats.org/drawingml/2006/main" prst="rect">
-            <a:avLst/>
-          </a:prstGeom>
-          <a:noFill xmlns:a="http://schemas.openxmlformats.org/drawingml/2006/main"/>
-          <a:ln xmlns:a="http://schemas.openxmlformats.org/drawingml/2006/main" w="0">
-            <a:noFill/>
-          </a:ln>
-        </p:spPr>
-        <p:txBody>
-          <a:bodyPr xmlns:a="http://schemas.openxmlformats.org/drawingml/2006/main" wrap="square" lIns="0" tIns="0" rIns="0" bIns="0" anchor="t">
-            <a:noAutofit/>
-          </a:bodyPr>
-          <a:lstStyle xmlns:a="http://schemas.openxmlformats.org/drawingml/2006/main"/>
-          <a:p xmlns:a="http://schemas.openxmlformats.org/drawingml/2006/main">
-            <a:pPr>
-              <a:lnSpc>
-                <a:spcPct val="110000"/>
-              </a:lnSpc>
-              <a:buNone/>
-              <a:defRPr sz="3675" b="1">
-                <a:solidFill>
-                  <a:srgbClr val="192B25"/>
-                </a:solidFill>
-                <a:latin typeface="Helvetica Neue"/>
-                <a:ea typeface="Helvetica Neue"/>
-                <a:cs typeface="Helvetica Neue"/>
-              </a:defRPr>
-            </a:pPr>
-            <a:r>
-              <a:rPr sz="3675" b="1">
-                <a:solidFill>
-                  <a:srgbClr val="192B25"/>
-                </a:solidFill>
-                <a:latin typeface="Helvetica Neue"/>
-                <a:ea typeface="Helvetica Neue"/>
-                <a:cs typeface="Helvetica Neue"/>
-              </a:rPr>
-              <a:t>I started by listening</a:t>
-            </a:r>
-          </a:p>
-          <a:p xmlns:a="http://schemas.openxmlformats.org/drawingml/2006/main">
-            <a:pPr>
-              <a:lnSpc>
-                <a:spcPct val="110000"/>
-              </a:lnSpc>
-              <a:buNone/>
-              <a:defRPr sz="3675" b="1">
-                <a:solidFill>
-                  <a:srgbClr val="192B25"/>
-                </a:solidFill>
-                <a:latin typeface="Helvetica Neue"/>
-                <a:ea typeface="Helvetica Neue"/>
-                <a:cs typeface="Helvetica Neue"/>
-              </a:defRPr>
-            </a:pPr>
-            <a:r>
-              <a:rPr sz="3675" b="1">
-                <a:solidFill>
-                  <a:srgbClr val="192B25"/>
-                </a:solidFill>
-                <a:latin typeface="Helvetica Neue"/>
-                <a:ea typeface="Helvetica Neue"/>
-                <a:cs typeface="Helvetica Neue"/>
-              </a:rPr>
-              <a:t>to people’s stories</a:t>
-            </a:r>
-          </a:p>
-        </p:txBody>
-      </p:sp>
-      <p:sp>
-        <p:nvSpPr>
-          <p:cNvPr id="6" name="story-documentary">
-            <a:extLst xmlns:a="http://schemas.openxmlformats.org/drawingml/2006/main">
-              <a:ext uri="{FF2B5EF4-FFF2-40B4-BE49-F238E27FC236}">
-                <a16:creationId xmlns:a16="http://schemas.microsoft.com/office/drawing/2014/main" id="{B129A756-3798-4BEA-952F-E2315739255B}"/>
-              </a:ext>
-            </a:extLst>
-          </p:cNvPr>
-          <p:cNvSpPr>
-            <a:spLocks xmlns:a="http://schemas.openxmlformats.org/drawingml/2006/main" noGrp="1"/>
-          </p:cNvSpPr>
-          <p:nvPr/>
-        </p:nvSpPr>
-        <p:spPr>
-          <a:xfrm xmlns:a="http://schemas.openxmlformats.org/drawingml/2006/main">
-            <a:off x="609600" y="3609975"/>
-            <a:ext cx="5610225" cy="1095375"/>
-          </a:xfrm>
-          <a:prstGeom xmlns:a="http://schemas.openxmlformats.org/drawingml/2006/main" prst="rect">
-            <a:avLst/>
-          </a:prstGeom>
-          <a:noFill xmlns:a="http://schemas.openxmlformats.org/drawingml/2006/main"/>
-          <a:ln xmlns:a="http://schemas.openxmlformats.org/drawingml/2006/main" w="0">
-            <a:noFill/>
-          </a:ln>
-        </p:spPr>
-        <p:txBody>
-          <a:bodyPr xmlns:a="http://schemas.openxmlformats.org/drawingml/2006/main" wrap="square" lIns="0" tIns="0" rIns="0" bIns="0" anchor="t">
-            <a:noAutofit/>
-          </a:bodyPr>
-          <a:lstStyle xmlns:a="http://schemas.openxmlformats.org/drawingml/2006/main"/>
-          <a:p xmlns:a="http://schemas.openxmlformats.org/drawingml/2006/main">
-            <a:pPr>
-              <a:lnSpc>
-                <a:spcPct val="110000"/>
-              </a:lnSpc>
-              <a:buNone/>
-              <a:defRPr sz="1950" b="0">
-                <a:solidFill>
-                  <a:srgbClr val="192B25"/>
-                </a:solidFill>
-                <a:latin typeface="Helvetica Neue"/>
-                <a:ea typeface="Helvetica Neue"/>
-                <a:cs typeface="Helvetica Neue"/>
-              </a:defRPr>
-            </a:pPr>
-            <a:r>
-              <a:rPr sz="1950" b="0">
-                <a:solidFill>
-                  <a:srgbClr val="192B25"/>
-                </a:solidFill>
-                <a:latin typeface="Helvetica Neue"/>
-                <a:ea typeface="Helvetica Neue"/>
-                <a:cs typeface="Helvetica Neue"/>
-              </a:rPr>
-              <a:t>Documentary filmmaking taught me to listen closely and find the thread in a complicated story.</a:t>
-            </a:r>
-          </a:p>
-        </p:txBody>
-      </p:sp>
-      <p:sp>
-        <p:nvSpPr>
-          <p:cNvPr id="7" name="story-now">
-            <a:extLst xmlns:a="http://schemas.openxmlformats.org/drawingml/2006/main">
-              <a:ext uri="{FF2B5EF4-FFF2-40B4-BE49-F238E27FC236}">
-                <a16:creationId xmlns:a16="http://schemas.microsoft.com/office/drawing/2014/main" id="{0D05F20F-2F5E-4358-9EAA-642247907040}"/>
-              </a:ext>
-            </a:extLst>
-          </p:cNvPr>
-          <p:cNvSpPr>
-            <a:spLocks xmlns:a="http://schemas.openxmlformats.org/drawingml/2006/main" noGrp="1"/>
-          </p:cNvSpPr>
-          <p:nvPr/>
-        </p:nvSpPr>
-        <p:spPr>
-          <a:xfrm xmlns:a="http://schemas.openxmlformats.org/drawingml/2006/main">
-            <a:off x="609600" y="5057775"/>
-            <a:ext cx="5610225" cy="1362075"/>
-          </a:xfrm>
-          <a:prstGeom xmlns:a="http://schemas.openxmlformats.org/drawingml/2006/main" prst="rect">
-            <a:avLst/>
-          </a:prstGeom>
-          <a:noFill xmlns:a="http://schemas.openxmlformats.org/drawingml/2006/main"/>
-          <a:ln xmlns:a="http://schemas.openxmlformats.org/drawingml/2006/main" w="0">
-            <a:noFill/>
-          </a:ln>
-        </p:spPr>
-        <p:txBody>
-          <a:bodyPr xmlns:a="http://schemas.openxmlformats.org/drawingml/2006/main" wrap="square" lIns="0" tIns="0" rIns="0" bIns="0" anchor="t">
-            <a:noAutofit/>
-          </a:bodyPr>
-          <a:lstStyle xmlns:a="http://schemas.openxmlformats.org/drawingml/2006/main"/>
-          <a:p xmlns:a="http://schemas.openxmlformats.org/drawingml/2006/main">
-            <a:pPr>
-              <a:lnSpc>
-                <a:spcPct val="110000"/>
-              </a:lnSpc>
-              <a:buNone/>
-              <a:defRPr sz="1800" b="0">
+              <a:defRPr sz="1200" b="0">
                 <a:solidFill>
                   <a:srgbClr val="58645D"/>
                 </a:solidFill>
@@ -6514,7 +8884,7 @@
               </a:defRPr>
             </a:pPr>
             <a:r>
-              <a:rPr sz="1800" b="0">
+              <a:rPr sz="1200" b="0">
                 <a:solidFill>
                   <a:srgbClr val="58645D"/>
                 </a:solidFill>
@@ -6522,68 +8892,7 @@
                 <a:ea typeface="Helvetica Neue"/>
                 <a:cs typeface="Helvetica Neue"/>
               </a:rPr>
-              <a:t>Those habits stayed with me in research and design. Outside work, I run tabletop games, where listening and helping a group find its way matter too.</a:t>
-            </a:r>
-          </a:p>
-        </p:txBody>
-      </p:sp>
-      <p:sp>
-        <p:nvSpPr>
-          <p:cNvPr id="8" name="story-slide-number">
-            <a:extLst xmlns:a="http://schemas.openxmlformats.org/drawingml/2006/main">
-              <a:ext uri="{FF2B5EF4-FFF2-40B4-BE49-F238E27FC236}">
-                <a16:creationId xmlns:a16="http://schemas.microsoft.com/office/drawing/2014/main" id="{A02BCCA1-2910-4717-8865-C4E59A531E39}"/>
-              </a:ext>
-            </a:extLst>
-          </p:cNvPr>
-          <p:cNvSpPr>
-            <a:spLocks xmlns:a="http://schemas.openxmlformats.org/drawingml/2006/main" noGrp="1"/>
-          </p:cNvSpPr>
-          <p:nvPr/>
-        </p:nvSpPr>
-        <p:spPr>
-          <a:xfrm xmlns:a="http://schemas.openxmlformats.org/drawingml/2006/main">
-            <a:off x="11353800" y="6515100"/>
-            <a:ext cx="323850" cy="209550"/>
-          </a:xfrm>
-          <a:prstGeom xmlns:a="http://schemas.openxmlformats.org/drawingml/2006/main" prst="rect">
-            <a:avLst/>
-          </a:prstGeom>
-          <a:noFill xmlns:a="http://schemas.openxmlformats.org/drawingml/2006/main"/>
-          <a:ln xmlns:a="http://schemas.openxmlformats.org/drawingml/2006/main" w="0">
-            <a:noFill/>
-          </a:ln>
-        </p:spPr>
-        <p:txBody>
-          <a:bodyPr xmlns:a="http://schemas.openxmlformats.org/drawingml/2006/main" wrap="square" lIns="0" tIns="0" rIns="0" bIns="0" anchor="t">
-            <a:noAutofit/>
-          </a:bodyPr>
-          <a:lstStyle xmlns:a="http://schemas.openxmlformats.org/drawingml/2006/main"/>
-          <a:p xmlns:a="http://schemas.openxmlformats.org/drawingml/2006/main">
-            <a:pPr>
-              <a:lnSpc>
-                <a:spcPct val="110000"/>
-              </a:lnSpc>
-              <a:buNone/>
-              <a:defRPr sz="1050" b="0">
-                <a:solidFill>
-                  <a:srgbClr val="58645D"/>
-                </a:solidFill>
-                <a:latin typeface="Helvetica Neue"/>
-                <a:ea typeface="Helvetica Neue"/>
-                <a:cs typeface="Helvetica Neue"/>
-              </a:defRPr>
-            </a:pPr>
-            <a:r>
-              <a:rPr sz="1050" b="0">
-                <a:solidFill>
-                  <a:srgbClr val="58645D"/>
-                </a:solidFill>
-                <a:latin typeface="Helvetica Neue"/>
-                <a:ea typeface="Helvetica Neue"/>
-                <a:cs typeface="Helvetica Neue"/>
-              </a:rPr>
-              <a:t>09</a:t>
+              <a:t>September 8 design captures · core Workflow reported live September 23 · report/email integrations in review</a:t>
             </a:r>
           </a:p>
         </p:txBody>
@@ -6591,7 +8900,7 @@
     </p:spTree>
     <p:extLst>
       <p:ext uri="{BB962C8B-B14F-4D97-AF65-F5344CB8AC3E}">
-        <p14:creationId xmlns:p14="http://schemas.microsoft.com/office/powerpoint/2010/main" val="1783234674"/>
+        <p14:creationId xmlns:p14="http://schemas.microsoft.com/office/powerpoint/2010/main" val="1404077353"/>
       </p:ext>
     </p:extLst>
   </p:cSld>

--- a/downloads/design/kyle-hobson-design-deck.pptx
+++ b/downloads/design/kyle-hobson-design-deck.pptx
@@ -2,26 +2,28 @@
 <file path=ppt/presentation.xml><?xml version="1.0" encoding="utf-8"?>
 <p:presentation xmlns:p="http://schemas.openxmlformats.org/presentationml/2006/main">
   <p:sldMasterIdLst>
-    <p:sldMasterId xmlns:r="http://schemas.openxmlformats.org/officeDocument/2006/relationships" id="2147483648" r:id="R490ed8bc47944cb8"/>
+    <p:sldMasterId xmlns:r="http://schemas.openxmlformats.org/officeDocument/2006/relationships" id="2147483648" r:id="Rbf3c1111317b4d6d"/>
   </p:sldMasterIdLst>
   <p:notesMasterIdLst>
-    <p:notesMasterId xmlns:r="http://schemas.openxmlformats.org/officeDocument/2006/relationships" r:id="R6fb5bfc6f1b043be"/>
+    <p:notesMasterId xmlns:r="http://schemas.openxmlformats.org/officeDocument/2006/relationships" r:id="Rd9bab16332254741"/>
   </p:notesMasterIdLst>
   <p:sldIdLst>
-    <p:sldId xmlns:r="http://schemas.openxmlformats.org/officeDocument/2006/relationships" id="256" r:id="Rc291683a3f814417"/>
-    <p:sldId xmlns:r="http://schemas.openxmlformats.org/officeDocument/2006/relationships" id="257" r:id="R9b330df305d74675"/>
-    <p:sldId xmlns:r="http://schemas.openxmlformats.org/officeDocument/2006/relationships" id="258" r:id="Rc51ba350f8fe4f63"/>
-    <p:sldId xmlns:r="http://schemas.openxmlformats.org/officeDocument/2006/relationships" id="259" r:id="Rf882751565b14d9c"/>
-    <p:sldId xmlns:r="http://schemas.openxmlformats.org/officeDocument/2006/relationships" id="260" r:id="Rb4d350ff4f614b37"/>
-    <p:sldId xmlns:r="http://schemas.openxmlformats.org/officeDocument/2006/relationships" id="261" r:id="Rc9305aa0b9354e89"/>
-    <p:sldId xmlns:r="http://schemas.openxmlformats.org/officeDocument/2006/relationships" id="262" r:id="R060513c9a242432c"/>
-    <p:sldId xmlns:r="http://schemas.openxmlformats.org/officeDocument/2006/relationships" id="263" r:id="R10e44b75113f4570"/>
-    <p:sldId xmlns:r="http://schemas.openxmlformats.org/officeDocument/2006/relationships" id="264" r:id="Re8ad3970a0c74a82"/>
-    <p:sldId xmlns:r="http://schemas.openxmlformats.org/officeDocument/2006/relationships" id="265" r:id="R899aff3d873a463a"/>
-    <p:sldId xmlns:r="http://schemas.openxmlformats.org/officeDocument/2006/relationships" id="266" r:id="R991acdbb5f634b7b"/>
-    <p:sldId xmlns:r="http://schemas.openxmlformats.org/officeDocument/2006/relationships" id="267" r:id="R8cb83c1cc8744224"/>
-    <p:sldId xmlns:r="http://schemas.openxmlformats.org/officeDocument/2006/relationships" id="268" r:id="R558f8342a3a94847"/>
-    <p:sldId xmlns:r="http://schemas.openxmlformats.org/officeDocument/2006/relationships" id="269" r:id="R1b43347fed914d26"/>
+    <p:sldId xmlns:r="http://schemas.openxmlformats.org/officeDocument/2006/relationships" id="256" r:id="R82d6ddc7dc0d4582"/>
+    <p:sldId xmlns:r="http://schemas.openxmlformats.org/officeDocument/2006/relationships" id="257" r:id="Rfd584be3bba7417e"/>
+    <p:sldId xmlns:r="http://schemas.openxmlformats.org/officeDocument/2006/relationships" id="258" r:id="R26251d319e194c1a"/>
+    <p:sldId xmlns:r="http://schemas.openxmlformats.org/officeDocument/2006/relationships" id="259" r:id="R0b8cc757e9ac4b40"/>
+    <p:sldId xmlns:r="http://schemas.openxmlformats.org/officeDocument/2006/relationships" id="260" r:id="Rb6e6abadf4d04649"/>
+    <p:sldId xmlns:r="http://schemas.openxmlformats.org/officeDocument/2006/relationships" id="261" r:id="R97868883916f4289"/>
+    <p:sldId xmlns:r="http://schemas.openxmlformats.org/officeDocument/2006/relationships" id="262" r:id="Rd1c6e3e0c9d944b8"/>
+    <p:sldId xmlns:r="http://schemas.openxmlformats.org/officeDocument/2006/relationships" id="263" r:id="Rfbb6d9a1f544411c"/>
+    <p:sldId xmlns:r="http://schemas.openxmlformats.org/officeDocument/2006/relationships" id="264" r:id="R1794c54da0a34e30"/>
+    <p:sldId xmlns:r="http://schemas.openxmlformats.org/officeDocument/2006/relationships" id="265" r:id="R4f335e2384ea41ea"/>
+    <p:sldId xmlns:r="http://schemas.openxmlformats.org/officeDocument/2006/relationships" id="266" r:id="R9950eb971c0b40cf"/>
+    <p:sldId xmlns:r="http://schemas.openxmlformats.org/officeDocument/2006/relationships" id="267" r:id="R9c721fb33b584c2b"/>
+    <p:sldId xmlns:r="http://schemas.openxmlformats.org/officeDocument/2006/relationships" id="268" r:id="R56b406de8763400e"/>
+    <p:sldId xmlns:r="http://schemas.openxmlformats.org/officeDocument/2006/relationships" id="269" r:id="R1435ea297b12489d"/>
+    <p:sldId xmlns:r="http://schemas.openxmlformats.org/officeDocument/2006/relationships" id="270" r:id="Rda83cb7f91214895"/>
+    <p:sldId xmlns:r="http://schemas.openxmlformats.org/officeDocument/2006/relationships" id="271" r:id="Rc934218ffdf042bc"/>
   </p:sldIdLst>
   <p:sldSz cx="12192000" cy="6858000"/>
   <p:notesSz cx="6858000" cy="9144000"/>
@@ -525,7 +527,7 @@
           <a:lstStyle xmlns:a="http://schemas.openxmlformats.org/drawingml/2006/main"/>
           <a:p xmlns:a="http://schemas.openxmlformats.org/drawingml/2006/main">
             <a:r>
-              <a:t>Camera capture, April 2026. A stakeholder demo exposed conflicting recording and form controls. Kyle proposed a draggable picture-in-picture concept, then separated that future direction from the agreed immediate scope. The April 14 handoff retained split-screen, removed the problematic bottom Submit, and preserved existing preview and Retake/Use Video actions. The pictured original design is a proposed design frame, not a verified released screen. PIP was a hypothesis, not a measured improvement. Implementation and post-fix testing remain unverified.</a:t>
+              <a:t>Original before: screenshot supplied by Kyle, corroborated by the April 2 stakeholder walkthrough. The blue square is the Stop control during active recording, not an idle Record button. After: original April design export. The April 14 immediate scope concerned the View Details footer, retaining split-screen and replacing the problematic bottom Submit with camera controls. Implementation and post-change testing remain unverified. Consistency and standards is the design rationale; color alone does not establish accessibility.</a:t>
             </a:r>
           </a:p>
         </p:txBody>
@@ -595,7 +597,7 @@
           <a:lstStyle xmlns:a="http://schemas.openxmlformats.org/drawingml/2006/main"/>
           <a:p xmlns:a="http://schemas.openxmlformats.org/drawingml/2006/main">
             <a:r>
-              <a:t>Case: Oak AI. Kyle: Lead UX Researcher, 2023–2025. Source: original Oak navigation evaluation screenshot, with the identity area omitted. Training the assistant, starting Vibecheck and requesting support appear as competing entry points. Kyle documented the labels and visual treatments and used the audit to make these choices explicit for review. Work stage: usability evaluation and design recommendations. This slide does not present a finished navigation redesign or a user-study finding.</a:t>
+              <a:t>Original camera flow designs by Kyle, shown as broader design exploration. These three screens do not imply that the entire polished flow was approved or shipped. In the scope discussion Kyle advocated retaining existing preview, Retake and Use Video functionality. Visibility of system status: elapsed time and Stop distinguish active recording. User control: review allows a decision before keeping the video. No measured task-success or time-saving claim is made.</a:t>
             </a:r>
           </a:p>
         </p:txBody>
@@ -665,7 +667,7 @@
           <a:lstStyle xmlns:a="http://schemas.openxmlformats.org/drawingml/2006/main"/>
           <a:p xmlns:a="http://schemas.openxmlformats.org/drawingml/2006/main">
             <a:r>
-              <a:t>Sources: original Oak desktop evaluation and error-messaging recommendation artifact. The shown crops retain original interface pixels and exclude the identity-bearing example field. Original and Proposed labels distinguish the existing interface from the recommendation. The evaluation identified error feedback that did not explain recovery, and the recommendation made a specific correction visible near the password field. This is a recommendation, not a measured usability improvement or a claim that the exact variant shipped.</a:t>
+              <a:t>Future-scope PIP proposal supplied by Kyle and supported by original archived designs. A project-name strip is obscured; all other design pixels are preserved. Movability is proposed behavior, not demonstrated by the static image. The April handoff separated PIP from the immediate control change. The intended benefit is more room for form review while recording. It remains a design hypothesis with no verified implementation or user-test result.</a:t>
             </a:r>
           </a:p>
         </p:txBody>
@@ -735,7 +737,7 @@
           <a:lstStyle xmlns:a="http://schemas.openxmlformats.org/drawingml/2006/main"/>
           <a:p xmlns:a="http://schemas.openxmlformats.org/drawingml/2006/main">
             <a:r>
-              <a:t>Personal story is based on Kyle’s self-described documentary filmmaking, digital storytelling and game facilitation background. It is an editorial connection, not a measured business-outcome claim. The portrait is a user-supplied personal image, used for identity rather than as project evidence.</a:t>
+              <a:t>Case: Oak AI. Kyle: Lead UX Researcher, 2023–2025. Source: original Oak navigation evaluation screenshot, with the identity area omitted. Training the assistant, starting Vibecheck and requesting support appear as competing entry points. Kyle documented the labels and visual treatments and used the audit to make these choices explicit for review. Work stage: usability evaluation and design recommendations. This slide does not present a finished navigation redesign or a user-study finding.</a:t>
             </a:r>
           </a:p>
         </p:txBody>
@@ -766,6 +768,146 @@
 </file>
 
 <file path=ppt/notesSlides/notesSlide14.xml><?xml version="1.0" encoding="utf-8"?>
+<p:notes xmlns:p="http://schemas.openxmlformats.org/presentationml/2006/main">
+  <p:cSld>
+    <p:spTree>
+      <p:nvGrpSpPr>
+        <p:cNvPr id="1" name=""/>
+        <p:cNvGrpSpPr/>
+        <p:nvPr/>
+      </p:nvGrpSpPr>
+      <p:grpSpPr>
+        <a:xfrm xmlns:a="http://schemas.openxmlformats.org/drawingml/2006/main"/>
+      </p:grpSpPr>
+      <p:sp>
+        <p:nvSpPr>
+          <p:cNvPr id="2" name="Slide Image Placeholder 1"/>
+          <p:cNvSpPr>
+            <a:spLocks xmlns:a="http://schemas.openxmlformats.org/drawingml/2006/main" noGrp="1"/>
+          </p:cNvSpPr>
+          <p:nvPr>
+            <p:ph type="sldImg" idx="0"/>
+          </p:nvPr>
+        </p:nvSpPr>
+        <p:spPr/>
+      </p:sp>
+      <p:sp>
+        <p:nvSpPr>
+          <p:cNvPr id="3" name="Notes Placeholder 2"/>
+          <p:cNvSpPr>
+            <a:spLocks xmlns:a="http://schemas.openxmlformats.org/drawingml/2006/main" noGrp="1"/>
+          </p:cNvSpPr>
+          <p:nvPr>
+            <p:ph type="body" idx="1"/>
+          </p:nvPr>
+        </p:nvSpPr>
+        <p:spPr/>
+        <p:txBody>
+          <a:bodyPr xmlns:a="http://schemas.openxmlformats.org/drawingml/2006/main"/>
+          <a:lstStyle xmlns:a="http://schemas.openxmlformats.org/drawingml/2006/main"/>
+          <a:p xmlns:a="http://schemas.openxmlformats.org/drawingml/2006/main">
+            <a:r>
+              <a:t>Sources: original Oak desktop evaluation and error-messaging recommendation artifact. The shown crops retain original interface pixels and exclude the identity-bearing example field. Original and Proposed labels distinguish the existing interface from the recommendation. The evaluation identified error feedback that did not explain recovery, and the recommendation made a specific correction visible near the password field. This is a recommendation, not a measured usability improvement or a claim that the exact variant shipped.</a:t>
+            </a:r>
+          </a:p>
+        </p:txBody>
+      </p:sp>
+      <p:sp>
+        <p:nvSpPr>
+          <p:cNvPr id="4" name="Slide Number Placeholder 3"/>
+          <p:cNvSpPr>
+            <a:spLocks xmlns:a="http://schemas.openxmlformats.org/drawingml/2006/main" noGrp="1"/>
+          </p:cNvSpPr>
+          <p:nvPr>
+            <p:ph type="sldNum" idx="5"/>
+          </p:nvPr>
+        </p:nvSpPr>
+        <p:spPr/>
+        <p:txBody>
+          <a:bodyPr xmlns:a="http://schemas.openxmlformats.org/drawingml/2006/main"/>
+          <a:lstStyle xmlns:a="http://schemas.openxmlformats.org/drawingml/2006/main"/>
+          <a:p xmlns:a="http://schemas.openxmlformats.org/drawingml/2006/main"/>
+        </p:txBody>
+      </p:sp>
+    </p:spTree>
+  </p:cSld>
+  <p:clrMapOvr>
+    <a:masterClrMapping xmlns:a="http://schemas.openxmlformats.org/drawingml/2006/main"/>
+  </p:clrMapOvr>
+</p:notes>
+</file>
+
+<file path=ppt/notesSlides/notesSlide15.xml><?xml version="1.0" encoding="utf-8"?>
+<p:notes xmlns:p="http://schemas.openxmlformats.org/presentationml/2006/main">
+  <p:cSld>
+    <p:spTree>
+      <p:nvGrpSpPr>
+        <p:cNvPr id="1" name=""/>
+        <p:cNvGrpSpPr/>
+        <p:nvPr/>
+      </p:nvGrpSpPr>
+      <p:grpSpPr>
+        <a:xfrm xmlns:a="http://schemas.openxmlformats.org/drawingml/2006/main"/>
+      </p:grpSpPr>
+      <p:sp>
+        <p:nvSpPr>
+          <p:cNvPr id="2" name="Slide Image Placeholder 1"/>
+          <p:cNvSpPr>
+            <a:spLocks xmlns:a="http://schemas.openxmlformats.org/drawingml/2006/main" noGrp="1"/>
+          </p:cNvSpPr>
+          <p:nvPr>
+            <p:ph type="sldImg" idx="0"/>
+          </p:nvPr>
+        </p:nvSpPr>
+        <p:spPr/>
+      </p:sp>
+      <p:sp>
+        <p:nvSpPr>
+          <p:cNvPr id="3" name="Notes Placeholder 2"/>
+          <p:cNvSpPr>
+            <a:spLocks xmlns:a="http://schemas.openxmlformats.org/drawingml/2006/main" noGrp="1"/>
+          </p:cNvSpPr>
+          <p:nvPr>
+            <p:ph type="body" idx="1"/>
+          </p:nvPr>
+        </p:nvSpPr>
+        <p:spPr/>
+        <p:txBody>
+          <a:bodyPr xmlns:a="http://schemas.openxmlformats.org/drawingml/2006/main"/>
+          <a:lstStyle xmlns:a="http://schemas.openxmlformats.org/drawingml/2006/main"/>
+          <a:p xmlns:a="http://schemas.openxmlformats.org/drawingml/2006/main">
+            <a:r>
+              <a:t>Personal story is based on Kyle’s self-described documentary filmmaking, digital storytelling and game facilitation background. It is an editorial connection, not a measured business-outcome claim. The portrait is a user-supplied personal image, used for identity rather than as project evidence.</a:t>
+            </a:r>
+          </a:p>
+        </p:txBody>
+      </p:sp>
+      <p:sp>
+        <p:nvSpPr>
+          <p:cNvPr id="4" name="Slide Number Placeholder 3"/>
+          <p:cNvSpPr>
+            <a:spLocks xmlns:a="http://schemas.openxmlformats.org/drawingml/2006/main" noGrp="1"/>
+          </p:cNvSpPr>
+          <p:nvPr>
+            <p:ph type="sldNum" idx="5"/>
+          </p:nvPr>
+        </p:nvSpPr>
+        <p:spPr/>
+        <p:txBody>
+          <a:bodyPr xmlns:a="http://schemas.openxmlformats.org/drawingml/2006/main"/>
+          <a:lstStyle xmlns:a="http://schemas.openxmlformats.org/drawingml/2006/main"/>
+          <a:p xmlns:a="http://schemas.openxmlformats.org/drawingml/2006/main"/>
+        </p:txBody>
+      </p:sp>
+    </p:spTree>
+  </p:cSld>
+  <p:clrMapOvr>
+    <a:masterClrMapping xmlns:a="http://schemas.openxmlformats.org/drawingml/2006/main"/>
+  </p:clrMapOvr>
+</p:notes>
+</file>
+
+<file path=ppt/notesSlides/notesSlide16.xml><?xml version="1.0" encoding="utf-8"?>
 <p:notes xmlns:p="http://schemas.openxmlformats.org/presentationml/2006/main">
   <p:cSld>
     <p:spTree>
@@ -1433,7 +1575,7 @@
   </p:cSld>
   <p:clrMap bg1="lt1" tx1="dk1" bg2="lt2" tx2="dk2" accent1="accent1" accent2="accent2" accent3="accent3" accent4="accent4" accent5="accent5" accent6="accent6" hlink="hlink" folHlink="folHlink"/>
   <p:sldLayoutIdLst>
-    <p:sldLayoutId xmlns:r="http://schemas.openxmlformats.org/officeDocument/2006/relationships" id="2147483649" r:id="R8b6a1bcf531b4900"/>
+    <p:sldLayoutId xmlns:r="http://schemas.openxmlformats.org/officeDocument/2006/relationships" id="2147483649" r:id="Rb1d1c6ce88e64c78"/>
   </p:sldLayoutIdLst>
   <p:txStyles>
     <p:titleStyle>
@@ -1984,7 +2126,7 @@
           <p:cNvPr id="8" name="slide-number">
             <a:extLst xmlns:a="http://schemas.openxmlformats.org/drawingml/2006/main">
               <a:ext uri="{FF2B5EF4-FFF2-40B4-BE49-F238E27FC236}">
-                <a16:creationId xmlns:a16="http://schemas.microsoft.com/office/drawing/2014/main" id="{39EC8650-D712-4C41-95F5-02996424BFCB}"/>
+                <a16:creationId xmlns:a16="http://schemas.microsoft.com/office/drawing/2014/main" id="{EB1B07F7-CDD6-41E7-8821-2963FCDC30EB}"/>
               </a:ext>
             </a:extLst>
           </p:cNvPr>
@@ -2045,7 +2187,7 @@
           <p:cNvPr id="2" name="section-label">
             <a:extLst xmlns:a="http://schemas.openxmlformats.org/drawingml/2006/main">
               <a:ext uri="{FF2B5EF4-FFF2-40B4-BE49-F238E27FC236}">
-                <a16:creationId xmlns:a16="http://schemas.microsoft.com/office/drawing/2014/main" id="{F05589A2-24F6-4AF7-BF31-B96D739A4ED4}"/>
+                <a16:creationId xmlns:a16="http://schemas.microsoft.com/office/drawing/2014/main" id="{1F697D92-A342-4261-92BD-C8628180BB7F}"/>
               </a:ext>
             </a:extLst>
           </p:cNvPr>
@@ -2106,7 +2248,7 @@
           <p:cNvPr id="3" name="headline">
             <a:extLst xmlns:a="http://schemas.openxmlformats.org/drawingml/2006/main">
               <a:ext uri="{FF2B5EF4-FFF2-40B4-BE49-F238E27FC236}">
-                <a16:creationId xmlns:a16="http://schemas.microsoft.com/office/drawing/2014/main" id="{6A14F5EF-3D70-4AE2-8AFA-844DFE8B36D8}"/>
+                <a16:creationId xmlns:a16="http://schemas.microsoft.com/office/drawing/2014/main" id="{3C71108D-63E3-4851-B3C3-944B19C37ABF}"/>
               </a:ext>
             </a:extLst>
           </p:cNvPr>
@@ -2194,7 +2336,7 @@
           <p:cNvPr id="4" name="cover-intro">
             <a:extLst xmlns:a="http://schemas.openxmlformats.org/drawingml/2006/main">
               <a:ext uri="{FF2B5EF4-FFF2-40B4-BE49-F238E27FC236}">
-                <a16:creationId xmlns:a16="http://schemas.microsoft.com/office/drawing/2014/main" id="{877C6975-F93B-474D-8CF1-EE3A476DFC3B}"/>
+                <a16:creationId xmlns:a16="http://schemas.microsoft.com/office/drawing/2014/main" id="{7B56F3DF-639C-4F42-80C8-AFB2C1485919}"/>
               </a:ext>
             </a:extLst>
           </p:cNvPr>
@@ -2282,7 +2424,7 @@
           <p:cNvPr id="5" name="cover-accent">
             <a:extLst xmlns:a="http://schemas.openxmlformats.org/drawingml/2006/main">
               <a:ext uri="{FF2B5EF4-FFF2-40B4-BE49-F238E27FC236}">
-                <a16:creationId xmlns:a16="http://schemas.microsoft.com/office/drawing/2014/main" id="{1B20D167-ADC5-4B9D-865F-EE4C3D4CD0C3}"/>
+                <a16:creationId xmlns:a16="http://schemas.microsoft.com/office/drawing/2014/main" id="{C51510B3-CCDD-4097-8D55-199674A46617}"/>
               </a:ext>
             </a:extLst>
           </p:cNvPr>
@@ -2312,7 +2454,7 @@
           <p:cNvPr id="6" name="cover-type">
             <a:extLst xmlns:a="http://schemas.openxmlformats.org/drawingml/2006/main">
               <a:ext uri="{FF2B5EF4-FFF2-40B4-BE49-F238E27FC236}">
-                <a16:creationId xmlns:a16="http://schemas.microsoft.com/office/drawing/2014/main" id="{CBC70B89-572E-4580-AEF5-61A201C4D3E4}"/>
+                <a16:creationId xmlns:a16="http://schemas.microsoft.com/office/drawing/2014/main" id="{CCDDFC3A-18DE-4700-AC9E-E3420EE463CB}"/>
               </a:ext>
             </a:extLst>
           </p:cNvPr>
@@ -2377,7 +2519,7 @@
           <p:nvPr/>
         </p:nvPicPr>
         <p:blipFill>
-          <a:blip xmlns:r="http://schemas.openxmlformats.org/officeDocument/2006/relationships" xmlns:a="http://schemas.openxmlformats.org/drawingml/2006/main" r:embed="Rc71413ac7fb54b20"/>
+          <a:blip xmlns:r="http://schemas.openxmlformats.org/officeDocument/2006/relationships" xmlns:a="http://schemas.openxmlformats.org/drawingml/2006/main" r:embed="Ra415e9be4a424237"/>
           <a:stretch xmlns:a="http://schemas.openxmlformats.org/drawingml/2006/main"/>
         </p:blipFill>
         <p:spPr>
@@ -2393,7 +2535,7 @@
     </p:spTree>
     <p:extLst>
       <p:ext uri="{BB962C8B-B14F-4D97-AF65-F5344CB8AC3E}">
-        <p14:creationId xmlns:p14="http://schemas.microsoft.com/office/powerpoint/2010/main" val="1747721104"/>
+        <p14:creationId xmlns:p14="http://schemas.microsoft.com/office/powerpoint/2010/main" val="986337482"/>
       </p:ext>
     </p:extLst>
   </p:cSld>
@@ -2421,10 +2563,10 @@
       </p:grpSpPr>
       <p:sp>
         <p:nvSpPr>
-          <p:cNvPr id="10" name="slide-number">
-            <a:extLst xmlns:a="http://schemas.openxmlformats.org/drawingml/2006/main">
-              <a:ext uri="{FF2B5EF4-FFF2-40B4-BE49-F238E27FC236}">
-                <a16:creationId xmlns:a16="http://schemas.microsoft.com/office/drawing/2014/main" id="{A88728FD-D92D-4893-997A-A85E620C0541}"/>
+          <p:cNvPr id="11" name="slide-number">
+            <a:extLst xmlns:a="http://schemas.openxmlformats.org/drawingml/2006/main">
+              <a:ext uri="{FF2B5EF4-FFF2-40B4-BE49-F238E27FC236}">
+                <a16:creationId xmlns:a16="http://schemas.microsoft.com/office/drawing/2014/main" id="{F997B22F-2455-43A6-A8E0-C172EA2931D7}"/>
               </a:ext>
             </a:extLst>
           </p:cNvPr>
@@ -2485,7 +2627,7 @@
           <p:cNvPr id="2" name="section-label">
             <a:extLst xmlns:a="http://schemas.openxmlformats.org/drawingml/2006/main">
               <a:ext uri="{FF2B5EF4-FFF2-40B4-BE49-F238E27FC236}">
-                <a16:creationId xmlns:a16="http://schemas.microsoft.com/office/drawing/2014/main" id="{961F3938-616B-4896-B5DC-33EA3EBD8BEA}"/>
+                <a16:creationId xmlns:a16="http://schemas.microsoft.com/office/drawing/2014/main" id="{DFC50831-6D18-4FBD-8A96-14C38B1A577E}"/>
               </a:ext>
             </a:extLst>
           </p:cNvPr>
@@ -2536,7 +2678,7 @@
                 <a:ea typeface="Helvetica Neue"/>
                 <a:cs typeface="Helvetica Neue"/>
               </a:rPr>
-              <a:t>CAMERA CAPTURE   /   SCOPE DECISION</a:t>
+              <a:t>CAMERA CAPTURE   /   BEFORE AND SCOPED REDESIGN</a:t>
             </a:r>
           </a:p>
         </p:txBody>
@@ -2546,40 +2688,40 @@
           <p:cNvPr id="3" name="headline">
             <a:extLst xmlns:a="http://schemas.openxmlformats.org/drawingml/2006/main">
               <a:ext uri="{FF2B5EF4-FFF2-40B4-BE49-F238E27FC236}">
-                <a16:creationId xmlns:a16="http://schemas.microsoft.com/office/drawing/2014/main" id="{D47BD2F4-F332-4BAA-ADCC-0DFC9E066CF5}"/>
-              </a:ext>
-            </a:extLst>
-          </p:cNvPr>
-          <p:cNvSpPr>
-            <a:spLocks xmlns:a="http://schemas.openxmlformats.org/drawingml/2006/main" noGrp="1"/>
-          </p:cNvSpPr>
-          <p:nvPr/>
-        </p:nvSpPr>
-        <p:spPr>
-          <a:xfrm xmlns:a="http://schemas.openxmlformats.org/drawingml/2006/main">
-            <a:off x="609600" y="1057275"/>
-            <a:ext cx="5610225" cy="1457325"/>
-          </a:xfrm>
-          <a:prstGeom xmlns:a="http://schemas.openxmlformats.org/drawingml/2006/main" prst="rect">
-            <a:avLst/>
-          </a:prstGeom>
-          <a:noFill xmlns:a="http://schemas.openxmlformats.org/drawingml/2006/main"/>
-          <a:ln xmlns:a="http://schemas.openxmlformats.org/drawingml/2006/main" w="0">
-            <a:noFill/>
-          </a:ln>
-        </p:spPr>
-        <p:txBody>
-          <a:bodyPr xmlns:a="http://schemas.openxmlformats.org/drawingml/2006/main" wrap="square" lIns="0" tIns="0" rIns="0" bIns="0" anchor="t">
-            <a:noAutofit/>
-          </a:bodyPr>
-          <a:lstStyle xmlns:a="http://schemas.openxmlformats.org/drawingml/2006/main"/>
-          <a:p xmlns:a="http://schemas.openxmlformats.org/drawingml/2006/main">
-            <a:pPr>
-              <a:lnSpc>
-                <a:spcPct val="110000"/>
-              </a:lnSpc>
-              <a:buNone/>
-              <a:defRPr sz="3600" b="1">
+                <a16:creationId xmlns:a16="http://schemas.microsoft.com/office/drawing/2014/main" id="{283F608B-4EBF-4E93-90A7-57834AD9FE80}"/>
+              </a:ext>
+            </a:extLst>
+          </p:cNvPr>
+          <p:cNvSpPr>
+            <a:spLocks xmlns:a="http://schemas.openxmlformats.org/drawingml/2006/main" noGrp="1"/>
+          </p:cNvSpPr>
+          <p:nvPr/>
+        </p:nvSpPr>
+        <p:spPr>
+          <a:xfrm xmlns:a="http://schemas.openxmlformats.org/drawingml/2006/main">
+            <a:off x="609600" y="1114425"/>
+            <a:ext cx="5067300" cy="1419225"/>
+          </a:xfrm>
+          <a:prstGeom xmlns:a="http://schemas.openxmlformats.org/drawingml/2006/main" prst="rect">
+            <a:avLst/>
+          </a:prstGeom>
+          <a:noFill xmlns:a="http://schemas.openxmlformats.org/drawingml/2006/main"/>
+          <a:ln xmlns:a="http://schemas.openxmlformats.org/drawingml/2006/main" w="0">
+            <a:noFill/>
+          </a:ln>
+        </p:spPr>
+        <p:txBody>
+          <a:bodyPr xmlns:a="http://schemas.openxmlformats.org/drawingml/2006/main" wrap="square" lIns="0" tIns="0" rIns="0" bIns="0" anchor="t">
+            <a:noAutofit/>
+          </a:bodyPr>
+          <a:lstStyle xmlns:a="http://schemas.openxmlformats.org/drawingml/2006/main"/>
+          <a:p xmlns:a="http://schemas.openxmlformats.org/drawingml/2006/main">
+            <a:pPr>
+              <a:lnSpc>
+                <a:spcPct val="110000"/>
+              </a:lnSpc>
+              <a:buNone/>
+              <a:defRPr sz="3525" b="1">
                 <a:solidFill>
                   <a:srgbClr val="192B25"/>
                 </a:solidFill>
@@ -2589,7 +2731,7 @@
               </a:defRPr>
             </a:pPr>
             <a:r>
-              <a:rPr sz="3600" b="1">
+              <a:rPr sz="3525" b="1">
                 <a:solidFill>
                   <a:srgbClr val="192B25"/>
                 </a:solidFill>
@@ -2597,16 +2739,16 @@
                 <a:ea typeface="Helvetica Neue"/>
                 <a:cs typeface="Helvetica Neue"/>
               </a:rPr>
-              <a:t>A smaller camera fix,</a:t>
-            </a:r>
-          </a:p>
-          <a:p xmlns:a="http://schemas.openxmlformats.org/drawingml/2006/main">
-            <a:pPr>
-              <a:lnSpc>
-                <a:spcPct val="110000"/>
-              </a:lnSpc>
-              <a:buNone/>
-              <a:defRPr sz="3600" b="1">
+              <a:t>Untangle the controls</a:t>
+            </a:r>
+          </a:p>
+          <a:p xmlns:a="http://schemas.openxmlformats.org/drawingml/2006/main">
+            <a:pPr>
+              <a:lnSpc>
+                <a:spcPct val="110000"/>
+              </a:lnSpc>
+              <a:buNone/>
+              <a:defRPr sz="3525" b="1">
                 <a:solidFill>
                   <a:srgbClr val="192B25"/>
                 </a:solidFill>
@@ -2616,7 +2758,7 @@
               </a:defRPr>
             </a:pPr>
             <a:r>
-              <a:rPr sz="3600" b="1">
+              <a:rPr sz="3525" b="1">
                 <a:solidFill>
                   <a:srgbClr val="192B25"/>
                 </a:solidFill>
@@ -2624,7 +2766,7 @@
                 <a:ea typeface="Helvetica Neue"/>
                 <a:cs typeface="Helvetica Neue"/>
               </a:rPr>
-              <a:t>with room to grow</a:t>
+              <a:t>from the form</a:t>
             </a:r>
           </a:p>
         </p:txBody>
@@ -2634,19 +2776,80 @@
           <p:cNvPr id="4" name="camera-problem">
             <a:extLst xmlns:a="http://schemas.openxmlformats.org/drawingml/2006/main">
               <a:ext uri="{FF2B5EF4-FFF2-40B4-BE49-F238E27FC236}">
-                <a16:creationId xmlns:a16="http://schemas.microsoft.com/office/drawing/2014/main" id="{873FE628-0D7F-4066-B561-FF012692E5B8}"/>
-              </a:ext>
-            </a:extLst>
-          </p:cNvPr>
-          <p:cNvSpPr>
-            <a:spLocks xmlns:a="http://schemas.openxmlformats.org/drawingml/2006/main" noGrp="1"/>
-          </p:cNvSpPr>
-          <p:nvPr/>
-        </p:nvSpPr>
-        <p:spPr>
-          <a:xfrm xmlns:a="http://schemas.openxmlformats.org/drawingml/2006/main">
-            <a:off x="609600" y="2790825"/>
-            <a:ext cx="4552950" cy="914400"/>
+                <a16:creationId xmlns:a16="http://schemas.microsoft.com/office/drawing/2014/main" id="{6AC1DD14-2141-42D1-9F4F-0A8DDEC4B6F7}"/>
+              </a:ext>
+            </a:extLst>
+          </p:cNvPr>
+          <p:cNvSpPr>
+            <a:spLocks xmlns:a="http://schemas.openxmlformats.org/drawingml/2006/main" noGrp="1"/>
+          </p:cNvSpPr>
+          <p:nvPr/>
+        </p:nvSpPr>
+        <p:spPr>
+          <a:xfrm xmlns:a="http://schemas.openxmlformats.org/drawingml/2006/main">
+            <a:off x="609600" y="3000375"/>
+            <a:ext cx="4305300" cy="904875"/>
+          </a:xfrm>
+          <a:prstGeom xmlns:a="http://schemas.openxmlformats.org/drawingml/2006/main" prst="rect">
+            <a:avLst/>
+          </a:prstGeom>
+          <a:noFill xmlns:a="http://schemas.openxmlformats.org/drawingml/2006/main"/>
+          <a:ln xmlns:a="http://schemas.openxmlformats.org/drawingml/2006/main" w="0">
+            <a:noFill/>
+          </a:ln>
+        </p:spPr>
+        <p:txBody>
+          <a:bodyPr xmlns:a="http://schemas.openxmlformats.org/drawingml/2006/main" wrap="square" lIns="0" tIns="0" rIns="0" bIns="0" anchor="t">
+            <a:noAutofit/>
+          </a:bodyPr>
+          <a:lstStyle xmlns:a="http://schemas.openxmlformats.org/drawingml/2006/main"/>
+          <a:p xmlns:a="http://schemas.openxmlformats.org/drawingml/2006/main">
+            <a:pPr>
+              <a:lnSpc>
+                <a:spcPct val="110000"/>
+              </a:lnSpc>
+              <a:buNone/>
+              <a:defRPr sz="1950" b="0">
+                <a:solidFill>
+                  <a:srgbClr val="192B25"/>
+                </a:solidFill>
+                <a:latin typeface="Helvetica Neue"/>
+                <a:ea typeface="Helvetica Neue"/>
+                <a:cs typeface="Helvetica Neue"/>
+              </a:defRPr>
+            </a:pPr>
+            <a:r>
+              <a:rPr sz="1950" b="0">
+                <a:solidFill>
+                  <a:srgbClr val="192B25"/>
+                </a:solidFill>
+                <a:latin typeface="Helvetica Neue"/>
+                <a:ea typeface="Helvetica Neue"/>
+                <a:cs typeface="Helvetica Neue"/>
+              </a:rPr>
+              <a:t>Submit appeared twice. Camera controls cut across the form.</a:t>
+            </a:r>
+          </a:p>
+        </p:txBody>
+      </p:sp>
+      <p:sp>
+        <p:nvSpPr>
+          <p:cNvPr id="5" name="camera-decision">
+            <a:extLst xmlns:a="http://schemas.openxmlformats.org/drawingml/2006/main">
+              <a:ext uri="{FF2B5EF4-FFF2-40B4-BE49-F238E27FC236}">
+                <a16:creationId xmlns:a16="http://schemas.microsoft.com/office/drawing/2014/main" id="{3EFF5FE2-6C1E-4CD6-ACB6-3607A13FC839}"/>
+              </a:ext>
+            </a:extLst>
+          </p:cNvPr>
+          <p:cNvSpPr>
+            <a:spLocks xmlns:a="http://schemas.openxmlformats.org/drawingml/2006/main" noGrp="1"/>
+          </p:cNvSpPr>
+          <p:nvPr/>
+        </p:nvSpPr>
+        <p:spPr>
+          <a:xfrm xmlns:a="http://schemas.openxmlformats.org/drawingml/2006/main">
+            <a:off x="609600" y="4200525"/>
+            <a:ext cx="4305300" cy="1247775"/>
           </a:xfrm>
           <a:prstGeom xmlns:a="http://schemas.openxmlformats.org/drawingml/2006/main" prst="rect">
             <a:avLst/>
@@ -2685,111 +2888,50 @@
                 <a:ea typeface="Helvetica Neue"/>
                 <a:cs typeface="Helvetica Neue"/>
               </a:rPr>
-              <a:t>A demo exposed competing controls while someone recorded and reviewed a form.</a:t>
-            </a:r>
-          </a:p>
-        </p:txBody>
-      </p:sp>
-      <p:sp>
-        <p:nvSpPr>
-          <p:cNvPr id="5" name="camera-current">
-            <a:extLst xmlns:a="http://schemas.openxmlformats.org/drawingml/2006/main">
-              <a:ext uri="{FF2B5EF4-FFF2-40B4-BE49-F238E27FC236}">
-                <a16:creationId xmlns:a16="http://schemas.microsoft.com/office/drawing/2014/main" id="{A0F78043-B6EC-4F98-AB8E-81ED72FF7BFB}"/>
-              </a:ext>
-            </a:extLst>
-          </p:cNvPr>
-          <p:cNvSpPr>
-            <a:spLocks xmlns:a="http://schemas.openxmlformats.org/drawingml/2006/main" noGrp="1"/>
-          </p:cNvSpPr>
-          <p:nvPr/>
-        </p:nvSpPr>
-        <p:spPr>
-          <a:xfrm xmlns:a="http://schemas.openxmlformats.org/drawingml/2006/main">
-            <a:off x="609600" y="3905250"/>
-            <a:ext cx="4552950" cy="1323975"/>
-          </a:xfrm>
-          <a:prstGeom xmlns:a="http://schemas.openxmlformats.org/drawingml/2006/main" prst="rect">
-            <a:avLst/>
-          </a:prstGeom>
-          <a:noFill xmlns:a="http://schemas.openxmlformats.org/drawingml/2006/main"/>
-          <a:ln xmlns:a="http://schemas.openxmlformats.org/drawingml/2006/main" w="0">
-            <a:noFill/>
-          </a:ln>
-        </p:spPr>
-        <p:txBody>
-          <a:bodyPr xmlns:a="http://schemas.openxmlformats.org/drawingml/2006/main" wrap="square" lIns="0" tIns="0" rIns="0" bIns="0" anchor="t">
-            <a:noAutofit/>
-          </a:bodyPr>
-          <a:lstStyle xmlns:a="http://schemas.openxmlformats.org/drawingml/2006/main"/>
-          <a:p xmlns:a="http://schemas.openxmlformats.org/drawingml/2006/main">
-            <a:pPr>
-              <a:lnSpc>
-                <a:spcPct val="110000"/>
-              </a:lnSpc>
-              <a:buNone/>
-              <a:defRPr sz="1650" b="0">
-                <a:solidFill>
-                  <a:srgbClr val="192B25"/>
-                </a:solidFill>
-                <a:latin typeface="Helvetica Neue"/>
-                <a:ea typeface="Helvetica Neue"/>
-                <a:cs typeface="Helvetica Neue"/>
-              </a:defRPr>
-            </a:pPr>
-            <a:r>
-              <a:rPr sz="1650" b="0">
-                <a:solidFill>
-                  <a:srgbClr val="192B25"/>
-                </a:solidFill>
-                <a:latin typeface="Helvetica Neue"/>
-                <a:ea typeface="Helvetica Neue"/>
-                <a:cs typeface="Helvetica Neue"/>
-              </a:rPr>
-              <a:t>Current handoff: keep the split screen, remove the problematic bottom Submit, and retain existing preview and Retake/Use Video actions.</a:t>
-            </a:r>
-          </a:p>
-        </p:txBody>
-      </p:sp>
-      <p:sp>
-        <p:nvSpPr>
-          <p:cNvPr id="6" name="camera-future">
-            <a:extLst xmlns:a="http://schemas.openxmlformats.org/drawingml/2006/main">
-              <a:ext uri="{FF2B5EF4-FFF2-40B4-BE49-F238E27FC236}">
-                <a16:creationId xmlns:a16="http://schemas.microsoft.com/office/drawing/2014/main" id="{AD1E3539-E9F4-4A94-A528-DDC008A8E433}"/>
-              </a:ext>
-            </a:extLst>
-          </p:cNvPr>
-          <p:cNvSpPr>
-            <a:spLocks xmlns:a="http://schemas.openxmlformats.org/drawingml/2006/main" noGrp="1"/>
-          </p:cNvSpPr>
-          <p:nvPr/>
-        </p:nvSpPr>
-        <p:spPr>
-          <a:xfrm xmlns:a="http://schemas.openxmlformats.org/drawingml/2006/main">
-            <a:off x="609600" y="5486400"/>
-            <a:ext cx="4705350" cy="771525"/>
-          </a:xfrm>
-          <a:prstGeom xmlns:a="http://schemas.openxmlformats.org/drawingml/2006/main" prst="rect">
-            <a:avLst/>
-          </a:prstGeom>
-          <a:noFill xmlns:a="http://schemas.openxmlformats.org/drawingml/2006/main"/>
-          <a:ln xmlns:a="http://schemas.openxmlformats.org/drawingml/2006/main" w="0">
-            <a:noFill/>
-          </a:ln>
-        </p:spPr>
-        <p:txBody>
-          <a:bodyPr xmlns:a="http://schemas.openxmlformats.org/drawingml/2006/main" wrap="square" lIns="0" tIns="0" rIns="0" bIns="0" anchor="t">
-            <a:noAutofit/>
-          </a:bodyPr>
-          <a:lstStyle xmlns:a="http://schemas.openxmlformats.org/drawingml/2006/main"/>
-          <a:p xmlns:a="http://schemas.openxmlformats.org/drawingml/2006/main">
-            <a:pPr>
-              <a:lnSpc>
-                <a:spcPct val="110000"/>
-              </a:lnSpc>
-              <a:buNone/>
-              <a:defRPr sz="1350" b="0">
+              <a:t>With product, I kept the split screen and focused the immediate change on the footer controls.</a:t>
+            </a:r>
+          </a:p>
+        </p:txBody>
+      </p:sp>
+      <p:sp>
+        <p:nvSpPr>
+          <p:cNvPr id="6" name="camera-principle">
+            <a:extLst xmlns:a="http://schemas.openxmlformats.org/drawingml/2006/main">
+              <a:ext uri="{FF2B5EF4-FFF2-40B4-BE49-F238E27FC236}">
+                <a16:creationId xmlns:a16="http://schemas.microsoft.com/office/drawing/2014/main" id="{6AC1A497-5A82-4264-A43D-04A55E379F19}"/>
+              </a:ext>
+            </a:extLst>
+          </p:cNvPr>
+          <p:cNvSpPr>
+            <a:spLocks xmlns:a="http://schemas.openxmlformats.org/drawingml/2006/main" noGrp="1"/>
+          </p:cNvSpPr>
+          <p:nvPr/>
+        </p:nvSpPr>
+        <p:spPr>
+          <a:xfrm xmlns:a="http://schemas.openxmlformats.org/drawingml/2006/main">
+            <a:off x="609600" y="5638800"/>
+            <a:ext cx="4391025" cy="762000"/>
+          </a:xfrm>
+          <a:prstGeom xmlns:a="http://schemas.openxmlformats.org/drawingml/2006/main" prst="rect">
+            <a:avLst/>
+          </a:prstGeom>
+          <a:noFill xmlns:a="http://schemas.openxmlformats.org/drawingml/2006/main"/>
+          <a:ln xmlns:a="http://schemas.openxmlformats.org/drawingml/2006/main" w="0">
+            <a:noFill/>
+          </a:ln>
+        </p:spPr>
+        <p:txBody>
+          <a:bodyPr xmlns:a="http://schemas.openxmlformats.org/drawingml/2006/main" wrap="square" lIns="0" tIns="0" rIns="0" bIns="0" anchor="t">
+            <a:noAutofit/>
+          </a:bodyPr>
+          <a:lstStyle xmlns:a="http://schemas.openxmlformats.org/drawingml/2006/main"/>
+          <a:p xmlns:a="http://schemas.openxmlformats.org/drawingml/2006/main">
+            <a:pPr>
+              <a:lnSpc>
+                <a:spcPct val="110000"/>
+              </a:lnSpc>
+              <a:buNone/>
+              <a:defRPr sz="1425" b="0">
                 <a:solidFill>
                   <a:srgbClr val="58645D"/>
                 </a:solidFill>
@@ -2799,7 +2941,7 @@
               </a:defRPr>
             </a:pPr>
             <a:r>
-              <a:rPr sz="1350" b="0">
+              <a:rPr sz="1425" b="0">
                 <a:solidFill>
                   <a:srgbClr val="58645D"/>
                 </a:solidFill>
@@ -2807,27 +2949,149 @@
                 <a:ea typeface="Helvetica Neue"/>
                 <a:cs typeface="Helvetica Neue"/>
               </a:rPr>
-              <a:t>Future direction: a draggable picture-in-picture view could give the form more room. That benefit remains a design hypothesis.</a:t>
+              <a:t>Consistency and standards: familiar recording controls help people recognize the next action.</a:t>
+            </a:r>
+          </a:p>
+        </p:txBody>
+      </p:sp>
+      <p:sp>
+        <p:nvSpPr>
+          <p:cNvPr id="7" name="before-label">
+            <a:extLst xmlns:a="http://schemas.openxmlformats.org/drawingml/2006/main">
+              <a:ext uri="{FF2B5EF4-FFF2-40B4-BE49-F238E27FC236}">
+                <a16:creationId xmlns:a16="http://schemas.microsoft.com/office/drawing/2014/main" id="{908930E9-AA60-45DE-9E45-0C0B82F9DAB6}"/>
+              </a:ext>
+            </a:extLst>
+          </p:cNvPr>
+          <p:cNvSpPr>
+            <a:spLocks xmlns:a="http://schemas.openxmlformats.org/drawingml/2006/main" noGrp="1"/>
+          </p:cNvSpPr>
+          <p:nvPr/>
+        </p:nvSpPr>
+        <p:spPr>
+          <a:xfrm xmlns:a="http://schemas.openxmlformats.org/drawingml/2006/main">
+            <a:off x="5572125" y="1028700"/>
+            <a:ext cx="2400300" cy="276225"/>
+          </a:xfrm>
+          <a:prstGeom xmlns:a="http://schemas.openxmlformats.org/drawingml/2006/main" prst="rect">
+            <a:avLst/>
+          </a:prstGeom>
+          <a:noFill xmlns:a="http://schemas.openxmlformats.org/drawingml/2006/main"/>
+          <a:ln xmlns:a="http://schemas.openxmlformats.org/drawingml/2006/main" w="0">
+            <a:noFill/>
+          </a:ln>
+        </p:spPr>
+        <p:txBody>
+          <a:bodyPr xmlns:a="http://schemas.openxmlformats.org/drawingml/2006/main" wrap="square" lIns="0" tIns="0" rIns="0" bIns="0" anchor="t">
+            <a:noAutofit/>
+          </a:bodyPr>
+          <a:lstStyle xmlns:a="http://schemas.openxmlformats.org/drawingml/2006/main"/>
+          <a:p xmlns:a="http://schemas.openxmlformats.org/drawingml/2006/main">
+            <a:pPr>
+              <a:lnSpc>
+                <a:spcPct val="110000"/>
+              </a:lnSpc>
+              <a:buNone/>
+              <a:defRPr sz="1275" b="1">
+                <a:solidFill>
+                  <a:srgbClr val="244D3C"/>
+                </a:solidFill>
+                <a:latin typeface="Helvetica Neue"/>
+                <a:ea typeface="Helvetica Neue"/>
+                <a:cs typeface="Helvetica Neue"/>
+              </a:defRPr>
+            </a:pPr>
+            <a:r>
+              <a:rPr sz="1275" b="1">
+                <a:solidFill>
+                  <a:srgbClr val="244D3C"/>
+                </a:solidFill>
+                <a:latin typeface="Helvetica Neue"/>
+                <a:ea typeface="Helvetica Neue"/>
+                <a:cs typeface="Helvetica Neue"/>
+              </a:rPr>
+              <a:t>BEFORE</a:t>
+            </a:r>
+          </a:p>
+        </p:txBody>
+      </p:sp>
+      <p:sp>
+        <p:nvSpPr>
+          <p:cNvPr id="8" name="after-label">
+            <a:extLst xmlns:a="http://schemas.openxmlformats.org/drawingml/2006/main">
+              <a:ext uri="{FF2B5EF4-FFF2-40B4-BE49-F238E27FC236}">
+                <a16:creationId xmlns:a16="http://schemas.microsoft.com/office/drawing/2014/main" id="{E9579874-61D5-4C5C-AB31-E0D3B5C461C9}"/>
+              </a:ext>
+            </a:extLst>
+          </p:cNvPr>
+          <p:cNvSpPr>
+            <a:spLocks xmlns:a="http://schemas.openxmlformats.org/drawingml/2006/main" noGrp="1"/>
+          </p:cNvSpPr>
+          <p:nvPr/>
+        </p:nvSpPr>
+        <p:spPr>
+          <a:xfrm xmlns:a="http://schemas.openxmlformats.org/drawingml/2006/main">
+            <a:off x="8867775" y="1028700"/>
+            <a:ext cx="2762250" cy="276225"/>
+          </a:xfrm>
+          <a:prstGeom xmlns:a="http://schemas.openxmlformats.org/drawingml/2006/main" prst="rect">
+            <a:avLst/>
+          </a:prstGeom>
+          <a:noFill xmlns:a="http://schemas.openxmlformats.org/drawingml/2006/main"/>
+          <a:ln xmlns:a="http://schemas.openxmlformats.org/drawingml/2006/main" w="0">
+            <a:noFill/>
+          </a:ln>
+        </p:spPr>
+        <p:txBody>
+          <a:bodyPr xmlns:a="http://schemas.openxmlformats.org/drawingml/2006/main" wrap="square" lIns="0" tIns="0" rIns="0" bIns="0" anchor="t">
+            <a:noAutofit/>
+          </a:bodyPr>
+          <a:lstStyle xmlns:a="http://schemas.openxmlformats.org/drawingml/2006/main"/>
+          <a:p xmlns:a="http://schemas.openxmlformats.org/drawingml/2006/main">
+            <a:pPr>
+              <a:lnSpc>
+                <a:spcPct val="110000"/>
+              </a:lnSpc>
+              <a:buNone/>
+              <a:defRPr sz="1275" b="1">
+                <a:solidFill>
+                  <a:srgbClr val="244D3C"/>
+                </a:solidFill>
+                <a:latin typeface="Helvetica Neue"/>
+                <a:ea typeface="Helvetica Neue"/>
+                <a:cs typeface="Helvetica Neue"/>
+              </a:defRPr>
+            </a:pPr>
+            <a:r>
+              <a:rPr sz="1275" b="1">
+                <a:solidFill>
+                  <a:srgbClr val="244D3C"/>
+                </a:solidFill>
+                <a:latin typeface="Helvetica Neue"/>
+                <a:ea typeface="Helvetica Neue"/>
+                <a:cs typeface="Helvetica Neue"/>
+              </a:rPr>
+              <a:t>MY SCOPED DESIGN</a:t>
             </a:r>
           </a:p>
         </p:txBody>
       </p:sp>
       <p:pic>
         <p:nvPicPr>
-          <p:cNvPr id="16" name=""/>
+          <p:cNvPr id="19" name=""/>
           <p:cNvPicPr>
             <a:picLocks xmlns:a="http://schemas.openxmlformats.org/drawingml/2006/main" noChangeAspect="1"/>
           </p:cNvPicPr>
           <p:nvPr/>
         </p:nvPicPr>
         <p:blipFill>
-          <a:blip xmlns:r="http://schemas.openxmlformats.org/officeDocument/2006/relationships" xmlns:a="http://schemas.openxmlformats.org/drawingml/2006/main" r:embed="R3f3cbeb53bcb418c"/>
+          <a:blip xmlns:r="http://schemas.openxmlformats.org/officeDocument/2006/relationships" xmlns:a="http://schemas.openxmlformats.org/drawingml/2006/main" r:embed="Rb399c3d23e4f4d07"/>
           <a:stretch xmlns:a="http://schemas.openxmlformats.org/drawingml/2006/main"/>
         </p:blipFill>
         <p:spPr>
           <a:xfrm xmlns:a="http://schemas.openxmlformats.org/drawingml/2006/main">
-            <a:off x="8578301" y="1209675"/>
-            <a:ext cx="1883872" cy="4762500"/>
+            <a:off x="5600737" y="1457325"/>
+            <a:ext cx="2276401" cy="4953000"/>
           </a:xfrm>
           <a:prstGeom xmlns:a="http://schemas.openxmlformats.org/drawingml/2006/main" prst="rect">
             <a:avLst/>
@@ -2836,91 +3100,30 @@
       </p:pic>
       <p:pic>
         <p:nvPicPr>
-          <p:cNvPr id="17" name=""/>
+          <p:cNvPr id="20" name=""/>
           <p:cNvPicPr>
             <a:picLocks xmlns:a="http://schemas.openxmlformats.org/drawingml/2006/main" noChangeAspect="1"/>
           </p:cNvPicPr>
           <p:nvPr/>
         </p:nvPicPr>
         <p:blipFill>
-          <a:blip xmlns:r="http://schemas.openxmlformats.org/officeDocument/2006/relationships" xmlns:a="http://schemas.openxmlformats.org/drawingml/2006/main" r:embed="R87e7b983cc19403e"/>
+          <a:blip xmlns:r="http://schemas.openxmlformats.org/officeDocument/2006/relationships" xmlns:a="http://schemas.openxmlformats.org/drawingml/2006/main" r:embed="Rb20ad542c9f549e7"/>
           <a:stretch xmlns:a="http://schemas.openxmlformats.org/drawingml/2006/main"/>
         </p:blipFill>
         <p:spPr>
           <a:xfrm xmlns:a="http://schemas.openxmlformats.org/drawingml/2006/main">
-            <a:off x="6048375" y="4534039"/>
-            <a:ext cx="1866900" cy="1218923"/>
+            <a:off x="9078786" y="1457325"/>
+            <a:ext cx="1959227" cy="4953000"/>
           </a:xfrm>
           <a:prstGeom xmlns:a="http://schemas.openxmlformats.org/drawingml/2006/main" prst="rect">
             <a:avLst/>
           </a:prstGeom>
         </p:spPr>
       </p:pic>
-      <p:sp>
-        <p:nvSpPr>
-          <p:cNvPr id="9" name="camera-stage">
-            <a:extLst xmlns:a="http://schemas.openxmlformats.org/drawingml/2006/main">
-              <a:ext uri="{FF2B5EF4-FFF2-40B4-BE49-F238E27FC236}">
-                <a16:creationId xmlns:a16="http://schemas.microsoft.com/office/drawing/2014/main" id="{CFF1A6B1-B042-4EF0-9D26-5DA9128B9BDD}"/>
-              </a:ext>
-            </a:extLst>
-          </p:cNvPr>
-          <p:cNvSpPr>
-            <a:spLocks xmlns:a="http://schemas.openxmlformats.org/drawingml/2006/main" noGrp="1"/>
-          </p:cNvSpPr>
-          <p:nvPr/>
-        </p:nvSpPr>
-        <p:spPr>
-          <a:xfrm xmlns:a="http://schemas.openxmlformats.org/drawingml/2006/main">
-            <a:off x="6048375" y="6019800"/>
-            <a:ext cx="4943475" cy="342900"/>
-          </a:xfrm>
-          <a:prstGeom xmlns:a="http://schemas.openxmlformats.org/drawingml/2006/main" prst="rect">
-            <a:avLst/>
-          </a:prstGeom>
-          <a:noFill xmlns:a="http://schemas.openxmlformats.org/drawingml/2006/main"/>
-          <a:ln xmlns:a="http://schemas.openxmlformats.org/drawingml/2006/main" w="0">
-            <a:noFill/>
-          </a:ln>
-        </p:spPr>
-        <p:txBody>
-          <a:bodyPr xmlns:a="http://schemas.openxmlformats.org/drawingml/2006/main" wrap="square" lIns="0" tIns="0" rIns="0" bIns="0" anchor="t">
-            <a:noAutofit/>
-          </a:bodyPr>
-          <a:lstStyle xmlns:a="http://schemas.openxmlformats.org/drawingml/2006/main"/>
-          <a:p xmlns:a="http://schemas.openxmlformats.org/drawingml/2006/main">
-            <a:pPr>
-              <a:lnSpc>
-                <a:spcPct val="110000"/>
-              </a:lnSpc>
-              <a:buNone/>
-              <a:defRPr sz="1200" b="0">
-                <a:solidFill>
-                  <a:srgbClr val="58645D"/>
-                </a:solidFill>
-                <a:latin typeface="Helvetica Neue"/>
-                <a:ea typeface="Helvetica Neue"/>
-                <a:cs typeface="Helvetica Neue"/>
-              </a:defRPr>
-            </a:pPr>
-            <a:r>
-              <a:rPr sz="1200" b="0">
-                <a:solidFill>
-                  <a:srgbClr val="58645D"/>
-                </a:solidFill>
-                <a:latin typeface="Helvetica Neue"/>
-                <a:ea typeface="Helvetica Neue"/>
-                <a:cs typeface="Helvetica Neue"/>
-              </a:rPr>
-              <a:t>Original design and April handoff · implementation and retest unverified</a:t>
-            </a:r>
-          </a:p>
-        </p:txBody>
-      </p:sp>
     </p:spTree>
     <p:extLst>
       <p:ext uri="{BB962C8B-B14F-4D97-AF65-F5344CB8AC3E}">
-        <p14:creationId xmlns:p14="http://schemas.microsoft.com/office/powerpoint/2010/main" val="565416675"/>
+        <p14:creationId xmlns:p14="http://schemas.microsoft.com/office/powerpoint/2010/main" val="757257751"/>
       </p:ext>
     </p:extLst>
   </p:cSld>
@@ -2948,10 +3151,10 @@
       </p:grpSpPr>
       <p:sp>
         <p:nvSpPr>
-          <p:cNvPr id="8" name="slide-number">
-            <a:extLst xmlns:a="http://schemas.openxmlformats.org/drawingml/2006/main">
-              <a:ext uri="{FF2B5EF4-FFF2-40B4-BE49-F238E27FC236}">
-                <a16:creationId xmlns:a16="http://schemas.microsoft.com/office/drawing/2014/main" id="{CEC947D4-762E-4A06-AA25-FE74A567C06C}"/>
+          <p:cNvPr id="13" name="slide-number">
+            <a:extLst xmlns:a="http://schemas.openxmlformats.org/drawingml/2006/main">
+              <a:ext uri="{FF2B5EF4-FFF2-40B4-BE49-F238E27FC236}">
+                <a16:creationId xmlns:a16="http://schemas.microsoft.com/office/drawing/2014/main" id="{13195249-7806-4344-9166-465B4A47D32F}"/>
               </a:ext>
             </a:extLst>
           </p:cNvPr>
@@ -3012,7 +3215,7 @@
           <p:cNvPr id="2" name="section-label">
             <a:extLst xmlns:a="http://schemas.openxmlformats.org/drawingml/2006/main">
               <a:ext uri="{FF2B5EF4-FFF2-40B4-BE49-F238E27FC236}">
-                <a16:creationId xmlns:a16="http://schemas.microsoft.com/office/drawing/2014/main" id="{2BC964AC-DFFD-474C-9FAF-90D308C2F451}"/>
+                <a16:creationId xmlns:a16="http://schemas.microsoft.com/office/drawing/2014/main" id="{815896F5-B3EA-4562-87BF-54D96BCF4A7A}"/>
               </a:ext>
             </a:extLst>
           </p:cNvPr>
@@ -3063,7 +3266,7 @@
                 <a:ea typeface="Helvetica Neue"/>
                 <a:cs typeface="Helvetica Neue"/>
               </a:rPr>
-              <a:t>OAK AI   /   LEAD UX RESEARCHER, 2023–2025</a:t>
+              <a:t>CAMERA CAPTURE   /   MY BROADER DESIGN EXPLORATION</a:t>
             </a:r>
           </a:p>
         </p:txBody>
@@ -3073,40 +3276,40 @@
           <p:cNvPr id="3" name="headline">
             <a:extLst xmlns:a="http://schemas.openxmlformats.org/drawingml/2006/main">
               <a:ext uri="{FF2B5EF4-FFF2-40B4-BE49-F238E27FC236}">
-                <a16:creationId xmlns:a16="http://schemas.microsoft.com/office/drawing/2014/main" id="{D715EAFF-6235-4BCA-BB28-F15C475BCB0F}"/>
-              </a:ext>
-            </a:extLst>
-          </p:cNvPr>
-          <p:cNvSpPr>
-            <a:spLocks xmlns:a="http://schemas.openxmlformats.org/drawingml/2006/main" noGrp="1"/>
-          </p:cNvSpPr>
-          <p:nvPr/>
-        </p:nvSpPr>
-        <p:spPr>
-          <a:xfrm xmlns:a="http://schemas.openxmlformats.org/drawingml/2006/main">
-            <a:off x="609600" y="1104900"/>
-            <a:ext cx="4248150" cy="1438275"/>
-          </a:xfrm>
-          <a:prstGeom xmlns:a="http://schemas.openxmlformats.org/drawingml/2006/main" prst="rect">
-            <a:avLst/>
-          </a:prstGeom>
-          <a:noFill xmlns:a="http://schemas.openxmlformats.org/drawingml/2006/main"/>
-          <a:ln xmlns:a="http://schemas.openxmlformats.org/drawingml/2006/main" w="0">
-            <a:noFill/>
-          </a:ln>
-        </p:spPr>
-        <p:txBody>
-          <a:bodyPr xmlns:a="http://schemas.openxmlformats.org/drawingml/2006/main" wrap="square" lIns="0" tIns="0" rIns="0" bIns="0" anchor="t">
-            <a:noAutofit/>
-          </a:bodyPr>
-          <a:lstStyle xmlns:a="http://schemas.openxmlformats.org/drawingml/2006/main"/>
-          <a:p xmlns:a="http://schemas.openxmlformats.org/drawingml/2006/main">
-            <a:pPr>
-              <a:lnSpc>
-                <a:spcPct val="110000"/>
-              </a:lnSpc>
-              <a:buNone/>
-              <a:defRPr sz="3750" b="1">
+                <a16:creationId xmlns:a16="http://schemas.microsoft.com/office/drawing/2014/main" id="{17CC83BB-0EA1-4E17-93C1-FBF677535215}"/>
+              </a:ext>
+            </a:extLst>
+          </p:cNvPr>
+          <p:cNvSpPr>
+            <a:spLocks xmlns:a="http://schemas.openxmlformats.org/drawingml/2006/main" noGrp="1"/>
+          </p:cNvSpPr>
+          <p:nvPr/>
+        </p:nvSpPr>
+        <p:spPr>
+          <a:xfrm xmlns:a="http://schemas.openxmlformats.org/drawingml/2006/main">
+            <a:off x="609600" y="1028700"/>
+            <a:ext cx="10953750" cy="704850"/>
+          </a:xfrm>
+          <a:prstGeom xmlns:a="http://schemas.openxmlformats.org/drawingml/2006/main" prst="rect">
+            <a:avLst/>
+          </a:prstGeom>
+          <a:noFill xmlns:a="http://schemas.openxmlformats.org/drawingml/2006/main"/>
+          <a:ln xmlns:a="http://schemas.openxmlformats.org/drawingml/2006/main" w="0">
+            <a:noFill/>
+          </a:ln>
+        </p:spPr>
+        <p:txBody>
+          <a:bodyPr xmlns:a="http://schemas.openxmlformats.org/drawingml/2006/main" wrap="square" lIns="0" tIns="0" rIns="0" bIns="0" anchor="t">
+            <a:noAutofit/>
+          </a:bodyPr>
+          <a:lstStyle xmlns:a="http://schemas.openxmlformats.org/drawingml/2006/main"/>
+          <a:p xmlns:a="http://schemas.openxmlformats.org/drawingml/2006/main">
+            <a:pPr>
+              <a:lnSpc>
+                <a:spcPct val="110000"/>
+              </a:lnSpc>
+              <a:buNone/>
+              <a:defRPr sz="3450" b="1">
                 <a:solidFill>
                   <a:srgbClr val="192B25"/>
                 </a:solidFill>
@@ -3116,7 +3319,7 @@
               </a:defRPr>
             </a:pPr>
             <a:r>
-              <a:rPr sz="3750" b="1">
+              <a:rPr sz="3450" b="1">
                 <a:solidFill>
                   <a:srgbClr val="192B25"/>
                 </a:solidFill>
@@ -3124,247 +3327,447 @@
                 <a:ea typeface="Helvetica Neue"/>
                 <a:cs typeface="Helvetica Neue"/>
               </a:rPr>
-              <a:t>Competing</a:t>
-            </a:r>
-          </a:p>
-          <a:p xmlns:a="http://schemas.openxmlformats.org/drawingml/2006/main">
-            <a:pPr>
-              <a:lnSpc>
-                <a:spcPct val="110000"/>
-              </a:lnSpc>
-              <a:buNone/>
-              <a:defRPr sz="3750" b="1">
-                <a:solidFill>
-                  <a:srgbClr val="192B25"/>
-                </a:solidFill>
-                <a:latin typeface="Helvetica Neue"/>
-                <a:ea typeface="Helvetica Neue"/>
-                <a:cs typeface="Helvetica Neue"/>
-              </a:defRPr>
-            </a:pPr>
-            <a:r>
-              <a:rPr sz="3750" b="1">
-                <a:solidFill>
-                  <a:srgbClr val="192B25"/>
-                </a:solidFill>
-                <a:latin typeface="Helvetica Neue"/>
-                <a:ea typeface="Helvetica Neue"/>
-                <a:cs typeface="Helvetica Neue"/>
-              </a:rPr>
-              <a:t>entry points</a:t>
-            </a:r>
-          </a:p>
-        </p:txBody>
-      </p:sp>
-      <p:sp>
-        <p:nvSpPr>
-          <p:cNvPr id="4" name="oak-observation">
-            <a:extLst xmlns:a="http://schemas.openxmlformats.org/drawingml/2006/main">
-              <a:ext uri="{FF2B5EF4-FFF2-40B4-BE49-F238E27FC236}">
-                <a16:creationId xmlns:a16="http://schemas.microsoft.com/office/drawing/2014/main" id="{B6040F3D-C2CC-4A92-BDA0-26720D6E1100}"/>
-              </a:ext>
-            </a:extLst>
-          </p:cNvPr>
-          <p:cNvSpPr>
-            <a:spLocks xmlns:a="http://schemas.openxmlformats.org/drawingml/2006/main" noGrp="1"/>
-          </p:cNvSpPr>
-          <p:nvPr/>
-        </p:nvSpPr>
-        <p:spPr>
-          <a:xfrm xmlns:a="http://schemas.openxmlformats.org/drawingml/2006/main">
-            <a:off x="609600" y="2981325"/>
-            <a:ext cx="4057650" cy="1743075"/>
-          </a:xfrm>
-          <a:prstGeom xmlns:a="http://schemas.openxmlformats.org/drawingml/2006/main" prst="rect">
-            <a:avLst/>
-          </a:prstGeom>
-          <a:noFill xmlns:a="http://schemas.openxmlformats.org/drawingml/2006/main"/>
-          <a:ln xmlns:a="http://schemas.openxmlformats.org/drawingml/2006/main" w="0">
-            <a:noFill/>
-          </a:ln>
-        </p:spPr>
-        <p:txBody>
-          <a:bodyPr xmlns:a="http://schemas.openxmlformats.org/drawingml/2006/main" wrap="square" lIns="0" tIns="0" rIns="0" bIns="0" anchor="t">
-            <a:noAutofit/>
-          </a:bodyPr>
-          <a:lstStyle xmlns:a="http://schemas.openxmlformats.org/drawingml/2006/main"/>
-          <a:p xmlns:a="http://schemas.openxmlformats.org/drawingml/2006/main">
-            <a:pPr>
-              <a:lnSpc>
-                <a:spcPct val="110000"/>
-              </a:lnSpc>
-              <a:buNone/>
-              <a:defRPr sz="1950" b="0">
-                <a:solidFill>
-                  <a:srgbClr val="192B25"/>
-                </a:solidFill>
-                <a:latin typeface="Helvetica Neue"/>
-                <a:ea typeface="Helvetica Neue"/>
-                <a:cs typeface="Helvetica Neue"/>
-              </a:defRPr>
-            </a:pPr>
-            <a:r>
-              <a:rPr sz="1950" b="0">
-                <a:solidFill>
-                  <a:srgbClr val="192B25"/>
-                </a:solidFill>
-                <a:latin typeface="Helvetica Neue"/>
-                <a:ea typeface="Helvetica Neue"/>
-                <a:cs typeface="Helvetica Neue"/>
-              </a:rPr>
-              <a:t>Training an assistant, starting a Vibecheck and requesting support competed at the same entry point.</a:t>
-            </a:r>
-          </a:p>
-        </p:txBody>
-      </p:sp>
-      <p:sp>
-        <p:nvSpPr>
-          <p:cNvPr id="5" name="oak-rationale">
-            <a:extLst xmlns:a="http://schemas.openxmlformats.org/drawingml/2006/main">
-              <a:ext uri="{FF2B5EF4-FFF2-40B4-BE49-F238E27FC236}">
-                <a16:creationId xmlns:a16="http://schemas.microsoft.com/office/drawing/2014/main" id="{DB617A73-058A-430C-ABE7-8D9F12FDE410}"/>
-              </a:ext>
-            </a:extLst>
-          </p:cNvPr>
-          <p:cNvSpPr>
-            <a:spLocks xmlns:a="http://schemas.openxmlformats.org/drawingml/2006/main" noGrp="1"/>
-          </p:cNvSpPr>
-          <p:nvPr/>
-        </p:nvSpPr>
-        <p:spPr>
-          <a:xfrm xmlns:a="http://schemas.openxmlformats.org/drawingml/2006/main">
-            <a:off x="609600" y="5038725"/>
-            <a:ext cx="4057650" cy="981075"/>
-          </a:xfrm>
-          <a:prstGeom xmlns:a="http://schemas.openxmlformats.org/drawingml/2006/main" prst="rect">
-            <a:avLst/>
-          </a:prstGeom>
-          <a:noFill xmlns:a="http://schemas.openxmlformats.org/drawingml/2006/main"/>
-          <a:ln xmlns:a="http://schemas.openxmlformats.org/drawingml/2006/main" w="0">
-            <a:noFill/>
-          </a:ln>
-        </p:spPr>
-        <p:txBody>
-          <a:bodyPr xmlns:a="http://schemas.openxmlformats.org/drawingml/2006/main" wrap="square" lIns="0" tIns="0" rIns="0" bIns="0" anchor="t">
-            <a:noAutofit/>
-          </a:bodyPr>
-          <a:lstStyle xmlns:a="http://schemas.openxmlformats.org/drawingml/2006/main"/>
-          <a:p xmlns:a="http://schemas.openxmlformats.org/drawingml/2006/main">
-            <a:pPr>
-              <a:lnSpc>
-                <a:spcPct val="110000"/>
-              </a:lnSpc>
-              <a:buNone/>
-              <a:defRPr sz="1725" b="0">
-                <a:solidFill>
-                  <a:srgbClr val="58645D"/>
-                </a:solidFill>
-                <a:latin typeface="Helvetica Neue"/>
-                <a:ea typeface="Helvetica Neue"/>
-                <a:cs typeface="Helvetica Neue"/>
-              </a:defRPr>
-            </a:pPr>
-            <a:r>
-              <a:rPr sz="1725" b="0">
-                <a:solidFill>
-                  <a:srgbClr val="58645D"/>
-                </a:solidFill>
-                <a:latin typeface="Helvetica Neue"/>
-                <a:ea typeface="Helvetica Neue"/>
-                <a:cs typeface="Helvetica Neue"/>
-              </a:rPr>
-              <a:t>I used the audit to make these choices explicit for the team’s review.</a:t>
-            </a:r>
-          </a:p>
-        </p:txBody>
-      </p:sp>
-      <p:sp>
-        <p:nvSpPr>
-          <p:cNvPr id="6" name="oak-stage">
-            <a:extLst xmlns:a="http://schemas.openxmlformats.org/drawingml/2006/main">
-              <a:ext uri="{FF2B5EF4-FFF2-40B4-BE49-F238E27FC236}">
-                <a16:creationId xmlns:a16="http://schemas.microsoft.com/office/drawing/2014/main" id="{490BA70F-B7DA-4248-AF89-488297250B05}"/>
-              </a:ext>
-            </a:extLst>
-          </p:cNvPr>
-          <p:cNvSpPr>
-            <a:spLocks xmlns:a="http://schemas.openxmlformats.org/drawingml/2006/main" noGrp="1"/>
-          </p:cNvSpPr>
-          <p:nvPr/>
-        </p:nvSpPr>
-        <p:spPr>
-          <a:xfrm xmlns:a="http://schemas.openxmlformats.org/drawingml/2006/main">
-            <a:off x="609600" y="6096000"/>
-            <a:ext cx="4248150" cy="400050"/>
-          </a:xfrm>
-          <a:prstGeom xmlns:a="http://schemas.openxmlformats.org/drawingml/2006/main" prst="rect">
-            <a:avLst/>
-          </a:prstGeom>
-          <a:noFill xmlns:a="http://schemas.openxmlformats.org/drawingml/2006/main"/>
-          <a:ln xmlns:a="http://schemas.openxmlformats.org/drawingml/2006/main" w="0">
-            <a:noFill/>
-          </a:ln>
-        </p:spPr>
-        <p:txBody>
-          <a:bodyPr xmlns:a="http://schemas.openxmlformats.org/drawingml/2006/main" wrap="square" lIns="0" tIns="0" rIns="0" bIns="0" anchor="t">
-            <a:noAutofit/>
-          </a:bodyPr>
-          <a:lstStyle xmlns:a="http://schemas.openxmlformats.org/drawingml/2006/main"/>
-          <a:p xmlns:a="http://schemas.openxmlformats.org/drawingml/2006/main">
-            <a:pPr>
-              <a:lnSpc>
-                <a:spcPct val="110000"/>
-              </a:lnSpc>
-              <a:buNone/>
-              <a:defRPr sz="1200" b="0">
-                <a:solidFill>
-                  <a:srgbClr val="58645D"/>
-                </a:solidFill>
-                <a:latin typeface="Helvetica Neue"/>
-                <a:ea typeface="Helvetica Neue"/>
-                <a:cs typeface="Helvetica Neue"/>
-              </a:defRPr>
-            </a:pPr>
-            <a:r>
-              <a:rPr sz="1200" b="0">
-                <a:solidFill>
-                  <a:srgbClr val="58645D"/>
-                </a:solidFill>
-                <a:latin typeface="Helvetica Neue"/>
-                <a:ea typeface="Helvetica Neue"/>
-                <a:cs typeface="Helvetica Neue"/>
-              </a:rPr>
-              <a:t>Usability evaluation and design recommendations</a:t>
+              <a:t>Make every recording state clear</a:t>
+            </a:r>
+          </a:p>
+        </p:txBody>
+      </p:sp>
+      <p:sp>
+        <p:nvSpPr>
+          <p:cNvPr id="4" name="flow-label-0">
+            <a:extLst xmlns:a="http://schemas.openxmlformats.org/drawingml/2006/main">
+              <a:ext uri="{FF2B5EF4-FFF2-40B4-BE49-F238E27FC236}">
+                <a16:creationId xmlns:a16="http://schemas.microsoft.com/office/drawing/2014/main" id="{F417AA5E-D628-4143-941A-52C2E55D3BC6}"/>
+              </a:ext>
+            </a:extLst>
+          </p:cNvPr>
+          <p:cNvSpPr>
+            <a:spLocks xmlns:a="http://schemas.openxmlformats.org/drawingml/2006/main" noGrp="1"/>
+          </p:cNvSpPr>
+          <p:nvPr/>
+        </p:nvSpPr>
+        <p:spPr>
+          <a:xfrm xmlns:a="http://schemas.openxmlformats.org/drawingml/2006/main">
+            <a:off x="685800" y="2009775"/>
+            <a:ext cx="3048000" cy="266700"/>
+          </a:xfrm>
+          <a:prstGeom xmlns:a="http://schemas.openxmlformats.org/drawingml/2006/main" prst="rect">
+            <a:avLst/>
+          </a:prstGeom>
+          <a:noFill xmlns:a="http://schemas.openxmlformats.org/drawingml/2006/main"/>
+          <a:ln xmlns:a="http://schemas.openxmlformats.org/drawingml/2006/main" w="0">
+            <a:noFill/>
+          </a:ln>
+        </p:spPr>
+        <p:txBody>
+          <a:bodyPr xmlns:a="http://schemas.openxmlformats.org/drawingml/2006/main" wrap="square" lIns="0" tIns="0" rIns="0" bIns="0" anchor="t">
+            <a:noAutofit/>
+          </a:bodyPr>
+          <a:lstStyle xmlns:a="http://schemas.openxmlformats.org/drawingml/2006/main"/>
+          <a:p xmlns:a="http://schemas.openxmlformats.org/drawingml/2006/main">
+            <a:pPr>
+              <a:lnSpc>
+                <a:spcPct val="110000"/>
+              </a:lnSpc>
+              <a:buNone/>
+              <a:defRPr sz="1275" b="1">
+                <a:solidFill>
+                  <a:srgbClr val="244D3C"/>
+                </a:solidFill>
+                <a:latin typeface="Helvetica Neue"/>
+                <a:ea typeface="Helvetica Neue"/>
+                <a:cs typeface="Helvetica Neue"/>
+              </a:defRPr>
+            </a:pPr>
+            <a:r>
+              <a:rPr sz="1275" b="1">
+                <a:solidFill>
+                  <a:srgbClr val="244D3C"/>
+                </a:solidFill>
+                <a:latin typeface="Helvetica Neue"/>
+                <a:ea typeface="Helvetica Neue"/>
+                <a:cs typeface="Helvetica Neue"/>
+              </a:rPr>
+              <a:t>READY TO RECORD</a:t>
             </a:r>
           </a:p>
         </p:txBody>
       </p:sp>
       <p:pic>
         <p:nvPicPr>
-          <p:cNvPr id="14" name=""/>
+          <p:cNvPr id="17" name=""/>
           <p:cNvPicPr>
             <a:picLocks xmlns:a="http://schemas.openxmlformats.org/drawingml/2006/main" noChangeAspect="1"/>
           </p:cNvPicPr>
           <p:nvPr/>
         </p:nvPicPr>
         <p:blipFill>
-          <a:blip xmlns:r="http://schemas.openxmlformats.org/officeDocument/2006/relationships" xmlns:a="http://schemas.openxmlformats.org/drawingml/2006/main" r:embed="R9ad64653b3484edd"/>
+          <a:blip xmlns:r="http://schemas.openxmlformats.org/officeDocument/2006/relationships" xmlns:a="http://schemas.openxmlformats.org/drawingml/2006/main" r:embed="Rf76f21eb7eb44dca"/>
           <a:stretch xmlns:a="http://schemas.openxmlformats.org/drawingml/2006/main"/>
         </p:blipFill>
         <p:spPr>
           <a:xfrm xmlns:a="http://schemas.openxmlformats.org/drawingml/2006/main">
-            <a:off x="5147971" y="1438275"/>
-            <a:ext cx="6429958" cy="5048250"/>
+            <a:off x="1399475" y="2419350"/>
+            <a:ext cx="1525401" cy="3457575"/>
           </a:xfrm>
           <a:prstGeom xmlns:a="http://schemas.openxmlformats.org/drawingml/2006/main" prst="rect">
             <a:avLst/>
           </a:prstGeom>
         </p:spPr>
       </p:pic>
+      <p:sp>
+        <p:nvSpPr>
+          <p:cNvPr id="6" name="flow-caption-0">
+            <a:extLst xmlns:a="http://schemas.openxmlformats.org/drawingml/2006/main">
+              <a:ext uri="{FF2B5EF4-FFF2-40B4-BE49-F238E27FC236}">
+                <a16:creationId xmlns:a16="http://schemas.microsoft.com/office/drawing/2014/main" id="{1411BDCC-2312-467F-9840-A590C6F0BCC3}"/>
+              </a:ext>
+            </a:extLst>
+          </p:cNvPr>
+          <p:cNvSpPr>
+            <a:spLocks xmlns:a="http://schemas.openxmlformats.org/drawingml/2006/main" noGrp="1"/>
+          </p:cNvSpPr>
+          <p:nvPr/>
+        </p:nvSpPr>
+        <p:spPr>
+          <a:xfrm xmlns:a="http://schemas.openxmlformats.org/drawingml/2006/main">
+            <a:off x="685800" y="6038850"/>
+            <a:ext cx="3238500" cy="419100"/>
+          </a:xfrm>
+          <a:prstGeom xmlns:a="http://schemas.openxmlformats.org/drawingml/2006/main" prst="rect">
+            <a:avLst/>
+          </a:prstGeom>
+          <a:noFill xmlns:a="http://schemas.openxmlformats.org/drawingml/2006/main"/>
+          <a:ln xmlns:a="http://schemas.openxmlformats.org/drawingml/2006/main" w="0">
+            <a:noFill/>
+          </a:ln>
+        </p:spPr>
+        <p:txBody>
+          <a:bodyPr xmlns:a="http://schemas.openxmlformats.org/drawingml/2006/main" wrap="square" lIns="0" tIns="0" rIns="0" bIns="0" anchor="t">
+            <a:noAutofit/>
+          </a:bodyPr>
+          <a:lstStyle xmlns:a="http://schemas.openxmlformats.org/drawingml/2006/main"/>
+          <a:p xmlns:a="http://schemas.openxmlformats.org/drawingml/2006/main">
+            <a:pPr>
+              <a:lnSpc>
+                <a:spcPct val="110000"/>
+              </a:lnSpc>
+              <a:buNone/>
+              <a:defRPr sz="1350" b="0">
+                <a:solidFill>
+                  <a:srgbClr val="58645D"/>
+                </a:solidFill>
+                <a:latin typeface="Helvetica Neue"/>
+                <a:ea typeface="Helvetica Neue"/>
+                <a:cs typeface="Helvetica Neue"/>
+              </a:defRPr>
+            </a:pPr>
+            <a:r>
+              <a:rPr sz="1350" b="0">
+                <a:solidFill>
+                  <a:srgbClr val="58645D"/>
+                </a:solidFill>
+                <a:latin typeface="Helvetica Neue"/>
+                <a:ea typeface="Helvetica Neue"/>
+                <a:cs typeface="Helvetica Neue"/>
+              </a:rPr>
+              <a:t>Cancel, Record and View Details.</a:t>
+            </a:r>
+          </a:p>
+        </p:txBody>
+      </p:sp>
+      <p:sp>
+        <p:nvSpPr>
+          <p:cNvPr id="7" name="flow-label-1">
+            <a:extLst xmlns:a="http://schemas.openxmlformats.org/drawingml/2006/main">
+              <a:ext uri="{FF2B5EF4-FFF2-40B4-BE49-F238E27FC236}">
+                <a16:creationId xmlns:a16="http://schemas.microsoft.com/office/drawing/2014/main" id="{3F2D7F0B-6A92-4D86-9E4B-842DCA822CC8}"/>
+              </a:ext>
+            </a:extLst>
+          </p:cNvPr>
+          <p:cNvSpPr>
+            <a:spLocks xmlns:a="http://schemas.openxmlformats.org/drawingml/2006/main" noGrp="1"/>
+          </p:cNvSpPr>
+          <p:nvPr/>
+        </p:nvSpPr>
+        <p:spPr>
+          <a:xfrm xmlns:a="http://schemas.openxmlformats.org/drawingml/2006/main">
+            <a:off x="4572000" y="2009775"/>
+            <a:ext cx="3048000" cy="266700"/>
+          </a:xfrm>
+          <a:prstGeom xmlns:a="http://schemas.openxmlformats.org/drawingml/2006/main" prst="rect">
+            <a:avLst/>
+          </a:prstGeom>
+          <a:noFill xmlns:a="http://schemas.openxmlformats.org/drawingml/2006/main"/>
+          <a:ln xmlns:a="http://schemas.openxmlformats.org/drawingml/2006/main" w="0">
+            <a:noFill/>
+          </a:ln>
+        </p:spPr>
+        <p:txBody>
+          <a:bodyPr xmlns:a="http://schemas.openxmlformats.org/drawingml/2006/main" wrap="square" lIns="0" tIns="0" rIns="0" bIns="0" anchor="t">
+            <a:noAutofit/>
+          </a:bodyPr>
+          <a:lstStyle xmlns:a="http://schemas.openxmlformats.org/drawingml/2006/main"/>
+          <a:p xmlns:a="http://schemas.openxmlformats.org/drawingml/2006/main">
+            <a:pPr>
+              <a:lnSpc>
+                <a:spcPct val="110000"/>
+              </a:lnSpc>
+              <a:buNone/>
+              <a:defRPr sz="1275" b="1">
+                <a:solidFill>
+                  <a:srgbClr val="244D3C"/>
+                </a:solidFill>
+                <a:latin typeface="Helvetica Neue"/>
+                <a:ea typeface="Helvetica Neue"/>
+                <a:cs typeface="Helvetica Neue"/>
+              </a:defRPr>
+            </a:pPr>
+            <a:r>
+              <a:rPr sz="1275" b="1">
+                <a:solidFill>
+                  <a:srgbClr val="244D3C"/>
+                </a:solidFill>
+                <a:latin typeface="Helvetica Neue"/>
+                <a:ea typeface="Helvetica Neue"/>
+                <a:cs typeface="Helvetica Neue"/>
+              </a:rPr>
+              <a:t>RECORDING</a:t>
+            </a:r>
+          </a:p>
+        </p:txBody>
+      </p:sp>
+      <p:pic>
+        <p:nvPicPr>
+          <p:cNvPr id="20" name=""/>
+          <p:cNvPicPr>
+            <a:picLocks xmlns:a="http://schemas.openxmlformats.org/drawingml/2006/main" noChangeAspect="1"/>
+          </p:cNvPicPr>
+          <p:nvPr/>
+        </p:nvPicPr>
+        <p:blipFill>
+          <a:blip xmlns:r="http://schemas.openxmlformats.org/officeDocument/2006/relationships" xmlns:a="http://schemas.openxmlformats.org/drawingml/2006/main" r:embed="Ra833eb4f0c2648ca"/>
+          <a:stretch xmlns:a="http://schemas.openxmlformats.org/drawingml/2006/main"/>
+        </p:blipFill>
+        <p:spPr>
+          <a:xfrm xmlns:a="http://schemas.openxmlformats.org/drawingml/2006/main">
+            <a:off x="5285675" y="2419350"/>
+            <a:ext cx="1525401" cy="3457575"/>
+          </a:xfrm>
+          <a:prstGeom xmlns:a="http://schemas.openxmlformats.org/drawingml/2006/main" prst="rect">
+            <a:avLst/>
+          </a:prstGeom>
+        </p:spPr>
+      </p:pic>
+      <p:sp>
+        <p:nvSpPr>
+          <p:cNvPr id="9" name="flow-caption-1">
+            <a:extLst xmlns:a="http://schemas.openxmlformats.org/drawingml/2006/main">
+              <a:ext uri="{FF2B5EF4-FFF2-40B4-BE49-F238E27FC236}">
+                <a16:creationId xmlns:a16="http://schemas.microsoft.com/office/drawing/2014/main" id="{3C54574F-D8F8-49F3-A94A-B998D119DC9F}"/>
+              </a:ext>
+            </a:extLst>
+          </p:cNvPr>
+          <p:cNvSpPr>
+            <a:spLocks xmlns:a="http://schemas.openxmlformats.org/drawingml/2006/main" noGrp="1"/>
+          </p:cNvSpPr>
+          <p:nvPr/>
+        </p:nvSpPr>
+        <p:spPr>
+          <a:xfrm xmlns:a="http://schemas.openxmlformats.org/drawingml/2006/main">
+            <a:off x="4572000" y="6038850"/>
+            <a:ext cx="3238500" cy="419100"/>
+          </a:xfrm>
+          <a:prstGeom xmlns:a="http://schemas.openxmlformats.org/drawingml/2006/main" prst="rect">
+            <a:avLst/>
+          </a:prstGeom>
+          <a:noFill xmlns:a="http://schemas.openxmlformats.org/drawingml/2006/main"/>
+          <a:ln xmlns:a="http://schemas.openxmlformats.org/drawingml/2006/main" w="0">
+            <a:noFill/>
+          </a:ln>
+        </p:spPr>
+        <p:txBody>
+          <a:bodyPr xmlns:a="http://schemas.openxmlformats.org/drawingml/2006/main" wrap="square" lIns="0" tIns="0" rIns="0" bIns="0" anchor="t">
+            <a:noAutofit/>
+          </a:bodyPr>
+          <a:lstStyle xmlns:a="http://schemas.openxmlformats.org/drawingml/2006/main"/>
+          <a:p xmlns:a="http://schemas.openxmlformats.org/drawingml/2006/main">
+            <a:pPr>
+              <a:lnSpc>
+                <a:spcPct val="110000"/>
+              </a:lnSpc>
+              <a:buNone/>
+              <a:defRPr sz="1350" b="0">
+                <a:solidFill>
+                  <a:srgbClr val="58645D"/>
+                </a:solidFill>
+                <a:latin typeface="Helvetica Neue"/>
+                <a:ea typeface="Helvetica Neue"/>
+                <a:cs typeface="Helvetica Neue"/>
+              </a:defRPr>
+            </a:pPr>
+            <a:r>
+              <a:rPr sz="1350" b="0">
+                <a:solidFill>
+                  <a:srgbClr val="58645D"/>
+                </a:solidFill>
+                <a:latin typeface="Helvetica Neue"/>
+                <a:ea typeface="Helvetica Neue"/>
+                <a:cs typeface="Helvetica Neue"/>
+              </a:rPr>
+              <a:t>Elapsed time and a distinct Stop control.</a:t>
+            </a:r>
+          </a:p>
+        </p:txBody>
+      </p:sp>
+      <p:sp>
+        <p:nvSpPr>
+          <p:cNvPr id="10" name="flow-label-2">
+            <a:extLst xmlns:a="http://schemas.openxmlformats.org/drawingml/2006/main">
+              <a:ext uri="{FF2B5EF4-FFF2-40B4-BE49-F238E27FC236}">
+                <a16:creationId xmlns:a16="http://schemas.microsoft.com/office/drawing/2014/main" id="{04AB97C9-0991-4420-AE8D-D31976DEDC65}"/>
+              </a:ext>
+            </a:extLst>
+          </p:cNvPr>
+          <p:cNvSpPr>
+            <a:spLocks xmlns:a="http://schemas.openxmlformats.org/drawingml/2006/main" noGrp="1"/>
+          </p:cNvSpPr>
+          <p:nvPr/>
+        </p:nvSpPr>
+        <p:spPr>
+          <a:xfrm xmlns:a="http://schemas.openxmlformats.org/drawingml/2006/main">
+            <a:off x="8458200" y="2009775"/>
+            <a:ext cx="3048000" cy="266700"/>
+          </a:xfrm>
+          <a:prstGeom xmlns:a="http://schemas.openxmlformats.org/drawingml/2006/main" prst="rect">
+            <a:avLst/>
+          </a:prstGeom>
+          <a:noFill xmlns:a="http://schemas.openxmlformats.org/drawingml/2006/main"/>
+          <a:ln xmlns:a="http://schemas.openxmlformats.org/drawingml/2006/main" w="0">
+            <a:noFill/>
+          </a:ln>
+        </p:spPr>
+        <p:txBody>
+          <a:bodyPr xmlns:a="http://schemas.openxmlformats.org/drawingml/2006/main" wrap="square" lIns="0" tIns="0" rIns="0" bIns="0" anchor="t">
+            <a:noAutofit/>
+          </a:bodyPr>
+          <a:lstStyle xmlns:a="http://schemas.openxmlformats.org/drawingml/2006/main"/>
+          <a:p xmlns:a="http://schemas.openxmlformats.org/drawingml/2006/main">
+            <a:pPr>
+              <a:lnSpc>
+                <a:spcPct val="110000"/>
+              </a:lnSpc>
+              <a:buNone/>
+              <a:defRPr sz="1275" b="1">
+                <a:solidFill>
+                  <a:srgbClr val="244D3C"/>
+                </a:solidFill>
+                <a:latin typeface="Helvetica Neue"/>
+                <a:ea typeface="Helvetica Neue"/>
+                <a:cs typeface="Helvetica Neue"/>
+              </a:defRPr>
+            </a:pPr>
+            <a:r>
+              <a:rPr sz="1275" b="1">
+                <a:solidFill>
+                  <a:srgbClr val="244D3C"/>
+                </a:solidFill>
+                <a:latin typeface="Helvetica Neue"/>
+                <a:ea typeface="Helvetica Neue"/>
+                <a:cs typeface="Helvetica Neue"/>
+              </a:rPr>
+              <a:t>REVIEW</a:t>
+            </a:r>
+          </a:p>
+        </p:txBody>
+      </p:sp>
+      <p:pic>
+        <p:nvPicPr>
+          <p:cNvPr id="23" name=""/>
+          <p:cNvPicPr>
+            <a:picLocks xmlns:a="http://schemas.openxmlformats.org/drawingml/2006/main" noChangeAspect="1"/>
+          </p:cNvPicPr>
+          <p:nvPr/>
+        </p:nvPicPr>
+        <p:blipFill>
+          <a:blip xmlns:r="http://schemas.openxmlformats.org/officeDocument/2006/relationships" xmlns:a="http://schemas.openxmlformats.org/drawingml/2006/main" r:embed="R86ef3469a0734558"/>
+          <a:stretch xmlns:a="http://schemas.openxmlformats.org/drawingml/2006/main"/>
+        </p:blipFill>
+        <p:spPr>
+          <a:xfrm xmlns:a="http://schemas.openxmlformats.org/drawingml/2006/main">
+            <a:off x="9171875" y="2419350"/>
+            <a:ext cx="1525401" cy="3457575"/>
+          </a:xfrm>
+          <a:prstGeom xmlns:a="http://schemas.openxmlformats.org/drawingml/2006/main" prst="rect">
+            <a:avLst/>
+          </a:prstGeom>
+        </p:spPr>
+      </p:pic>
+      <p:sp>
+        <p:nvSpPr>
+          <p:cNvPr id="12" name="flow-caption-2">
+            <a:extLst xmlns:a="http://schemas.openxmlformats.org/drawingml/2006/main">
+              <a:ext uri="{FF2B5EF4-FFF2-40B4-BE49-F238E27FC236}">
+                <a16:creationId xmlns:a16="http://schemas.microsoft.com/office/drawing/2014/main" id="{424DC72E-A726-4369-95CB-7F0BCF454BF6}"/>
+              </a:ext>
+            </a:extLst>
+          </p:cNvPr>
+          <p:cNvSpPr>
+            <a:spLocks xmlns:a="http://schemas.openxmlformats.org/drawingml/2006/main" noGrp="1"/>
+          </p:cNvSpPr>
+          <p:nvPr/>
+        </p:nvSpPr>
+        <p:spPr>
+          <a:xfrm xmlns:a="http://schemas.openxmlformats.org/drawingml/2006/main">
+            <a:off x="8458200" y="6038850"/>
+            <a:ext cx="3238500" cy="419100"/>
+          </a:xfrm>
+          <a:prstGeom xmlns:a="http://schemas.openxmlformats.org/drawingml/2006/main" prst="rect">
+            <a:avLst/>
+          </a:prstGeom>
+          <a:noFill xmlns:a="http://schemas.openxmlformats.org/drawingml/2006/main"/>
+          <a:ln xmlns:a="http://schemas.openxmlformats.org/drawingml/2006/main" w="0">
+            <a:noFill/>
+          </a:ln>
+        </p:spPr>
+        <p:txBody>
+          <a:bodyPr xmlns:a="http://schemas.openxmlformats.org/drawingml/2006/main" wrap="square" lIns="0" tIns="0" rIns="0" bIns="0" anchor="t">
+            <a:noAutofit/>
+          </a:bodyPr>
+          <a:lstStyle xmlns:a="http://schemas.openxmlformats.org/drawingml/2006/main"/>
+          <a:p xmlns:a="http://schemas.openxmlformats.org/drawingml/2006/main">
+            <a:pPr>
+              <a:lnSpc>
+                <a:spcPct val="110000"/>
+              </a:lnSpc>
+              <a:buNone/>
+              <a:defRPr sz="1350" b="0">
+                <a:solidFill>
+                  <a:srgbClr val="58645D"/>
+                </a:solidFill>
+                <a:latin typeface="Helvetica Neue"/>
+                <a:ea typeface="Helvetica Neue"/>
+                <a:cs typeface="Helvetica Neue"/>
+              </a:defRPr>
+            </a:pPr>
+            <a:r>
+              <a:rPr sz="1350" b="0">
+                <a:solidFill>
+                  <a:srgbClr val="58645D"/>
+                </a:solidFill>
+                <a:latin typeface="Helvetica Neue"/>
+                <a:ea typeface="Helvetica Neue"/>
+                <a:cs typeface="Helvetica Neue"/>
+              </a:rPr>
+              <a:t>Retake or choose Use Video.</a:t>
+            </a:r>
+          </a:p>
+        </p:txBody>
+      </p:sp>
     </p:spTree>
     <p:extLst>
       <p:ext uri="{BB962C8B-B14F-4D97-AF65-F5344CB8AC3E}">
-        <p14:creationId xmlns:p14="http://schemas.microsoft.com/office/powerpoint/2010/main" val="268901315"/>
+        <p14:creationId xmlns:p14="http://schemas.microsoft.com/office/powerpoint/2010/main" val="180174871"/>
       </p:ext>
     </p:extLst>
   </p:cSld>
@@ -3392,10 +3795,10 @@
       </p:grpSpPr>
       <p:sp>
         <p:nvSpPr>
-          <p:cNvPr id="13" name="slide-number">
-            <a:extLst xmlns:a="http://schemas.openxmlformats.org/drawingml/2006/main">
-              <a:ext uri="{FF2B5EF4-FFF2-40B4-BE49-F238E27FC236}">
-                <a16:creationId xmlns:a16="http://schemas.microsoft.com/office/drawing/2014/main" id="{D9BF6269-7BEE-4B51-A319-119E526BF029}"/>
+          <p:cNvPr id="8" name="slide-number">
+            <a:extLst xmlns:a="http://schemas.openxmlformats.org/drawingml/2006/main">
+              <a:ext uri="{FF2B5EF4-FFF2-40B4-BE49-F238E27FC236}">
+                <a16:creationId xmlns:a16="http://schemas.microsoft.com/office/drawing/2014/main" id="{3305CE33-673E-42EA-B6F6-85EFA4B00C68}"/>
               </a:ext>
             </a:extLst>
           </p:cNvPr>
@@ -3456,7 +3859,7 @@
           <p:cNvPr id="2" name="section-label">
             <a:extLst xmlns:a="http://schemas.openxmlformats.org/drawingml/2006/main">
               <a:ext uri="{FF2B5EF4-FFF2-40B4-BE49-F238E27FC236}">
-                <a16:creationId xmlns:a16="http://schemas.microsoft.com/office/drawing/2014/main" id="{569112A1-3F11-49C0-93D3-D72F799616B6}"/>
+                <a16:creationId xmlns:a16="http://schemas.microsoft.com/office/drawing/2014/main" id="{E304C81B-2CFF-4CA1-A467-AAECB8C63FEF}"/>
               </a:ext>
             </a:extLst>
           </p:cNvPr>
@@ -3507,7 +3910,7 @@
                 <a:ea typeface="Helvetica Neue"/>
                 <a:cs typeface="Helvetica Neue"/>
               </a:rPr>
-              <a:t>OAK AI   /   ERROR RECOVERY RECOMMENDATION</a:t>
+              <a:t>CAMERA CAPTURE   /   FUTURE PICTURE-IN-PICTURE PROPOSAL</a:t>
             </a:r>
           </a:p>
         </p:txBody>
@@ -3517,40 +3920,40 @@
           <p:cNvPr id="3" name="headline">
             <a:extLst xmlns:a="http://schemas.openxmlformats.org/drawingml/2006/main">
               <a:ext uri="{FF2B5EF4-FFF2-40B4-BE49-F238E27FC236}">
-                <a16:creationId xmlns:a16="http://schemas.microsoft.com/office/drawing/2014/main" id="{6ADA3570-BED1-4002-9217-8FF5997AB5F0}"/>
-              </a:ext>
-            </a:extLst>
-          </p:cNvPr>
-          <p:cNvSpPr>
-            <a:spLocks xmlns:a="http://schemas.openxmlformats.org/drawingml/2006/main" noGrp="1"/>
-          </p:cNvSpPr>
-          <p:nvPr/>
-        </p:nvSpPr>
-        <p:spPr>
-          <a:xfrm xmlns:a="http://schemas.openxmlformats.org/drawingml/2006/main">
-            <a:off x="609600" y="1104900"/>
-            <a:ext cx="10953750" cy="800100"/>
-          </a:xfrm>
-          <a:prstGeom xmlns:a="http://schemas.openxmlformats.org/drawingml/2006/main" prst="rect">
-            <a:avLst/>
-          </a:prstGeom>
-          <a:noFill xmlns:a="http://schemas.openxmlformats.org/drawingml/2006/main"/>
-          <a:ln xmlns:a="http://schemas.openxmlformats.org/drawingml/2006/main" w="0">
-            <a:noFill/>
-          </a:ln>
-        </p:spPr>
-        <p:txBody>
-          <a:bodyPr xmlns:a="http://schemas.openxmlformats.org/drawingml/2006/main" wrap="square" lIns="0" tIns="0" rIns="0" bIns="0" anchor="t">
-            <a:noAutofit/>
-          </a:bodyPr>
-          <a:lstStyle xmlns:a="http://schemas.openxmlformats.org/drawingml/2006/main"/>
-          <a:p xmlns:a="http://schemas.openxmlformats.org/drawingml/2006/main">
-            <a:pPr>
-              <a:lnSpc>
-                <a:spcPct val="110000"/>
-              </a:lnSpc>
-              <a:buNone/>
-              <a:defRPr sz="3525" b="1">
+                <a16:creationId xmlns:a16="http://schemas.microsoft.com/office/drawing/2014/main" id="{89153D9E-8B9A-4CC4-8716-CC83980A4AB6}"/>
+              </a:ext>
+            </a:extLst>
+          </p:cNvPr>
+          <p:cNvSpPr>
+            <a:spLocks xmlns:a="http://schemas.openxmlformats.org/drawingml/2006/main" noGrp="1"/>
+          </p:cNvSpPr>
+          <p:nvPr/>
+        </p:nvSpPr>
+        <p:spPr>
+          <a:xfrm xmlns:a="http://schemas.openxmlformats.org/drawingml/2006/main">
+            <a:off x="609600" y="1133475"/>
+            <a:ext cx="6162675" cy="1457325"/>
+          </a:xfrm>
+          <a:prstGeom xmlns:a="http://schemas.openxmlformats.org/drawingml/2006/main" prst="rect">
+            <a:avLst/>
+          </a:prstGeom>
+          <a:noFill xmlns:a="http://schemas.openxmlformats.org/drawingml/2006/main"/>
+          <a:ln xmlns:a="http://schemas.openxmlformats.org/drawingml/2006/main" w="0">
+            <a:noFill/>
+          </a:ln>
+        </p:spPr>
+        <p:txBody>
+          <a:bodyPr xmlns:a="http://schemas.openxmlformats.org/drawingml/2006/main" wrap="square" lIns="0" tIns="0" rIns="0" bIns="0" anchor="t">
+            <a:noAutofit/>
+          </a:bodyPr>
+          <a:lstStyle xmlns:a="http://schemas.openxmlformats.org/drawingml/2006/main"/>
+          <a:p xmlns:a="http://schemas.openxmlformats.org/drawingml/2006/main">
+            <a:pPr>
+              <a:lnSpc>
+                <a:spcPct val="110000"/>
+              </a:lnSpc>
+              <a:buNone/>
+              <a:defRPr sz="3750" b="1">
                 <a:solidFill>
                   <a:srgbClr val="192B25"/>
                 </a:solidFill>
@@ -3560,7 +3963,7 @@
               </a:defRPr>
             </a:pPr>
             <a:r>
-              <a:rPr sz="3525" b="1">
+              <a:rPr sz="3750" b="1">
                 <a:solidFill>
                   <a:srgbClr val="192B25"/>
                 </a:solidFill>
@@ -3568,172 +3971,16 @@
                 <a:ea typeface="Helvetica Neue"/>
                 <a:cs typeface="Helvetica Neue"/>
               </a:rPr>
-              <a:t>Error feedback beside the field</a:t>
-            </a:r>
-          </a:p>
-        </p:txBody>
-      </p:sp>
-      <p:sp>
-        <p:nvSpPr>
-          <p:cNvPr id="4" name="original-label">
-            <a:extLst xmlns:a="http://schemas.openxmlformats.org/drawingml/2006/main">
-              <a:ext uri="{FF2B5EF4-FFF2-40B4-BE49-F238E27FC236}">
-                <a16:creationId xmlns:a16="http://schemas.microsoft.com/office/drawing/2014/main" id="{FD608254-B5F4-4E92-9D88-AFCAFCB4F9D2}"/>
-              </a:ext>
-            </a:extLst>
-          </p:cNvPr>
-          <p:cNvSpPr>
-            <a:spLocks xmlns:a="http://schemas.openxmlformats.org/drawingml/2006/main" noGrp="1"/>
-          </p:cNvSpPr>
-          <p:nvPr/>
-        </p:nvSpPr>
-        <p:spPr>
-          <a:xfrm xmlns:a="http://schemas.openxmlformats.org/drawingml/2006/main">
-            <a:off x="609600" y="2162175"/>
-            <a:ext cx="5048250" cy="266700"/>
-          </a:xfrm>
-          <a:prstGeom xmlns:a="http://schemas.openxmlformats.org/drawingml/2006/main" prst="rect">
-            <a:avLst/>
-          </a:prstGeom>
-          <a:noFill xmlns:a="http://schemas.openxmlformats.org/drawingml/2006/main"/>
-          <a:ln xmlns:a="http://schemas.openxmlformats.org/drawingml/2006/main" w="0">
-            <a:noFill/>
-          </a:ln>
-        </p:spPr>
-        <p:txBody>
-          <a:bodyPr xmlns:a="http://schemas.openxmlformats.org/drawingml/2006/main" wrap="square" lIns="0" tIns="0" rIns="0" bIns="0" anchor="t">
-            <a:noAutofit/>
-          </a:bodyPr>
-          <a:lstStyle xmlns:a="http://schemas.openxmlformats.org/drawingml/2006/main"/>
-          <a:p xmlns:a="http://schemas.openxmlformats.org/drawingml/2006/main">
-            <a:pPr>
-              <a:lnSpc>
-                <a:spcPct val="110000"/>
-              </a:lnSpc>
-              <a:buNone/>
-              <a:defRPr sz="1350" b="1">
-                <a:solidFill>
-                  <a:srgbClr val="244D3C"/>
-                </a:solidFill>
-                <a:latin typeface="Helvetica Neue"/>
-                <a:ea typeface="Helvetica Neue"/>
-                <a:cs typeface="Helvetica Neue"/>
-              </a:defRPr>
-            </a:pPr>
-            <a:r>
-              <a:rPr sz="1350" b="1">
-                <a:solidFill>
-                  <a:srgbClr val="244D3C"/>
-                </a:solidFill>
-                <a:latin typeface="Helvetica Neue"/>
-                <a:ea typeface="Helvetica Neue"/>
-                <a:cs typeface="Helvetica Neue"/>
-              </a:rPr>
-              <a:t>ORIGINAL</a:t>
-            </a:r>
-          </a:p>
-        </p:txBody>
-      </p:sp>
-      <p:sp>
-        <p:nvSpPr>
-          <p:cNvPr id="5" name="proposed-label">
-            <a:extLst xmlns:a="http://schemas.openxmlformats.org/drawingml/2006/main">
-              <a:ext uri="{FF2B5EF4-FFF2-40B4-BE49-F238E27FC236}">
-                <a16:creationId xmlns:a16="http://schemas.microsoft.com/office/drawing/2014/main" id="{4851BE1A-3DE0-4F6A-9F56-FB80A72D080C}"/>
-              </a:ext>
-            </a:extLst>
-          </p:cNvPr>
-          <p:cNvSpPr>
-            <a:spLocks xmlns:a="http://schemas.openxmlformats.org/drawingml/2006/main" noGrp="1"/>
-          </p:cNvSpPr>
-          <p:nvPr/>
-        </p:nvSpPr>
-        <p:spPr>
-          <a:xfrm xmlns:a="http://schemas.openxmlformats.org/drawingml/2006/main">
-            <a:off x="6515100" y="2162175"/>
-            <a:ext cx="5048250" cy="266700"/>
-          </a:xfrm>
-          <a:prstGeom xmlns:a="http://schemas.openxmlformats.org/drawingml/2006/main" prst="rect">
-            <a:avLst/>
-          </a:prstGeom>
-          <a:noFill xmlns:a="http://schemas.openxmlformats.org/drawingml/2006/main"/>
-          <a:ln xmlns:a="http://schemas.openxmlformats.org/drawingml/2006/main" w="0">
-            <a:noFill/>
-          </a:ln>
-        </p:spPr>
-        <p:txBody>
-          <a:bodyPr xmlns:a="http://schemas.openxmlformats.org/drawingml/2006/main" wrap="square" lIns="0" tIns="0" rIns="0" bIns="0" anchor="t">
-            <a:noAutofit/>
-          </a:bodyPr>
-          <a:lstStyle xmlns:a="http://schemas.openxmlformats.org/drawingml/2006/main"/>
-          <a:p xmlns:a="http://schemas.openxmlformats.org/drawingml/2006/main">
-            <a:pPr>
-              <a:lnSpc>
-                <a:spcPct val="110000"/>
-              </a:lnSpc>
-              <a:buNone/>
-              <a:defRPr sz="1350" b="1">
-                <a:solidFill>
-                  <a:srgbClr val="244D3C"/>
-                </a:solidFill>
-                <a:latin typeface="Helvetica Neue"/>
-                <a:ea typeface="Helvetica Neue"/>
-                <a:cs typeface="Helvetica Neue"/>
-              </a:defRPr>
-            </a:pPr>
-            <a:r>
-              <a:rPr sz="1350" b="1">
-                <a:solidFill>
-                  <a:srgbClr val="244D3C"/>
-                </a:solidFill>
-                <a:latin typeface="Helvetica Neue"/>
-                <a:ea typeface="Helvetica Neue"/>
-                <a:cs typeface="Helvetica Neue"/>
-              </a:rPr>
-              <a:t>MY RECOMMENDATION</a:t>
-            </a:r>
-          </a:p>
-        </p:txBody>
-      </p:sp>
-      <p:sp>
-        <p:nvSpPr>
-          <p:cNvPr id="6" name="error-observation">
-            <a:extLst xmlns:a="http://schemas.openxmlformats.org/drawingml/2006/main">
-              <a:ext uri="{FF2B5EF4-FFF2-40B4-BE49-F238E27FC236}">
-                <a16:creationId xmlns:a16="http://schemas.microsoft.com/office/drawing/2014/main" id="{EF4AA750-1191-464A-9C59-ACAB755B9228}"/>
-              </a:ext>
-            </a:extLst>
-          </p:cNvPr>
-          <p:cNvSpPr>
-            <a:spLocks xmlns:a="http://schemas.openxmlformats.org/drawingml/2006/main" noGrp="1"/>
-          </p:cNvSpPr>
-          <p:nvPr/>
-        </p:nvSpPr>
-        <p:spPr>
-          <a:xfrm xmlns:a="http://schemas.openxmlformats.org/drawingml/2006/main">
-            <a:off x="609600" y="2562225"/>
-            <a:ext cx="5048250" cy="400050"/>
-          </a:xfrm>
-          <a:prstGeom xmlns:a="http://schemas.openxmlformats.org/drawingml/2006/main" prst="rect">
-            <a:avLst/>
-          </a:prstGeom>
-          <a:noFill xmlns:a="http://schemas.openxmlformats.org/drawingml/2006/main"/>
-          <a:ln xmlns:a="http://schemas.openxmlformats.org/drawingml/2006/main" w="0">
-            <a:noFill/>
-          </a:ln>
-        </p:spPr>
-        <p:txBody>
-          <a:bodyPr xmlns:a="http://schemas.openxmlformats.org/drawingml/2006/main" wrap="square" lIns="0" tIns="0" rIns="0" bIns="0" anchor="t">
-            <a:noAutofit/>
-          </a:bodyPr>
-          <a:lstStyle xmlns:a="http://schemas.openxmlformats.org/drawingml/2006/main"/>
-          <a:p xmlns:a="http://schemas.openxmlformats.org/drawingml/2006/main">
-            <a:pPr>
-              <a:lnSpc>
-                <a:spcPct val="110000"/>
-              </a:lnSpc>
-              <a:buNone/>
-              <a:defRPr sz="1725" b="0">
+              <a:t>Keep the larger idea</a:t>
+            </a:r>
+          </a:p>
+          <a:p xmlns:a="http://schemas.openxmlformats.org/drawingml/2006/main">
+            <a:pPr>
+              <a:lnSpc>
+                <a:spcPct val="110000"/>
+              </a:lnSpc>
+              <a:buNone/>
+              <a:defRPr sz="3750" b="1">
                 <a:solidFill>
                   <a:srgbClr val="192B25"/>
                 </a:solidFill>
@@ -3743,7 +3990,7 @@
               </a:defRPr>
             </a:pPr>
             <a:r>
-              <a:rPr sz="1725" b="0">
+              <a:rPr sz="3750" b="1">
                 <a:solidFill>
                   <a:srgbClr val="192B25"/>
                 </a:solidFill>
@@ -3751,50 +3998,50 @@
                 <a:ea typeface="Helvetica Neue"/>
                 <a:cs typeface="Helvetica Neue"/>
               </a:rPr>
-              <a:t>The error sat away from the login fields.</a:t>
-            </a:r>
-          </a:p>
-        </p:txBody>
-      </p:sp>
-      <p:sp>
-        <p:nvSpPr>
-          <p:cNvPr id="7" name="error-recommendation">
-            <a:extLst xmlns:a="http://schemas.openxmlformats.org/drawingml/2006/main">
-              <a:ext uri="{FF2B5EF4-FFF2-40B4-BE49-F238E27FC236}">
-                <a16:creationId xmlns:a16="http://schemas.microsoft.com/office/drawing/2014/main" id="{E0B97B1C-BFC7-46ED-8998-8615E3FDFB83}"/>
-              </a:ext>
-            </a:extLst>
-          </p:cNvPr>
-          <p:cNvSpPr>
-            <a:spLocks xmlns:a="http://schemas.openxmlformats.org/drawingml/2006/main" noGrp="1"/>
-          </p:cNvSpPr>
-          <p:nvPr/>
-        </p:nvSpPr>
-        <p:spPr>
-          <a:xfrm xmlns:a="http://schemas.openxmlformats.org/drawingml/2006/main">
-            <a:off x="6515100" y="2562225"/>
-            <a:ext cx="5048250" cy="400050"/>
-          </a:xfrm>
-          <a:prstGeom xmlns:a="http://schemas.openxmlformats.org/drawingml/2006/main" prst="rect">
-            <a:avLst/>
-          </a:prstGeom>
-          <a:noFill xmlns:a="http://schemas.openxmlformats.org/drawingml/2006/main"/>
-          <a:ln xmlns:a="http://schemas.openxmlformats.org/drawingml/2006/main" w="0">
-            <a:noFill/>
-          </a:ln>
-        </p:spPr>
-        <p:txBody>
-          <a:bodyPr xmlns:a="http://schemas.openxmlformats.org/drawingml/2006/main" wrap="square" lIns="0" tIns="0" rIns="0" bIns="0" anchor="t">
-            <a:noAutofit/>
-          </a:bodyPr>
-          <a:lstStyle xmlns:a="http://schemas.openxmlformats.org/drawingml/2006/main"/>
-          <a:p xmlns:a="http://schemas.openxmlformats.org/drawingml/2006/main">
-            <a:pPr>
-              <a:lnSpc>
-                <a:spcPct val="110000"/>
-              </a:lnSpc>
-              <a:buNone/>
-              <a:defRPr sz="1725" b="0">
+              <a:t>within reach</a:t>
+            </a:r>
+          </a:p>
+        </p:txBody>
+      </p:sp>
+      <p:sp>
+        <p:nvSpPr>
+          <p:cNvPr id="4" name="pip-benefit">
+            <a:extLst xmlns:a="http://schemas.openxmlformats.org/drawingml/2006/main">
+              <a:ext uri="{FF2B5EF4-FFF2-40B4-BE49-F238E27FC236}">
+                <a16:creationId xmlns:a16="http://schemas.microsoft.com/office/drawing/2014/main" id="{0C14E259-A740-44F8-B065-C48037E93FFD}"/>
+              </a:ext>
+            </a:extLst>
+          </p:cNvPr>
+          <p:cNvSpPr>
+            <a:spLocks xmlns:a="http://schemas.openxmlformats.org/drawingml/2006/main" noGrp="1"/>
+          </p:cNvSpPr>
+          <p:nvPr/>
+        </p:nvSpPr>
+        <p:spPr>
+          <a:xfrm xmlns:a="http://schemas.openxmlformats.org/drawingml/2006/main">
+            <a:off x="609600" y="3133725"/>
+            <a:ext cx="5381625" cy="1047750"/>
+          </a:xfrm>
+          <a:prstGeom xmlns:a="http://schemas.openxmlformats.org/drawingml/2006/main" prst="rect">
+            <a:avLst/>
+          </a:prstGeom>
+          <a:noFill xmlns:a="http://schemas.openxmlformats.org/drawingml/2006/main"/>
+          <a:ln xmlns:a="http://schemas.openxmlformats.org/drawingml/2006/main" w="0">
+            <a:noFill/>
+          </a:ln>
+        </p:spPr>
+        <p:txBody>
+          <a:bodyPr xmlns:a="http://schemas.openxmlformats.org/drawingml/2006/main" wrap="square" lIns="0" tIns="0" rIns="0" bIns="0" anchor="t">
+            <a:noAutofit/>
+          </a:bodyPr>
+          <a:lstStyle xmlns:a="http://schemas.openxmlformats.org/drawingml/2006/main"/>
+          <a:p xmlns:a="http://schemas.openxmlformats.org/drawingml/2006/main">
+            <a:pPr>
+              <a:lnSpc>
+                <a:spcPct val="110000"/>
+              </a:lnSpc>
+              <a:buNone/>
+              <a:defRPr sz="2100" b="0">
                 <a:solidFill>
                   <a:srgbClr val="192B25"/>
                 </a:solidFill>
@@ -3804,7 +4051,7 @@
               </a:defRPr>
             </a:pPr>
             <a:r>
-              <a:rPr sz="1725" b="0">
+              <a:rPr sz="2100" b="0">
                 <a:solidFill>
                   <a:srgbClr val="192B25"/>
                 </a:solidFill>
@@ -3812,230 +4059,159 @@
                 <a:ea typeface="Helvetica Neue"/>
                 <a:cs typeface="Helvetica Neue"/>
               </a:rPr>
-              <a:t>Place the correction beside the field.</a:t>
+              <a:t>A movable camera view could leave more room to read and complete the form.</a:t>
+            </a:r>
+          </a:p>
+        </p:txBody>
+      </p:sp>
+      <p:sp>
+        <p:nvSpPr>
+          <p:cNvPr id="5" name="pip-collaboration">
+            <a:extLst xmlns:a="http://schemas.openxmlformats.org/drawingml/2006/main">
+              <a:ext uri="{FF2B5EF4-FFF2-40B4-BE49-F238E27FC236}">
+                <a16:creationId xmlns:a16="http://schemas.microsoft.com/office/drawing/2014/main" id="{98564DD7-6B48-4306-93E2-4E5303BEBBAA}"/>
+              </a:ext>
+            </a:extLst>
+          </p:cNvPr>
+          <p:cNvSpPr>
+            <a:spLocks xmlns:a="http://schemas.openxmlformats.org/drawingml/2006/main" noGrp="1"/>
+          </p:cNvSpPr>
+          <p:nvPr/>
+        </p:nvSpPr>
+        <p:spPr>
+          <a:xfrm xmlns:a="http://schemas.openxmlformats.org/drawingml/2006/main">
+            <a:off x="609600" y="4572000"/>
+            <a:ext cx="5381625" cy="1266825"/>
+          </a:xfrm>
+          <a:prstGeom xmlns:a="http://schemas.openxmlformats.org/drawingml/2006/main" prst="rect">
+            <a:avLst/>
+          </a:prstGeom>
+          <a:noFill xmlns:a="http://schemas.openxmlformats.org/drawingml/2006/main"/>
+          <a:ln xmlns:a="http://schemas.openxmlformats.org/drawingml/2006/main" w="0">
+            <a:noFill/>
+          </a:ln>
+        </p:spPr>
+        <p:txBody>
+          <a:bodyPr xmlns:a="http://schemas.openxmlformats.org/drawingml/2006/main" wrap="square" lIns="0" tIns="0" rIns="0" bIns="0" anchor="t">
+            <a:noAutofit/>
+          </a:bodyPr>
+          <a:lstStyle xmlns:a="http://schemas.openxmlformats.org/drawingml/2006/main"/>
+          <a:p xmlns:a="http://schemas.openxmlformats.org/drawingml/2006/main">
+            <a:pPr>
+              <a:lnSpc>
+                <a:spcPct val="110000"/>
+              </a:lnSpc>
+              <a:buNone/>
+              <a:defRPr sz="1875" b="0">
+                <a:solidFill>
+                  <a:srgbClr val="192B25"/>
+                </a:solidFill>
+                <a:latin typeface="Helvetica Neue"/>
+                <a:ea typeface="Helvetica Neue"/>
+                <a:cs typeface="Helvetica Neue"/>
+              </a:defRPr>
+            </a:pPr>
+            <a:r>
+              <a:rPr sz="1875" b="0">
+                <a:solidFill>
+                  <a:srgbClr val="192B25"/>
+                </a:solidFill>
+                <a:latin typeface="Helvetica Neue"/>
+                <a:ea typeface="Helvetica Neue"/>
+                <a:cs typeface="Helvetica Neue"/>
+              </a:rPr>
+              <a:t>I explained the benefit, worked within the team’s delivery constraints, and handed over PIP separately for future consideration.</a:t>
+            </a:r>
+          </a:p>
+        </p:txBody>
+      </p:sp>
+      <p:sp>
+        <p:nvSpPr>
+          <p:cNvPr id="6" name="pip-status">
+            <a:extLst xmlns:a="http://schemas.openxmlformats.org/drawingml/2006/main">
+              <a:ext uri="{FF2B5EF4-FFF2-40B4-BE49-F238E27FC236}">
+                <a16:creationId xmlns:a16="http://schemas.microsoft.com/office/drawing/2014/main" id="{0D815C37-E030-4954-ADA9-CB5BEB529EC0}"/>
+              </a:ext>
+            </a:extLst>
+          </p:cNvPr>
+          <p:cNvSpPr>
+            <a:spLocks xmlns:a="http://schemas.openxmlformats.org/drawingml/2006/main" noGrp="1"/>
+          </p:cNvSpPr>
+          <p:nvPr/>
+        </p:nvSpPr>
+        <p:spPr>
+          <a:xfrm xmlns:a="http://schemas.openxmlformats.org/drawingml/2006/main">
+            <a:off x="609600" y="6210300"/>
+            <a:ext cx="5895975" cy="276225"/>
+          </a:xfrm>
+          <a:prstGeom xmlns:a="http://schemas.openxmlformats.org/drawingml/2006/main" prst="rect">
+            <a:avLst/>
+          </a:prstGeom>
+          <a:noFill xmlns:a="http://schemas.openxmlformats.org/drawingml/2006/main"/>
+          <a:ln xmlns:a="http://schemas.openxmlformats.org/drawingml/2006/main" w="0">
+            <a:noFill/>
+          </a:ln>
+        </p:spPr>
+        <p:txBody>
+          <a:bodyPr xmlns:a="http://schemas.openxmlformats.org/drawingml/2006/main" wrap="square" lIns="0" tIns="0" rIns="0" bIns="0" anchor="t">
+            <a:noAutofit/>
+          </a:bodyPr>
+          <a:lstStyle xmlns:a="http://schemas.openxmlformats.org/drawingml/2006/main"/>
+          <a:p xmlns:a="http://schemas.openxmlformats.org/drawingml/2006/main">
+            <a:pPr>
+              <a:lnSpc>
+                <a:spcPct val="110000"/>
+              </a:lnSpc>
+              <a:buNone/>
+              <a:defRPr sz="1275" b="0">
+                <a:solidFill>
+                  <a:srgbClr val="58645D"/>
+                </a:solidFill>
+                <a:latin typeface="Helvetica Neue"/>
+                <a:ea typeface="Helvetica Neue"/>
+                <a:cs typeface="Helvetica Neue"/>
+              </a:defRPr>
+            </a:pPr>
+            <a:r>
+              <a:rPr sz="1275" b="0">
+                <a:solidFill>
+                  <a:srgbClr val="58645D"/>
+                </a:solidFill>
+                <a:latin typeface="Helvetica Neue"/>
+                <a:ea typeface="Helvetica Neue"/>
+                <a:cs typeface="Helvetica Neue"/>
+              </a:rPr>
+              <a:t>Original proposal · benefit not yet tested</a:t>
             </a:r>
           </a:p>
         </p:txBody>
       </p:sp>
       <p:pic>
         <p:nvPicPr>
-          <p:cNvPr id="20" name=""/>
+          <p:cNvPr id="14" name=""/>
           <p:cNvPicPr>
             <a:picLocks xmlns:a="http://schemas.openxmlformats.org/drawingml/2006/main" noChangeAspect="1"/>
           </p:cNvPicPr>
           <p:nvPr/>
         </p:nvPicPr>
         <p:blipFill>
-          <a:blip xmlns:r="http://schemas.openxmlformats.org/officeDocument/2006/relationships" xmlns:a="http://schemas.openxmlformats.org/drawingml/2006/main" r:embed="Rcd1fb2529913438d"/>
+          <a:blip xmlns:r="http://schemas.openxmlformats.org/officeDocument/2006/relationships" xmlns:a="http://schemas.openxmlformats.org/drawingml/2006/main" r:embed="Rc7cf5993a7cb488b"/>
           <a:stretch xmlns:a="http://schemas.openxmlformats.org/drawingml/2006/main"/>
         </p:blipFill>
         <p:spPr>
           <a:xfrm xmlns:a="http://schemas.openxmlformats.org/drawingml/2006/main">
-            <a:off x="1366838" y="3067050"/>
-            <a:ext cx="3533775" cy="2867025"/>
+            <a:off x="8135950" y="1028700"/>
+            <a:ext cx="2444725" cy="5372100"/>
           </a:xfrm>
           <a:prstGeom xmlns:a="http://schemas.openxmlformats.org/drawingml/2006/main" prst="rect">
             <a:avLst/>
           </a:prstGeom>
         </p:spPr>
       </p:pic>
-      <p:pic>
-        <p:nvPicPr>
-          <p:cNvPr id="21" name=""/>
-          <p:cNvPicPr>
-            <a:picLocks xmlns:a="http://schemas.openxmlformats.org/drawingml/2006/main" noChangeAspect="1"/>
-          </p:cNvPicPr>
-          <p:nvPr/>
-        </p:nvPicPr>
-        <p:blipFill>
-          <a:blip xmlns:r="http://schemas.openxmlformats.org/officeDocument/2006/relationships" xmlns:a="http://schemas.openxmlformats.org/drawingml/2006/main" r:embed="Rf965f634f5514672"/>
-          <a:stretch xmlns:a="http://schemas.openxmlformats.org/drawingml/2006/main"/>
-        </p:blipFill>
-        <p:spPr>
-          <a:xfrm xmlns:a="http://schemas.openxmlformats.org/drawingml/2006/main">
-            <a:off x="7038975" y="3067050"/>
-            <a:ext cx="4000500" cy="2867025"/>
-          </a:xfrm>
-          <a:prstGeom xmlns:a="http://schemas.openxmlformats.org/drawingml/2006/main" prst="rect">
-            <a:avLst/>
-          </a:prstGeom>
-        </p:spPr>
-      </p:pic>
-      <p:sp>
-        <p:nvSpPr>
-          <p:cNvPr id="10" name="footer-label">
-            <a:extLst xmlns:a="http://schemas.openxmlformats.org/drawingml/2006/main">
-              <a:ext uri="{FF2B5EF4-FFF2-40B4-BE49-F238E27FC236}">
-                <a16:creationId xmlns:a16="http://schemas.microsoft.com/office/drawing/2014/main" id="{07ED3E85-4FF8-4ABD-A29D-AF87EC9E3F96}"/>
-              </a:ext>
-            </a:extLst>
-          </p:cNvPr>
-          <p:cNvSpPr>
-            <a:spLocks xmlns:a="http://schemas.openxmlformats.org/drawingml/2006/main" noGrp="1"/>
-          </p:cNvSpPr>
-          <p:nvPr/>
-        </p:nvSpPr>
-        <p:spPr>
-          <a:xfrm xmlns:a="http://schemas.openxmlformats.org/drawingml/2006/main">
-            <a:off x="609600" y="6076950"/>
-            <a:ext cx="5048250" cy="228600"/>
-          </a:xfrm>
-          <a:prstGeom xmlns:a="http://schemas.openxmlformats.org/drawingml/2006/main" prst="rect">
-            <a:avLst/>
-          </a:prstGeom>
-          <a:noFill xmlns:a="http://schemas.openxmlformats.org/drawingml/2006/main"/>
-          <a:ln xmlns:a="http://schemas.openxmlformats.org/drawingml/2006/main" w="0">
-            <a:noFill/>
-          </a:ln>
-        </p:spPr>
-        <p:txBody>
-          <a:bodyPr xmlns:a="http://schemas.openxmlformats.org/drawingml/2006/main" wrap="square" lIns="0" tIns="0" rIns="0" bIns="0" anchor="t">
-            <a:noAutofit/>
-          </a:bodyPr>
-          <a:lstStyle xmlns:a="http://schemas.openxmlformats.org/drawingml/2006/main"/>
-          <a:p xmlns:a="http://schemas.openxmlformats.org/drawingml/2006/main">
-            <a:pPr>
-              <a:lnSpc>
-                <a:spcPct val="110000"/>
-              </a:lnSpc>
-              <a:buNone/>
-              <a:defRPr sz="1200" b="0">
-                <a:solidFill>
-                  <a:srgbClr val="58645D"/>
-                </a:solidFill>
-                <a:latin typeface="Helvetica Neue"/>
-                <a:ea typeface="Helvetica Neue"/>
-                <a:cs typeface="Helvetica Neue"/>
-              </a:defRPr>
-            </a:pPr>
-            <a:r>
-              <a:rPr sz="1200" b="0">
-                <a:solidFill>
-                  <a:srgbClr val="58645D"/>
-                </a:solidFill>
-                <a:latin typeface="Helvetica Neue"/>
-                <a:ea typeface="Helvetica Neue"/>
-                <a:cs typeface="Helvetica Neue"/>
-              </a:rPr>
-              <a:t>Separate page-footer message:</a:t>
-            </a:r>
-          </a:p>
-        </p:txBody>
-      </p:sp>
-      <p:pic>
-        <p:nvPicPr>
-          <p:cNvPr id="23" name=""/>
-          <p:cNvPicPr>
-            <a:picLocks xmlns:a="http://schemas.openxmlformats.org/drawingml/2006/main" noChangeAspect="1"/>
-          </p:cNvPicPr>
-          <p:nvPr/>
-        </p:nvPicPr>
-        <p:blipFill>
-          <a:blip xmlns:r="http://schemas.openxmlformats.org/officeDocument/2006/relationships" xmlns:a="http://schemas.openxmlformats.org/drawingml/2006/main" r:embed="Rd1d2cf2c09d34978"/>
-          <a:stretch xmlns:a="http://schemas.openxmlformats.org/drawingml/2006/main"/>
-        </p:blipFill>
-        <p:spPr>
-          <a:xfrm xmlns:a="http://schemas.openxmlformats.org/drawingml/2006/main">
-            <a:off x="609600" y="6372225"/>
-            <a:ext cx="3476625" cy="333375"/>
-          </a:xfrm>
-          <a:prstGeom xmlns:a="http://schemas.openxmlformats.org/drawingml/2006/main" prst="rect">
-            <a:avLst/>
-          </a:prstGeom>
-        </p:spPr>
-      </p:pic>
-      <p:sp>
-        <p:nvSpPr>
-          <p:cNvPr id="12" name="recommendation-status">
-            <a:extLst xmlns:a="http://schemas.openxmlformats.org/drawingml/2006/main">
-              <a:ext uri="{FF2B5EF4-FFF2-40B4-BE49-F238E27FC236}">
-                <a16:creationId xmlns:a16="http://schemas.microsoft.com/office/drawing/2014/main" id="{BBA12451-CCEA-4DAE-BA5F-67E22C4FC05B}"/>
-              </a:ext>
-            </a:extLst>
-          </p:cNvPr>
-          <p:cNvSpPr>
-            <a:spLocks xmlns:a="http://schemas.openxmlformats.org/drawingml/2006/main" noGrp="1"/>
-          </p:cNvSpPr>
-          <p:nvPr/>
-        </p:nvSpPr>
-        <p:spPr>
-          <a:xfrm xmlns:a="http://schemas.openxmlformats.org/drawingml/2006/main">
-            <a:off x="6515100" y="6115050"/>
-            <a:ext cx="4686300" cy="542925"/>
-          </a:xfrm>
-          <a:prstGeom xmlns:a="http://schemas.openxmlformats.org/drawingml/2006/main" prst="rect">
-            <a:avLst/>
-          </a:prstGeom>
-          <a:noFill xmlns:a="http://schemas.openxmlformats.org/drawingml/2006/main"/>
-          <a:ln xmlns:a="http://schemas.openxmlformats.org/drawingml/2006/main" w="0">
-            <a:noFill/>
-          </a:ln>
-        </p:spPr>
-        <p:txBody>
-          <a:bodyPr xmlns:a="http://schemas.openxmlformats.org/drawingml/2006/main" wrap="square" lIns="0" tIns="0" rIns="0" bIns="0" anchor="t">
-            <a:noAutofit/>
-          </a:bodyPr>
-          <a:lstStyle xmlns:a="http://schemas.openxmlformats.org/drawingml/2006/main"/>
-          <a:p xmlns:a="http://schemas.openxmlformats.org/drawingml/2006/main">
-            <a:pPr>
-              <a:lnSpc>
-                <a:spcPct val="110000"/>
-              </a:lnSpc>
-              <a:buNone/>
-              <a:defRPr sz="1275" b="0">
-                <a:solidFill>
-                  <a:srgbClr val="58645D"/>
-                </a:solidFill>
-                <a:latin typeface="Helvetica Neue"/>
-                <a:ea typeface="Helvetica Neue"/>
-                <a:cs typeface="Helvetica Neue"/>
-              </a:defRPr>
-            </a:pPr>
-            <a:r>
-              <a:rPr sz="1275" b="0">
-                <a:solidFill>
-                  <a:srgbClr val="58645D"/>
-                </a:solidFill>
-                <a:latin typeface="Helvetica Neue"/>
-                <a:ea typeface="Helvetica Neue"/>
-                <a:cs typeface="Helvetica Neue"/>
-              </a:rPr>
-              <a:t>Original recommendation artifact.</a:t>
-            </a:r>
-          </a:p>
-          <a:p xmlns:a="http://schemas.openxmlformats.org/drawingml/2006/main">
-            <a:pPr>
-              <a:lnSpc>
-                <a:spcPct val="110000"/>
-              </a:lnSpc>
-              <a:buNone/>
-              <a:defRPr sz="1275" b="0">
-                <a:solidFill>
-                  <a:srgbClr val="58645D"/>
-                </a:solidFill>
-                <a:latin typeface="Helvetica Neue"/>
-                <a:ea typeface="Helvetica Neue"/>
-                <a:cs typeface="Helvetica Neue"/>
-              </a:defRPr>
-            </a:pPr>
-            <a:r>
-              <a:rPr sz="1275" b="0">
-                <a:solidFill>
-                  <a:srgbClr val="58645D"/>
-                </a:solidFill>
-                <a:latin typeface="Helvetica Neue"/>
-                <a:ea typeface="Helvetica Neue"/>
-                <a:cs typeface="Helvetica Neue"/>
-              </a:rPr>
-              <a:t>Exact shipped variant and usability impact unverified.</a:t>
-            </a:r>
-          </a:p>
-        </p:txBody>
-      </p:sp>
     </p:spTree>
     <p:extLst>
       <p:ext uri="{BB962C8B-B14F-4D97-AF65-F5344CB8AC3E}">
-        <p14:creationId xmlns:p14="http://schemas.microsoft.com/office/powerpoint/2010/main" val="626328617"/>
+        <p14:creationId xmlns:p14="http://schemas.microsoft.com/office/powerpoint/2010/main" val="1154768326"/>
       </p:ext>
     </p:extLst>
   </p:cSld>
@@ -4066,7 +4242,7 @@
           <p:cNvPr id="8" name="slide-number">
             <a:extLst xmlns:a="http://schemas.openxmlformats.org/drawingml/2006/main">
               <a:ext uri="{FF2B5EF4-FFF2-40B4-BE49-F238E27FC236}">
-                <a16:creationId xmlns:a16="http://schemas.microsoft.com/office/drawing/2014/main" id="{DC13B6A5-6342-42E8-8915-A9982DE38E68}"/>
+                <a16:creationId xmlns:a16="http://schemas.microsoft.com/office/drawing/2014/main" id="{F7F139EE-16AF-4978-9202-98DEEFA6B6EB}"/>
               </a:ext>
             </a:extLst>
           </p:cNvPr>
@@ -4124,331 +4300,362 @@
       </p:sp>
       <p:sp>
         <p:nvSpPr>
-          <p:cNvPr id="2" name="story-image-surface">
-            <a:extLst xmlns:a="http://schemas.openxmlformats.org/drawingml/2006/main">
-              <a:ext uri="{FF2B5EF4-FFF2-40B4-BE49-F238E27FC236}">
-                <a16:creationId xmlns:a16="http://schemas.microsoft.com/office/drawing/2014/main" id="{AA68E05C-A41E-4DF2-8978-E5B7FB684CEE}"/>
-              </a:ext>
-            </a:extLst>
-          </p:cNvPr>
-          <p:cNvSpPr>
-            <a:spLocks xmlns:a="http://schemas.openxmlformats.org/drawingml/2006/main" noGrp="1"/>
-          </p:cNvSpPr>
-          <p:nvPr/>
-        </p:nvSpPr>
-        <p:spPr>
-          <a:xfrm xmlns:a="http://schemas.openxmlformats.org/drawingml/2006/main">
-            <a:off x="6705600" y="0"/>
-            <a:ext cx="5486400" cy="6858000"/>
-          </a:xfrm>
-          <a:prstGeom xmlns:a="http://schemas.openxmlformats.org/drawingml/2006/main" prst="rect">
-            <a:avLst/>
-          </a:prstGeom>
-          <a:solidFill xmlns:a="http://schemas.openxmlformats.org/drawingml/2006/main">
-            <a:srgbClr val="E1E8DB"/>
-          </a:solidFill>
-          <a:ln xmlns:a="http://schemas.openxmlformats.org/drawingml/2006/main" w="0">
-            <a:noFill/>
-          </a:ln>
-        </p:spPr>
+          <p:cNvPr id="2" name="section-label">
+            <a:extLst xmlns:a="http://schemas.openxmlformats.org/drawingml/2006/main">
+              <a:ext uri="{FF2B5EF4-FFF2-40B4-BE49-F238E27FC236}">
+                <a16:creationId xmlns:a16="http://schemas.microsoft.com/office/drawing/2014/main" id="{65AB3229-063A-4CBB-A2C5-8B2BE3B0B98F}"/>
+              </a:ext>
+            </a:extLst>
+          </p:cNvPr>
+          <p:cNvSpPr>
+            <a:spLocks xmlns:a="http://schemas.openxmlformats.org/drawingml/2006/main" noGrp="1"/>
+          </p:cNvSpPr>
+          <p:nvPr/>
+        </p:nvSpPr>
+        <p:spPr>
+          <a:xfrm xmlns:a="http://schemas.openxmlformats.org/drawingml/2006/main">
+            <a:off x="609600" y="495300"/>
+            <a:ext cx="10668000" cy="266700"/>
+          </a:xfrm>
+          <a:prstGeom xmlns:a="http://schemas.openxmlformats.org/drawingml/2006/main" prst="rect">
+            <a:avLst/>
+          </a:prstGeom>
+          <a:noFill xmlns:a="http://schemas.openxmlformats.org/drawingml/2006/main"/>
+          <a:ln xmlns:a="http://schemas.openxmlformats.org/drawingml/2006/main" w="0">
+            <a:noFill/>
+          </a:ln>
+        </p:spPr>
+        <p:txBody>
+          <a:bodyPr xmlns:a="http://schemas.openxmlformats.org/drawingml/2006/main" wrap="square" lIns="0" tIns="0" rIns="0" bIns="0" anchor="t">
+            <a:noAutofit/>
+          </a:bodyPr>
+          <a:lstStyle xmlns:a="http://schemas.openxmlformats.org/drawingml/2006/main"/>
+          <a:p xmlns:a="http://schemas.openxmlformats.org/drawingml/2006/main">
+            <a:pPr>
+              <a:lnSpc>
+                <a:spcPct val="110000"/>
+              </a:lnSpc>
+              <a:buNone/>
+              <a:defRPr sz="1200" b="1">
+                <a:solidFill>
+                  <a:srgbClr val="244D3C"/>
+                </a:solidFill>
+                <a:latin typeface="Helvetica Neue"/>
+                <a:ea typeface="Helvetica Neue"/>
+                <a:cs typeface="Helvetica Neue"/>
+              </a:defRPr>
+            </a:pPr>
+            <a:r>
+              <a:rPr sz="1200" b="1">
+                <a:solidFill>
+                  <a:srgbClr val="244D3C"/>
+                </a:solidFill>
+                <a:latin typeface="Helvetica Neue"/>
+                <a:ea typeface="Helvetica Neue"/>
+                <a:cs typeface="Helvetica Neue"/>
+              </a:rPr>
+              <a:t>OAK AI   /   LEAD UX RESEARCHER, 2023–2025</a:t>
+            </a:r>
+          </a:p>
+        </p:txBody>
+      </p:sp>
+      <p:sp>
+        <p:nvSpPr>
+          <p:cNvPr id="3" name="headline">
+            <a:extLst xmlns:a="http://schemas.openxmlformats.org/drawingml/2006/main">
+              <a:ext uri="{FF2B5EF4-FFF2-40B4-BE49-F238E27FC236}">
+                <a16:creationId xmlns:a16="http://schemas.microsoft.com/office/drawing/2014/main" id="{E2E22536-84AF-446A-9A0A-F00DA28B7904}"/>
+              </a:ext>
+            </a:extLst>
+          </p:cNvPr>
+          <p:cNvSpPr>
+            <a:spLocks xmlns:a="http://schemas.openxmlformats.org/drawingml/2006/main" noGrp="1"/>
+          </p:cNvSpPr>
+          <p:nvPr/>
+        </p:nvSpPr>
+        <p:spPr>
+          <a:xfrm xmlns:a="http://schemas.openxmlformats.org/drawingml/2006/main">
+            <a:off x="609600" y="1104900"/>
+            <a:ext cx="4248150" cy="1438275"/>
+          </a:xfrm>
+          <a:prstGeom xmlns:a="http://schemas.openxmlformats.org/drawingml/2006/main" prst="rect">
+            <a:avLst/>
+          </a:prstGeom>
+          <a:noFill xmlns:a="http://schemas.openxmlformats.org/drawingml/2006/main"/>
+          <a:ln xmlns:a="http://schemas.openxmlformats.org/drawingml/2006/main" w="0">
+            <a:noFill/>
+          </a:ln>
+        </p:spPr>
+        <p:txBody>
+          <a:bodyPr xmlns:a="http://schemas.openxmlformats.org/drawingml/2006/main" wrap="square" lIns="0" tIns="0" rIns="0" bIns="0" anchor="t">
+            <a:noAutofit/>
+          </a:bodyPr>
+          <a:lstStyle xmlns:a="http://schemas.openxmlformats.org/drawingml/2006/main"/>
+          <a:p xmlns:a="http://schemas.openxmlformats.org/drawingml/2006/main">
+            <a:pPr>
+              <a:lnSpc>
+                <a:spcPct val="110000"/>
+              </a:lnSpc>
+              <a:buNone/>
+              <a:defRPr sz="3750" b="1">
+                <a:solidFill>
+                  <a:srgbClr val="192B25"/>
+                </a:solidFill>
+                <a:latin typeface="Helvetica Neue"/>
+                <a:ea typeface="Helvetica Neue"/>
+                <a:cs typeface="Helvetica Neue"/>
+              </a:defRPr>
+            </a:pPr>
+            <a:r>
+              <a:rPr sz="3750" b="1">
+                <a:solidFill>
+                  <a:srgbClr val="192B25"/>
+                </a:solidFill>
+                <a:latin typeface="Helvetica Neue"/>
+                <a:ea typeface="Helvetica Neue"/>
+                <a:cs typeface="Helvetica Neue"/>
+              </a:rPr>
+              <a:t>Competing</a:t>
+            </a:r>
+          </a:p>
+          <a:p xmlns:a="http://schemas.openxmlformats.org/drawingml/2006/main">
+            <a:pPr>
+              <a:lnSpc>
+                <a:spcPct val="110000"/>
+              </a:lnSpc>
+              <a:buNone/>
+              <a:defRPr sz="3750" b="1">
+                <a:solidFill>
+                  <a:srgbClr val="192B25"/>
+                </a:solidFill>
+                <a:latin typeface="Helvetica Neue"/>
+                <a:ea typeface="Helvetica Neue"/>
+                <a:cs typeface="Helvetica Neue"/>
+              </a:defRPr>
+            </a:pPr>
+            <a:r>
+              <a:rPr sz="3750" b="1">
+                <a:solidFill>
+                  <a:srgbClr val="192B25"/>
+                </a:solidFill>
+                <a:latin typeface="Helvetica Neue"/>
+                <a:ea typeface="Helvetica Neue"/>
+                <a:cs typeface="Helvetica Neue"/>
+              </a:rPr>
+              <a:t>entry points</a:t>
+            </a:r>
+          </a:p>
+        </p:txBody>
+      </p:sp>
+      <p:sp>
+        <p:nvSpPr>
+          <p:cNvPr id="4" name="oak-observation">
+            <a:extLst xmlns:a="http://schemas.openxmlformats.org/drawingml/2006/main">
+              <a:ext uri="{FF2B5EF4-FFF2-40B4-BE49-F238E27FC236}">
+                <a16:creationId xmlns:a16="http://schemas.microsoft.com/office/drawing/2014/main" id="{3E7ACD69-8C16-4F68-92FB-C8A040961F3C}"/>
+              </a:ext>
+            </a:extLst>
+          </p:cNvPr>
+          <p:cNvSpPr>
+            <a:spLocks xmlns:a="http://schemas.openxmlformats.org/drawingml/2006/main" noGrp="1"/>
+          </p:cNvSpPr>
+          <p:nvPr/>
+        </p:nvSpPr>
+        <p:spPr>
+          <a:xfrm xmlns:a="http://schemas.openxmlformats.org/drawingml/2006/main">
+            <a:off x="609600" y="2981325"/>
+            <a:ext cx="4057650" cy="1743075"/>
+          </a:xfrm>
+          <a:prstGeom xmlns:a="http://schemas.openxmlformats.org/drawingml/2006/main" prst="rect">
+            <a:avLst/>
+          </a:prstGeom>
+          <a:noFill xmlns:a="http://schemas.openxmlformats.org/drawingml/2006/main"/>
+          <a:ln xmlns:a="http://schemas.openxmlformats.org/drawingml/2006/main" w="0">
+            <a:noFill/>
+          </a:ln>
+        </p:spPr>
+        <p:txBody>
+          <a:bodyPr xmlns:a="http://schemas.openxmlformats.org/drawingml/2006/main" wrap="square" lIns="0" tIns="0" rIns="0" bIns="0" anchor="t">
+            <a:noAutofit/>
+          </a:bodyPr>
+          <a:lstStyle xmlns:a="http://schemas.openxmlformats.org/drawingml/2006/main"/>
+          <a:p xmlns:a="http://schemas.openxmlformats.org/drawingml/2006/main">
+            <a:pPr>
+              <a:lnSpc>
+                <a:spcPct val="110000"/>
+              </a:lnSpc>
+              <a:buNone/>
+              <a:defRPr sz="1950" b="0">
+                <a:solidFill>
+                  <a:srgbClr val="192B25"/>
+                </a:solidFill>
+                <a:latin typeface="Helvetica Neue"/>
+                <a:ea typeface="Helvetica Neue"/>
+                <a:cs typeface="Helvetica Neue"/>
+              </a:defRPr>
+            </a:pPr>
+            <a:r>
+              <a:rPr sz="1950" b="0">
+                <a:solidFill>
+                  <a:srgbClr val="192B25"/>
+                </a:solidFill>
+                <a:latin typeface="Helvetica Neue"/>
+                <a:ea typeface="Helvetica Neue"/>
+                <a:cs typeface="Helvetica Neue"/>
+              </a:rPr>
+              <a:t>Training an assistant, starting a Vibecheck and requesting support competed at the same entry point.</a:t>
+            </a:r>
+          </a:p>
+        </p:txBody>
+      </p:sp>
+      <p:sp>
+        <p:nvSpPr>
+          <p:cNvPr id="5" name="oak-rationale">
+            <a:extLst xmlns:a="http://schemas.openxmlformats.org/drawingml/2006/main">
+              <a:ext uri="{FF2B5EF4-FFF2-40B4-BE49-F238E27FC236}">
+                <a16:creationId xmlns:a16="http://schemas.microsoft.com/office/drawing/2014/main" id="{9BC7C9C6-A13A-4CD6-A75D-5D57FAF444FA}"/>
+              </a:ext>
+            </a:extLst>
+          </p:cNvPr>
+          <p:cNvSpPr>
+            <a:spLocks xmlns:a="http://schemas.openxmlformats.org/drawingml/2006/main" noGrp="1"/>
+          </p:cNvSpPr>
+          <p:nvPr/>
+        </p:nvSpPr>
+        <p:spPr>
+          <a:xfrm xmlns:a="http://schemas.openxmlformats.org/drawingml/2006/main">
+            <a:off x="609600" y="5038725"/>
+            <a:ext cx="4057650" cy="981075"/>
+          </a:xfrm>
+          <a:prstGeom xmlns:a="http://schemas.openxmlformats.org/drawingml/2006/main" prst="rect">
+            <a:avLst/>
+          </a:prstGeom>
+          <a:noFill xmlns:a="http://schemas.openxmlformats.org/drawingml/2006/main"/>
+          <a:ln xmlns:a="http://schemas.openxmlformats.org/drawingml/2006/main" w="0">
+            <a:noFill/>
+          </a:ln>
+        </p:spPr>
+        <p:txBody>
+          <a:bodyPr xmlns:a="http://schemas.openxmlformats.org/drawingml/2006/main" wrap="square" lIns="0" tIns="0" rIns="0" bIns="0" anchor="t">
+            <a:noAutofit/>
+          </a:bodyPr>
+          <a:lstStyle xmlns:a="http://schemas.openxmlformats.org/drawingml/2006/main"/>
+          <a:p xmlns:a="http://schemas.openxmlformats.org/drawingml/2006/main">
+            <a:pPr>
+              <a:lnSpc>
+                <a:spcPct val="110000"/>
+              </a:lnSpc>
+              <a:buNone/>
+              <a:defRPr sz="1725" b="0">
+                <a:solidFill>
+                  <a:srgbClr val="58645D"/>
+                </a:solidFill>
+                <a:latin typeface="Helvetica Neue"/>
+                <a:ea typeface="Helvetica Neue"/>
+                <a:cs typeface="Helvetica Neue"/>
+              </a:defRPr>
+            </a:pPr>
+            <a:r>
+              <a:rPr sz="1725" b="0">
+                <a:solidFill>
+                  <a:srgbClr val="58645D"/>
+                </a:solidFill>
+                <a:latin typeface="Helvetica Neue"/>
+                <a:ea typeface="Helvetica Neue"/>
+                <a:cs typeface="Helvetica Neue"/>
+              </a:rPr>
+              <a:t>I used the audit to make these choices explicit for the team’s review.</a:t>
+            </a:r>
+          </a:p>
+        </p:txBody>
+      </p:sp>
+      <p:sp>
+        <p:nvSpPr>
+          <p:cNvPr id="6" name="oak-stage">
+            <a:extLst xmlns:a="http://schemas.openxmlformats.org/drawingml/2006/main">
+              <a:ext uri="{FF2B5EF4-FFF2-40B4-BE49-F238E27FC236}">
+                <a16:creationId xmlns:a16="http://schemas.microsoft.com/office/drawing/2014/main" id="{E21810F0-543F-4DD1-B7A8-AA63CF0B5B01}"/>
+              </a:ext>
+            </a:extLst>
+          </p:cNvPr>
+          <p:cNvSpPr>
+            <a:spLocks xmlns:a="http://schemas.openxmlformats.org/drawingml/2006/main" noGrp="1"/>
+          </p:cNvSpPr>
+          <p:nvPr/>
+        </p:nvSpPr>
+        <p:spPr>
+          <a:xfrm xmlns:a="http://schemas.openxmlformats.org/drawingml/2006/main">
+            <a:off x="609600" y="6096000"/>
+            <a:ext cx="4248150" cy="400050"/>
+          </a:xfrm>
+          <a:prstGeom xmlns:a="http://schemas.openxmlformats.org/drawingml/2006/main" prst="rect">
+            <a:avLst/>
+          </a:prstGeom>
+          <a:noFill xmlns:a="http://schemas.openxmlformats.org/drawingml/2006/main"/>
+          <a:ln xmlns:a="http://schemas.openxmlformats.org/drawingml/2006/main" w="0">
+            <a:noFill/>
+          </a:ln>
+        </p:spPr>
+        <p:txBody>
+          <a:bodyPr xmlns:a="http://schemas.openxmlformats.org/drawingml/2006/main" wrap="square" lIns="0" tIns="0" rIns="0" bIns="0" anchor="t">
+            <a:noAutofit/>
+          </a:bodyPr>
+          <a:lstStyle xmlns:a="http://schemas.openxmlformats.org/drawingml/2006/main"/>
+          <a:p xmlns:a="http://schemas.openxmlformats.org/drawingml/2006/main">
+            <a:pPr>
+              <a:lnSpc>
+                <a:spcPct val="110000"/>
+              </a:lnSpc>
+              <a:buNone/>
+              <a:defRPr sz="1200" b="0">
+                <a:solidFill>
+                  <a:srgbClr val="58645D"/>
+                </a:solidFill>
+                <a:latin typeface="Helvetica Neue"/>
+                <a:ea typeface="Helvetica Neue"/>
+                <a:cs typeface="Helvetica Neue"/>
+              </a:defRPr>
+            </a:pPr>
+            <a:r>
+              <a:rPr sz="1200" b="0">
+                <a:solidFill>
+                  <a:srgbClr val="58645D"/>
+                </a:solidFill>
+                <a:latin typeface="Helvetica Neue"/>
+                <a:ea typeface="Helvetica Neue"/>
+                <a:cs typeface="Helvetica Neue"/>
+              </a:rPr>
+              <a:t>Usability evaluation and design recommendations</a:t>
+            </a:r>
+          </a:p>
+        </p:txBody>
       </p:sp>
       <p:pic>
         <p:nvPicPr>
-          <p:cNvPr id="10" name=""/>
+          <p:cNvPr id="14" name=""/>
           <p:cNvPicPr>
             <a:picLocks xmlns:a="http://schemas.openxmlformats.org/drawingml/2006/main" noChangeAspect="1"/>
           </p:cNvPicPr>
           <p:nvPr/>
         </p:nvPicPr>
         <p:blipFill>
-          <a:blip xmlns:r="http://schemas.openxmlformats.org/officeDocument/2006/relationships" xmlns:a="http://schemas.openxmlformats.org/drawingml/2006/main" r:embed="Rd707036a7ac44ffb"/>
+          <a:blip xmlns:r="http://schemas.openxmlformats.org/officeDocument/2006/relationships" xmlns:a="http://schemas.openxmlformats.org/drawingml/2006/main" r:embed="Rdcc60975d5bc4fb5"/>
           <a:stretch xmlns:a="http://schemas.openxmlformats.org/drawingml/2006/main"/>
         </p:blipFill>
         <p:spPr>
           <a:xfrm xmlns:a="http://schemas.openxmlformats.org/drawingml/2006/main">
-            <a:off x="7010400" y="1466850"/>
-            <a:ext cx="4876800" cy="4876800"/>
+            <a:off x="5147971" y="1438275"/>
+            <a:ext cx="6429958" cy="5048250"/>
           </a:xfrm>
           <a:prstGeom xmlns:a="http://schemas.openxmlformats.org/drawingml/2006/main" prst="rect">
             <a:avLst/>
           </a:prstGeom>
         </p:spPr>
       </p:pic>
-      <p:sp>
-        <p:nvSpPr>
-          <p:cNvPr id="4" name="section-label">
-            <a:extLst xmlns:a="http://schemas.openxmlformats.org/drawingml/2006/main">
-              <a:ext uri="{FF2B5EF4-FFF2-40B4-BE49-F238E27FC236}">
-                <a16:creationId xmlns:a16="http://schemas.microsoft.com/office/drawing/2014/main" id="{31E9FE38-70B1-4703-A97B-D67B4D3D24FC}"/>
-              </a:ext>
-            </a:extLst>
-          </p:cNvPr>
-          <p:cNvSpPr>
-            <a:spLocks xmlns:a="http://schemas.openxmlformats.org/drawingml/2006/main" noGrp="1"/>
-          </p:cNvSpPr>
-          <p:nvPr/>
-        </p:nvSpPr>
-        <p:spPr>
-          <a:xfrm xmlns:a="http://schemas.openxmlformats.org/drawingml/2006/main">
-            <a:off x="609600" y="514350"/>
-            <a:ext cx="5753100" cy="266700"/>
-          </a:xfrm>
-          <a:prstGeom xmlns:a="http://schemas.openxmlformats.org/drawingml/2006/main" prst="rect">
-            <a:avLst/>
-          </a:prstGeom>
-          <a:noFill xmlns:a="http://schemas.openxmlformats.org/drawingml/2006/main"/>
-          <a:ln xmlns:a="http://schemas.openxmlformats.org/drawingml/2006/main" w="0">
-            <a:noFill/>
-          </a:ln>
-        </p:spPr>
-        <p:txBody>
-          <a:bodyPr xmlns:a="http://schemas.openxmlformats.org/drawingml/2006/main" wrap="square" lIns="0" tIns="0" rIns="0" bIns="0" anchor="t">
-            <a:noAutofit/>
-          </a:bodyPr>
-          <a:lstStyle xmlns:a="http://schemas.openxmlformats.org/drawingml/2006/main"/>
-          <a:p xmlns:a="http://schemas.openxmlformats.org/drawingml/2006/main">
-            <a:pPr>
-              <a:lnSpc>
-                <a:spcPct val="110000"/>
-              </a:lnSpc>
-              <a:buNone/>
-              <a:defRPr sz="1200" b="1">
-                <a:solidFill>
-                  <a:srgbClr val="244D3C"/>
-                </a:solidFill>
-                <a:latin typeface="Helvetica Neue"/>
-                <a:ea typeface="Helvetica Neue"/>
-                <a:cs typeface="Helvetica Neue"/>
-              </a:defRPr>
-            </a:pPr>
-            <a:r>
-              <a:rPr sz="1200" b="1">
-                <a:solidFill>
-                  <a:srgbClr val="244D3C"/>
-                </a:solidFill>
-                <a:latin typeface="Helvetica Neue"/>
-                <a:ea typeface="Helvetica Neue"/>
-                <a:cs typeface="Helvetica Neue"/>
-              </a:rPr>
-              <a:t>THE THREAD THROUGH MY WORK</a:t>
-            </a:r>
-          </a:p>
-        </p:txBody>
-      </p:sp>
-      <p:sp>
-        <p:nvSpPr>
-          <p:cNvPr id="5" name="headline">
-            <a:extLst xmlns:a="http://schemas.openxmlformats.org/drawingml/2006/main">
-              <a:ext uri="{FF2B5EF4-FFF2-40B4-BE49-F238E27FC236}">
-                <a16:creationId xmlns:a16="http://schemas.microsoft.com/office/drawing/2014/main" id="{FE917AA3-1CF8-4818-A7FB-296DACF14AB8}"/>
-              </a:ext>
-            </a:extLst>
-          </p:cNvPr>
-          <p:cNvSpPr>
-            <a:spLocks xmlns:a="http://schemas.openxmlformats.org/drawingml/2006/main" noGrp="1"/>
-          </p:cNvSpPr>
-          <p:nvPr/>
-        </p:nvSpPr>
-        <p:spPr>
-          <a:xfrm xmlns:a="http://schemas.openxmlformats.org/drawingml/2006/main">
-            <a:off x="609600" y="1438275"/>
-            <a:ext cx="5734050" cy="1657350"/>
-          </a:xfrm>
-          <a:prstGeom xmlns:a="http://schemas.openxmlformats.org/drawingml/2006/main" prst="rect">
-            <a:avLst/>
-          </a:prstGeom>
-          <a:noFill xmlns:a="http://schemas.openxmlformats.org/drawingml/2006/main"/>
-          <a:ln xmlns:a="http://schemas.openxmlformats.org/drawingml/2006/main" w="0">
-            <a:noFill/>
-          </a:ln>
-        </p:spPr>
-        <p:txBody>
-          <a:bodyPr xmlns:a="http://schemas.openxmlformats.org/drawingml/2006/main" wrap="square" lIns="0" tIns="0" rIns="0" bIns="0" anchor="t">
-            <a:noAutofit/>
-          </a:bodyPr>
-          <a:lstStyle xmlns:a="http://schemas.openxmlformats.org/drawingml/2006/main"/>
-          <a:p xmlns:a="http://schemas.openxmlformats.org/drawingml/2006/main">
-            <a:pPr>
-              <a:lnSpc>
-                <a:spcPct val="110000"/>
-              </a:lnSpc>
-              <a:buNone/>
-              <a:defRPr sz="3675" b="1">
-                <a:solidFill>
-                  <a:srgbClr val="192B25"/>
-                </a:solidFill>
-                <a:latin typeface="Helvetica Neue"/>
-                <a:ea typeface="Helvetica Neue"/>
-                <a:cs typeface="Helvetica Neue"/>
-              </a:defRPr>
-            </a:pPr>
-            <a:r>
-              <a:rPr sz="3675" b="1">
-                <a:solidFill>
-                  <a:srgbClr val="192B25"/>
-                </a:solidFill>
-                <a:latin typeface="Helvetica Neue"/>
-                <a:ea typeface="Helvetica Neue"/>
-                <a:cs typeface="Helvetica Neue"/>
-              </a:rPr>
-              <a:t>I started by listening</a:t>
-            </a:r>
-          </a:p>
-          <a:p xmlns:a="http://schemas.openxmlformats.org/drawingml/2006/main">
-            <a:pPr>
-              <a:lnSpc>
-                <a:spcPct val="110000"/>
-              </a:lnSpc>
-              <a:buNone/>
-              <a:defRPr sz="3675" b="1">
-                <a:solidFill>
-                  <a:srgbClr val="192B25"/>
-                </a:solidFill>
-                <a:latin typeface="Helvetica Neue"/>
-                <a:ea typeface="Helvetica Neue"/>
-                <a:cs typeface="Helvetica Neue"/>
-              </a:defRPr>
-            </a:pPr>
-            <a:r>
-              <a:rPr sz="3675" b="1">
-                <a:solidFill>
-                  <a:srgbClr val="192B25"/>
-                </a:solidFill>
-                <a:latin typeface="Helvetica Neue"/>
-                <a:ea typeface="Helvetica Neue"/>
-                <a:cs typeface="Helvetica Neue"/>
-              </a:rPr>
-              <a:t>to people’s stories</a:t>
-            </a:r>
-          </a:p>
-        </p:txBody>
-      </p:sp>
-      <p:sp>
-        <p:nvSpPr>
-          <p:cNvPr id="6" name="story-documentary">
-            <a:extLst xmlns:a="http://schemas.openxmlformats.org/drawingml/2006/main">
-              <a:ext uri="{FF2B5EF4-FFF2-40B4-BE49-F238E27FC236}">
-                <a16:creationId xmlns:a16="http://schemas.microsoft.com/office/drawing/2014/main" id="{93987741-6DC9-4DC3-BF28-4F1D12CA4E7B}"/>
-              </a:ext>
-            </a:extLst>
-          </p:cNvPr>
-          <p:cNvSpPr>
-            <a:spLocks xmlns:a="http://schemas.openxmlformats.org/drawingml/2006/main" noGrp="1"/>
-          </p:cNvSpPr>
-          <p:nvPr/>
-        </p:nvSpPr>
-        <p:spPr>
-          <a:xfrm xmlns:a="http://schemas.openxmlformats.org/drawingml/2006/main">
-            <a:off x="609600" y="3609975"/>
-            <a:ext cx="5610225" cy="1095375"/>
-          </a:xfrm>
-          <a:prstGeom xmlns:a="http://schemas.openxmlformats.org/drawingml/2006/main" prst="rect">
-            <a:avLst/>
-          </a:prstGeom>
-          <a:noFill xmlns:a="http://schemas.openxmlformats.org/drawingml/2006/main"/>
-          <a:ln xmlns:a="http://schemas.openxmlformats.org/drawingml/2006/main" w="0">
-            <a:noFill/>
-          </a:ln>
-        </p:spPr>
-        <p:txBody>
-          <a:bodyPr xmlns:a="http://schemas.openxmlformats.org/drawingml/2006/main" wrap="square" lIns="0" tIns="0" rIns="0" bIns="0" anchor="t">
-            <a:noAutofit/>
-          </a:bodyPr>
-          <a:lstStyle xmlns:a="http://schemas.openxmlformats.org/drawingml/2006/main"/>
-          <a:p xmlns:a="http://schemas.openxmlformats.org/drawingml/2006/main">
-            <a:pPr>
-              <a:lnSpc>
-                <a:spcPct val="110000"/>
-              </a:lnSpc>
-              <a:buNone/>
-              <a:defRPr sz="1950" b="0">
-                <a:solidFill>
-                  <a:srgbClr val="192B25"/>
-                </a:solidFill>
-                <a:latin typeface="Helvetica Neue"/>
-                <a:ea typeface="Helvetica Neue"/>
-                <a:cs typeface="Helvetica Neue"/>
-              </a:defRPr>
-            </a:pPr>
-            <a:r>
-              <a:rPr sz="1950" b="0">
-                <a:solidFill>
-                  <a:srgbClr val="192B25"/>
-                </a:solidFill>
-                <a:latin typeface="Helvetica Neue"/>
-                <a:ea typeface="Helvetica Neue"/>
-                <a:cs typeface="Helvetica Neue"/>
-              </a:rPr>
-              <a:t>Documentary filmmaking taught me to listen closely and find the thread in a complicated story.</a:t>
-            </a:r>
-          </a:p>
-        </p:txBody>
-      </p:sp>
-      <p:sp>
-        <p:nvSpPr>
-          <p:cNvPr id="7" name="story-now">
-            <a:extLst xmlns:a="http://schemas.openxmlformats.org/drawingml/2006/main">
-              <a:ext uri="{FF2B5EF4-FFF2-40B4-BE49-F238E27FC236}">
-                <a16:creationId xmlns:a16="http://schemas.microsoft.com/office/drawing/2014/main" id="{0E437A12-EBE7-4DBB-8977-EE70B0501DC6}"/>
-              </a:ext>
-            </a:extLst>
-          </p:cNvPr>
-          <p:cNvSpPr>
-            <a:spLocks xmlns:a="http://schemas.openxmlformats.org/drawingml/2006/main" noGrp="1"/>
-          </p:cNvSpPr>
-          <p:nvPr/>
-        </p:nvSpPr>
-        <p:spPr>
-          <a:xfrm xmlns:a="http://schemas.openxmlformats.org/drawingml/2006/main">
-            <a:off x="609600" y="5057775"/>
-            <a:ext cx="5610225" cy="1362075"/>
-          </a:xfrm>
-          <a:prstGeom xmlns:a="http://schemas.openxmlformats.org/drawingml/2006/main" prst="rect">
-            <a:avLst/>
-          </a:prstGeom>
-          <a:noFill xmlns:a="http://schemas.openxmlformats.org/drawingml/2006/main"/>
-          <a:ln xmlns:a="http://schemas.openxmlformats.org/drawingml/2006/main" w="0">
-            <a:noFill/>
-          </a:ln>
-        </p:spPr>
-        <p:txBody>
-          <a:bodyPr xmlns:a="http://schemas.openxmlformats.org/drawingml/2006/main" wrap="square" lIns="0" tIns="0" rIns="0" bIns="0" anchor="t">
-            <a:noAutofit/>
-          </a:bodyPr>
-          <a:lstStyle xmlns:a="http://schemas.openxmlformats.org/drawingml/2006/main"/>
-          <a:p xmlns:a="http://schemas.openxmlformats.org/drawingml/2006/main">
-            <a:pPr>
-              <a:lnSpc>
-                <a:spcPct val="110000"/>
-              </a:lnSpc>
-              <a:buNone/>
-              <a:defRPr sz="1800" b="0">
-                <a:solidFill>
-                  <a:srgbClr val="58645D"/>
-                </a:solidFill>
-                <a:latin typeface="Helvetica Neue"/>
-                <a:ea typeface="Helvetica Neue"/>
-                <a:cs typeface="Helvetica Neue"/>
-              </a:defRPr>
-            </a:pPr>
-            <a:r>
-              <a:rPr sz="1800" b="0">
-                <a:solidFill>
-                  <a:srgbClr val="58645D"/>
-                </a:solidFill>
-                <a:latin typeface="Helvetica Neue"/>
-                <a:ea typeface="Helvetica Neue"/>
-                <a:cs typeface="Helvetica Neue"/>
-              </a:rPr>
-              <a:t>Those habits stayed with me in research and design. Outside work, I run tabletop games, where listening and helping a group find its way matter too.</a:t>
-            </a:r>
-          </a:p>
-        </p:txBody>
-      </p:sp>
     </p:spTree>
     <p:extLst>
       <p:ext uri="{BB962C8B-B14F-4D97-AF65-F5344CB8AC3E}">
-        <p14:creationId xmlns:p14="http://schemas.microsoft.com/office/powerpoint/2010/main" val="158750328"/>
+        <p14:creationId xmlns:p14="http://schemas.microsoft.com/office/powerpoint/2010/main" val="579078105"/>
       </p:ext>
     </p:extLst>
   </p:cSld>
@@ -4456,6 +4663,1090 @@
 </file>
 
 <file path=ppt/slides/slide14.xml><?xml version="1.0" encoding="utf-8"?>
+<p:sld xmlns:p="http://schemas.openxmlformats.org/presentationml/2006/main">
+  <p:cSld>
+    <p:bg>
+      <p:bgPr>
+        <a:solidFill xmlns:a="http://schemas.openxmlformats.org/drawingml/2006/main">
+          <a:srgbClr val="F4F2E9"/>
+        </a:solidFill>
+      </p:bgPr>
+    </p:bg>
+    <p:spTree>
+      <p:nvGrpSpPr>
+        <p:cNvPr id="1" name=""/>
+        <p:cNvGrpSpPr/>
+        <p:nvPr/>
+      </p:nvGrpSpPr>
+      <p:grpSpPr>
+        <a:xfrm xmlns:a="http://schemas.openxmlformats.org/drawingml/2006/main"/>
+      </p:grpSpPr>
+      <p:sp>
+        <p:nvSpPr>
+          <p:cNvPr id="13" name="slide-number">
+            <a:extLst xmlns:a="http://schemas.openxmlformats.org/drawingml/2006/main">
+              <a:ext uri="{FF2B5EF4-FFF2-40B4-BE49-F238E27FC236}">
+                <a16:creationId xmlns:a16="http://schemas.microsoft.com/office/drawing/2014/main" id="{53852010-52F2-4661-8220-BE7F57DA675B}"/>
+              </a:ext>
+            </a:extLst>
+          </p:cNvPr>
+          <p:cNvSpPr>
+            <a:spLocks xmlns:a="http://schemas.openxmlformats.org/drawingml/2006/main" noGrp="1"/>
+          </p:cNvSpPr>
+          <p:nvPr/>
+        </p:nvSpPr>
+        <p:spPr>
+          <a:xfrm xmlns:a="http://schemas.openxmlformats.org/drawingml/2006/main">
+            <a:off x="11353800" y="6515100"/>
+            <a:ext cx="323850" cy="209550"/>
+          </a:xfrm>
+          <a:prstGeom xmlns:a="http://schemas.openxmlformats.org/drawingml/2006/main" prst="rect">
+            <a:avLst/>
+          </a:prstGeom>
+          <a:noFill xmlns:a="http://schemas.openxmlformats.org/drawingml/2006/main"/>
+          <a:ln xmlns:a="http://schemas.openxmlformats.org/drawingml/2006/main" w="0">
+            <a:noFill/>
+          </a:ln>
+        </p:spPr>
+        <p:txBody>
+          <a:bodyPr xmlns:a="http://schemas.openxmlformats.org/drawingml/2006/main" wrap="square" lIns="0" tIns="0" rIns="0" bIns="0" anchor="t">
+            <a:noAutofit/>
+          </a:bodyPr>
+          <a:lstStyle xmlns:a="http://schemas.openxmlformats.org/drawingml/2006/main"/>
+          <a:p xmlns:a="http://schemas.openxmlformats.org/drawingml/2006/main">
+            <a:pPr>
+              <a:lnSpc>
+                <a:spcPct val="110000"/>
+              </a:lnSpc>
+              <a:buNone/>
+              <a:defRPr sz="1050" b="0">
+                <a:solidFill>
+                  <a:srgbClr val="58645D"/>
+                </a:solidFill>
+                <a:latin typeface="Helvetica Neue"/>
+                <a:ea typeface="Helvetica Neue"/>
+                <a:cs typeface="Helvetica Neue"/>
+              </a:defRPr>
+            </a:pPr>
+            <a:r>
+              <a:rPr sz="1050" b="0">
+                <a:solidFill>
+                  <a:srgbClr val="58645D"/>
+                </a:solidFill>
+                <a:latin typeface="Helvetica Neue"/>
+                <a:ea typeface="Helvetica Neue"/>
+                <a:cs typeface="Helvetica Neue"/>
+              </a:rPr>
+              <a:t>14</a:t>
+            </a:r>
+          </a:p>
+        </p:txBody>
+      </p:sp>
+      <p:sp>
+        <p:nvSpPr>
+          <p:cNvPr id="2" name="section-label">
+            <a:extLst xmlns:a="http://schemas.openxmlformats.org/drawingml/2006/main">
+              <a:ext uri="{FF2B5EF4-FFF2-40B4-BE49-F238E27FC236}">
+                <a16:creationId xmlns:a16="http://schemas.microsoft.com/office/drawing/2014/main" id="{D993D362-0C35-443C-9CEB-CCA09BE1C70C}"/>
+              </a:ext>
+            </a:extLst>
+          </p:cNvPr>
+          <p:cNvSpPr>
+            <a:spLocks xmlns:a="http://schemas.openxmlformats.org/drawingml/2006/main" noGrp="1"/>
+          </p:cNvSpPr>
+          <p:nvPr/>
+        </p:nvSpPr>
+        <p:spPr>
+          <a:xfrm xmlns:a="http://schemas.openxmlformats.org/drawingml/2006/main">
+            <a:off x="609600" y="495300"/>
+            <a:ext cx="10668000" cy="266700"/>
+          </a:xfrm>
+          <a:prstGeom xmlns:a="http://schemas.openxmlformats.org/drawingml/2006/main" prst="rect">
+            <a:avLst/>
+          </a:prstGeom>
+          <a:noFill xmlns:a="http://schemas.openxmlformats.org/drawingml/2006/main"/>
+          <a:ln xmlns:a="http://schemas.openxmlformats.org/drawingml/2006/main" w="0">
+            <a:noFill/>
+          </a:ln>
+        </p:spPr>
+        <p:txBody>
+          <a:bodyPr xmlns:a="http://schemas.openxmlformats.org/drawingml/2006/main" wrap="square" lIns="0" tIns="0" rIns="0" bIns="0" anchor="t">
+            <a:noAutofit/>
+          </a:bodyPr>
+          <a:lstStyle xmlns:a="http://schemas.openxmlformats.org/drawingml/2006/main"/>
+          <a:p xmlns:a="http://schemas.openxmlformats.org/drawingml/2006/main">
+            <a:pPr>
+              <a:lnSpc>
+                <a:spcPct val="110000"/>
+              </a:lnSpc>
+              <a:buNone/>
+              <a:defRPr sz="1200" b="1">
+                <a:solidFill>
+                  <a:srgbClr val="244D3C"/>
+                </a:solidFill>
+                <a:latin typeface="Helvetica Neue"/>
+                <a:ea typeface="Helvetica Neue"/>
+                <a:cs typeface="Helvetica Neue"/>
+              </a:defRPr>
+            </a:pPr>
+            <a:r>
+              <a:rPr sz="1200" b="1">
+                <a:solidFill>
+                  <a:srgbClr val="244D3C"/>
+                </a:solidFill>
+                <a:latin typeface="Helvetica Neue"/>
+                <a:ea typeface="Helvetica Neue"/>
+                <a:cs typeface="Helvetica Neue"/>
+              </a:rPr>
+              <a:t>OAK AI   /   ERROR RECOVERY RECOMMENDATION</a:t>
+            </a:r>
+          </a:p>
+        </p:txBody>
+      </p:sp>
+      <p:sp>
+        <p:nvSpPr>
+          <p:cNvPr id="3" name="headline">
+            <a:extLst xmlns:a="http://schemas.openxmlformats.org/drawingml/2006/main">
+              <a:ext uri="{FF2B5EF4-FFF2-40B4-BE49-F238E27FC236}">
+                <a16:creationId xmlns:a16="http://schemas.microsoft.com/office/drawing/2014/main" id="{E8F1EDF9-2B53-4F3A-A948-71405D67D403}"/>
+              </a:ext>
+            </a:extLst>
+          </p:cNvPr>
+          <p:cNvSpPr>
+            <a:spLocks xmlns:a="http://schemas.openxmlformats.org/drawingml/2006/main" noGrp="1"/>
+          </p:cNvSpPr>
+          <p:nvPr/>
+        </p:nvSpPr>
+        <p:spPr>
+          <a:xfrm xmlns:a="http://schemas.openxmlformats.org/drawingml/2006/main">
+            <a:off x="609600" y="1104900"/>
+            <a:ext cx="10953750" cy="800100"/>
+          </a:xfrm>
+          <a:prstGeom xmlns:a="http://schemas.openxmlformats.org/drawingml/2006/main" prst="rect">
+            <a:avLst/>
+          </a:prstGeom>
+          <a:noFill xmlns:a="http://schemas.openxmlformats.org/drawingml/2006/main"/>
+          <a:ln xmlns:a="http://schemas.openxmlformats.org/drawingml/2006/main" w="0">
+            <a:noFill/>
+          </a:ln>
+        </p:spPr>
+        <p:txBody>
+          <a:bodyPr xmlns:a="http://schemas.openxmlformats.org/drawingml/2006/main" wrap="square" lIns="0" tIns="0" rIns="0" bIns="0" anchor="t">
+            <a:noAutofit/>
+          </a:bodyPr>
+          <a:lstStyle xmlns:a="http://schemas.openxmlformats.org/drawingml/2006/main"/>
+          <a:p xmlns:a="http://schemas.openxmlformats.org/drawingml/2006/main">
+            <a:pPr>
+              <a:lnSpc>
+                <a:spcPct val="110000"/>
+              </a:lnSpc>
+              <a:buNone/>
+              <a:defRPr sz="3525" b="1">
+                <a:solidFill>
+                  <a:srgbClr val="192B25"/>
+                </a:solidFill>
+                <a:latin typeface="Helvetica Neue"/>
+                <a:ea typeface="Helvetica Neue"/>
+                <a:cs typeface="Helvetica Neue"/>
+              </a:defRPr>
+            </a:pPr>
+            <a:r>
+              <a:rPr sz="3525" b="1">
+                <a:solidFill>
+                  <a:srgbClr val="192B25"/>
+                </a:solidFill>
+                <a:latin typeface="Helvetica Neue"/>
+                <a:ea typeface="Helvetica Neue"/>
+                <a:cs typeface="Helvetica Neue"/>
+              </a:rPr>
+              <a:t>Error feedback beside the field</a:t>
+            </a:r>
+          </a:p>
+        </p:txBody>
+      </p:sp>
+      <p:sp>
+        <p:nvSpPr>
+          <p:cNvPr id="4" name="original-label">
+            <a:extLst xmlns:a="http://schemas.openxmlformats.org/drawingml/2006/main">
+              <a:ext uri="{FF2B5EF4-FFF2-40B4-BE49-F238E27FC236}">
+                <a16:creationId xmlns:a16="http://schemas.microsoft.com/office/drawing/2014/main" id="{C8FAD445-65BB-4A25-B5FA-4AD46B15894C}"/>
+              </a:ext>
+            </a:extLst>
+          </p:cNvPr>
+          <p:cNvSpPr>
+            <a:spLocks xmlns:a="http://schemas.openxmlformats.org/drawingml/2006/main" noGrp="1"/>
+          </p:cNvSpPr>
+          <p:nvPr/>
+        </p:nvSpPr>
+        <p:spPr>
+          <a:xfrm xmlns:a="http://schemas.openxmlformats.org/drawingml/2006/main">
+            <a:off x="609600" y="2162175"/>
+            <a:ext cx="5048250" cy="266700"/>
+          </a:xfrm>
+          <a:prstGeom xmlns:a="http://schemas.openxmlformats.org/drawingml/2006/main" prst="rect">
+            <a:avLst/>
+          </a:prstGeom>
+          <a:noFill xmlns:a="http://schemas.openxmlformats.org/drawingml/2006/main"/>
+          <a:ln xmlns:a="http://schemas.openxmlformats.org/drawingml/2006/main" w="0">
+            <a:noFill/>
+          </a:ln>
+        </p:spPr>
+        <p:txBody>
+          <a:bodyPr xmlns:a="http://schemas.openxmlformats.org/drawingml/2006/main" wrap="square" lIns="0" tIns="0" rIns="0" bIns="0" anchor="t">
+            <a:noAutofit/>
+          </a:bodyPr>
+          <a:lstStyle xmlns:a="http://schemas.openxmlformats.org/drawingml/2006/main"/>
+          <a:p xmlns:a="http://schemas.openxmlformats.org/drawingml/2006/main">
+            <a:pPr>
+              <a:lnSpc>
+                <a:spcPct val="110000"/>
+              </a:lnSpc>
+              <a:buNone/>
+              <a:defRPr sz="1350" b="1">
+                <a:solidFill>
+                  <a:srgbClr val="244D3C"/>
+                </a:solidFill>
+                <a:latin typeface="Helvetica Neue"/>
+                <a:ea typeface="Helvetica Neue"/>
+                <a:cs typeface="Helvetica Neue"/>
+              </a:defRPr>
+            </a:pPr>
+            <a:r>
+              <a:rPr sz="1350" b="1">
+                <a:solidFill>
+                  <a:srgbClr val="244D3C"/>
+                </a:solidFill>
+                <a:latin typeface="Helvetica Neue"/>
+                <a:ea typeface="Helvetica Neue"/>
+                <a:cs typeface="Helvetica Neue"/>
+              </a:rPr>
+              <a:t>ORIGINAL</a:t>
+            </a:r>
+          </a:p>
+        </p:txBody>
+      </p:sp>
+      <p:sp>
+        <p:nvSpPr>
+          <p:cNvPr id="5" name="proposed-label">
+            <a:extLst xmlns:a="http://schemas.openxmlformats.org/drawingml/2006/main">
+              <a:ext uri="{FF2B5EF4-FFF2-40B4-BE49-F238E27FC236}">
+                <a16:creationId xmlns:a16="http://schemas.microsoft.com/office/drawing/2014/main" id="{1FCBBF30-D3D2-4CCD-A88C-DBEEC7360C68}"/>
+              </a:ext>
+            </a:extLst>
+          </p:cNvPr>
+          <p:cNvSpPr>
+            <a:spLocks xmlns:a="http://schemas.openxmlformats.org/drawingml/2006/main" noGrp="1"/>
+          </p:cNvSpPr>
+          <p:nvPr/>
+        </p:nvSpPr>
+        <p:spPr>
+          <a:xfrm xmlns:a="http://schemas.openxmlformats.org/drawingml/2006/main">
+            <a:off x="6515100" y="2162175"/>
+            <a:ext cx="5048250" cy="266700"/>
+          </a:xfrm>
+          <a:prstGeom xmlns:a="http://schemas.openxmlformats.org/drawingml/2006/main" prst="rect">
+            <a:avLst/>
+          </a:prstGeom>
+          <a:noFill xmlns:a="http://schemas.openxmlformats.org/drawingml/2006/main"/>
+          <a:ln xmlns:a="http://schemas.openxmlformats.org/drawingml/2006/main" w="0">
+            <a:noFill/>
+          </a:ln>
+        </p:spPr>
+        <p:txBody>
+          <a:bodyPr xmlns:a="http://schemas.openxmlformats.org/drawingml/2006/main" wrap="square" lIns="0" tIns="0" rIns="0" bIns="0" anchor="t">
+            <a:noAutofit/>
+          </a:bodyPr>
+          <a:lstStyle xmlns:a="http://schemas.openxmlformats.org/drawingml/2006/main"/>
+          <a:p xmlns:a="http://schemas.openxmlformats.org/drawingml/2006/main">
+            <a:pPr>
+              <a:lnSpc>
+                <a:spcPct val="110000"/>
+              </a:lnSpc>
+              <a:buNone/>
+              <a:defRPr sz="1350" b="1">
+                <a:solidFill>
+                  <a:srgbClr val="244D3C"/>
+                </a:solidFill>
+                <a:latin typeface="Helvetica Neue"/>
+                <a:ea typeface="Helvetica Neue"/>
+                <a:cs typeface="Helvetica Neue"/>
+              </a:defRPr>
+            </a:pPr>
+            <a:r>
+              <a:rPr sz="1350" b="1">
+                <a:solidFill>
+                  <a:srgbClr val="244D3C"/>
+                </a:solidFill>
+                <a:latin typeface="Helvetica Neue"/>
+                <a:ea typeface="Helvetica Neue"/>
+                <a:cs typeface="Helvetica Neue"/>
+              </a:rPr>
+              <a:t>MY RECOMMENDATION</a:t>
+            </a:r>
+          </a:p>
+        </p:txBody>
+      </p:sp>
+      <p:sp>
+        <p:nvSpPr>
+          <p:cNvPr id="6" name="error-observation">
+            <a:extLst xmlns:a="http://schemas.openxmlformats.org/drawingml/2006/main">
+              <a:ext uri="{FF2B5EF4-FFF2-40B4-BE49-F238E27FC236}">
+                <a16:creationId xmlns:a16="http://schemas.microsoft.com/office/drawing/2014/main" id="{6A892FEF-CAD4-49D3-AD31-F492AB48C805}"/>
+              </a:ext>
+            </a:extLst>
+          </p:cNvPr>
+          <p:cNvSpPr>
+            <a:spLocks xmlns:a="http://schemas.openxmlformats.org/drawingml/2006/main" noGrp="1"/>
+          </p:cNvSpPr>
+          <p:nvPr/>
+        </p:nvSpPr>
+        <p:spPr>
+          <a:xfrm xmlns:a="http://schemas.openxmlformats.org/drawingml/2006/main">
+            <a:off x="609600" y="2562225"/>
+            <a:ext cx="5048250" cy="400050"/>
+          </a:xfrm>
+          <a:prstGeom xmlns:a="http://schemas.openxmlformats.org/drawingml/2006/main" prst="rect">
+            <a:avLst/>
+          </a:prstGeom>
+          <a:noFill xmlns:a="http://schemas.openxmlformats.org/drawingml/2006/main"/>
+          <a:ln xmlns:a="http://schemas.openxmlformats.org/drawingml/2006/main" w="0">
+            <a:noFill/>
+          </a:ln>
+        </p:spPr>
+        <p:txBody>
+          <a:bodyPr xmlns:a="http://schemas.openxmlformats.org/drawingml/2006/main" wrap="square" lIns="0" tIns="0" rIns="0" bIns="0" anchor="t">
+            <a:noAutofit/>
+          </a:bodyPr>
+          <a:lstStyle xmlns:a="http://schemas.openxmlformats.org/drawingml/2006/main"/>
+          <a:p xmlns:a="http://schemas.openxmlformats.org/drawingml/2006/main">
+            <a:pPr>
+              <a:lnSpc>
+                <a:spcPct val="110000"/>
+              </a:lnSpc>
+              <a:buNone/>
+              <a:defRPr sz="1725" b="0">
+                <a:solidFill>
+                  <a:srgbClr val="192B25"/>
+                </a:solidFill>
+                <a:latin typeface="Helvetica Neue"/>
+                <a:ea typeface="Helvetica Neue"/>
+                <a:cs typeface="Helvetica Neue"/>
+              </a:defRPr>
+            </a:pPr>
+            <a:r>
+              <a:rPr sz="1725" b="0">
+                <a:solidFill>
+                  <a:srgbClr val="192B25"/>
+                </a:solidFill>
+                <a:latin typeface="Helvetica Neue"/>
+                <a:ea typeface="Helvetica Neue"/>
+                <a:cs typeface="Helvetica Neue"/>
+              </a:rPr>
+              <a:t>The error sat away from the login fields.</a:t>
+            </a:r>
+          </a:p>
+        </p:txBody>
+      </p:sp>
+      <p:sp>
+        <p:nvSpPr>
+          <p:cNvPr id="7" name="error-recommendation">
+            <a:extLst xmlns:a="http://schemas.openxmlformats.org/drawingml/2006/main">
+              <a:ext uri="{FF2B5EF4-FFF2-40B4-BE49-F238E27FC236}">
+                <a16:creationId xmlns:a16="http://schemas.microsoft.com/office/drawing/2014/main" id="{172EB4FA-F8B5-430C-A05E-D58988DE633A}"/>
+              </a:ext>
+            </a:extLst>
+          </p:cNvPr>
+          <p:cNvSpPr>
+            <a:spLocks xmlns:a="http://schemas.openxmlformats.org/drawingml/2006/main" noGrp="1"/>
+          </p:cNvSpPr>
+          <p:nvPr/>
+        </p:nvSpPr>
+        <p:spPr>
+          <a:xfrm xmlns:a="http://schemas.openxmlformats.org/drawingml/2006/main">
+            <a:off x="6515100" y="2562225"/>
+            <a:ext cx="5048250" cy="400050"/>
+          </a:xfrm>
+          <a:prstGeom xmlns:a="http://schemas.openxmlformats.org/drawingml/2006/main" prst="rect">
+            <a:avLst/>
+          </a:prstGeom>
+          <a:noFill xmlns:a="http://schemas.openxmlformats.org/drawingml/2006/main"/>
+          <a:ln xmlns:a="http://schemas.openxmlformats.org/drawingml/2006/main" w="0">
+            <a:noFill/>
+          </a:ln>
+        </p:spPr>
+        <p:txBody>
+          <a:bodyPr xmlns:a="http://schemas.openxmlformats.org/drawingml/2006/main" wrap="square" lIns="0" tIns="0" rIns="0" bIns="0" anchor="t">
+            <a:noAutofit/>
+          </a:bodyPr>
+          <a:lstStyle xmlns:a="http://schemas.openxmlformats.org/drawingml/2006/main"/>
+          <a:p xmlns:a="http://schemas.openxmlformats.org/drawingml/2006/main">
+            <a:pPr>
+              <a:lnSpc>
+                <a:spcPct val="110000"/>
+              </a:lnSpc>
+              <a:buNone/>
+              <a:defRPr sz="1725" b="0">
+                <a:solidFill>
+                  <a:srgbClr val="192B25"/>
+                </a:solidFill>
+                <a:latin typeface="Helvetica Neue"/>
+                <a:ea typeface="Helvetica Neue"/>
+                <a:cs typeface="Helvetica Neue"/>
+              </a:defRPr>
+            </a:pPr>
+            <a:r>
+              <a:rPr sz="1725" b="0">
+                <a:solidFill>
+                  <a:srgbClr val="192B25"/>
+                </a:solidFill>
+                <a:latin typeface="Helvetica Neue"/>
+                <a:ea typeface="Helvetica Neue"/>
+                <a:cs typeface="Helvetica Neue"/>
+              </a:rPr>
+              <a:t>Place the correction beside the field.</a:t>
+            </a:r>
+          </a:p>
+        </p:txBody>
+      </p:sp>
+      <p:pic>
+        <p:nvPicPr>
+          <p:cNvPr id="20" name=""/>
+          <p:cNvPicPr>
+            <a:picLocks xmlns:a="http://schemas.openxmlformats.org/drawingml/2006/main" noChangeAspect="1"/>
+          </p:cNvPicPr>
+          <p:nvPr/>
+        </p:nvPicPr>
+        <p:blipFill>
+          <a:blip xmlns:r="http://schemas.openxmlformats.org/officeDocument/2006/relationships" xmlns:a="http://schemas.openxmlformats.org/drawingml/2006/main" r:embed="Rc6aff3e771f6476d"/>
+          <a:stretch xmlns:a="http://schemas.openxmlformats.org/drawingml/2006/main"/>
+        </p:blipFill>
+        <p:spPr>
+          <a:xfrm xmlns:a="http://schemas.openxmlformats.org/drawingml/2006/main">
+            <a:off x="1366838" y="3067050"/>
+            <a:ext cx="3533775" cy="2867025"/>
+          </a:xfrm>
+          <a:prstGeom xmlns:a="http://schemas.openxmlformats.org/drawingml/2006/main" prst="rect">
+            <a:avLst/>
+          </a:prstGeom>
+        </p:spPr>
+      </p:pic>
+      <p:pic>
+        <p:nvPicPr>
+          <p:cNvPr id="21" name=""/>
+          <p:cNvPicPr>
+            <a:picLocks xmlns:a="http://schemas.openxmlformats.org/drawingml/2006/main" noChangeAspect="1"/>
+          </p:cNvPicPr>
+          <p:nvPr/>
+        </p:nvPicPr>
+        <p:blipFill>
+          <a:blip xmlns:r="http://schemas.openxmlformats.org/officeDocument/2006/relationships" xmlns:a="http://schemas.openxmlformats.org/drawingml/2006/main" r:embed="R102017f86a6c473d"/>
+          <a:stretch xmlns:a="http://schemas.openxmlformats.org/drawingml/2006/main"/>
+        </p:blipFill>
+        <p:spPr>
+          <a:xfrm xmlns:a="http://schemas.openxmlformats.org/drawingml/2006/main">
+            <a:off x="7038975" y="3067050"/>
+            <a:ext cx="4000500" cy="2867025"/>
+          </a:xfrm>
+          <a:prstGeom xmlns:a="http://schemas.openxmlformats.org/drawingml/2006/main" prst="rect">
+            <a:avLst/>
+          </a:prstGeom>
+        </p:spPr>
+      </p:pic>
+      <p:sp>
+        <p:nvSpPr>
+          <p:cNvPr id="10" name="footer-label">
+            <a:extLst xmlns:a="http://schemas.openxmlformats.org/drawingml/2006/main">
+              <a:ext uri="{FF2B5EF4-FFF2-40B4-BE49-F238E27FC236}">
+                <a16:creationId xmlns:a16="http://schemas.microsoft.com/office/drawing/2014/main" id="{2F63B7FE-B249-4E3F-8CDC-E9DBAD309FF9}"/>
+              </a:ext>
+            </a:extLst>
+          </p:cNvPr>
+          <p:cNvSpPr>
+            <a:spLocks xmlns:a="http://schemas.openxmlformats.org/drawingml/2006/main" noGrp="1"/>
+          </p:cNvSpPr>
+          <p:nvPr/>
+        </p:nvSpPr>
+        <p:spPr>
+          <a:xfrm xmlns:a="http://schemas.openxmlformats.org/drawingml/2006/main">
+            <a:off x="609600" y="6076950"/>
+            <a:ext cx="5048250" cy="228600"/>
+          </a:xfrm>
+          <a:prstGeom xmlns:a="http://schemas.openxmlformats.org/drawingml/2006/main" prst="rect">
+            <a:avLst/>
+          </a:prstGeom>
+          <a:noFill xmlns:a="http://schemas.openxmlformats.org/drawingml/2006/main"/>
+          <a:ln xmlns:a="http://schemas.openxmlformats.org/drawingml/2006/main" w="0">
+            <a:noFill/>
+          </a:ln>
+        </p:spPr>
+        <p:txBody>
+          <a:bodyPr xmlns:a="http://schemas.openxmlformats.org/drawingml/2006/main" wrap="square" lIns="0" tIns="0" rIns="0" bIns="0" anchor="t">
+            <a:noAutofit/>
+          </a:bodyPr>
+          <a:lstStyle xmlns:a="http://schemas.openxmlformats.org/drawingml/2006/main"/>
+          <a:p xmlns:a="http://schemas.openxmlformats.org/drawingml/2006/main">
+            <a:pPr>
+              <a:lnSpc>
+                <a:spcPct val="110000"/>
+              </a:lnSpc>
+              <a:buNone/>
+              <a:defRPr sz="1200" b="0">
+                <a:solidFill>
+                  <a:srgbClr val="58645D"/>
+                </a:solidFill>
+                <a:latin typeface="Helvetica Neue"/>
+                <a:ea typeface="Helvetica Neue"/>
+                <a:cs typeface="Helvetica Neue"/>
+              </a:defRPr>
+            </a:pPr>
+            <a:r>
+              <a:rPr sz="1200" b="0">
+                <a:solidFill>
+                  <a:srgbClr val="58645D"/>
+                </a:solidFill>
+                <a:latin typeface="Helvetica Neue"/>
+                <a:ea typeface="Helvetica Neue"/>
+                <a:cs typeface="Helvetica Neue"/>
+              </a:rPr>
+              <a:t>Separate page-footer message:</a:t>
+            </a:r>
+          </a:p>
+        </p:txBody>
+      </p:sp>
+      <p:pic>
+        <p:nvPicPr>
+          <p:cNvPr id="23" name=""/>
+          <p:cNvPicPr>
+            <a:picLocks xmlns:a="http://schemas.openxmlformats.org/drawingml/2006/main" noChangeAspect="1"/>
+          </p:cNvPicPr>
+          <p:nvPr/>
+        </p:nvPicPr>
+        <p:blipFill>
+          <a:blip xmlns:r="http://schemas.openxmlformats.org/officeDocument/2006/relationships" xmlns:a="http://schemas.openxmlformats.org/drawingml/2006/main" r:embed="Rb3b5f75833144dd2"/>
+          <a:stretch xmlns:a="http://schemas.openxmlformats.org/drawingml/2006/main"/>
+        </p:blipFill>
+        <p:spPr>
+          <a:xfrm xmlns:a="http://schemas.openxmlformats.org/drawingml/2006/main">
+            <a:off x="609600" y="6372225"/>
+            <a:ext cx="3476625" cy="333375"/>
+          </a:xfrm>
+          <a:prstGeom xmlns:a="http://schemas.openxmlformats.org/drawingml/2006/main" prst="rect">
+            <a:avLst/>
+          </a:prstGeom>
+        </p:spPr>
+      </p:pic>
+      <p:sp>
+        <p:nvSpPr>
+          <p:cNvPr id="12" name="recommendation-status">
+            <a:extLst xmlns:a="http://schemas.openxmlformats.org/drawingml/2006/main">
+              <a:ext uri="{FF2B5EF4-FFF2-40B4-BE49-F238E27FC236}">
+                <a16:creationId xmlns:a16="http://schemas.microsoft.com/office/drawing/2014/main" id="{67EF4AE0-A1D7-46DC-BFEC-01DD3BB0C47C}"/>
+              </a:ext>
+            </a:extLst>
+          </p:cNvPr>
+          <p:cNvSpPr>
+            <a:spLocks xmlns:a="http://schemas.openxmlformats.org/drawingml/2006/main" noGrp="1"/>
+          </p:cNvSpPr>
+          <p:nvPr/>
+        </p:nvSpPr>
+        <p:spPr>
+          <a:xfrm xmlns:a="http://schemas.openxmlformats.org/drawingml/2006/main">
+            <a:off x="6515100" y="6115050"/>
+            <a:ext cx="4686300" cy="542925"/>
+          </a:xfrm>
+          <a:prstGeom xmlns:a="http://schemas.openxmlformats.org/drawingml/2006/main" prst="rect">
+            <a:avLst/>
+          </a:prstGeom>
+          <a:noFill xmlns:a="http://schemas.openxmlformats.org/drawingml/2006/main"/>
+          <a:ln xmlns:a="http://schemas.openxmlformats.org/drawingml/2006/main" w="0">
+            <a:noFill/>
+          </a:ln>
+        </p:spPr>
+        <p:txBody>
+          <a:bodyPr xmlns:a="http://schemas.openxmlformats.org/drawingml/2006/main" wrap="square" lIns="0" tIns="0" rIns="0" bIns="0" anchor="t">
+            <a:noAutofit/>
+          </a:bodyPr>
+          <a:lstStyle xmlns:a="http://schemas.openxmlformats.org/drawingml/2006/main"/>
+          <a:p xmlns:a="http://schemas.openxmlformats.org/drawingml/2006/main">
+            <a:pPr>
+              <a:lnSpc>
+                <a:spcPct val="110000"/>
+              </a:lnSpc>
+              <a:buNone/>
+              <a:defRPr sz="1275" b="0">
+                <a:solidFill>
+                  <a:srgbClr val="58645D"/>
+                </a:solidFill>
+                <a:latin typeface="Helvetica Neue"/>
+                <a:ea typeface="Helvetica Neue"/>
+                <a:cs typeface="Helvetica Neue"/>
+              </a:defRPr>
+            </a:pPr>
+            <a:r>
+              <a:rPr sz="1275" b="0">
+                <a:solidFill>
+                  <a:srgbClr val="58645D"/>
+                </a:solidFill>
+                <a:latin typeface="Helvetica Neue"/>
+                <a:ea typeface="Helvetica Neue"/>
+                <a:cs typeface="Helvetica Neue"/>
+              </a:rPr>
+              <a:t>Original recommendation artifact.</a:t>
+            </a:r>
+          </a:p>
+          <a:p xmlns:a="http://schemas.openxmlformats.org/drawingml/2006/main">
+            <a:pPr>
+              <a:lnSpc>
+                <a:spcPct val="110000"/>
+              </a:lnSpc>
+              <a:buNone/>
+              <a:defRPr sz="1275" b="0">
+                <a:solidFill>
+                  <a:srgbClr val="58645D"/>
+                </a:solidFill>
+                <a:latin typeface="Helvetica Neue"/>
+                <a:ea typeface="Helvetica Neue"/>
+                <a:cs typeface="Helvetica Neue"/>
+              </a:defRPr>
+            </a:pPr>
+            <a:r>
+              <a:rPr sz="1275" b="0">
+                <a:solidFill>
+                  <a:srgbClr val="58645D"/>
+                </a:solidFill>
+                <a:latin typeface="Helvetica Neue"/>
+                <a:ea typeface="Helvetica Neue"/>
+                <a:cs typeface="Helvetica Neue"/>
+              </a:rPr>
+              <a:t>Exact shipped variant and usability impact unverified.</a:t>
+            </a:r>
+          </a:p>
+        </p:txBody>
+      </p:sp>
+    </p:spTree>
+    <p:extLst>
+      <p:ext uri="{BB962C8B-B14F-4D97-AF65-F5344CB8AC3E}">
+        <p14:creationId xmlns:p14="http://schemas.microsoft.com/office/powerpoint/2010/main" val="1816625939"/>
+      </p:ext>
+    </p:extLst>
+  </p:cSld>
+</p:sld>
+</file>
+
+<file path=ppt/slides/slide15.xml><?xml version="1.0" encoding="utf-8"?>
+<p:sld xmlns:p="http://schemas.openxmlformats.org/presentationml/2006/main">
+  <p:cSld>
+    <p:bg>
+      <p:bgPr>
+        <a:solidFill xmlns:a="http://schemas.openxmlformats.org/drawingml/2006/main">
+          <a:srgbClr val="F4F2E9"/>
+        </a:solidFill>
+      </p:bgPr>
+    </p:bg>
+    <p:spTree>
+      <p:nvGrpSpPr>
+        <p:cNvPr id="1" name=""/>
+        <p:cNvGrpSpPr/>
+        <p:nvPr/>
+      </p:nvGrpSpPr>
+      <p:grpSpPr>
+        <a:xfrm xmlns:a="http://schemas.openxmlformats.org/drawingml/2006/main"/>
+      </p:grpSpPr>
+      <p:sp>
+        <p:nvSpPr>
+          <p:cNvPr id="8" name="slide-number">
+            <a:extLst xmlns:a="http://schemas.openxmlformats.org/drawingml/2006/main">
+              <a:ext uri="{FF2B5EF4-FFF2-40B4-BE49-F238E27FC236}">
+                <a16:creationId xmlns:a16="http://schemas.microsoft.com/office/drawing/2014/main" id="{F55B4AB8-2F25-4438-B18D-00F2B6348FA7}"/>
+              </a:ext>
+            </a:extLst>
+          </p:cNvPr>
+          <p:cNvSpPr>
+            <a:spLocks xmlns:a="http://schemas.openxmlformats.org/drawingml/2006/main" noGrp="1"/>
+          </p:cNvSpPr>
+          <p:nvPr/>
+        </p:nvSpPr>
+        <p:spPr>
+          <a:xfrm xmlns:a="http://schemas.openxmlformats.org/drawingml/2006/main">
+            <a:off x="11353800" y="6515100"/>
+            <a:ext cx="323850" cy="209550"/>
+          </a:xfrm>
+          <a:prstGeom xmlns:a="http://schemas.openxmlformats.org/drawingml/2006/main" prst="rect">
+            <a:avLst/>
+          </a:prstGeom>
+          <a:noFill xmlns:a="http://schemas.openxmlformats.org/drawingml/2006/main"/>
+          <a:ln xmlns:a="http://schemas.openxmlformats.org/drawingml/2006/main" w="0">
+            <a:noFill/>
+          </a:ln>
+        </p:spPr>
+        <p:txBody>
+          <a:bodyPr xmlns:a="http://schemas.openxmlformats.org/drawingml/2006/main" wrap="square" lIns="0" tIns="0" rIns="0" bIns="0" anchor="t">
+            <a:noAutofit/>
+          </a:bodyPr>
+          <a:lstStyle xmlns:a="http://schemas.openxmlformats.org/drawingml/2006/main"/>
+          <a:p xmlns:a="http://schemas.openxmlformats.org/drawingml/2006/main">
+            <a:pPr>
+              <a:lnSpc>
+                <a:spcPct val="110000"/>
+              </a:lnSpc>
+              <a:buNone/>
+              <a:defRPr sz="1050" b="0">
+                <a:solidFill>
+                  <a:srgbClr val="58645D"/>
+                </a:solidFill>
+                <a:latin typeface="Helvetica Neue"/>
+                <a:ea typeface="Helvetica Neue"/>
+                <a:cs typeface="Helvetica Neue"/>
+              </a:defRPr>
+            </a:pPr>
+            <a:r>
+              <a:rPr sz="1050" b="0">
+                <a:solidFill>
+                  <a:srgbClr val="58645D"/>
+                </a:solidFill>
+                <a:latin typeface="Helvetica Neue"/>
+                <a:ea typeface="Helvetica Neue"/>
+                <a:cs typeface="Helvetica Neue"/>
+              </a:rPr>
+              <a:t>15</a:t>
+            </a:r>
+          </a:p>
+        </p:txBody>
+      </p:sp>
+      <p:sp>
+        <p:nvSpPr>
+          <p:cNvPr id="2" name="story-image-surface">
+            <a:extLst xmlns:a="http://schemas.openxmlformats.org/drawingml/2006/main">
+              <a:ext uri="{FF2B5EF4-FFF2-40B4-BE49-F238E27FC236}">
+                <a16:creationId xmlns:a16="http://schemas.microsoft.com/office/drawing/2014/main" id="{04AB218E-A729-4553-8C18-7F651AFD5037}"/>
+              </a:ext>
+            </a:extLst>
+          </p:cNvPr>
+          <p:cNvSpPr>
+            <a:spLocks xmlns:a="http://schemas.openxmlformats.org/drawingml/2006/main" noGrp="1"/>
+          </p:cNvSpPr>
+          <p:nvPr/>
+        </p:nvSpPr>
+        <p:spPr>
+          <a:xfrm xmlns:a="http://schemas.openxmlformats.org/drawingml/2006/main">
+            <a:off x="6705600" y="0"/>
+            <a:ext cx="5486400" cy="6858000"/>
+          </a:xfrm>
+          <a:prstGeom xmlns:a="http://schemas.openxmlformats.org/drawingml/2006/main" prst="rect">
+            <a:avLst/>
+          </a:prstGeom>
+          <a:solidFill xmlns:a="http://schemas.openxmlformats.org/drawingml/2006/main">
+            <a:srgbClr val="E1E8DB"/>
+          </a:solidFill>
+          <a:ln xmlns:a="http://schemas.openxmlformats.org/drawingml/2006/main" w="0">
+            <a:noFill/>
+          </a:ln>
+        </p:spPr>
+      </p:sp>
+      <p:pic>
+        <p:nvPicPr>
+          <p:cNvPr id="10" name=""/>
+          <p:cNvPicPr>
+            <a:picLocks xmlns:a="http://schemas.openxmlformats.org/drawingml/2006/main" noChangeAspect="1"/>
+          </p:cNvPicPr>
+          <p:nvPr/>
+        </p:nvPicPr>
+        <p:blipFill>
+          <a:blip xmlns:r="http://schemas.openxmlformats.org/officeDocument/2006/relationships" xmlns:a="http://schemas.openxmlformats.org/drawingml/2006/main" r:embed="Red0d680ebec14716"/>
+          <a:stretch xmlns:a="http://schemas.openxmlformats.org/drawingml/2006/main"/>
+        </p:blipFill>
+        <p:spPr>
+          <a:xfrm xmlns:a="http://schemas.openxmlformats.org/drawingml/2006/main">
+            <a:off x="7010400" y="1466850"/>
+            <a:ext cx="4876800" cy="4876800"/>
+          </a:xfrm>
+          <a:prstGeom xmlns:a="http://schemas.openxmlformats.org/drawingml/2006/main" prst="rect">
+            <a:avLst/>
+          </a:prstGeom>
+        </p:spPr>
+      </p:pic>
+      <p:sp>
+        <p:nvSpPr>
+          <p:cNvPr id="4" name="section-label">
+            <a:extLst xmlns:a="http://schemas.openxmlformats.org/drawingml/2006/main">
+              <a:ext uri="{FF2B5EF4-FFF2-40B4-BE49-F238E27FC236}">
+                <a16:creationId xmlns:a16="http://schemas.microsoft.com/office/drawing/2014/main" id="{905CA4E4-D15F-4C12-8C8F-8AABA8D409BA}"/>
+              </a:ext>
+            </a:extLst>
+          </p:cNvPr>
+          <p:cNvSpPr>
+            <a:spLocks xmlns:a="http://schemas.openxmlformats.org/drawingml/2006/main" noGrp="1"/>
+          </p:cNvSpPr>
+          <p:nvPr/>
+        </p:nvSpPr>
+        <p:spPr>
+          <a:xfrm xmlns:a="http://schemas.openxmlformats.org/drawingml/2006/main">
+            <a:off x="609600" y="514350"/>
+            <a:ext cx="5753100" cy="266700"/>
+          </a:xfrm>
+          <a:prstGeom xmlns:a="http://schemas.openxmlformats.org/drawingml/2006/main" prst="rect">
+            <a:avLst/>
+          </a:prstGeom>
+          <a:noFill xmlns:a="http://schemas.openxmlformats.org/drawingml/2006/main"/>
+          <a:ln xmlns:a="http://schemas.openxmlformats.org/drawingml/2006/main" w="0">
+            <a:noFill/>
+          </a:ln>
+        </p:spPr>
+        <p:txBody>
+          <a:bodyPr xmlns:a="http://schemas.openxmlformats.org/drawingml/2006/main" wrap="square" lIns="0" tIns="0" rIns="0" bIns="0" anchor="t">
+            <a:noAutofit/>
+          </a:bodyPr>
+          <a:lstStyle xmlns:a="http://schemas.openxmlformats.org/drawingml/2006/main"/>
+          <a:p xmlns:a="http://schemas.openxmlformats.org/drawingml/2006/main">
+            <a:pPr>
+              <a:lnSpc>
+                <a:spcPct val="110000"/>
+              </a:lnSpc>
+              <a:buNone/>
+              <a:defRPr sz="1200" b="1">
+                <a:solidFill>
+                  <a:srgbClr val="244D3C"/>
+                </a:solidFill>
+                <a:latin typeface="Helvetica Neue"/>
+                <a:ea typeface="Helvetica Neue"/>
+                <a:cs typeface="Helvetica Neue"/>
+              </a:defRPr>
+            </a:pPr>
+            <a:r>
+              <a:rPr sz="1200" b="1">
+                <a:solidFill>
+                  <a:srgbClr val="244D3C"/>
+                </a:solidFill>
+                <a:latin typeface="Helvetica Neue"/>
+                <a:ea typeface="Helvetica Neue"/>
+                <a:cs typeface="Helvetica Neue"/>
+              </a:rPr>
+              <a:t>THE THREAD THROUGH MY WORK</a:t>
+            </a:r>
+          </a:p>
+        </p:txBody>
+      </p:sp>
+      <p:sp>
+        <p:nvSpPr>
+          <p:cNvPr id="5" name="headline">
+            <a:extLst xmlns:a="http://schemas.openxmlformats.org/drawingml/2006/main">
+              <a:ext uri="{FF2B5EF4-FFF2-40B4-BE49-F238E27FC236}">
+                <a16:creationId xmlns:a16="http://schemas.microsoft.com/office/drawing/2014/main" id="{F007E96B-E7AF-4762-95C1-3729073B1478}"/>
+              </a:ext>
+            </a:extLst>
+          </p:cNvPr>
+          <p:cNvSpPr>
+            <a:spLocks xmlns:a="http://schemas.openxmlformats.org/drawingml/2006/main" noGrp="1"/>
+          </p:cNvSpPr>
+          <p:nvPr/>
+        </p:nvSpPr>
+        <p:spPr>
+          <a:xfrm xmlns:a="http://schemas.openxmlformats.org/drawingml/2006/main">
+            <a:off x="609600" y="1438275"/>
+            <a:ext cx="5734050" cy="1657350"/>
+          </a:xfrm>
+          <a:prstGeom xmlns:a="http://schemas.openxmlformats.org/drawingml/2006/main" prst="rect">
+            <a:avLst/>
+          </a:prstGeom>
+          <a:noFill xmlns:a="http://schemas.openxmlformats.org/drawingml/2006/main"/>
+          <a:ln xmlns:a="http://schemas.openxmlformats.org/drawingml/2006/main" w="0">
+            <a:noFill/>
+          </a:ln>
+        </p:spPr>
+        <p:txBody>
+          <a:bodyPr xmlns:a="http://schemas.openxmlformats.org/drawingml/2006/main" wrap="square" lIns="0" tIns="0" rIns="0" bIns="0" anchor="t">
+            <a:noAutofit/>
+          </a:bodyPr>
+          <a:lstStyle xmlns:a="http://schemas.openxmlformats.org/drawingml/2006/main"/>
+          <a:p xmlns:a="http://schemas.openxmlformats.org/drawingml/2006/main">
+            <a:pPr>
+              <a:lnSpc>
+                <a:spcPct val="110000"/>
+              </a:lnSpc>
+              <a:buNone/>
+              <a:defRPr sz="3675" b="1">
+                <a:solidFill>
+                  <a:srgbClr val="192B25"/>
+                </a:solidFill>
+                <a:latin typeface="Helvetica Neue"/>
+                <a:ea typeface="Helvetica Neue"/>
+                <a:cs typeface="Helvetica Neue"/>
+              </a:defRPr>
+            </a:pPr>
+            <a:r>
+              <a:rPr sz="3675" b="1">
+                <a:solidFill>
+                  <a:srgbClr val="192B25"/>
+                </a:solidFill>
+                <a:latin typeface="Helvetica Neue"/>
+                <a:ea typeface="Helvetica Neue"/>
+                <a:cs typeface="Helvetica Neue"/>
+              </a:rPr>
+              <a:t>I started by listening</a:t>
+            </a:r>
+          </a:p>
+          <a:p xmlns:a="http://schemas.openxmlformats.org/drawingml/2006/main">
+            <a:pPr>
+              <a:lnSpc>
+                <a:spcPct val="110000"/>
+              </a:lnSpc>
+              <a:buNone/>
+              <a:defRPr sz="3675" b="1">
+                <a:solidFill>
+                  <a:srgbClr val="192B25"/>
+                </a:solidFill>
+                <a:latin typeface="Helvetica Neue"/>
+                <a:ea typeface="Helvetica Neue"/>
+                <a:cs typeface="Helvetica Neue"/>
+              </a:defRPr>
+            </a:pPr>
+            <a:r>
+              <a:rPr sz="3675" b="1">
+                <a:solidFill>
+                  <a:srgbClr val="192B25"/>
+                </a:solidFill>
+                <a:latin typeface="Helvetica Neue"/>
+                <a:ea typeface="Helvetica Neue"/>
+                <a:cs typeface="Helvetica Neue"/>
+              </a:rPr>
+              <a:t>to people’s stories</a:t>
+            </a:r>
+          </a:p>
+        </p:txBody>
+      </p:sp>
+      <p:sp>
+        <p:nvSpPr>
+          <p:cNvPr id="6" name="story-documentary">
+            <a:extLst xmlns:a="http://schemas.openxmlformats.org/drawingml/2006/main">
+              <a:ext uri="{FF2B5EF4-FFF2-40B4-BE49-F238E27FC236}">
+                <a16:creationId xmlns:a16="http://schemas.microsoft.com/office/drawing/2014/main" id="{7D05C8FC-4D8F-472D-916C-0560FAC64301}"/>
+              </a:ext>
+            </a:extLst>
+          </p:cNvPr>
+          <p:cNvSpPr>
+            <a:spLocks xmlns:a="http://schemas.openxmlformats.org/drawingml/2006/main" noGrp="1"/>
+          </p:cNvSpPr>
+          <p:nvPr/>
+        </p:nvSpPr>
+        <p:spPr>
+          <a:xfrm xmlns:a="http://schemas.openxmlformats.org/drawingml/2006/main">
+            <a:off x="609600" y="3609975"/>
+            <a:ext cx="5610225" cy="1095375"/>
+          </a:xfrm>
+          <a:prstGeom xmlns:a="http://schemas.openxmlformats.org/drawingml/2006/main" prst="rect">
+            <a:avLst/>
+          </a:prstGeom>
+          <a:noFill xmlns:a="http://schemas.openxmlformats.org/drawingml/2006/main"/>
+          <a:ln xmlns:a="http://schemas.openxmlformats.org/drawingml/2006/main" w="0">
+            <a:noFill/>
+          </a:ln>
+        </p:spPr>
+        <p:txBody>
+          <a:bodyPr xmlns:a="http://schemas.openxmlformats.org/drawingml/2006/main" wrap="square" lIns="0" tIns="0" rIns="0" bIns="0" anchor="t">
+            <a:noAutofit/>
+          </a:bodyPr>
+          <a:lstStyle xmlns:a="http://schemas.openxmlformats.org/drawingml/2006/main"/>
+          <a:p xmlns:a="http://schemas.openxmlformats.org/drawingml/2006/main">
+            <a:pPr>
+              <a:lnSpc>
+                <a:spcPct val="110000"/>
+              </a:lnSpc>
+              <a:buNone/>
+              <a:defRPr sz="1950" b="0">
+                <a:solidFill>
+                  <a:srgbClr val="192B25"/>
+                </a:solidFill>
+                <a:latin typeface="Helvetica Neue"/>
+                <a:ea typeface="Helvetica Neue"/>
+                <a:cs typeface="Helvetica Neue"/>
+              </a:defRPr>
+            </a:pPr>
+            <a:r>
+              <a:rPr sz="1950" b="0">
+                <a:solidFill>
+                  <a:srgbClr val="192B25"/>
+                </a:solidFill>
+                <a:latin typeface="Helvetica Neue"/>
+                <a:ea typeface="Helvetica Neue"/>
+                <a:cs typeface="Helvetica Neue"/>
+              </a:rPr>
+              <a:t>Documentary filmmaking taught me to listen closely and find the thread in a complicated story.</a:t>
+            </a:r>
+          </a:p>
+        </p:txBody>
+      </p:sp>
+      <p:sp>
+        <p:nvSpPr>
+          <p:cNvPr id="7" name="story-now">
+            <a:extLst xmlns:a="http://schemas.openxmlformats.org/drawingml/2006/main">
+              <a:ext uri="{FF2B5EF4-FFF2-40B4-BE49-F238E27FC236}">
+                <a16:creationId xmlns:a16="http://schemas.microsoft.com/office/drawing/2014/main" id="{FD96120C-D547-4942-9791-D83C74F14EFA}"/>
+              </a:ext>
+            </a:extLst>
+          </p:cNvPr>
+          <p:cNvSpPr>
+            <a:spLocks xmlns:a="http://schemas.openxmlformats.org/drawingml/2006/main" noGrp="1"/>
+          </p:cNvSpPr>
+          <p:nvPr/>
+        </p:nvSpPr>
+        <p:spPr>
+          <a:xfrm xmlns:a="http://schemas.openxmlformats.org/drawingml/2006/main">
+            <a:off x="609600" y="5057775"/>
+            <a:ext cx="5610225" cy="1362075"/>
+          </a:xfrm>
+          <a:prstGeom xmlns:a="http://schemas.openxmlformats.org/drawingml/2006/main" prst="rect">
+            <a:avLst/>
+          </a:prstGeom>
+          <a:noFill xmlns:a="http://schemas.openxmlformats.org/drawingml/2006/main"/>
+          <a:ln xmlns:a="http://schemas.openxmlformats.org/drawingml/2006/main" w="0">
+            <a:noFill/>
+          </a:ln>
+        </p:spPr>
+        <p:txBody>
+          <a:bodyPr xmlns:a="http://schemas.openxmlformats.org/drawingml/2006/main" wrap="square" lIns="0" tIns="0" rIns="0" bIns="0" anchor="t">
+            <a:noAutofit/>
+          </a:bodyPr>
+          <a:lstStyle xmlns:a="http://schemas.openxmlformats.org/drawingml/2006/main"/>
+          <a:p xmlns:a="http://schemas.openxmlformats.org/drawingml/2006/main">
+            <a:pPr>
+              <a:lnSpc>
+                <a:spcPct val="110000"/>
+              </a:lnSpc>
+              <a:buNone/>
+              <a:defRPr sz="1800" b="0">
+                <a:solidFill>
+                  <a:srgbClr val="58645D"/>
+                </a:solidFill>
+                <a:latin typeface="Helvetica Neue"/>
+                <a:ea typeface="Helvetica Neue"/>
+                <a:cs typeface="Helvetica Neue"/>
+              </a:defRPr>
+            </a:pPr>
+            <a:r>
+              <a:rPr sz="1800" b="0">
+                <a:solidFill>
+                  <a:srgbClr val="58645D"/>
+                </a:solidFill>
+                <a:latin typeface="Helvetica Neue"/>
+                <a:ea typeface="Helvetica Neue"/>
+                <a:cs typeface="Helvetica Neue"/>
+              </a:rPr>
+              <a:t>Those habits stayed with me in research and design. Outside work, I run tabletop games, where listening and helping a group find its way matter too.</a:t>
+            </a:r>
+          </a:p>
+        </p:txBody>
+      </p:sp>
+    </p:spTree>
+    <p:extLst>
+      <p:ext uri="{BB962C8B-B14F-4D97-AF65-F5344CB8AC3E}">
+        <p14:creationId xmlns:p14="http://schemas.microsoft.com/office/powerpoint/2010/main" val="1100122398"/>
+      </p:ext>
+    </p:extLst>
+  </p:cSld>
+</p:sld>
+</file>
+
+<file path=ppt/slides/slide16.xml><?xml version="1.0" encoding="utf-8"?>
 <p:sld xmlns:p="http://schemas.openxmlformats.org/presentationml/2006/main">
   <p:cSld>
     <p:bg>
@@ -4479,7 +5770,7 @@
           <p:cNvPr id="7" name="slide-number">
             <a:extLst xmlns:a="http://schemas.openxmlformats.org/drawingml/2006/main">
               <a:ext uri="{FF2B5EF4-FFF2-40B4-BE49-F238E27FC236}">
-                <a16:creationId xmlns:a16="http://schemas.microsoft.com/office/drawing/2014/main" id="{E11995A4-C549-4DD1-B0FD-B929A48476C1}"/>
+                <a16:creationId xmlns:a16="http://schemas.microsoft.com/office/drawing/2014/main" id="{33DA1BD4-7132-4AF3-95D9-F6FD2F4297A0}"/>
               </a:ext>
             </a:extLst>
           </p:cNvPr>
@@ -4530,7 +5821,7 @@
                 <a:ea typeface="Helvetica Neue"/>
                 <a:cs typeface="Helvetica Neue"/>
               </a:rPr>
-              <a:t>14</a:t>
+              <a:t>16</a:t>
             </a:r>
           </a:p>
         </p:txBody>
@@ -4540,7 +5831,7 @@
           <p:cNvPr id="2" name="section-label">
             <a:extLst xmlns:a="http://schemas.openxmlformats.org/drawingml/2006/main">
               <a:ext uri="{FF2B5EF4-FFF2-40B4-BE49-F238E27FC236}">
-                <a16:creationId xmlns:a16="http://schemas.microsoft.com/office/drawing/2014/main" id="{F531D45F-DCC8-4A91-837B-3E3159139573}"/>
+                <a16:creationId xmlns:a16="http://schemas.microsoft.com/office/drawing/2014/main" id="{7FC5E829-5319-48F2-ADBD-2344A609BFC0}"/>
               </a:ext>
             </a:extLst>
           </p:cNvPr>
@@ -4601,7 +5892,7 @@
           <p:cNvPr id="3" name="headline">
             <a:extLst xmlns:a="http://schemas.openxmlformats.org/drawingml/2006/main">
               <a:ext uri="{FF2B5EF4-FFF2-40B4-BE49-F238E27FC236}">
-                <a16:creationId xmlns:a16="http://schemas.microsoft.com/office/drawing/2014/main" id="{41C646C0-1616-48BF-B0BF-7406C5DF1404}"/>
+                <a16:creationId xmlns:a16="http://schemas.microsoft.com/office/drawing/2014/main" id="{2F69D42B-DD52-4E52-8129-6ECBFFB0AA83}"/>
               </a:ext>
             </a:extLst>
           </p:cNvPr>
@@ -4689,7 +5980,7 @@
           <p:cNvPr id="4" name="contact-intent">
             <a:extLst xmlns:a="http://schemas.openxmlformats.org/drawingml/2006/main">
               <a:ext uri="{FF2B5EF4-FFF2-40B4-BE49-F238E27FC236}">
-                <a16:creationId xmlns:a16="http://schemas.microsoft.com/office/drawing/2014/main" id="{C7F1019E-3AF9-475B-BEC3-664DFF0F0FAA}"/>
+                <a16:creationId xmlns:a16="http://schemas.microsoft.com/office/drawing/2014/main" id="{8102BE5D-8624-4F31-AE91-85EAFFC94429}"/>
               </a:ext>
             </a:extLst>
           </p:cNvPr>
@@ -4750,7 +6041,7 @@
           <p:cNvPr id="5" name="email">
             <a:extLst xmlns:a="http://schemas.openxmlformats.org/drawingml/2006/main">
               <a:ext uri="{FF2B5EF4-FFF2-40B4-BE49-F238E27FC236}">
-                <a16:creationId xmlns:a16="http://schemas.microsoft.com/office/drawing/2014/main" id="{E9E9F345-250C-4BAD-89C2-7ABCDE999C81}"/>
+                <a16:creationId xmlns:a16="http://schemas.microsoft.com/office/drawing/2014/main" id="{71771AA5-A220-4067-A828-1F8A0F63FEFA}"/>
               </a:ext>
             </a:extLst>
           </p:cNvPr>
@@ -4800,7 +6091,7 @@
                 <a:latin typeface="Helvetica Neue"/>
                 <a:ea typeface="Helvetica Neue"/>
                 <a:cs typeface="Helvetica Neue"/>
-                <a:hlinkClick xmlns:r="http://schemas.openxmlformats.org/officeDocument/2006/relationships" r:id="R3d7d7f60e50c42fe"/>
+                <a:hlinkClick xmlns:r="http://schemas.openxmlformats.org/officeDocument/2006/relationships" r:id="Rdb68c02961eb4232"/>
               </a:rPr>
               <a:t>JonathanKyleHobson@gmail.com</a:t>
             </a:r>
@@ -4812,7 +6103,7 @@
           <p:cNvPr id="6" name="public-profile">
             <a:extLst xmlns:a="http://schemas.openxmlformats.org/drawingml/2006/main">
               <a:ext uri="{FF2B5EF4-FFF2-40B4-BE49-F238E27FC236}">
-                <a16:creationId xmlns:a16="http://schemas.microsoft.com/office/drawing/2014/main" id="{9CF0FAE8-8A89-4201-8B91-63D45166B0AB}"/>
+                <a16:creationId xmlns:a16="http://schemas.microsoft.com/office/drawing/2014/main" id="{4822A0AE-5B4C-4371-AB53-A143F40851DC}"/>
               </a:ext>
             </a:extLst>
           </p:cNvPr>
@@ -4862,7 +6153,7 @@
                 <a:latin typeface="Helvetica Neue"/>
                 <a:ea typeface="Helvetica Neue"/>
                 <a:cs typeface="Helvetica Neue"/>
-                <a:hlinkClick xmlns:r="http://schemas.openxmlformats.org/officeDocument/2006/relationships" r:id="R419465b5694b4dcf"/>
+                <a:hlinkClick xmlns:r="http://schemas.openxmlformats.org/officeDocument/2006/relationships" r:id="R8f7a670fd6a04c45"/>
               </a:rPr>
               <a:t>jonathankhobson.github.io/portfolio/design</a:t>
             </a:r>
@@ -4872,7 +6163,7 @@
     </p:spTree>
     <p:extLst>
       <p:ext uri="{BB962C8B-B14F-4D97-AF65-F5344CB8AC3E}">
-        <p14:creationId xmlns:p14="http://schemas.microsoft.com/office/powerpoint/2010/main" val="1451956468"/>
+        <p14:creationId xmlns:p14="http://schemas.microsoft.com/office/powerpoint/2010/main" val="360507604"/>
       </p:ext>
     </p:extLst>
   </p:cSld>
@@ -4903,7 +6194,7 @@
           <p:cNvPr id="11" name="slide-number">
             <a:extLst xmlns:a="http://schemas.openxmlformats.org/drawingml/2006/main">
               <a:ext uri="{FF2B5EF4-FFF2-40B4-BE49-F238E27FC236}">
-                <a16:creationId xmlns:a16="http://schemas.microsoft.com/office/drawing/2014/main" id="{10D63E99-046F-4498-9323-619269809B47}"/>
+                <a16:creationId xmlns:a16="http://schemas.microsoft.com/office/drawing/2014/main" id="{17AB2BCB-C758-4347-966A-6AE0806E3116}"/>
               </a:ext>
             </a:extLst>
           </p:cNvPr>
@@ -4964,7 +6255,7 @@
           <p:cNvPr id="2" name="section-label">
             <a:extLst xmlns:a="http://schemas.openxmlformats.org/drawingml/2006/main">
               <a:ext uri="{FF2B5EF4-FFF2-40B4-BE49-F238E27FC236}">
-                <a16:creationId xmlns:a16="http://schemas.microsoft.com/office/drawing/2014/main" id="{DFD264F8-87CB-4E0E-A1AD-F868B1AF4BF4}"/>
+                <a16:creationId xmlns:a16="http://schemas.microsoft.com/office/drawing/2014/main" id="{3DCD9C07-EC88-4CB4-8239-37050CE6FA48}"/>
               </a:ext>
             </a:extLst>
           </p:cNvPr>
@@ -5025,7 +6316,7 @@
           <p:cNvPr id="3" name="headline">
             <a:extLst xmlns:a="http://schemas.openxmlformats.org/drawingml/2006/main">
               <a:ext uri="{FF2B5EF4-FFF2-40B4-BE49-F238E27FC236}">
-                <a16:creationId xmlns:a16="http://schemas.microsoft.com/office/drawing/2014/main" id="{1C10C34B-A613-4CC5-83DC-149D75FCD65D}"/>
+                <a16:creationId xmlns:a16="http://schemas.microsoft.com/office/drawing/2014/main" id="{26937109-D15A-4647-ABDC-AB17AF39C1B8}"/>
               </a:ext>
             </a:extLst>
           </p:cNvPr>
@@ -5086,7 +6377,7 @@
           <p:cNvPr id="4" name="before-label">
             <a:extLst xmlns:a="http://schemas.openxmlformats.org/drawingml/2006/main">
               <a:ext uri="{FF2B5EF4-FFF2-40B4-BE49-F238E27FC236}">
-                <a16:creationId xmlns:a16="http://schemas.microsoft.com/office/drawing/2014/main" id="{49E2363E-3B10-45B4-A11D-F7D345637F6B}"/>
+                <a16:creationId xmlns:a16="http://schemas.microsoft.com/office/drawing/2014/main" id="{A5B24CB6-E08F-4239-996B-4FA54245A246}"/>
               </a:ext>
             </a:extLst>
           </p:cNvPr>
@@ -5147,7 +6438,7 @@
           <p:cNvPr id="5" name="after-label">
             <a:extLst xmlns:a="http://schemas.openxmlformats.org/drawingml/2006/main">
               <a:ext uri="{FF2B5EF4-FFF2-40B4-BE49-F238E27FC236}">
-                <a16:creationId xmlns:a16="http://schemas.microsoft.com/office/drawing/2014/main" id="{5F9AA821-B33B-4D5E-876F-3578F70B575C}"/>
+                <a16:creationId xmlns:a16="http://schemas.microsoft.com/office/drawing/2014/main" id="{4A2C055F-727E-4C51-AD19-9E9406488B74}"/>
               </a:ext>
             </a:extLst>
           </p:cNvPr>
@@ -5208,7 +6499,7 @@
           <p:cNvPr id="6" name="before-caption">
             <a:extLst xmlns:a="http://schemas.openxmlformats.org/drawingml/2006/main">
               <a:ext uri="{FF2B5EF4-FFF2-40B4-BE49-F238E27FC236}">
-                <a16:creationId xmlns:a16="http://schemas.microsoft.com/office/drawing/2014/main" id="{63E965DD-4759-49E9-AB89-3FFD631A7AC2}"/>
+                <a16:creationId xmlns:a16="http://schemas.microsoft.com/office/drawing/2014/main" id="{380B457A-715E-44DD-AADC-582B8BF5BF46}"/>
               </a:ext>
             </a:extLst>
           </p:cNvPr>
@@ -5269,7 +6560,7 @@
           <p:cNvPr id="7" name="after-caption">
             <a:extLst xmlns:a="http://schemas.openxmlformats.org/drawingml/2006/main">
               <a:ext uri="{FF2B5EF4-FFF2-40B4-BE49-F238E27FC236}">
-                <a16:creationId xmlns:a16="http://schemas.microsoft.com/office/drawing/2014/main" id="{F1F1729E-8F3B-4F53-A155-443EB2189225}"/>
+                <a16:creationId xmlns:a16="http://schemas.microsoft.com/office/drawing/2014/main" id="{1F041A58-1252-40B5-B536-66B8C2D79027}"/>
               </a:ext>
             </a:extLst>
           </p:cNvPr>
@@ -5334,7 +6625,7 @@
           <p:nvPr/>
         </p:nvPicPr>
         <p:blipFill>
-          <a:blip xmlns:r="http://schemas.openxmlformats.org/officeDocument/2006/relationships" xmlns:a="http://schemas.openxmlformats.org/drawingml/2006/main" r:embed="R01dee18b99454961"/>
+          <a:blip xmlns:r="http://schemas.openxmlformats.org/officeDocument/2006/relationships" xmlns:a="http://schemas.openxmlformats.org/drawingml/2006/main" r:embed="R80d097906b404cab"/>
           <a:stretch xmlns:a="http://schemas.openxmlformats.org/drawingml/2006/main"/>
         </p:blipFill>
         <p:spPr>
@@ -5356,7 +6647,7 @@
           <p:nvPr/>
         </p:nvPicPr>
         <p:blipFill>
-          <a:blip xmlns:r="http://schemas.openxmlformats.org/officeDocument/2006/relationships" xmlns:a="http://schemas.openxmlformats.org/drawingml/2006/main" r:embed="Rd9c6e0f8f8fe420f"/>
+          <a:blip xmlns:r="http://schemas.openxmlformats.org/officeDocument/2006/relationships" xmlns:a="http://schemas.openxmlformats.org/drawingml/2006/main" r:embed="R8405cd55196d4f11"/>
           <a:stretch xmlns:a="http://schemas.openxmlformats.org/drawingml/2006/main"/>
         </p:blipFill>
         <p:spPr>
@@ -5374,7 +6665,7 @@
           <p:cNvPr id="10" name="stage">
             <a:extLst xmlns:a="http://schemas.openxmlformats.org/drawingml/2006/main">
               <a:ext uri="{FF2B5EF4-FFF2-40B4-BE49-F238E27FC236}">
-                <a16:creationId xmlns:a16="http://schemas.microsoft.com/office/drawing/2014/main" id="{A714C98F-D01C-4662-9BAD-5E8C85EA3D2B}"/>
+                <a16:creationId xmlns:a16="http://schemas.microsoft.com/office/drawing/2014/main" id="{F448ED5A-AEF2-4E81-8877-CB5B9602F05D}"/>
               </a:ext>
             </a:extLst>
           </p:cNvPr>
@@ -5433,7 +6724,7 @@
     </p:spTree>
     <p:extLst>
       <p:ext uri="{BB962C8B-B14F-4D97-AF65-F5344CB8AC3E}">
-        <p14:creationId xmlns:p14="http://schemas.microsoft.com/office/powerpoint/2010/main" val="1310918179"/>
+        <p14:creationId xmlns:p14="http://schemas.microsoft.com/office/powerpoint/2010/main" val="1467956206"/>
       </p:ext>
     </p:extLst>
   </p:cSld>
@@ -5464,7 +6755,7 @@
           <p:cNvPr id="9" name="slide-number">
             <a:extLst xmlns:a="http://schemas.openxmlformats.org/drawingml/2006/main">
               <a:ext uri="{FF2B5EF4-FFF2-40B4-BE49-F238E27FC236}">
-                <a16:creationId xmlns:a16="http://schemas.microsoft.com/office/drawing/2014/main" id="{49D98C7C-33BA-4156-ADA0-7FED9A47F13F}"/>
+                <a16:creationId xmlns:a16="http://schemas.microsoft.com/office/drawing/2014/main" id="{1D667338-C42B-4AF4-A262-E61BCABB4729}"/>
               </a:ext>
             </a:extLst>
           </p:cNvPr>
@@ -5525,7 +6816,7 @@
           <p:cNvPr id="2" name="section-label">
             <a:extLst xmlns:a="http://schemas.openxmlformats.org/drawingml/2006/main">
               <a:ext uri="{FF2B5EF4-FFF2-40B4-BE49-F238E27FC236}">
-                <a16:creationId xmlns:a16="http://schemas.microsoft.com/office/drawing/2014/main" id="{4B9BBF2B-999C-4BCE-9E70-7824CFF2616B}"/>
+                <a16:creationId xmlns:a16="http://schemas.microsoft.com/office/drawing/2014/main" id="{ECD208FA-6D47-4EF3-91CE-33FC14F5EA95}"/>
               </a:ext>
             </a:extLst>
           </p:cNvPr>
@@ -5586,7 +6877,7 @@
           <p:cNvPr id="3" name="headline">
             <a:extLst xmlns:a="http://schemas.openxmlformats.org/drawingml/2006/main">
               <a:ext uri="{FF2B5EF4-FFF2-40B4-BE49-F238E27FC236}">
-                <a16:creationId xmlns:a16="http://schemas.microsoft.com/office/drawing/2014/main" id="{2944FBF4-7806-4DEC-BA17-DB1C451FD8D4}"/>
+                <a16:creationId xmlns:a16="http://schemas.microsoft.com/office/drawing/2014/main" id="{114E0A5D-FA10-4BCA-A237-CBE21ED9F027}"/>
               </a:ext>
             </a:extLst>
           </p:cNvPr>
@@ -5674,7 +6965,7 @@
           <p:cNvPr id="4" name="waiting-decision">
             <a:extLst xmlns:a="http://schemas.openxmlformats.org/drawingml/2006/main">
               <a:ext uri="{FF2B5EF4-FFF2-40B4-BE49-F238E27FC236}">
-                <a16:creationId xmlns:a16="http://schemas.microsoft.com/office/drawing/2014/main" id="{89311DF1-07F3-40DB-A001-67170A7A1072}"/>
+                <a16:creationId xmlns:a16="http://schemas.microsoft.com/office/drawing/2014/main" id="{33AC019F-66E3-436F-A570-470EC45A3FC6}"/>
               </a:ext>
             </a:extLst>
           </p:cNvPr>
@@ -5735,7 +7026,7 @@
           <p:cNvPr id="5" name="waiting-constraint">
             <a:extLst xmlns:a="http://schemas.openxmlformats.org/drawingml/2006/main">
               <a:ext uri="{FF2B5EF4-FFF2-40B4-BE49-F238E27FC236}">
-                <a16:creationId xmlns:a16="http://schemas.microsoft.com/office/drawing/2014/main" id="{82E95FDD-57D6-48B0-BD55-4AD7D86AC432}"/>
+                <a16:creationId xmlns:a16="http://schemas.microsoft.com/office/drawing/2014/main" id="{994A94FB-7637-465F-A812-F9FE511D7B83}"/>
               </a:ext>
             </a:extLst>
           </p:cNvPr>
@@ -5800,7 +7091,7 @@
           <p:nvPr/>
         </p:nvPicPr>
         <p:blipFill>
-          <a:blip xmlns:r="http://schemas.openxmlformats.org/officeDocument/2006/relationships" xmlns:a="http://schemas.openxmlformats.org/drawingml/2006/main" r:embed="R08df1bd76c34483f"/>
+          <a:blip xmlns:r="http://schemas.openxmlformats.org/officeDocument/2006/relationships" xmlns:a="http://schemas.openxmlformats.org/drawingml/2006/main" r:embed="Rc5c1f42cbc0f4999"/>
           <a:stretch xmlns:a="http://schemas.openxmlformats.org/drawingml/2006/main"/>
         </p:blipFill>
         <p:spPr>
@@ -5818,7 +7109,7 @@
           <p:cNvPr id="7" name="detail-caption">
             <a:extLst xmlns:a="http://schemas.openxmlformats.org/drawingml/2006/main">
               <a:ext uri="{FF2B5EF4-FFF2-40B4-BE49-F238E27FC236}">
-                <a16:creationId xmlns:a16="http://schemas.microsoft.com/office/drawing/2014/main" id="{932C6AEF-7C6E-4581-9422-2B0BE668A19B}"/>
+                <a16:creationId xmlns:a16="http://schemas.microsoft.com/office/drawing/2014/main" id="{B8B5D798-C4A1-41E8-8A76-4DC8E14C72C6}"/>
               </a:ext>
             </a:extLst>
           </p:cNvPr>
@@ -5883,7 +7174,7 @@
           <p:nvPr/>
         </p:nvPicPr>
         <p:blipFill>
-          <a:blip xmlns:r="http://schemas.openxmlformats.org/officeDocument/2006/relationships" xmlns:a="http://schemas.openxmlformats.org/drawingml/2006/main" r:embed="R447264a24f914efc"/>
+          <a:blip xmlns:r="http://schemas.openxmlformats.org/officeDocument/2006/relationships" xmlns:a="http://schemas.openxmlformats.org/drawingml/2006/main" r:embed="R8fa159c5e4cb490a"/>
           <a:stretch xmlns:a="http://schemas.openxmlformats.org/drawingml/2006/main"/>
         </p:blipFill>
         <p:spPr>
@@ -5899,7 +7190,7 @@
     </p:spTree>
     <p:extLst>
       <p:ext uri="{BB962C8B-B14F-4D97-AF65-F5344CB8AC3E}">
-        <p14:creationId xmlns:p14="http://schemas.microsoft.com/office/powerpoint/2010/main" val="98995015"/>
+        <p14:creationId xmlns:p14="http://schemas.microsoft.com/office/powerpoint/2010/main" val="1306270528"/>
       </p:ext>
     </p:extLst>
   </p:cSld>
@@ -5930,7 +7221,7 @@
           <p:cNvPr id="10" name="slide-number">
             <a:extLst xmlns:a="http://schemas.openxmlformats.org/drawingml/2006/main">
               <a:ext uri="{FF2B5EF4-FFF2-40B4-BE49-F238E27FC236}">
-                <a16:creationId xmlns:a16="http://schemas.microsoft.com/office/drawing/2014/main" id="{41D63752-A03A-4219-8392-B9F7837861D5}"/>
+                <a16:creationId xmlns:a16="http://schemas.microsoft.com/office/drawing/2014/main" id="{A69D04BB-F866-49C5-A42B-2048DEF57323}"/>
               </a:ext>
             </a:extLst>
           </p:cNvPr>
@@ -5991,7 +7282,7 @@
           <p:cNvPr id="2" name="section-label">
             <a:extLst xmlns:a="http://schemas.openxmlformats.org/drawingml/2006/main">
               <a:ext uri="{FF2B5EF4-FFF2-40B4-BE49-F238E27FC236}">
-                <a16:creationId xmlns:a16="http://schemas.microsoft.com/office/drawing/2014/main" id="{30DDD93F-991F-4784-BB54-10533688562B}"/>
+                <a16:creationId xmlns:a16="http://schemas.microsoft.com/office/drawing/2014/main" id="{5FF23D0E-B773-41D6-BB7B-3A946C7B0787}"/>
               </a:ext>
             </a:extLst>
           </p:cNvPr>
@@ -6052,7 +7343,7 @@
           <p:cNvPr id="3" name="headline">
             <a:extLst xmlns:a="http://schemas.openxmlformats.org/drawingml/2006/main">
               <a:ext uri="{FF2B5EF4-FFF2-40B4-BE49-F238E27FC236}">
-                <a16:creationId xmlns:a16="http://schemas.microsoft.com/office/drawing/2014/main" id="{46C3A5CF-172A-4795-A52C-C527CA2E710B}"/>
+                <a16:creationId xmlns:a16="http://schemas.microsoft.com/office/drawing/2014/main" id="{F0F5CB0E-486F-4A6A-9616-198ABB649B8A}"/>
               </a:ext>
             </a:extLst>
           </p:cNvPr>
@@ -6140,7 +7431,7 @@
           <p:cNvPr id="4" name="recovery-decision">
             <a:extLst xmlns:a="http://schemas.openxmlformats.org/drawingml/2006/main">
               <a:ext uri="{FF2B5EF4-FFF2-40B4-BE49-F238E27FC236}">
-                <a16:creationId xmlns:a16="http://schemas.microsoft.com/office/drawing/2014/main" id="{B5FC3C24-5E77-4255-8773-63F0D36E4DC0}"/>
+                <a16:creationId xmlns:a16="http://schemas.microsoft.com/office/drawing/2014/main" id="{F9CE2D89-8763-402B-BE75-ADD81839D690}"/>
               </a:ext>
             </a:extLst>
           </p:cNvPr>
@@ -6201,7 +7492,7 @@
           <p:cNvPr id="5" name="recovery-outcome">
             <a:extLst xmlns:a="http://schemas.openxmlformats.org/drawingml/2006/main">
               <a:ext uri="{FF2B5EF4-FFF2-40B4-BE49-F238E27FC236}">
-                <a16:creationId xmlns:a16="http://schemas.microsoft.com/office/drawing/2014/main" id="{85BB512A-BB3D-4851-A4D9-0BE42B14A9C7}"/>
+                <a16:creationId xmlns:a16="http://schemas.microsoft.com/office/drawing/2014/main" id="{D25BC748-26BE-45AE-8D32-4AA82724239C}"/>
               </a:ext>
             </a:extLst>
           </p:cNvPr>
@@ -6262,7 +7553,7 @@
           <p:cNvPr id="6" name="incomplete-label">
             <a:extLst xmlns:a="http://schemas.openxmlformats.org/drawingml/2006/main">
               <a:ext uri="{FF2B5EF4-FFF2-40B4-BE49-F238E27FC236}">
-                <a16:creationId xmlns:a16="http://schemas.microsoft.com/office/drawing/2014/main" id="{CAE0FCD7-4E3E-4C3E-A1E7-E774799FFA90}"/>
+                <a16:creationId xmlns:a16="http://schemas.microsoft.com/office/drawing/2014/main" id="{7F2A2A34-A2D6-4DB3-9179-CD0704348FCA}"/>
               </a:ext>
             </a:extLst>
           </p:cNvPr>
@@ -6323,7 +7614,7 @@
           <p:cNvPr id="7" name="offline-label">
             <a:extLst xmlns:a="http://schemas.openxmlformats.org/drawingml/2006/main">
               <a:ext uri="{FF2B5EF4-FFF2-40B4-BE49-F238E27FC236}">
-                <a16:creationId xmlns:a16="http://schemas.microsoft.com/office/drawing/2014/main" id="{640A1389-C2CA-4541-BE7A-281FBDD344FA}"/>
+                <a16:creationId xmlns:a16="http://schemas.microsoft.com/office/drawing/2014/main" id="{9A504A2E-7761-493A-A30C-FAF8761675E7}"/>
               </a:ext>
             </a:extLst>
           </p:cNvPr>
@@ -6388,7 +7679,7 @@
           <p:nvPr/>
         </p:nvPicPr>
         <p:blipFill>
-          <a:blip xmlns:r="http://schemas.openxmlformats.org/officeDocument/2006/relationships" xmlns:a="http://schemas.openxmlformats.org/drawingml/2006/main" r:embed="R57e2863456174dec"/>
+          <a:blip xmlns:r="http://schemas.openxmlformats.org/officeDocument/2006/relationships" xmlns:a="http://schemas.openxmlformats.org/drawingml/2006/main" r:embed="Ref82dafcc9054955"/>
           <a:stretch xmlns:a="http://schemas.openxmlformats.org/drawingml/2006/main"/>
         </p:blipFill>
         <p:spPr>
@@ -6410,7 +7701,7 @@
           <p:nvPr/>
         </p:nvPicPr>
         <p:blipFill>
-          <a:blip xmlns:r="http://schemas.openxmlformats.org/officeDocument/2006/relationships" xmlns:a="http://schemas.openxmlformats.org/drawingml/2006/main" r:embed="R94ce2b1097ec4a9a"/>
+          <a:blip xmlns:r="http://schemas.openxmlformats.org/officeDocument/2006/relationships" xmlns:a="http://schemas.openxmlformats.org/drawingml/2006/main" r:embed="Rc0a61ae04ab7443d"/>
           <a:stretch xmlns:a="http://schemas.openxmlformats.org/drawingml/2006/main"/>
         </p:blipFill>
         <p:spPr>
@@ -6426,7 +7717,7 @@
     </p:spTree>
     <p:extLst>
       <p:ext uri="{BB962C8B-B14F-4D97-AF65-F5344CB8AC3E}">
-        <p14:creationId xmlns:p14="http://schemas.microsoft.com/office/powerpoint/2010/main" val="432895907"/>
+        <p14:creationId xmlns:p14="http://schemas.microsoft.com/office/powerpoint/2010/main" val="983979839"/>
       </p:ext>
     </p:extLst>
   </p:cSld>
@@ -6457,7 +7748,7 @@
           <p:cNvPr id="8" name="slide-number">
             <a:extLst xmlns:a="http://schemas.openxmlformats.org/drawingml/2006/main">
               <a:ext uri="{FF2B5EF4-FFF2-40B4-BE49-F238E27FC236}">
-                <a16:creationId xmlns:a16="http://schemas.microsoft.com/office/drawing/2014/main" id="{5944B73E-B2E5-4FF9-9CE7-E5CA5D16BE8F}"/>
+                <a16:creationId xmlns:a16="http://schemas.microsoft.com/office/drawing/2014/main" id="{B4509696-4604-4758-A379-8F0D4608D9AA}"/>
               </a:ext>
             </a:extLst>
           </p:cNvPr>
@@ -6518,7 +7809,7 @@
           <p:cNvPr id="2" name="section-label">
             <a:extLst xmlns:a="http://schemas.openxmlformats.org/drawingml/2006/main">
               <a:ext uri="{FF2B5EF4-FFF2-40B4-BE49-F238E27FC236}">
-                <a16:creationId xmlns:a16="http://schemas.microsoft.com/office/drawing/2014/main" id="{14E7061F-4680-430A-9615-A3890AF88DF6}"/>
+                <a16:creationId xmlns:a16="http://schemas.microsoft.com/office/drawing/2014/main" id="{EEB4EEC3-565B-4467-A6BB-DE482A4E18BE}"/>
               </a:ext>
             </a:extLst>
           </p:cNvPr>
@@ -6579,7 +7870,7 @@
           <p:cNvPr id="3" name="headline">
             <a:extLst xmlns:a="http://schemas.openxmlformats.org/drawingml/2006/main">
               <a:ext uri="{FF2B5EF4-FFF2-40B4-BE49-F238E27FC236}">
-                <a16:creationId xmlns:a16="http://schemas.microsoft.com/office/drawing/2014/main" id="{039D7B94-C9A0-42F9-AC53-9F70C27E6B44}"/>
+                <a16:creationId xmlns:a16="http://schemas.microsoft.com/office/drawing/2014/main" id="{70CF98C1-DFB3-4A4C-A310-8A9B6D99EFC3}"/>
               </a:ext>
             </a:extLst>
           </p:cNvPr>
@@ -6667,7 +7958,7 @@
           <p:cNvPr id="4" name="role">
             <a:extLst xmlns:a="http://schemas.openxmlformats.org/drawingml/2006/main">
               <a:ext uri="{FF2B5EF4-FFF2-40B4-BE49-F238E27FC236}">
-                <a16:creationId xmlns:a16="http://schemas.microsoft.com/office/drawing/2014/main" id="{A6C1370E-90A1-4B3A-BE8D-2C0B1DB9C1D4}"/>
+                <a16:creationId xmlns:a16="http://schemas.microsoft.com/office/drawing/2014/main" id="{F6A80498-59D8-4815-84FD-41741426F91E}"/>
               </a:ext>
             </a:extLst>
           </p:cNvPr>
@@ -6728,7 +8019,7 @@
           <p:cNvPr id="5" name="about-decision">
             <a:extLst xmlns:a="http://schemas.openxmlformats.org/drawingml/2006/main">
               <a:ext uri="{FF2B5EF4-FFF2-40B4-BE49-F238E27FC236}">
-                <a16:creationId xmlns:a16="http://schemas.microsoft.com/office/drawing/2014/main" id="{B8E17B32-E775-44D0-B670-2E566F97475B}"/>
+                <a16:creationId xmlns:a16="http://schemas.microsoft.com/office/drawing/2014/main" id="{21E31833-842C-4C99-89D1-53BF7104FE93}"/>
               </a:ext>
             </a:extLst>
           </p:cNvPr>
@@ -6789,7 +8080,7 @@
           <p:cNvPr id="6" name="about-stage">
             <a:extLst xmlns:a="http://schemas.openxmlformats.org/drawingml/2006/main">
               <a:ext uri="{FF2B5EF4-FFF2-40B4-BE49-F238E27FC236}">
-                <a16:creationId xmlns:a16="http://schemas.microsoft.com/office/drawing/2014/main" id="{D69B2EDB-8D68-4AE2-9D6A-4527BE1B2F86}"/>
+                <a16:creationId xmlns:a16="http://schemas.microsoft.com/office/drawing/2014/main" id="{5B8D8229-A384-4F72-B8AA-59DAE53B5D0C}"/>
               </a:ext>
             </a:extLst>
           </p:cNvPr>
@@ -6854,7 +8145,7 @@
           <p:nvPr/>
         </p:nvPicPr>
         <p:blipFill>
-          <a:blip xmlns:r="http://schemas.openxmlformats.org/officeDocument/2006/relationships" xmlns:a="http://schemas.openxmlformats.org/drawingml/2006/main" r:embed="R4bf4926ba3f249df"/>
+          <a:blip xmlns:r="http://schemas.openxmlformats.org/officeDocument/2006/relationships" xmlns:a="http://schemas.openxmlformats.org/drawingml/2006/main" r:embed="Rf2c8639f74364fc7"/>
           <a:stretch xmlns:a="http://schemas.openxmlformats.org/drawingml/2006/main"/>
         </p:blipFill>
         <p:spPr>
@@ -6870,7 +8161,7 @@
     </p:spTree>
     <p:extLst>
       <p:ext uri="{BB962C8B-B14F-4D97-AF65-F5344CB8AC3E}">
-        <p14:creationId xmlns:p14="http://schemas.microsoft.com/office/powerpoint/2010/main" val="1986214611"/>
+        <p14:creationId xmlns:p14="http://schemas.microsoft.com/office/powerpoint/2010/main" val="808463758"/>
       </p:ext>
     </p:extLst>
   </p:cSld>
@@ -6901,7 +8192,7 @@
           <p:cNvPr id="9" name="slide-number">
             <a:extLst xmlns:a="http://schemas.openxmlformats.org/drawingml/2006/main">
               <a:ext uri="{FF2B5EF4-FFF2-40B4-BE49-F238E27FC236}">
-                <a16:creationId xmlns:a16="http://schemas.microsoft.com/office/drawing/2014/main" id="{2E36D1EB-64A0-493D-AD19-6D2638E4C130}"/>
+                <a16:creationId xmlns:a16="http://schemas.microsoft.com/office/drawing/2014/main" id="{734F31D1-18EF-4EB1-8CBD-189FF7982620}"/>
               </a:ext>
             </a:extLst>
           </p:cNvPr>
@@ -6962,7 +8253,7 @@
           <p:cNvPr id="2" name="section-label">
             <a:extLst xmlns:a="http://schemas.openxmlformats.org/drawingml/2006/main">
               <a:ext uri="{FF2B5EF4-FFF2-40B4-BE49-F238E27FC236}">
-                <a16:creationId xmlns:a16="http://schemas.microsoft.com/office/drawing/2014/main" id="{D6F177E1-1518-4380-80B6-F78DA9E23F69}"/>
+                <a16:creationId xmlns:a16="http://schemas.microsoft.com/office/drawing/2014/main" id="{8AA5D4D6-9DAF-4201-BDEB-1E81BF021198}"/>
               </a:ext>
             </a:extLst>
           </p:cNvPr>
@@ -7023,7 +8314,7 @@
           <p:cNvPr id="3" name="headline">
             <a:extLst xmlns:a="http://schemas.openxmlformats.org/drawingml/2006/main">
               <a:ext uri="{FF2B5EF4-FFF2-40B4-BE49-F238E27FC236}">
-                <a16:creationId xmlns:a16="http://schemas.microsoft.com/office/drawing/2014/main" id="{4D7558C6-7620-4E8E-B5B4-79C1E54A2AAF}"/>
+                <a16:creationId xmlns:a16="http://schemas.microsoft.com/office/drawing/2014/main" id="{8C8B5C17-7DA7-4922-8B03-B396E98A3E21}"/>
               </a:ext>
             </a:extLst>
           </p:cNvPr>
@@ -7111,7 +8402,7 @@
           <p:cNvPr id="4" name="collaboration-lead">
             <a:extLst xmlns:a="http://schemas.openxmlformats.org/drawingml/2006/main">
               <a:ext uri="{FF2B5EF4-FFF2-40B4-BE49-F238E27FC236}">
-                <a16:creationId xmlns:a16="http://schemas.microsoft.com/office/drawing/2014/main" id="{3039C6C8-964B-4FB7-8DCB-2FDC9052DF05}"/>
+                <a16:creationId xmlns:a16="http://schemas.microsoft.com/office/drawing/2014/main" id="{66FA40A0-FDB0-4EE9-BB63-BDDCAE48C37B}"/>
               </a:ext>
             </a:extLst>
           </p:cNvPr>
@@ -7172,7 +8463,7 @@
           <p:cNvPr id="5" name="collaboration-decision">
             <a:extLst xmlns:a="http://schemas.openxmlformats.org/drawingml/2006/main">
               <a:ext uri="{FF2B5EF4-FFF2-40B4-BE49-F238E27FC236}">
-                <a16:creationId xmlns:a16="http://schemas.microsoft.com/office/drawing/2014/main" id="{F9CBB0FC-3750-4256-85F7-7A3EFBB55F6D}"/>
+                <a16:creationId xmlns:a16="http://schemas.microsoft.com/office/drawing/2014/main" id="{FB58D33D-1B12-41AF-9CE3-6069B44305E6}"/>
               </a:ext>
             </a:extLst>
           </p:cNvPr>
@@ -7233,7 +8524,7 @@
           <p:cNvPr id="6" name="collaboration-stage">
             <a:extLst xmlns:a="http://schemas.openxmlformats.org/drawingml/2006/main">
               <a:ext uri="{FF2B5EF4-FFF2-40B4-BE49-F238E27FC236}">
-                <a16:creationId xmlns:a16="http://schemas.microsoft.com/office/drawing/2014/main" id="{088EF960-BD4D-498D-9A08-9E412ACBA69F}"/>
+                <a16:creationId xmlns:a16="http://schemas.microsoft.com/office/drawing/2014/main" id="{4A607614-F7D0-4C50-8D04-30DB6D70EF38}"/>
               </a:ext>
             </a:extLst>
           </p:cNvPr>
@@ -7298,7 +8589,7 @@
           <p:nvPr/>
         </p:nvPicPr>
         <p:blipFill>
-          <a:blip xmlns:r="http://schemas.openxmlformats.org/officeDocument/2006/relationships" xmlns:a="http://schemas.openxmlformats.org/drawingml/2006/main" r:embed="R6679bdccf75e4cbc"/>
+          <a:blip xmlns:r="http://schemas.openxmlformats.org/officeDocument/2006/relationships" xmlns:a="http://schemas.openxmlformats.org/drawingml/2006/main" r:embed="R8087a68858b34a1b"/>
           <a:stretch xmlns:a="http://schemas.openxmlformats.org/drawingml/2006/main"/>
         </p:blipFill>
         <p:spPr>
@@ -7316,7 +8607,7 @@
           <p:cNvPr id="8" name="accomplishments-caption">
             <a:extLst xmlns:a="http://schemas.openxmlformats.org/drawingml/2006/main">
               <a:ext uri="{FF2B5EF4-FFF2-40B4-BE49-F238E27FC236}">
-                <a16:creationId xmlns:a16="http://schemas.microsoft.com/office/drawing/2014/main" id="{FD985A97-7433-4403-870A-37BF28FD4823}"/>
+                <a16:creationId xmlns:a16="http://schemas.microsoft.com/office/drawing/2014/main" id="{31E23A2A-E204-4287-B017-5FEC250A4FE7}"/>
               </a:ext>
             </a:extLst>
           </p:cNvPr>
@@ -7375,7 +8666,7 @@
     </p:spTree>
     <p:extLst>
       <p:ext uri="{BB962C8B-B14F-4D97-AF65-F5344CB8AC3E}">
-        <p14:creationId xmlns:p14="http://schemas.microsoft.com/office/powerpoint/2010/main" val="1527817320"/>
+        <p14:creationId xmlns:p14="http://schemas.microsoft.com/office/powerpoint/2010/main" val="1802254531"/>
       </p:ext>
     </p:extLst>
   </p:cSld>
@@ -7406,7 +8697,7 @@
           <p:cNvPr id="8" name="slide-number">
             <a:extLst xmlns:a="http://schemas.openxmlformats.org/drawingml/2006/main">
               <a:ext uri="{FF2B5EF4-FFF2-40B4-BE49-F238E27FC236}">
-                <a16:creationId xmlns:a16="http://schemas.microsoft.com/office/drawing/2014/main" id="{C69B6234-F9EB-4A3B-B8F7-37B96327AEFF}"/>
+                <a16:creationId xmlns:a16="http://schemas.microsoft.com/office/drawing/2014/main" id="{98C7C662-F283-4284-91E0-5C3CF6D0125E}"/>
               </a:ext>
             </a:extLst>
           </p:cNvPr>
@@ -7467,7 +8758,7 @@
           <p:cNvPr id="2" name="section-label">
             <a:extLst xmlns:a="http://schemas.openxmlformats.org/drawingml/2006/main">
               <a:ext uri="{FF2B5EF4-FFF2-40B4-BE49-F238E27FC236}">
-                <a16:creationId xmlns:a16="http://schemas.microsoft.com/office/drawing/2014/main" id="{A8274FD1-5EB7-464E-A9AE-9AA80B0159A1}"/>
+                <a16:creationId xmlns:a16="http://schemas.microsoft.com/office/drawing/2014/main" id="{0730AFE1-CA5A-4C35-952F-BD4849C6558A}"/>
               </a:ext>
             </a:extLst>
           </p:cNvPr>
@@ -7528,7 +8819,7 @@
           <p:cNvPr id="3" name="headline">
             <a:extLst xmlns:a="http://schemas.openxmlformats.org/drawingml/2006/main">
               <a:ext uri="{FF2B5EF4-FFF2-40B4-BE49-F238E27FC236}">
-                <a16:creationId xmlns:a16="http://schemas.microsoft.com/office/drawing/2014/main" id="{4A666F3D-6735-4ABC-A7D7-4E3244A0D19C}"/>
+                <a16:creationId xmlns:a16="http://schemas.microsoft.com/office/drawing/2014/main" id="{B90796A0-473F-42AC-B695-98568B6770E7}"/>
               </a:ext>
             </a:extLst>
           </p:cNvPr>
@@ -7616,7 +8907,7 @@
           <p:cNvPr id="4" name="comparison-decision">
             <a:extLst xmlns:a="http://schemas.openxmlformats.org/drawingml/2006/main">
               <a:ext uri="{FF2B5EF4-FFF2-40B4-BE49-F238E27FC236}">
-                <a16:creationId xmlns:a16="http://schemas.microsoft.com/office/drawing/2014/main" id="{4464D903-E773-466F-90B5-336A2C24FD2A}"/>
+                <a16:creationId xmlns:a16="http://schemas.microsoft.com/office/drawing/2014/main" id="{744D13F4-92A8-44C9-ADB1-EB524C2D727E}"/>
               </a:ext>
             </a:extLst>
           </p:cNvPr>
@@ -7677,7 +8968,7 @@
           <p:cNvPr id="5" name="comparison-outcome">
             <a:extLst xmlns:a="http://schemas.openxmlformats.org/drawingml/2006/main">
               <a:ext uri="{FF2B5EF4-FFF2-40B4-BE49-F238E27FC236}">
-                <a16:creationId xmlns:a16="http://schemas.microsoft.com/office/drawing/2014/main" id="{D3343847-6F2A-4BC8-A558-8DF0A616B020}"/>
+                <a16:creationId xmlns:a16="http://schemas.microsoft.com/office/drawing/2014/main" id="{03CDDC92-B0B8-430B-B0B3-0C146E8B8974}"/>
               </a:ext>
             </a:extLst>
           </p:cNvPr>
@@ -7742,7 +9033,7 @@
           <p:nvPr/>
         </p:nvPicPr>
         <p:blipFill>
-          <a:blip xmlns:r="http://schemas.openxmlformats.org/officeDocument/2006/relationships" xmlns:a="http://schemas.openxmlformats.org/drawingml/2006/main" r:embed="R4968b09a0e31449a"/>
+          <a:blip xmlns:r="http://schemas.openxmlformats.org/officeDocument/2006/relationships" xmlns:a="http://schemas.openxmlformats.org/drawingml/2006/main" r:embed="Rbefabe5625124542"/>
           <a:stretch xmlns:a="http://schemas.openxmlformats.org/drawingml/2006/main"/>
         </p:blipFill>
         <p:spPr>
@@ -7760,7 +9051,7 @@
           <p:cNvPr id="7" name="sample-label">
             <a:extLst xmlns:a="http://schemas.openxmlformats.org/drawingml/2006/main">
               <a:ext uri="{FF2B5EF4-FFF2-40B4-BE49-F238E27FC236}">
-                <a16:creationId xmlns:a16="http://schemas.microsoft.com/office/drawing/2014/main" id="{CCC8A31C-A2BA-4F30-A579-D9698B8EA808}"/>
+                <a16:creationId xmlns:a16="http://schemas.microsoft.com/office/drawing/2014/main" id="{2FDBFD70-D6AF-4AEC-AB6E-32D3753C8155}"/>
               </a:ext>
             </a:extLst>
           </p:cNvPr>
@@ -7819,7 +9110,7 @@
     </p:spTree>
     <p:extLst>
       <p:ext uri="{BB962C8B-B14F-4D97-AF65-F5344CB8AC3E}">
-        <p14:creationId xmlns:p14="http://schemas.microsoft.com/office/powerpoint/2010/main" val="1154707154"/>
+        <p14:creationId xmlns:p14="http://schemas.microsoft.com/office/powerpoint/2010/main" val="614079743"/>
       </p:ext>
     </p:extLst>
   </p:cSld>
@@ -7850,7 +9141,7 @@
           <p:cNvPr id="9" name="slide-number">
             <a:extLst xmlns:a="http://schemas.openxmlformats.org/drawingml/2006/main">
               <a:ext uri="{FF2B5EF4-FFF2-40B4-BE49-F238E27FC236}">
-                <a16:creationId xmlns:a16="http://schemas.microsoft.com/office/drawing/2014/main" id="{F9AA0A8C-1C13-4DFA-A7EC-348FABEB5474}"/>
+                <a16:creationId xmlns:a16="http://schemas.microsoft.com/office/drawing/2014/main" id="{517B4D20-6AFC-49BB-A719-DD8F1D6369A2}"/>
               </a:ext>
             </a:extLst>
           </p:cNvPr>
@@ -7911,7 +9202,7 @@
           <p:cNvPr id="2" name="section-label">
             <a:extLst xmlns:a="http://schemas.openxmlformats.org/drawingml/2006/main">
               <a:ext uri="{FF2B5EF4-FFF2-40B4-BE49-F238E27FC236}">
-                <a16:creationId xmlns:a16="http://schemas.microsoft.com/office/drawing/2014/main" id="{737C0F3A-5A3D-460F-80AF-70A3E5B3A9F0}"/>
+                <a16:creationId xmlns:a16="http://schemas.microsoft.com/office/drawing/2014/main" id="{C5C8376A-F98A-46E1-AC06-6BA202D359F8}"/>
               </a:ext>
             </a:extLst>
           </p:cNvPr>
@@ -7972,7 +9263,7 @@
           <p:cNvPr id="3" name="headline">
             <a:extLst xmlns:a="http://schemas.openxmlformats.org/drawingml/2006/main">
               <a:ext uri="{FF2B5EF4-FFF2-40B4-BE49-F238E27FC236}">
-                <a16:creationId xmlns:a16="http://schemas.microsoft.com/office/drawing/2014/main" id="{FF227F9E-1DC7-4B55-B436-159458BAF671}"/>
+                <a16:creationId xmlns:a16="http://schemas.microsoft.com/office/drawing/2014/main" id="{5E42734F-C479-49C7-9B67-6331184F7BE3}"/>
               </a:ext>
             </a:extLst>
           </p:cNvPr>
@@ -8060,7 +9351,7 @@
           <p:cNvPr id="4" name="workflow-context">
             <a:extLst xmlns:a="http://schemas.openxmlformats.org/drawingml/2006/main">
               <a:ext uri="{FF2B5EF4-FFF2-40B4-BE49-F238E27FC236}">
-                <a16:creationId xmlns:a16="http://schemas.microsoft.com/office/drawing/2014/main" id="{63786DB6-B715-4254-91A5-70E18C588BF3}"/>
+                <a16:creationId xmlns:a16="http://schemas.microsoft.com/office/drawing/2014/main" id="{C630723D-1937-4103-A3F7-CF08490D75BF}"/>
               </a:ext>
             </a:extLst>
           </p:cNvPr>
@@ -8121,7 +9412,7 @@
           <p:cNvPr id="5" name="workflow-scope">
             <a:extLst xmlns:a="http://schemas.openxmlformats.org/drawingml/2006/main">
               <a:ext uri="{FF2B5EF4-FFF2-40B4-BE49-F238E27FC236}">
-                <a16:creationId xmlns:a16="http://schemas.microsoft.com/office/drawing/2014/main" id="{8681354D-6223-4F57-AE89-AE124CA3F06F}"/>
+                <a16:creationId xmlns:a16="http://schemas.microsoft.com/office/drawing/2014/main" id="{19861303-3DE3-48B4-986E-B909EA2A8996}"/>
               </a:ext>
             </a:extLst>
           </p:cNvPr>
@@ -8186,7 +9477,7 @@
           <p:nvPr/>
         </p:nvPicPr>
         <p:blipFill>
-          <a:blip xmlns:r="http://schemas.openxmlformats.org/officeDocument/2006/relationships" xmlns:a="http://schemas.openxmlformats.org/drawingml/2006/main" r:embed="R90dac52e7cf9458b"/>
+          <a:blip xmlns:r="http://schemas.openxmlformats.org/officeDocument/2006/relationships" xmlns:a="http://schemas.openxmlformats.org/drawingml/2006/main" r:embed="Rea48b8231bf54770"/>
           <a:stretch xmlns:a="http://schemas.openxmlformats.org/drawingml/2006/main"/>
         </p:blipFill>
         <p:spPr>
@@ -8208,7 +9499,7 @@
           <p:nvPr/>
         </p:nvPicPr>
         <p:blipFill>
-          <a:blip xmlns:r="http://schemas.openxmlformats.org/officeDocument/2006/relationships" xmlns:a="http://schemas.openxmlformats.org/drawingml/2006/main" r:embed="R01d84cee808a4f5d"/>
+          <a:blip xmlns:r="http://schemas.openxmlformats.org/officeDocument/2006/relationships" xmlns:a="http://schemas.openxmlformats.org/drawingml/2006/main" r:embed="Ra9bbb73d4bc6488c"/>
           <a:stretch xmlns:a="http://schemas.openxmlformats.org/drawingml/2006/main"/>
         </p:blipFill>
         <p:spPr>
@@ -8226,7 +9517,7 @@
           <p:cNvPr id="8" name="workflow-stage">
             <a:extLst xmlns:a="http://schemas.openxmlformats.org/drawingml/2006/main">
               <a:ext uri="{FF2B5EF4-FFF2-40B4-BE49-F238E27FC236}">
-                <a16:creationId xmlns:a16="http://schemas.microsoft.com/office/drawing/2014/main" id="{D0AB0BBA-20E4-4783-97A6-00036E70F045}"/>
+                <a16:creationId xmlns:a16="http://schemas.microsoft.com/office/drawing/2014/main" id="{B3977E1D-4BEF-4923-A839-A692F7A7B444}"/>
               </a:ext>
             </a:extLst>
           </p:cNvPr>
@@ -8285,7 +9576,7 @@
     </p:spTree>
     <p:extLst>
       <p:ext uri="{BB962C8B-B14F-4D97-AF65-F5344CB8AC3E}">
-        <p14:creationId xmlns:p14="http://schemas.microsoft.com/office/powerpoint/2010/main" val="62513720"/>
+        <p14:creationId xmlns:p14="http://schemas.microsoft.com/office/powerpoint/2010/main" val="183292042"/>
       </p:ext>
     </p:extLst>
   </p:cSld>
@@ -8316,7 +9607,7 @@
           <p:cNvPr id="11" name="slide-number">
             <a:extLst xmlns:a="http://schemas.openxmlformats.org/drawingml/2006/main">
               <a:ext uri="{FF2B5EF4-FFF2-40B4-BE49-F238E27FC236}">
-                <a16:creationId xmlns:a16="http://schemas.microsoft.com/office/drawing/2014/main" id="{8698EC3A-8EBA-4602-890D-1DDFA49C279D}"/>
+                <a16:creationId xmlns:a16="http://schemas.microsoft.com/office/drawing/2014/main" id="{AAD86A1F-AA5D-439F-A355-30242F920151}"/>
               </a:ext>
             </a:extLst>
           </p:cNvPr>
@@ -8377,7 +9668,7 @@
           <p:cNvPr id="2" name="section-label">
             <a:extLst xmlns:a="http://schemas.openxmlformats.org/drawingml/2006/main">
               <a:ext uri="{FF2B5EF4-FFF2-40B4-BE49-F238E27FC236}">
-                <a16:creationId xmlns:a16="http://schemas.microsoft.com/office/drawing/2014/main" id="{BAA0E2DE-CB9A-49E5-A901-A334F679EA35}"/>
+                <a16:creationId xmlns:a16="http://schemas.microsoft.com/office/drawing/2014/main" id="{22431BB1-07B0-4EB3-A1E3-C24B90E844CB}"/>
               </a:ext>
             </a:extLst>
           </p:cNvPr>
@@ -8438,7 +9729,7 @@
           <p:cNvPr id="3" name="headline">
             <a:extLst xmlns:a="http://schemas.openxmlformats.org/drawingml/2006/main">
               <a:ext uri="{FF2B5EF4-FFF2-40B4-BE49-F238E27FC236}">
-                <a16:creationId xmlns:a16="http://schemas.microsoft.com/office/drawing/2014/main" id="{4847F674-6B44-4E09-BD73-99F1A5C11BFE}"/>
+                <a16:creationId xmlns:a16="http://schemas.microsoft.com/office/drawing/2014/main" id="{F5187C9E-FDD9-4CD5-A008-420C841A3D3E}"/>
               </a:ext>
             </a:extLst>
           </p:cNvPr>
@@ -8499,7 +9790,7 @@
           <p:cNvPr id="4" name="issue-label">
             <a:extLst xmlns:a="http://schemas.openxmlformats.org/drawingml/2006/main">
               <a:ext uri="{FF2B5EF4-FFF2-40B4-BE49-F238E27FC236}">
-                <a16:creationId xmlns:a16="http://schemas.microsoft.com/office/drawing/2014/main" id="{67D7BD40-1DE3-4A3E-A549-522AD12FE03E}"/>
+                <a16:creationId xmlns:a16="http://schemas.microsoft.com/office/drawing/2014/main" id="{304ACC13-07BF-4137-ABBA-79938D74C0AA}"/>
               </a:ext>
             </a:extLst>
           </p:cNvPr>
@@ -8560,7 +9851,7 @@
           <p:cNvPr id="5" name="approval-label">
             <a:extLst xmlns:a="http://schemas.openxmlformats.org/drawingml/2006/main">
               <a:ext uri="{FF2B5EF4-FFF2-40B4-BE49-F238E27FC236}">
-                <a16:creationId xmlns:a16="http://schemas.microsoft.com/office/drawing/2014/main" id="{A1658FC5-E26D-48BA-93D6-47CAD47CCF98}"/>
+                <a16:creationId xmlns:a16="http://schemas.microsoft.com/office/drawing/2014/main" id="{F0778703-DC62-47F9-88BF-E2651F437F91}"/>
               </a:ext>
             </a:extLst>
           </p:cNvPr>
@@ -8621,7 +9912,7 @@
           <p:cNvPr id="6" name="issue-difference">
             <a:extLst xmlns:a="http://schemas.openxmlformats.org/drawingml/2006/main">
               <a:ext uri="{FF2B5EF4-FFF2-40B4-BE49-F238E27FC236}">
-                <a16:creationId xmlns:a16="http://schemas.microsoft.com/office/drawing/2014/main" id="{89A48477-27B3-4907-A16F-1CEE79E26C7D}"/>
+                <a16:creationId xmlns:a16="http://schemas.microsoft.com/office/drawing/2014/main" id="{D36C4804-75C7-4D70-B369-93CFF70CAF1D}"/>
               </a:ext>
             </a:extLst>
           </p:cNvPr>
@@ -8709,7 +10000,7 @@
           <p:cNvPr id="7" name="approval-difference">
             <a:extLst xmlns:a="http://schemas.openxmlformats.org/drawingml/2006/main">
               <a:ext uri="{FF2B5EF4-FFF2-40B4-BE49-F238E27FC236}">
-                <a16:creationId xmlns:a16="http://schemas.microsoft.com/office/drawing/2014/main" id="{4506BF08-A7C9-4778-8D5F-4F82E2E494CE}"/>
+                <a16:creationId xmlns:a16="http://schemas.microsoft.com/office/drawing/2014/main" id="{88C31207-0C6F-4410-A08A-3563EC40A920}"/>
               </a:ext>
             </a:extLst>
           </p:cNvPr>
@@ -8801,7 +10092,7 @@
           <p:nvPr/>
         </p:nvPicPr>
         <p:blipFill>
-          <a:blip xmlns:r="http://schemas.openxmlformats.org/officeDocument/2006/relationships" xmlns:a="http://schemas.openxmlformats.org/drawingml/2006/main" r:embed="R7efeda7dadd2440c"/>
+          <a:blip xmlns:r="http://schemas.openxmlformats.org/officeDocument/2006/relationships" xmlns:a="http://schemas.openxmlformats.org/drawingml/2006/main" r:embed="Rcd65067a45eb425d"/>
           <a:stretch xmlns:a="http://schemas.openxmlformats.org/drawingml/2006/main"/>
         </p:blipFill>
         <p:spPr>
@@ -8823,7 +10114,7 @@
           <p:nvPr/>
         </p:nvPicPr>
         <p:blipFill>
-          <a:blip xmlns:r="http://schemas.openxmlformats.org/officeDocument/2006/relationships" xmlns:a="http://schemas.openxmlformats.org/drawingml/2006/main" r:embed="R9b9f6b33b40f4524"/>
+          <a:blip xmlns:r="http://schemas.openxmlformats.org/officeDocument/2006/relationships" xmlns:a="http://schemas.openxmlformats.org/drawingml/2006/main" r:embed="Rd130eb78ee154619"/>
           <a:stretch xmlns:a="http://schemas.openxmlformats.org/drawingml/2006/main"/>
         </p:blipFill>
         <p:spPr>
@@ -8841,7 +10132,7 @@
           <p:cNvPr id="10" name="forms-stage">
             <a:extLst xmlns:a="http://schemas.openxmlformats.org/drawingml/2006/main">
               <a:ext uri="{FF2B5EF4-FFF2-40B4-BE49-F238E27FC236}">
-                <a16:creationId xmlns:a16="http://schemas.microsoft.com/office/drawing/2014/main" id="{FFA420A6-39CE-4F1B-968D-DBED416250AB}"/>
+                <a16:creationId xmlns:a16="http://schemas.microsoft.com/office/drawing/2014/main" id="{B3984C68-6F95-47DF-921B-2C359678F434}"/>
               </a:ext>
             </a:extLst>
           </p:cNvPr>
@@ -8900,7 +10191,7 @@
     </p:spTree>
     <p:extLst>
       <p:ext uri="{BB962C8B-B14F-4D97-AF65-F5344CB8AC3E}">
-        <p14:creationId xmlns:p14="http://schemas.microsoft.com/office/powerpoint/2010/main" val="1404077353"/>
+        <p14:creationId xmlns:p14="http://schemas.microsoft.com/office/powerpoint/2010/main" val="741156100"/>
       </p:ext>
     </p:extLst>
   </p:cSld>
